--- a/docs/curso/slides/m04-usinas-e-produtores.pptx
+++ b/docs/curso/slides/m04-usinas-e-produtores.pptx
@@ -2802,6 +2802,54 @@
           <a:chExt cx="0" cy="0"/>
         </a:xfrm>
       </p:grpSpPr>
+      <p:sp>
+        <p:nvSpPr>
+          <p:cNvPr id="25" name="Slide Number Placeholder 0"/>
+          <p:cNvSpPr>
+            <a:spLocks noGrp="1"/>
+          </p:cNvSpPr>
+          <p:nvPr>
+            <p:ph type="sldNum" sz="quarter" idx="4294967295"/>
+          </p:nvPr>
+        </p:nvSpPr>
+        <p:spPr>
+          <a:xfrm>
+            <a:off x="11292840" y="6556248"/>
+            <a:ext cx="548640" cy="256032"/>
+          </a:xfrm>
+          <a:prstGeom prst="rect">
+            <a:avLst/>
+          </a:prstGeom>
+          <a:extLst>
+            <a:ext uri="{C572A759-6A51-4108-AA02-DFA0A04FC94B}">
+              <ma14:wrappingTextBoxFlag xmlns:ma14="http://schemas.microsoft.com/office/mac/drawingml/2011/main" val="0"/>
+            </a:ext>
+          </a:extLst>
+        </p:spPr>
+        <p:txBody>
+          <a:bodyPr/>
+          <a:lstStyle>
+            <a:lvl1pPr>
+              <a:defRPr sz="900">
+                <a:solidFill>
+                  <a:srgbClr val="1B3A6B"/>
+                </a:solidFill>
+                <a:latin typeface="Arial"/>
+                <a:ea typeface="Arial"/>
+                <a:cs typeface="Arial"/>
+              </a:defRPr>
+            </a:lvl1pPr>
+          </a:lstStyle>
+          <a:p>
+            <a:pPr algn="r"/>
+            <a:fld id="{F7021451-1387-4CA6-816F-3879F97B5CBC}" type="slidenum">
+              <a:rPr b="1" lang="en-US"/>
+              <a:t>1000</a:t>
+            </a:fld>
+            <a:endParaRPr lang="en-US"/>
+          </a:p>
+        </p:txBody>
+      </p:sp>
     </p:spTree>
   </p:cSld>
   <p:clrMapOvr>
@@ -2827,6 +2875,54 @@
           <a:chExt cx="0" cy="0"/>
         </a:xfrm>
       </p:grpSpPr>
+      <p:sp>
+        <p:nvSpPr>
+          <p:cNvPr id="25" name="Slide Number Placeholder 0"/>
+          <p:cNvSpPr>
+            <a:spLocks noGrp="1"/>
+          </p:cNvSpPr>
+          <p:nvPr>
+            <p:ph type="sldNum" sz="quarter" idx="4294967295"/>
+          </p:nvPr>
+        </p:nvSpPr>
+        <p:spPr>
+          <a:xfrm>
+            <a:off x="11292840" y="6556248"/>
+            <a:ext cx="548640" cy="256032"/>
+          </a:xfrm>
+          <a:prstGeom prst="rect">
+            <a:avLst/>
+          </a:prstGeom>
+          <a:extLst>
+            <a:ext uri="{C572A759-6A51-4108-AA02-DFA0A04FC94B}">
+              <ma14:wrappingTextBoxFlag xmlns:ma14="http://schemas.microsoft.com/office/mac/drawingml/2011/main" val="0"/>
+            </a:ext>
+          </a:extLst>
+        </p:spPr>
+        <p:txBody>
+          <a:bodyPr/>
+          <a:lstStyle>
+            <a:lvl1pPr>
+              <a:defRPr sz="900">
+                <a:solidFill>
+                  <a:srgbClr val="1B3A6B"/>
+                </a:solidFill>
+                <a:latin typeface="Arial"/>
+                <a:ea typeface="Arial"/>
+                <a:cs typeface="Arial"/>
+              </a:defRPr>
+            </a:lvl1pPr>
+          </a:lstStyle>
+          <a:p>
+            <a:pPr algn="r"/>
+            <a:fld id="{F7021451-1387-4CA6-816F-3879F97B5CBC}" type="slidenum">
+              <a:rPr b="1" lang="en-US"/>
+              <a:t>null</a:t>
+            </a:fld>
+            <a:endParaRPr lang="en-US"/>
+          </a:p>
+        </p:txBody>
+      </p:sp>
     </p:spTree>
   </p:cSld>
   <p:clrMap bg1="lt1" tx1="dk1" bg2="lt2" tx2="dk2" accent1="accent1" accent2="accent2" accent3="accent3" accent4="accent4" accent5="accent5" accent6="accent6" hlink="hlink" folHlink="folHlink"/>
@@ -3647,6 +3743,45 @@
         </p:nvSpPr>
         <p:spPr>
           <a:xfrm>
+            <a:off x="457200" y="548640"/>
+            <a:ext cx="3474720" cy="1737360"/>
+          </a:xfrm>
+          <a:prstGeom prst="rect">
+            <a:avLst/>
+          </a:prstGeom>
+          <a:noFill/>
+          <a:ln/>
+        </p:spPr>
+        <p:txBody>
+          <a:bodyPr wrap="square" rtlCol="0" anchor="ctr"/>
+          <a:lstStyle/>
+          <a:p>
+            <a:pPr indent="0" marL="0">
+              <a:buNone/>
+            </a:pPr>
+            <a:r>
+              <a:rPr lang="en-US" sz="11000" b="1" dirty="0">
+                <a:solidFill>
+                  <a:srgbClr val="11396F"/>
+                </a:solidFill>
+                <a:latin typeface="Arial" pitchFamily="34" charset="0"/>
+                <a:ea typeface="Arial" pitchFamily="34" charset="-122"/>
+                <a:cs typeface="Arial" pitchFamily="34" charset="-120"/>
+              </a:rPr>
+              <a:t>03</a:t>
+            </a:r>
+            <a:endParaRPr lang="en-US" sz="11000" dirty="0"/>
+          </a:p>
+        </p:txBody>
+      </p:sp>
+      <p:sp>
+        <p:nvSpPr>
+          <p:cNvPr id="4" name="Text 2"/>
+          <p:cNvSpPr/>
+          <p:nvPr/>
+        </p:nvSpPr>
+        <p:spPr>
+          <a:xfrm>
             <a:off x="548640" y="2194560"/>
             <a:ext cx="3291840" cy="548640"/>
           </a:xfrm>
@@ -3680,7 +3815,46 @@
       </p:sp>
       <p:sp>
         <p:nvSpPr>
-          <p:cNvPr id="4" name="Text 2"/>
+          <p:cNvPr id="5" name="Text 3"/>
+          <p:cNvSpPr/>
+          <p:nvPr/>
+        </p:nvSpPr>
+        <p:spPr>
+          <a:xfrm>
+            <a:off x="548640" y="3200400"/>
+            <a:ext cx="3383280" cy="457200"/>
+          </a:xfrm>
+          <a:prstGeom prst="rect">
+            <a:avLst/>
+          </a:prstGeom>
+          <a:noFill/>
+          <a:ln/>
+        </p:spPr>
+        <p:txBody>
+          <a:bodyPr wrap="square" rtlCol="0" anchor="ctr"/>
+          <a:lstStyle/>
+          <a:p>
+            <a:pPr indent="0" marL="0">
+              <a:buNone/>
+            </a:pPr>
+            <a:r>
+              <a:rPr lang="en-US" sz="1100" dirty="0">
+                <a:solidFill>
+                  <a:srgbClr val="C7D2E3"/>
+                </a:solidFill>
+                <a:latin typeface="Arial" pitchFamily="34" charset="0"/>
+                <a:ea typeface="Arial" pitchFamily="34" charset="-122"/>
+                <a:cs typeface="Arial" pitchFamily="34" charset="-120"/>
+              </a:rPr>
+              <a:t>M4 · Etapa 3 · Operação ponta a ponta</a:t>
+            </a:r>
+            <a:endParaRPr lang="en-US" sz="1100" dirty="0"/>
+          </a:p>
+        </p:txBody>
+      </p:sp>
+      <p:sp>
+        <p:nvSpPr>
+          <p:cNvPr id="6" name="Text 4"/>
           <p:cNvSpPr/>
           <p:nvPr/>
         </p:nvSpPr>
@@ -3719,7 +3893,7 @@
       </p:sp>
       <p:pic>
         <p:nvPicPr>
-          <p:cNvPr id="5" name="Image 0" descr="/www/wwwroot/rexar/gdsolar/docs/curso/slides/assets/logo-gdsolar.png">    </p:cNvPr>
+          <p:cNvPr id="7" name="Image 0" descr="/www/wwwroot/rexar/gdsolar/docs/curso/slides/assets/logo-gdsolar.png">    </p:cNvPr>
           <p:cNvPicPr>
             <a:picLocks noChangeAspect="1"/>
           </p:cNvPicPr>
@@ -3743,7 +3917,7 @@
       </p:pic>
       <p:sp>
         <p:nvSpPr>
-          <p:cNvPr id="6" name="Text 3"/>
+          <p:cNvPr id="8" name="Text 5"/>
           <p:cNvSpPr/>
           <p:nvPr/>
         </p:nvSpPr>
@@ -3784,7 +3958,7 @@
       </p:sp>
       <p:sp>
         <p:nvSpPr>
-          <p:cNvPr id="7" name="Text 4"/>
+          <p:cNvPr id="9" name="Text 6"/>
           <p:cNvSpPr/>
           <p:nvPr/>
         </p:nvSpPr>
@@ -3825,7 +3999,7 @@
       </p:sp>
       <p:sp>
         <p:nvSpPr>
-          <p:cNvPr id="8" name="Text 5"/>
+          <p:cNvPr id="10" name="Text 7"/>
           <p:cNvSpPr/>
           <p:nvPr/>
         </p:nvSpPr>
@@ -3983,7 +4157,7 @@
         </p:blipFill>
         <p:spPr>
           <a:xfrm>
-            <a:off x="411480" y="6547104"/>
+            <a:off x="548640" y="6547104"/>
             <a:ext cx="274320" cy="274320"/>
           </a:xfrm>
           <a:prstGeom prst="rect">
@@ -3999,7 +4173,7 @@
         </p:nvSpPr>
         <p:spPr>
           <a:xfrm>
-            <a:off x="749808" y="6528816"/>
+            <a:off x="886968" y="6528816"/>
             <a:ext cx="6400800" cy="310896"/>
           </a:xfrm>
           <a:prstGeom prst="rect">
@@ -4039,7 +4213,7 @@
         <p:spPr>
           <a:xfrm>
             <a:off x="7132320" y="6528816"/>
-            <a:ext cx="4663440" cy="310896"/>
+            <a:ext cx="4023360" cy="310896"/>
           </a:xfrm>
           <a:prstGeom prst="rect">
             <a:avLst/>
@@ -4077,7 +4251,7 @@
         </p:nvSpPr>
         <p:spPr>
           <a:xfrm>
-            <a:off x="411480" y="384048"/>
+            <a:off x="548640" y="384048"/>
             <a:ext cx="82296" cy="658368"/>
           </a:xfrm>
           <a:prstGeom prst="rect">
@@ -4097,7 +4271,7 @@
         </p:nvSpPr>
         <p:spPr>
           <a:xfrm>
-            <a:off x="640080" y="292608"/>
+            <a:off x="777240" y="292608"/>
             <a:ext cx="10972800" cy="274320"/>
           </a:xfrm>
           <a:prstGeom prst="rect">
@@ -4136,8 +4310,8 @@
         </p:nvSpPr>
         <p:spPr>
           <a:xfrm>
-            <a:off x="640080" y="530352"/>
-            <a:ext cx="11155680" cy="566928"/>
+            <a:off x="777240" y="530352"/>
+            <a:ext cx="10881360" cy="566928"/>
           </a:xfrm>
           <a:prstGeom prst="rect">
             <a:avLst/>
@@ -4177,8 +4351,8 @@
         </p:nvSpPr>
         <p:spPr>
           <a:xfrm>
-            <a:off x="411480" y="1325880"/>
-            <a:ext cx="3642360" cy="2331720"/>
+            <a:off x="548640" y="1325880"/>
+            <a:ext cx="3544824" cy="2331720"/>
           </a:xfrm>
           <a:prstGeom prst="roundRect">
             <a:avLst>
@@ -4211,7 +4385,7 @@
         </p:nvSpPr>
         <p:spPr>
           <a:xfrm>
-            <a:off x="594360" y="1508760"/>
+            <a:off x="731520" y="1508760"/>
             <a:ext cx="457200" cy="457200"/>
           </a:xfrm>
           <a:prstGeom prst="ellipse">
@@ -4231,7 +4405,7 @@
         </p:nvSpPr>
         <p:spPr>
           <a:xfrm>
-            <a:off x="594360" y="1508760"/>
+            <a:off x="731520" y="1508760"/>
             <a:ext cx="457200" cy="457200"/>
           </a:xfrm>
           <a:prstGeom prst="rect">
@@ -4270,8 +4444,8 @@
         </p:nvSpPr>
         <p:spPr>
           <a:xfrm>
-            <a:off x="1188720" y="1435608"/>
-            <a:ext cx="2727960" cy="2112264"/>
+            <a:off x="1325880" y="1435608"/>
+            <a:ext cx="2630424" cy="2112264"/>
           </a:xfrm>
           <a:prstGeom prst="rect">
             <a:avLst/>
@@ -4289,7 +4463,7 @@
               <a:buNone/>
             </a:pPr>
             <a:r>
-              <a:rPr lang="en-US" sz="1600" dirty="0">
+              <a:rPr lang="en-US" sz="1800" dirty="0">
                 <a:solidFill>
                   <a:srgbClr val="1F2937"/>
                 </a:solidFill>
@@ -4299,7 +4473,7 @@
               </a:rPr>
               <a:t>Média de geração: 60.000 kWh/mês → 720.000 kWh/ano</a:t>
             </a:r>
-            <a:endParaRPr lang="en-US" sz="1600" dirty="0"/>
+            <a:endParaRPr lang="en-US" sz="1800" dirty="0"/>
           </a:p>
         </p:txBody>
       </p:sp>
@@ -4311,8 +4485,8 @@
         </p:nvSpPr>
         <p:spPr>
           <a:xfrm>
-            <a:off x="4282440" y="1325880"/>
-            <a:ext cx="3642360" cy="2331720"/>
+            <a:off x="4322064" y="1325880"/>
+            <a:ext cx="3544824" cy="2331720"/>
           </a:xfrm>
           <a:prstGeom prst="roundRect">
             <a:avLst>
@@ -4345,7 +4519,7 @@
         </p:nvSpPr>
         <p:spPr>
           <a:xfrm>
-            <a:off x="4465320" y="1508760"/>
+            <a:off x="4504944" y="1508760"/>
             <a:ext cx="457200" cy="457200"/>
           </a:xfrm>
           <a:prstGeom prst="ellipse">
@@ -4365,7 +4539,7 @@
         </p:nvSpPr>
         <p:spPr>
           <a:xfrm>
-            <a:off x="4465320" y="1508760"/>
+            <a:off x="4504944" y="1508760"/>
             <a:ext cx="457200" cy="457200"/>
           </a:xfrm>
           <a:prstGeom prst="rect">
@@ -4404,8 +4578,8 @@
         </p:nvSpPr>
         <p:spPr>
           <a:xfrm>
-            <a:off x="5059680" y="1435608"/>
-            <a:ext cx="2727960" cy="2112264"/>
+            <a:off x="5099304" y="1435608"/>
+            <a:ext cx="2630424" cy="2112264"/>
           </a:xfrm>
           <a:prstGeom prst="rect">
             <a:avLst/>
@@ -4423,7 +4597,7 @@
               <a:buNone/>
             </a:pPr>
             <a:r>
-              <a:rPr lang="en-US" sz="1600" dirty="0">
+              <a:rPr lang="en-US" sz="1800" dirty="0">
                 <a:solidFill>
                   <a:srgbClr val="1F2937"/>
                 </a:solidFill>
@@ -4433,7 +4607,7 @@
               </a:rPr>
               <a:t>Tarifa GD (crédito): R$ 0,68 · Redução ao consumidor: 20% (R$ 0,136) · Taxa de administração: 15% (R$ 0,102)</a:t>
             </a:r>
-            <a:endParaRPr lang="en-US" sz="1600" dirty="0"/>
+            <a:endParaRPr lang="en-US" sz="1800" dirty="0"/>
           </a:p>
         </p:txBody>
       </p:sp>
@@ -4445,8 +4619,8 @@
         </p:nvSpPr>
         <p:spPr>
           <a:xfrm>
-            <a:off x="8153400" y="1325880"/>
-            <a:ext cx="3642360" cy="2331720"/>
+            <a:off x="8095488" y="1325880"/>
+            <a:ext cx="3544824" cy="2331720"/>
           </a:xfrm>
           <a:prstGeom prst="roundRect">
             <a:avLst>
@@ -4479,7 +4653,7 @@
         </p:nvSpPr>
         <p:spPr>
           <a:xfrm>
-            <a:off x="8336280" y="1508760"/>
+            <a:off x="8278368" y="1508760"/>
             <a:ext cx="457200" cy="457200"/>
           </a:xfrm>
           <a:prstGeom prst="ellipse">
@@ -4499,7 +4673,7 @@
         </p:nvSpPr>
         <p:spPr>
           <a:xfrm>
-            <a:off x="8336280" y="1508760"/>
+            <a:off x="8278368" y="1508760"/>
             <a:ext cx="457200" cy="457200"/>
           </a:xfrm>
           <a:prstGeom prst="rect">
@@ -4538,8 +4712,8 @@
         </p:nvSpPr>
         <p:spPr>
           <a:xfrm>
-            <a:off x="8930640" y="1435608"/>
-            <a:ext cx="2727960" cy="2112264"/>
+            <a:off x="8872728" y="1435608"/>
+            <a:ext cx="2630424" cy="2112264"/>
           </a:xfrm>
           <a:prstGeom prst="rect">
             <a:avLst/>
@@ -4557,7 +4731,7 @@
               <a:buNone/>
             </a:pPr>
             <a:r>
-              <a:rPr lang="en-US" sz="1600" dirty="0">
+              <a:rPr lang="en-US" sz="1800" dirty="0">
                 <a:solidFill>
                   <a:srgbClr val="1F2937"/>
                 </a:solidFill>
@@ -4567,7 +4741,7 @@
               </a:rPr>
               <a:t>Valor pago ao produtor: R$ 0,442/kWh</a:t>
             </a:r>
-            <a:endParaRPr lang="en-US" sz="1600" dirty="0"/>
+            <a:endParaRPr lang="en-US" sz="1800" dirty="0"/>
           </a:p>
         </p:txBody>
       </p:sp>
@@ -4579,8 +4753,8 @@
         </p:nvSpPr>
         <p:spPr>
           <a:xfrm>
-            <a:off x="411480" y="3886200"/>
-            <a:ext cx="3642360" cy="2331720"/>
+            <a:off x="548640" y="3886200"/>
+            <a:ext cx="3544824" cy="2331720"/>
           </a:xfrm>
           <a:prstGeom prst="roundRect">
             <a:avLst>
@@ -4613,7 +4787,7 @@
         </p:nvSpPr>
         <p:spPr>
           <a:xfrm>
-            <a:off x="594360" y="4069080"/>
+            <a:off x="731520" y="4069080"/>
             <a:ext cx="457200" cy="457200"/>
           </a:xfrm>
           <a:prstGeom prst="ellipse">
@@ -4633,7 +4807,7 @@
         </p:nvSpPr>
         <p:spPr>
           <a:xfrm>
-            <a:off x="594360" y="4069080"/>
+            <a:off x="731520" y="4069080"/>
             <a:ext cx="457200" cy="457200"/>
           </a:xfrm>
           <a:prstGeom prst="rect">
@@ -4672,8 +4846,8 @@
         </p:nvSpPr>
         <p:spPr>
           <a:xfrm>
-            <a:off x="1188720" y="3995928"/>
-            <a:ext cx="2727960" cy="2112264"/>
+            <a:off x="1325880" y="3995928"/>
+            <a:ext cx="2630424" cy="2112264"/>
           </a:xfrm>
           <a:prstGeom prst="rect">
             <a:avLst/>
@@ -4691,7 +4865,7 @@
               <a:buNone/>
             </a:pPr>
             <a:r>
-              <a:rPr lang="en-US" sz="1600" dirty="0">
+              <a:rPr lang="en-US" sz="1800" dirty="0">
                 <a:solidFill>
                   <a:srgbClr val="1F2937"/>
                 </a:solidFill>
@@ -4701,7 +4875,7 @@
               </a:rPr>
               <a:t>Pagamento anual bruto: R$ 489.600 · Líquido (após taxa): R$ 416.160</a:t>
             </a:r>
-            <a:endParaRPr lang="en-US" sz="1600" dirty="0"/>
+            <a:endParaRPr lang="en-US" sz="1800" dirty="0"/>
           </a:p>
         </p:txBody>
       </p:sp>
@@ -4713,8 +4887,8 @@
         </p:nvSpPr>
         <p:spPr>
           <a:xfrm>
-            <a:off x="4282440" y="3886200"/>
-            <a:ext cx="3642360" cy="2331720"/>
+            <a:off x="4322064" y="3886200"/>
+            <a:ext cx="3544824" cy="2331720"/>
           </a:xfrm>
           <a:prstGeom prst="roundRect">
             <a:avLst>
@@ -4747,7 +4921,7 @@
         </p:nvSpPr>
         <p:spPr>
           <a:xfrm>
-            <a:off x="4465320" y="4069080"/>
+            <a:off x="4504944" y="4069080"/>
             <a:ext cx="457200" cy="457200"/>
           </a:xfrm>
           <a:prstGeom prst="ellipse">
@@ -4767,7 +4941,7 @@
         </p:nvSpPr>
         <p:spPr>
           <a:xfrm>
-            <a:off x="4465320" y="4069080"/>
+            <a:off x="4504944" y="4069080"/>
             <a:ext cx="457200" cy="457200"/>
           </a:xfrm>
           <a:prstGeom prst="rect">
@@ -4806,8 +4980,8 @@
         </p:nvSpPr>
         <p:spPr>
           <a:xfrm>
-            <a:off x="5059680" y="3995928"/>
-            <a:ext cx="2727960" cy="2112264"/>
+            <a:off x="5099304" y="3995928"/>
+            <a:ext cx="2630424" cy="2112264"/>
           </a:xfrm>
           <a:prstGeom prst="rect">
             <a:avLst/>
@@ -4825,7 +4999,7 @@
               <a:buNone/>
             </a:pPr>
             <a:r>
-              <a:rPr lang="en-US" sz="1600" dirty="0">
+              <a:rPr lang="en-US" sz="1800" dirty="0">
                 <a:solidFill>
                   <a:srgbClr val="1F2937"/>
                 </a:solidFill>
@@ -4835,7 +5009,55 @@
               </a:rPr>
               <a:t>Pagamento mensal previsto: R$ 26.520</a:t>
             </a:r>
-            <a:endParaRPr lang="en-US" sz="1600" dirty="0"/>
+            <a:endParaRPr lang="en-US" sz="1800" dirty="0"/>
+          </a:p>
+        </p:txBody>
+      </p:sp>
+      <p:sp>
+        <p:nvSpPr>
+          <p:cNvPr id="25" name="Slide Number Placeholder 0"/>
+          <p:cNvSpPr>
+            <a:spLocks noGrp="1"/>
+          </p:cNvSpPr>
+          <p:nvPr>
+            <p:ph type="sldNum" sz="quarter" idx="4294967295"/>
+          </p:nvPr>
+        </p:nvSpPr>
+        <p:spPr>
+          <a:xfrm>
+            <a:off x="11292840" y="6556248"/>
+            <a:ext cx="548640" cy="256032"/>
+          </a:xfrm>
+          <a:prstGeom prst="rect">
+            <a:avLst/>
+          </a:prstGeom>
+          <a:extLst>
+            <a:ext uri="{C572A759-6A51-4108-AA02-DFA0A04FC94B}">
+              <ma14:wrappingTextBoxFlag xmlns:ma14="http://schemas.microsoft.com/office/mac/drawingml/2011/main" val="0"/>
+            </a:ext>
+          </a:extLst>
+        </p:spPr>
+        <p:txBody>
+          <a:bodyPr/>
+          <a:lstStyle>
+            <a:lvl1pPr>
+              <a:defRPr sz="900">
+                <a:solidFill>
+                  <a:srgbClr val="1B3A6B"/>
+                </a:solidFill>
+                <a:latin typeface="Arial"/>
+                <a:ea typeface="Arial"/>
+                <a:cs typeface="Arial"/>
+              </a:defRPr>
+            </a:lvl1pPr>
+          </a:lstStyle>
+          <a:p>
+            <a:pPr algn="r"/>
+            <a:fld id="{F7021451-1387-4CA6-816F-3879F97B5CBC}" type="slidenum">
+              <a:rPr b="1" lang="en-US"/>
+              <a:t>11</a:t>
+            </a:fld>
+            <a:endParaRPr lang="en-US"/>
           </a:p>
         </p:txBody>
       </p:sp>
@@ -4912,7 +5134,7 @@
         </p:blipFill>
         <p:spPr>
           <a:xfrm>
-            <a:off x="411480" y="6547104"/>
+            <a:off x="548640" y="6547104"/>
             <a:ext cx="274320" cy="274320"/>
           </a:xfrm>
           <a:prstGeom prst="rect">
@@ -4928,7 +5150,7 @@
         </p:nvSpPr>
         <p:spPr>
           <a:xfrm>
-            <a:off x="749808" y="6528816"/>
+            <a:off x="886968" y="6528816"/>
             <a:ext cx="6400800" cy="310896"/>
           </a:xfrm>
           <a:prstGeom prst="rect">
@@ -4968,7 +5190,7 @@
         <p:spPr>
           <a:xfrm>
             <a:off x="7132320" y="6528816"/>
-            <a:ext cx="4663440" cy="310896"/>
+            <a:ext cx="4023360" cy="310896"/>
           </a:xfrm>
           <a:prstGeom prst="rect">
             <a:avLst/>
@@ -5006,7 +5228,7 @@
         </p:nvSpPr>
         <p:spPr>
           <a:xfrm>
-            <a:off x="411480" y="384048"/>
+            <a:off x="548640" y="384048"/>
             <a:ext cx="82296" cy="658368"/>
           </a:xfrm>
           <a:prstGeom prst="rect">
@@ -5026,7 +5248,7 @@
         </p:nvSpPr>
         <p:spPr>
           <a:xfrm>
-            <a:off x="640080" y="292608"/>
+            <a:off x="777240" y="292608"/>
             <a:ext cx="10972800" cy="274320"/>
           </a:xfrm>
           <a:prstGeom prst="rect">
@@ -5065,8 +5287,8 @@
         </p:nvSpPr>
         <p:spPr>
           <a:xfrm>
-            <a:off x="640080" y="530352"/>
-            <a:ext cx="11155680" cy="566928"/>
+            <a:off x="777240" y="530352"/>
+            <a:ext cx="10881360" cy="566928"/>
           </a:xfrm>
           <a:prstGeom prst="rect">
             <a:avLst/>
@@ -5106,8 +5328,8 @@
         </p:nvSpPr>
         <p:spPr>
           <a:xfrm>
-            <a:off x="411480" y="1325880"/>
-            <a:ext cx="3642360" cy="2331720"/>
+            <a:off x="548640" y="1325880"/>
+            <a:ext cx="3544824" cy="2331720"/>
           </a:xfrm>
           <a:prstGeom prst="roundRect">
             <a:avLst>
@@ -5140,7 +5362,7 @@
         </p:nvSpPr>
         <p:spPr>
           <a:xfrm>
-            <a:off x="594360" y="1508760"/>
+            <a:off x="731520" y="1508760"/>
             <a:ext cx="457200" cy="457200"/>
           </a:xfrm>
           <a:prstGeom prst="ellipse">
@@ -5160,7 +5382,7 @@
         </p:nvSpPr>
         <p:spPr>
           <a:xfrm>
-            <a:off x="594360" y="1508760"/>
+            <a:off x="731520" y="1508760"/>
             <a:ext cx="457200" cy="457200"/>
           </a:xfrm>
           <a:prstGeom prst="rect">
@@ -5199,8 +5421,8 @@
         </p:nvSpPr>
         <p:spPr>
           <a:xfrm>
-            <a:off x="1188720" y="1435608"/>
-            <a:ext cx="2727960" cy="2112264"/>
+            <a:off x="1325880" y="1435608"/>
+            <a:ext cx="2630424" cy="2112264"/>
           </a:xfrm>
           <a:prstGeom prst="rect">
             <a:avLst/>
@@ -5240,8 +5462,8 @@
         </p:nvSpPr>
         <p:spPr>
           <a:xfrm>
-            <a:off x="4282440" y="1325880"/>
-            <a:ext cx="3642360" cy="2331720"/>
+            <a:off x="4322064" y="1325880"/>
+            <a:ext cx="3544824" cy="2331720"/>
           </a:xfrm>
           <a:prstGeom prst="roundRect">
             <a:avLst>
@@ -5274,7 +5496,7 @@
         </p:nvSpPr>
         <p:spPr>
           <a:xfrm>
-            <a:off x="4465320" y="1508760"/>
+            <a:off x="4504944" y="1508760"/>
             <a:ext cx="457200" cy="457200"/>
           </a:xfrm>
           <a:prstGeom prst="ellipse">
@@ -5294,7 +5516,7 @@
         </p:nvSpPr>
         <p:spPr>
           <a:xfrm>
-            <a:off x="4465320" y="1508760"/>
+            <a:off x="4504944" y="1508760"/>
             <a:ext cx="457200" cy="457200"/>
           </a:xfrm>
           <a:prstGeom prst="rect">
@@ -5333,8 +5555,8 @@
         </p:nvSpPr>
         <p:spPr>
           <a:xfrm>
-            <a:off x="5059680" y="1435608"/>
-            <a:ext cx="2727960" cy="2112264"/>
+            <a:off x="5099304" y="1435608"/>
+            <a:ext cx="2630424" cy="2112264"/>
           </a:xfrm>
           <a:prstGeom prst="rect">
             <a:avLst/>
@@ -5374,8 +5596,8 @@
         </p:nvSpPr>
         <p:spPr>
           <a:xfrm>
-            <a:off x="8153400" y="1325880"/>
-            <a:ext cx="3642360" cy="2331720"/>
+            <a:off x="8095488" y="1325880"/>
+            <a:ext cx="3544824" cy="2331720"/>
           </a:xfrm>
           <a:prstGeom prst="roundRect">
             <a:avLst>
@@ -5408,7 +5630,7 @@
         </p:nvSpPr>
         <p:spPr>
           <a:xfrm>
-            <a:off x="8336280" y="1508760"/>
+            <a:off x="8278368" y="1508760"/>
             <a:ext cx="457200" cy="457200"/>
           </a:xfrm>
           <a:prstGeom prst="ellipse">
@@ -5428,7 +5650,7 @@
         </p:nvSpPr>
         <p:spPr>
           <a:xfrm>
-            <a:off x="8336280" y="1508760"/>
+            <a:off x="8278368" y="1508760"/>
             <a:ext cx="457200" cy="457200"/>
           </a:xfrm>
           <a:prstGeom prst="rect">
@@ -5467,8 +5689,8 @@
         </p:nvSpPr>
         <p:spPr>
           <a:xfrm>
-            <a:off x="8930640" y="1435608"/>
-            <a:ext cx="2727960" cy="2112264"/>
+            <a:off x="8872728" y="1435608"/>
+            <a:ext cx="2630424" cy="2112264"/>
           </a:xfrm>
           <a:prstGeom prst="rect">
             <a:avLst/>
@@ -5508,8 +5730,8 @@
         </p:nvSpPr>
         <p:spPr>
           <a:xfrm>
-            <a:off x="411480" y="3886200"/>
-            <a:ext cx="3642360" cy="2331720"/>
+            <a:off x="548640" y="3886200"/>
+            <a:ext cx="3544824" cy="2331720"/>
           </a:xfrm>
           <a:prstGeom prst="roundRect">
             <a:avLst>
@@ -5542,7 +5764,7 @@
         </p:nvSpPr>
         <p:spPr>
           <a:xfrm>
-            <a:off x="594360" y="4069080"/>
+            <a:off x="731520" y="4069080"/>
             <a:ext cx="457200" cy="457200"/>
           </a:xfrm>
           <a:prstGeom prst="ellipse">
@@ -5562,7 +5784,7 @@
         </p:nvSpPr>
         <p:spPr>
           <a:xfrm>
-            <a:off x="594360" y="4069080"/>
+            <a:off x="731520" y="4069080"/>
             <a:ext cx="457200" cy="457200"/>
           </a:xfrm>
           <a:prstGeom prst="rect">
@@ -5601,8 +5823,8 @@
         </p:nvSpPr>
         <p:spPr>
           <a:xfrm>
-            <a:off x="1188720" y="3995928"/>
-            <a:ext cx="2727960" cy="2112264"/>
+            <a:off x="1325880" y="3995928"/>
+            <a:ext cx="2630424" cy="2112264"/>
           </a:xfrm>
           <a:prstGeom prst="rect">
             <a:avLst/>
@@ -5642,8 +5864,8 @@
         </p:nvSpPr>
         <p:spPr>
           <a:xfrm>
-            <a:off x="4282440" y="3886200"/>
-            <a:ext cx="3642360" cy="2331720"/>
+            <a:off x="4322064" y="3886200"/>
+            <a:ext cx="3544824" cy="2331720"/>
           </a:xfrm>
           <a:prstGeom prst="roundRect">
             <a:avLst>
@@ -5676,7 +5898,7 @@
         </p:nvSpPr>
         <p:spPr>
           <a:xfrm>
-            <a:off x="4465320" y="4069080"/>
+            <a:off x="4504944" y="4069080"/>
             <a:ext cx="457200" cy="457200"/>
           </a:xfrm>
           <a:prstGeom prst="ellipse">
@@ -5696,7 +5918,7 @@
         </p:nvSpPr>
         <p:spPr>
           <a:xfrm>
-            <a:off x="4465320" y="4069080"/>
+            <a:off x="4504944" y="4069080"/>
             <a:ext cx="457200" cy="457200"/>
           </a:xfrm>
           <a:prstGeom prst="rect">
@@ -5735,8 +5957,8 @@
         </p:nvSpPr>
         <p:spPr>
           <a:xfrm>
-            <a:off x="5059680" y="3995928"/>
-            <a:ext cx="2727960" cy="2112264"/>
+            <a:off x="5099304" y="3995928"/>
+            <a:ext cx="2630424" cy="2112264"/>
           </a:xfrm>
           <a:prstGeom prst="rect">
             <a:avLst/>
@@ -5776,8 +5998,8 @@
         </p:nvSpPr>
         <p:spPr>
           <a:xfrm>
-            <a:off x="8153400" y="3886200"/>
-            <a:ext cx="3642360" cy="2331720"/>
+            <a:off x="8095488" y="3886200"/>
+            <a:ext cx="3544824" cy="2331720"/>
           </a:xfrm>
           <a:prstGeom prst="roundRect">
             <a:avLst>
@@ -5810,7 +6032,7 @@
         </p:nvSpPr>
         <p:spPr>
           <a:xfrm>
-            <a:off x="8336280" y="4069080"/>
+            <a:off x="8278368" y="4069080"/>
             <a:ext cx="457200" cy="457200"/>
           </a:xfrm>
           <a:prstGeom prst="ellipse">
@@ -5830,7 +6052,7 @@
         </p:nvSpPr>
         <p:spPr>
           <a:xfrm>
-            <a:off x="8336280" y="4069080"/>
+            <a:off x="8278368" y="4069080"/>
             <a:ext cx="457200" cy="457200"/>
           </a:xfrm>
           <a:prstGeom prst="rect">
@@ -5869,8 +6091,8 @@
         </p:nvSpPr>
         <p:spPr>
           <a:xfrm>
-            <a:off x="8930640" y="3995928"/>
-            <a:ext cx="2727960" cy="2112264"/>
+            <a:off x="8872728" y="3995928"/>
+            <a:ext cx="2630424" cy="2112264"/>
           </a:xfrm>
           <a:prstGeom prst="rect">
             <a:avLst/>
@@ -5899,6 +6121,54 @@
               <a:t>Saída antecipada e transição</a:t>
             </a:r>
             <a:endParaRPr lang="en-US" sz="1800" dirty="0"/>
+          </a:p>
+        </p:txBody>
+      </p:sp>
+      <p:sp>
+        <p:nvSpPr>
+          <p:cNvPr id="25" name="Slide Number Placeholder 0"/>
+          <p:cNvSpPr>
+            <a:spLocks noGrp="1"/>
+          </p:cNvSpPr>
+          <p:nvPr>
+            <p:ph type="sldNum" sz="quarter" idx="4294967295"/>
+          </p:nvPr>
+        </p:nvSpPr>
+        <p:spPr>
+          <a:xfrm>
+            <a:off x="11292840" y="6556248"/>
+            <a:ext cx="548640" cy="256032"/>
+          </a:xfrm>
+          <a:prstGeom prst="rect">
+            <a:avLst/>
+          </a:prstGeom>
+          <a:extLst>
+            <a:ext uri="{C572A759-6A51-4108-AA02-DFA0A04FC94B}">
+              <ma14:wrappingTextBoxFlag xmlns:ma14="http://schemas.microsoft.com/office/mac/drawingml/2011/main" val="0"/>
+            </a:ext>
+          </a:extLst>
+        </p:spPr>
+        <p:txBody>
+          <a:bodyPr/>
+          <a:lstStyle>
+            <a:lvl1pPr>
+              <a:defRPr sz="900">
+                <a:solidFill>
+                  <a:srgbClr val="1B3A6B"/>
+                </a:solidFill>
+                <a:latin typeface="Arial"/>
+                <a:ea typeface="Arial"/>
+                <a:cs typeface="Arial"/>
+              </a:defRPr>
+            </a:lvl1pPr>
+          </a:lstStyle>
+          <a:p>
+            <a:pPr algn="r"/>
+            <a:fld id="{F7021451-1387-4CA6-816F-3879F97B5CBC}" type="slidenum">
+              <a:rPr b="1" lang="en-US"/>
+              <a:t>12</a:t>
+            </a:fld>
+            <a:endParaRPr lang="en-US"/>
           </a:p>
         </p:txBody>
       </p:sp>
@@ -5975,7 +6245,7 @@
         </p:blipFill>
         <p:spPr>
           <a:xfrm>
-            <a:off x="411480" y="6547104"/>
+            <a:off x="548640" y="6547104"/>
             <a:ext cx="274320" cy="274320"/>
           </a:xfrm>
           <a:prstGeom prst="rect">
@@ -5991,7 +6261,7 @@
         </p:nvSpPr>
         <p:spPr>
           <a:xfrm>
-            <a:off x="749808" y="6528816"/>
+            <a:off x="886968" y="6528816"/>
             <a:ext cx="6400800" cy="310896"/>
           </a:xfrm>
           <a:prstGeom prst="rect">
@@ -6031,7 +6301,7 @@
         <p:spPr>
           <a:xfrm>
             <a:off x="7132320" y="6528816"/>
-            <a:ext cx="4663440" cy="310896"/>
+            <a:ext cx="4023360" cy="310896"/>
           </a:xfrm>
           <a:prstGeom prst="rect">
             <a:avLst/>
@@ -6069,7 +6339,7 @@
         </p:nvSpPr>
         <p:spPr>
           <a:xfrm>
-            <a:off x="411480" y="384048"/>
+            <a:off x="548640" y="384048"/>
             <a:ext cx="82296" cy="658368"/>
           </a:xfrm>
           <a:prstGeom prst="rect">
@@ -6089,7 +6359,7 @@
         </p:nvSpPr>
         <p:spPr>
           <a:xfrm>
-            <a:off x="640080" y="292608"/>
+            <a:off x="777240" y="292608"/>
             <a:ext cx="10972800" cy="274320"/>
           </a:xfrm>
           <a:prstGeom prst="rect">
@@ -6128,8 +6398,8 @@
         </p:nvSpPr>
         <p:spPr>
           <a:xfrm>
-            <a:off x="640080" y="530352"/>
-            <a:ext cx="11155680" cy="566928"/>
+            <a:off x="777240" y="530352"/>
+            <a:ext cx="10881360" cy="566928"/>
           </a:xfrm>
           <a:prstGeom prst="rect">
             <a:avLst/>
@@ -6169,8 +6439,8 @@
         </p:nvSpPr>
         <p:spPr>
           <a:xfrm>
-            <a:off x="411480" y="1325880"/>
-            <a:ext cx="5577840" cy="2331720"/>
+            <a:off x="548640" y="1325880"/>
+            <a:ext cx="5431536" cy="2331720"/>
           </a:xfrm>
           <a:prstGeom prst="roundRect">
             <a:avLst>
@@ -6203,7 +6473,7 @@
         </p:nvSpPr>
         <p:spPr>
           <a:xfrm>
-            <a:off x="594360" y="1508760"/>
+            <a:off x="731520" y="1508760"/>
             <a:ext cx="457200" cy="457200"/>
           </a:xfrm>
           <a:prstGeom prst="ellipse">
@@ -6223,7 +6493,7 @@
         </p:nvSpPr>
         <p:spPr>
           <a:xfrm>
-            <a:off x="594360" y="1508760"/>
+            <a:off x="731520" y="1508760"/>
             <a:ext cx="457200" cy="457200"/>
           </a:xfrm>
           <a:prstGeom prst="rect">
@@ -6262,8 +6532,8 @@
         </p:nvSpPr>
         <p:spPr>
           <a:xfrm>
-            <a:off x="1188720" y="1435608"/>
-            <a:ext cx="4663440" cy="2112264"/>
+            <a:off x="1325880" y="1435608"/>
+            <a:ext cx="4517136" cy="2112264"/>
           </a:xfrm>
           <a:prstGeom prst="rect">
             <a:avLst/>
@@ -6281,7 +6551,7 @@
               <a:buNone/>
             </a:pPr>
             <a:r>
-              <a:rPr lang="en-US" sz="1600" dirty="0">
+              <a:rPr lang="en-US" sz="1800" dirty="0">
                 <a:solidFill>
                   <a:srgbClr val="1F2937"/>
                 </a:solidFill>
@@ -6291,7 +6561,7 @@
               </a:rPr>
               <a:t>'Outra gestora paga mais' → compare o líquido mensal e o histórico de ocupação e inadimplência dela</a:t>
             </a:r>
-            <a:endParaRPr lang="en-US" sz="1600" dirty="0"/>
+            <a:endParaRPr lang="en-US" sz="1800" dirty="0"/>
           </a:p>
         </p:txBody>
       </p:sp>
@@ -6303,8 +6573,8 @@
         </p:nvSpPr>
         <p:spPr>
           <a:xfrm>
-            <a:off x="6217920" y="1325880"/>
-            <a:ext cx="5577840" cy="2331720"/>
+            <a:off x="6208776" y="1325880"/>
+            <a:ext cx="5431536" cy="2331720"/>
           </a:xfrm>
           <a:prstGeom prst="roundRect">
             <a:avLst>
@@ -6337,7 +6607,7 @@
         </p:nvSpPr>
         <p:spPr>
           <a:xfrm>
-            <a:off x="6400800" y="1508760"/>
+            <a:off x="6391656" y="1508760"/>
             <a:ext cx="457200" cy="457200"/>
           </a:xfrm>
           <a:prstGeom prst="ellipse">
@@ -6357,7 +6627,7 @@
         </p:nvSpPr>
         <p:spPr>
           <a:xfrm>
-            <a:off x="6400800" y="1508760"/>
+            <a:off x="6391656" y="1508760"/>
             <a:ext cx="457200" cy="457200"/>
           </a:xfrm>
           <a:prstGeom prst="rect">
@@ -6396,8 +6666,8 @@
         </p:nvSpPr>
         <p:spPr>
           <a:xfrm>
-            <a:off x="6995160" y="1435608"/>
-            <a:ext cx="4663440" cy="2112264"/>
+            <a:off x="6986016" y="1435608"/>
+            <a:ext cx="4517136" cy="2112264"/>
           </a:xfrm>
           <a:prstGeom prst="rect">
             <a:avLst/>
@@ -6415,7 +6685,7 @@
               <a:buNone/>
             </a:pPr>
             <a:r>
-              <a:rPr lang="en-US" sz="1600" dirty="0">
+              <a:rPr lang="en-US" sz="1800" dirty="0">
                 <a:solidFill>
                   <a:srgbClr val="1F2937"/>
                 </a:solidFill>
@@ -6425,7 +6695,7 @@
               </a:rPr>
               <a:t>'Quero aluguel fixo' → fixo com valor menor, ou misto</a:t>
             </a:r>
-            <a:endParaRPr lang="en-US" sz="1600" dirty="0"/>
+            <a:endParaRPr lang="en-US" sz="1800" dirty="0"/>
           </a:p>
         </p:txBody>
       </p:sp>
@@ -6437,8 +6707,8 @@
         </p:nvSpPr>
         <p:spPr>
           <a:xfrm>
-            <a:off x="411480" y="3886200"/>
-            <a:ext cx="5577840" cy="2331720"/>
+            <a:off x="548640" y="3886200"/>
+            <a:ext cx="5431536" cy="2331720"/>
           </a:xfrm>
           <a:prstGeom prst="roundRect">
             <a:avLst>
@@ -6471,7 +6741,7 @@
         </p:nvSpPr>
         <p:spPr>
           <a:xfrm>
-            <a:off x="594360" y="4069080"/>
+            <a:off x="731520" y="4069080"/>
             <a:ext cx="457200" cy="457200"/>
           </a:xfrm>
           <a:prstGeom prst="ellipse">
@@ -6491,7 +6761,7 @@
         </p:nvSpPr>
         <p:spPr>
           <a:xfrm>
-            <a:off x="594360" y="4069080"/>
+            <a:off x="731520" y="4069080"/>
             <a:ext cx="457200" cy="457200"/>
           </a:xfrm>
           <a:prstGeom prst="rect">
@@ -6530,8 +6800,8 @@
         </p:nvSpPr>
         <p:spPr>
           <a:xfrm>
-            <a:off x="1188720" y="3995928"/>
-            <a:ext cx="4663440" cy="2112264"/>
+            <a:off x="1325880" y="3995928"/>
+            <a:ext cx="4517136" cy="2112264"/>
           </a:xfrm>
           <a:prstGeom prst="rect">
             <a:avLst/>
@@ -6549,7 +6819,7 @@
               <a:buNone/>
             </a:pPr>
             <a:r>
-              <a:rPr lang="en-US" sz="1600" dirty="0">
+              <a:rPr lang="en-US" sz="1800" dirty="0">
                 <a:solidFill>
                   <a:srgbClr val="1F2937"/>
                 </a:solidFill>
@@ -6559,7 +6829,7 @@
               </a:rPr>
               <a:t>'E se a usina não encher?' → ramp-up com plano comercial e metas</a:t>
             </a:r>
-            <a:endParaRPr lang="en-US" sz="1600" dirty="0"/>
+            <a:endParaRPr lang="en-US" sz="1800" dirty="0"/>
           </a:p>
         </p:txBody>
       </p:sp>
@@ -6571,8 +6841,8 @@
         </p:nvSpPr>
         <p:spPr>
           <a:xfrm>
-            <a:off x="6217920" y="3886200"/>
-            <a:ext cx="5577840" cy="2331720"/>
+            <a:off x="6208776" y="3886200"/>
+            <a:ext cx="5431536" cy="2331720"/>
           </a:xfrm>
           <a:prstGeom prst="roundRect">
             <a:avLst>
@@ -6605,7 +6875,7 @@
         </p:nvSpPr>
         <p:spPr>
           <a:xfrm>
-            <a:off x="6400800" y="4069080"/>
+            <a:off x="6391656" y="4069080"/>
             <a:ext cx="457200" cy="457200"/>
           </a:xfrm>
           <a:prstGeom prst="ellipse">
@@ -6625,7 +6895,7 @@
         </p:nvSpPr>
         <p:spPr>
           <a:xfrm>
-            <a:off x="6400800" y="4069080"/>
+            <a:off x="6391656" y="4069080"/>
             <a:ext cx="457200" cy="457200"/>
           </a:xfrm>
           <a:prstGeom prst="rect">
@@ -6664,8 +6934,8 @@
         </p:nvSpPr>
         <p:spPr>
           <a:xfrm>
-            <a:off x="6995160" y="3995928"/>
-            <a:ext cx="4663440" cy="2112264"/>
+            <a:off x="6986016" y="3995928"/>
+            <a:ext cx="4517136" cy="2112264"/>
           </a:xfrm>
           <a:prstGeom prst="rect">
             <a:avLst/>
@@ -6683,7 +6953,7 @@
               <a:buNone/>
             </a:pPr>
             <a:r>
-              <a:rPr lang="en-US" sz="1600" dirty="0">
+              <a:rPr lang="en-US" sz="1800" dirty="0">
                 <a:solidFill>
                   <a:srgbClr val="1F2937"/>
                 </a:solidFill>
@@ -6693,7 +6963,55 @@
               </a:rPr>
               <a:t>'Como sei o que acontece?' → portal do produtor</a:t>
             </a:r>
-            <a:endParaRPr lang="en-US" sz="1600" dirty="0"/>
+            <a:endParaRPr lang="en-US" sz="1800" dirty="0"/>
+          </a:p>
+        </p:txBody>
+      </p:sp>
+      <p:sp>
+        <p:nvSpPr>
+          <p:cNvPr id="25" name="Slide Number Placeholder 0"/>
+          <p:cNvSpPr>
+            <a:spLocks noGrp="1"/>
+          </p:cNvSpPr>
+          <p:nvPr>
+            <p:ph type="sldNum" sz="quarter" idx="4294967295"/>
+          </p:nvPr>
+        </p:nvSpPr>
+        <p:spPr>
+          <a:xfrm>
+            <a:off x="11292840" y="6556248"/>
+            <a:ext cx="548640" cy="256032"/>
+          </a:xfrm>
+          <a:prstGeom prst="rect">
+            <a:avLst/>
+          </a:prstGeom>
+          <a:extLst>
+            <a:ext uri="{C572A759-6A51-4108-AA02-DFA0A04FC94B}">
+              <ma14:wrappingTextBoxFlag xmlns:ma14="http://schemas.microsoft.com/office/mac/drawingml/2011/main" val="0"/>
+            </a:ext>
+          </a:extLst>
+        </p:spPr>
+        <p:txBody>
+          <a:bodyPr/>
+          <a:lstStyle>
+            <a:lvl1pPr>
+              <a:defRPr sz="900">
+                <a:solidFill>
+                  <a:srgbClr val="1B3A6B"/>
+                </a:solidFill>
+                <a:latin typeface="Arial"/>
+                <a:ea typeface="Arial"/>
+                <a:cs typeface="Arial"/>
+              </a:defRPr>
+            </a:lvl1pPr>
+          </a:lstStyle>
+          <a:p>
+            <a:pPr algn="r"/>
+            <a:fld id="{F7021451-1387-4CA6-816F-3879F97B5CBC}" type="slidenum">
+              <a:rPr b="1" lang="en-US"/>
+              <a:t>13</a:t>
+            </a:fld>
+            <a:endParaRPr lang="en-US"/>
           </a:p>
         </p:txBody>
       </p:sp>
@@ -6770,7 +7088,7 @@
         </p:blipFill>
         <p:spPr>
           <a:xfrm>
-            <a:off x="411480" y="6547104"/>
+            <a:off x="548640" y="6547104"/>
             <a:ext cx="274320" cy="274320"/>
           </a:xfrm>
           <a:prstGeom prst="rect">
@@ -6786,7 +7104,7 @@
         </p:nvSpPr>
         <p:spPr>
           <a:xfrm>
-            <a:off x="749808" y="6528816"/>
+            <a:off x="886968" y="6528816"/>
             <a:ext cx="6400800" cy="310896"/>
           </a:xfrm>
           <a:prstGeom prst="rect">
@@ -6826,7 +7144,7 @@
         <p:spPr>
           <a:xfrm>
             <a:off x="7132320" y="6528816"/>
-            <a:ext cx="4663440" cy="310896"/>
+            <a:ext cx="4023360" cy="310896"/>
           </a:xfrm>
           <a:prstGeom prst="rect">
             <a:avLst/>
@@ -6864,7 +7182,7 @@
         </p:nvSpPr>
         <p:spPr>
           <a:xfrm>
-            <a:off x="411480" y="384048"/>
+            <a:off x="548640" y="384048"/>
             <a:ext cx="82296" cy="658368"/>
           </a:xfrm>
           <a:prstGeom prst="rect">
@@ -6884,7 +7202,7 @@
         </p:nvSpPr>
         <p:spPr>
           <a:xfrm>
-            <a:off x="640080" y="292608"/>
+            <a:off x="777240" y="292608"/>
             <a:ext cx="10972800" cy="274320"/>
           </a:xfrm>
           <a:prstGeom prst="rect">
@@ -6923,8 +7241,8 @@
         </p:nvSpPr>
         <p:spPr>
           <a:xfrm>
-            <a:off x="640080" y="530352"/>
-            <a:ext cx="11155680" cy="566928"/>
+            <a:off x="777240" y="530352"/>
+            <a:ext cx="10881360" cy="566928"/>
           </a:xfrm>
           <a:prstGeom prst="rect">
             <a:avLst/>
@@ -6964,8 +7282,8 @@
         </p:nvSpPr>
         <p:spPr>
           <a:xfrm>
-            <a:off x="411480" y="1325880"/>
-            <a:ext cx="5577840" cy="4892040"/>
+            <a:off x="548640" y="1325880"/>
+            <a:ext cx="5431536" cy="4892040"/>
           </a:xfrm>
           <a:prstGeom prst="roundRect">
             <a:avLst>
@@ -6998,7 +7316,7 @@
         </p:nvSpPr>
         <p:spPr>
           <a:xfrm>
-            <a:off x="594360" y="1508760"/>
+            <a:off x="731520" y="1508760"/>
             <a:ext cx="457200" cy="457200"/>
           </a:xfrm>
           <a:prstGeom prst="ellipse">
@@ -7018,7 +7336,7 @@
         </p:nvSpPr>
         <p:spPr>
           <a:xfrm>
-            <a:off x="594360" y="1508760"/>
+            <a:off x="731520" y="1508760"/>
             <a:ext cx="457200" cy="457200"/>
           </a:xfrm>
           <a:prstGeom prst="rect">
@@ -7057,8 +7375,8 @@
         </p:nvSpPr>
         <p:spPr>
           <a:xfrm>
-            <a:off x="1188720" y="1435608"/>
-            <a:ext cx="4663440" cy="4672584"/>
+            <a:off x="1325880" y="1435608"/>
+            <a:ext cx="4517136" cy="4672584"/>
           </a:xfrm>
           <a:prstGeom prst="rect">
             <a:avLst/>
@@ -7098,8 +7416,8 @@
         </p:nvSpPr>
         <p:spPr>
           <a:xfrm>
-            <a:off x="6217920" y="1325880"/>
-            <a:ext cx="5577840" cy="4892040"/>
+            <a:off x="6208776" y="1325880"/>
+            <a:ext cx="5431536" cy="4892040"/>
           </a:xfrm>
           <a:prstGeom prst="roundRect">
             <a:avLst>
@@ -7132,7 +7450,7 @@
         </p:nvSpPr>
         <p:spPr>
           <a:xfrm>
-            <a:off x="6400800" y="1508760"/>
+            <a:off x="6391656" y="1508760"/>
             <a:ext cx="457200" cy="457200"/>
           </a:xfrm>
           <a:prstGeom prst="ellipse">
@@ -7152,7 +7470,7 @@
         </p:nvSpPr>
         <p:spPr>
           <a:xfrm>
-            <a:off x="6400800" y="1508760"/>
+            <a:off x="6391656" y="1508760"/>
             <a:ext cx="457200" cy="457200"/>
           </a:xfrm>
           <a:prstGeom prst="rect">
@@ -7191,8 +7509,8 @@
         </p:nvSpPr>
         <p:spPr>
           <a:xfrm>
-            <a:off x="6995160" y="1435608"/>
-            <a:ext cx="4663440" cy="4672584"/>
+            <a:off x="6986016" y="1435608"/>
+            <a:ext cx="4517136" cy="4672584"/>
           </a:xfrm>
           <a:prstGeom prst="rect">
             <a:avLst/>
@@ -7221,6 +7539,54 @@
               <a:t>compare sempre o líquido mensal</a:t>
             </a:r>
             <a:endParaRPr lang="en-US" sz="1800" dirty="0"/>
+          </a:p>
+        </p:txBody>
+      </p:sp>
+      <p:sp>
+        <p:nvSpPr>
+          <p:cNvPr id="25" name="Slide Number Placeholder 0"/>
+          <p:cNvSpPr>
+            <a:spLocks noGrp="1"/>
+          </p:cNvSpPr>
+          <p:nvPr>
+            <p:ph type="sldNum" sz="quarter" idx="4294967295"/>
+          </p:nvPr>
+        </p:nvSpPr>
+        <p:spPr>
+          <a:xfrm>
+            <a:off x="11292840" y="6556248"/>
+            <a:ext cx="548640" cy="256032"/>
+          </a:xfrm>
+          <a:prstGeom prst="rect">
+            <a:avLst/>
+          </a:prstGeom>
+          <a:extLst>
+            <a:ext uri="{C572A759-6A51-4108-AA02-DFA0A04FC94B}">
+              <ma14:wrappingTextBoxFlag xmlns:ma14="http://schemas.microsoft.com/office/mac/drawingml/2011/main" val="0"/>
+            </a:ext>
+          </a:extLst>
+        </p:spPr>
+        <p:txBody>
+          <a:bodyPr/>
+          <a:lstStyle>
+            <a:lvl1pPr>
+              <a:defRPr sz="900">
+                <a:solidFill>
+                  <a:srgbClr val="1B3A6B"/>
+                </a:solidFill>
+                <a:latin typeface="Arial"/>
+                <a:ea typeface="Arial"/>
+                <a:cs typeface="Arial"/>
+              </a:defRPr>
+            </a:lvl1pPr>
+          </a:lstStyle>
+          <a:p>
+            <a:pPr algn="r"/>
+            <a:fld id="{F7021451-1387-4CA6-816F-3879F97B5CBC}" type="slidenum">
+              <a:rPr b="1" lang="en-US"/>
+              <a:t>14</a:t>
+            </a:fld>
+            <a:endParaRPr lang="en-US"/>
           </a:p>
         </p:txBody>
       </p:sp>
@@ -7284,6 +7650,45 @@
         </p:nvSpPr>
         <p:spPr>
           <a:xfrm>
+            <a:off x="457200" y="548640"/>
+            <a:ext cx="3474720" cy="1737360"/>
+          </a:xfrm>
+          <a:prstGeom prst="rect">
+            <a:avLst/>
+          </a:prstGeom>
+          <a:noFill/>
+          <a:ln/>
+        </p:spPr>
+        <p:txBody>
+          <a:bodyPr wrap="square" rtlCol="0" anchor="ctr"/>
+          <a:lstStyle/>
+          <a:p>
+            <a:pPr indent="0" marL="0">
+              <a:buNone/>
+            </a:pPr>
+            <a:r>
+              <a:rPr lang="en-US" sz="11000" b="1" dirty="0">
+                <a:solidFill>
+                  <a:srgbClr val="11396F"/>
+                </a:solidFill>
+                <a:latin typeface="Arial" pitchFamily="34" charset="0"/>
+                <a:ea typeface="Arial" pitchFamily="34" charset="-122"/>
+                <a:cs typeface="Arial" pitchFamily="34" charset="-120"/>
+              </a:rPr>
+              <a:t>04</a:t>
+            </a:r>
+            <a:endParaRPr lang="en-US" sz="11000" dirty="0"/>
+          </a:p>
+        </p:txBody>
+      </p:sp>
+      <p:sp>
+        <p:nvSpPr>
+          <p:cNvPr id="4" name="Text 2"/>
+          <p:cNvSpPr/>
+          <p:nvPr/>
+        </p:nvSpPr>
+        <p:spPr>
+          <a:xfrm>
             <a:off x="548640" y="2194560"/>
             <a:ext cx="3291840" cy="548640"/>
           </a:xfrm>
@@ -7317,7 +7722,46 @@
       </p:sp>
       <p:sp>
         <p:nvSpPr>
-          <p:cNvPr id="4" name="Text 2"/>
+          <p:cNvPr id="5" name="Text 3"/>
+          <p:cNvSpPr/>
+          <p:nvPr/>
+        </p:nvSpPr>
+        <p:spPr>
+          <a:xfrm>
+            <a:off x="548640" y="3200400"/>
+            <a:ext cx="3383280" cy="457200"/>
+          </a:xfrm>
+          <a:prstGeom prst="rect">
+            <a:avLst/>
+          </a:prstGeom>
+          <a:noFill/>
+          <a:ln/>
+        </p:spPr>
+        <p:txBody>
+          <a:bodyPr wrap="square" rtlCol="0" anchor="ctr"/>
+          <a:lstStyle/>
+          <a:p>
+            <a:pPr indent="0" marL="0">
+              <a:buNone/>
+            </a:pPr>
+            <a:r>
+              <a:rPr lang="en-US" sz="1100" dirty="0">
+                <a:solidFill>
+                  <a:srgbClr val="C7D2E3"/>
+                </a:solidFill>
+                <a:latin typeface="Arial" pitchFamily="34" charset="0"/>
+                <a:ea typeface="Arial" pitchFamily="34" charset="-122"/>
+                <a:cs typeface="Arial" pitchFamily="34" charset="-120"/>
+              </a:rPr>
+              <a:t>M4 · Etapa 3 · Operação ponta a ponta</a:t>
+            </a:r>
+            <a:endParaRPr lang="en-US" sz="1100" dirty="0"/>
+          </a:p>
+        </p:txBody>
+      </p:sp>
+      <p:sp>
+        <p:nvSpPr>
+          <p:cNvPr id="6" name="Text 4"/>
           <p:cNvSpPr/>
           <p:nvPr/>
         </p:nvSpPr>
@@ -7356,7 +7800,7 @@
       </p:sp>
       <p:pic>
         <p:nvPicPr>
-          <p:cNvPr id="5" name="Image 0" descr="/www/wwwroot/rexar/gdsolar/docs/curso/slides/assets/logo-gdsolar.png">    </p:cNvPr>
+          <p:cNvPr id="7" name="Image 0" descr="/www/wwwroot/rexar/gdsolar/docs/curso/slides/assets/logo-gdsolar.png">    </p:cNvPr>
           <p:cNvPicPr>
             <a:picLocks noChangeAspect="1"/>
           </p:cNvPicPr>
@@ -7380,7 +7824,7 @@
       </p:pic>
       <p:sp>
         <p:nvSpPr>
-          <p:cNvPr id="6" name="Text 3"/>
+          <p:cNvPr id="8" name="Text 5"/>
           <p:cNvSpPr/>
           <p:nvPr/>
         </p:nvSpPr>
@@ -7421,7 +7865,7 @@
       </p:sp>
       <p:sp>
         <p:nvSpPr>
-          <p:cNvPr id="7" name="Text 4"/>
+          <p:cNvPr id="9" name="Text 6"/>
           <p:cNvSpPr/>
           <p:nvPr/>
         </p:nvSpPr>
@@ -7462,7 +7906,7 @@
       </p:sp>
       <p:sp>
         <p:nvSpPr>
-          <p:cNvPr id="8" name="Text 5"/>
+          <p:cNvPr id="10" name="Text 7"/>
           <p:cNvSpPr/>
           <p:nvPr/>
         </p:nvSpPr>
@@ -7620,7 +8064,7 @@
         </p:blipFill>
         <p:spPr>
           <a:xfrm>
-            <a:off x="411480" y="6547104"/>
+            <a:off x="548640" y="6547104"/>
             <a:ext cx="274320" cy="274320"/>
           </a:xfrm>
           <a:prstGeom prst="rect">
@@ -7636,7 +8080,7 @@
         </p:nvSpPr>
         <p:spPr>
           <a:xfrm>
-            <a:off x="749808" y="6528816"/>
+            <a:off x="886968" y="6528816"/>
             <a:ext cx="6400800" cy="310896"/>
           </a:xfrm>
           <a:prstGeom prst="rect">
@@ -7676,7 +8120,7 @@
         <p:spPr>
           <a:xfrm>
             <a:off x="7132320" y="6528816"/>
-            <a:ext cx="4663440" cy="310896"/>
+            <a:ext cx="4023360" cy="310896"/>
           </a:xfrm>
           <a:prstGeom prst="rect">
             <a:avLst/>
@@ -7714,7 +8158,7 @@
         </p:nvSpPr>
         <p:spPr>
           <a:xfrm>
-            <a:off x="411480" y="384048"/>
+            <a:off x="548640" y="384048"/>
             <a:ext cx="82296" cy="658368"/>
           </a:xfrm>
           <a:prstGeom prst="rect">
@@ -7734,7 +8178,7 @@
         </p:nvSpPr>
         <p:spPr>
           <a:xfrm>
-            <a:off x="640080" y="292608"/>
+            <a:off x="777240" y="292608"/>
             <a:ext cx="10972800" cy="274320"/>
           </a:xfrm>
           <a:prstGeom prst="rect">
@@ -7773,8 +8217,8 @@
         </p:nvSpPr>
         <p:spPr>
           <a:xfrm>
-            <a:off x="640080" y="530352"/>
-            <a:ext cx="11155680" cy="566928"/>
+            <a:off x="777240" y="530352"/>
+            <a:ext cx="10881360" cy="566928"/>
           </a:xfrm>
           <a:prstGeom prst="rect">
             <a:avLst/>
@@ -7815,7 +8259,7 @@
         <p:spPr>
           <a:xfrm>
             <a:off x="548640" y="1325880"/>
-            <a:ext cx="11155680" cy="4937760"/>
+            <a:ext cx="5486400" cy="4937760"/>
           </a:xfrm>
           <a:prstGeom prst="rect">
             <a:avLst/>
@@ -7908,6 +8352,30 @@
             </a:r>
             <a:endParaRPr lang="en-US" sz="1800" dirty="0"/>
           </a:p>
+        </p:txBody>
+      </p:sp>
+      <p:sp>
+        <p:nvSpPr>
+          <p:cNvPr id="10" name="Text 7"/>
+          <p:cNvSpPr/>
+          <p:nvPr/>
+        </p:nvSpPr>
+        <p:spPr>
+          <a:xfrm>
+            <a:off x="6263640" y="1325880"/>
+            <a:ext cx="5486400" cy="4937760"/>
+          </a:xfrm>
+          <a:prstGeom prst="rect">
+            <a:avLst/>
+          </a:prstGeom>
+          <a:noFill/>
+          <a:ln/>
+        </p:spPr>
+        <p:txBody>
+          <a:bodyPr wrap="square" rtlCol="0" anchor="t">
+            <a:normAutofit/>
+          </a:bodyPr>
+          <a:lstStyle/>
           <a:p>
             <a:pPr indent="0" marL="0">
               <a:spcAft>
@@ -7967,6 +8435,54 @@
               <a:t>7. Concluído</a:t>
             </a:r>
             <a:endParaRPr lang="en-US" sz="1800" dirty="0"/>
+          </a:p>
+        </p:txBody>
+      </p:sp>
+      <p:sp>
+        <p:nvSpPr>
+          <p:cNvPr id="25" name="Slide Number Placeholder 0"/>
+          <p:cNvSpPr>
+            <a:spLocks noGrp="1"/>
+          </p:cNvSpPr>
+          <p:nvPr>
+            <p:ph type="sldNum" sz="quarter" idx="4294967295"/>
+          </p:nvPr>
+        </p:nvSpPr>
+        <p:spPr>
+          <a:xfrm>
+            <a:off x="11292840" y="6556248"/>
+            <a:ext cx="548640" cy="256032"/>
+          </a:xfrm>
+          <a:prstGeom prst="rect">
+            <a:avLst/>
+          </a:prstGeom>
+          <a:extLst>
+            <a:ext uri="{C572A759-6A51-4108-AA02-DFA0A04FC94B}">
+              <ma14:wrappingTextBoxFlag xmlns:ma14="http://schemas.microsoft.com/office/mac/drawingml/2011/main" val="0"/>
+            </a:ext>
+          </a:extLst>
+        </p:spPr>
+        <p:txBody>
+          <a:bodyPr/>
+          <a:lstStyle>
+            <a:lvl1pPr>
+              <a:defRPr sz="900">
+                <a:solidFill>
+                  <a:srgbClr val="1B3A6B"/>
+                </a:solidFill>
+                <a:latin typeface="Arial"/>
+                <a:ea typeface="Arial"/>
+                <a:cs typeface="Arial"/>
+              </a:defRPr>
+            </a:lvl1pPr>
+          </a:lstStyle>
+          <a:p>
+            <a:pPr algn="r"/>
+            <a:fld id="{F7021451-1387-4CA6-816F-3879F97B5CBC}" type="slidenum">
+              <a:rPr b="1" lang="en-US"/>
+              <a:t>16</a:t>
+            </a:fld>
+            <a:endParaRPr lang="en-US"/>
           </a:p>
         </p:txBody>
       </p:sp>
@@ -8043,7 +8559,7 @@
         </p:blipFill>
         <p:spPr>
           <a:xfrm>
-            <a:off x="411480" y="6547104"/>
+            <a:off x="548640" y="6547104"/>
             <a:ext cx="274320" cy="274320"/>
           </a:xfrm>
           <a:prstGeom prst="rect">
@@ -8059,7 +8575,7 @@
         </p:nvSpPr>
         <p:spPr>
           <a:xfrm>
-            <a:off x="749808" y="6528816"/>
+            <a:off x="886968" y="6528816"/>
             <a:ext cx="6400800" cy="310896"/>
           </a:xfrm>
           <a:prstGeom prst="rect">
@@ -8099,7 +8615,7 @@
         <p:spPr>
           <a:xfrm>
             <a:off x="7132320" y="6528816"/>
-            <a:ext cx="4663440" cy="310896"/>
+            <a:ext cx="4023360" cy="310896"/>
           </a:xfrm>
           <a:prstGeom prst="rect">
             <a:avLst/>
@@ -8137,7 +8653,7 @@
         </p:nvSpPr>
         <p:spPr>
           <a:xfrm>
-            <a:off x="411480" y="384048"/>
+            <a:off x="548640" y="384048"/>
             <a:ext cx="82296" cy="658368"/>
           </a:xfrm>
           <a:prstGeom prst="rect">
@@ -8157,7 +8673,7 @@
         </p:nvSpPr>
         <p:spPr>
           <a:xfrm>
-            <a:off x="640080" y="292608"/>
+            <a:off x="777240" y="292608"/>
             <a:ext cx="10972800" cy="274320"/>
           </a:xfrm>
           <a:prstGeom prst="rect">
@@ -8196,8 +8712,8 @@
         </p:nvSpPr>
         <p:spPr>
           <a:xfrm>
-            <a:off x="640080" y="530352"/>
-            <a:ext cx="11155680" cy="566928"/>
+            <a:off x="777240" y="530352"/>
+            <a:ext cx="10881360" cy="566928"/>
           </a:xfrm>
           <a:prstGeom prst="rect">
             <a:avLst/>
@@ -8237,8 +8753,8 @@
         </p:nvSpPr>
         <p:spPr>
           <a:xfrm>
-            <a:off x="411480" y="1325880"/>
-            <a:ext cx="5577840" cy="4892040"/>
+            <a:off x="548640" y="1325880"/>
+            <a:ext cx="5431536" cy="4892040"/>
           </a:xfrm>
           <a:prstGeom prst="roundRect">
             <a:avLst>
@@ -8271,7 +8787,7 @@
         </p:nvSpPr>
         <p:spPr>
           <a:xfrm>
-            <a:off x="594360" y="1508760"/>
+            <a:off x="731520" y="1508760"/>
             <a:ext cx="457200" cy="457200"/>
           </a:xfrm>
           <a:prstGeom prst="ellipse">
@@ -8291,7 +8807,7 @@
         </p:nvSpPr>
         <p:spPr>
           <a:xfrm>
-            <a:off x="594360" y="1508760"/>
+            <a:off x="731520" y="1508760"/>
             <a:ext cx="457200" cy="457200"/>
           </a:xfrm>
           <a:prstGeom prst="rect">
@@ -8330,8 +8846,8 @@
         </p:nvSpPr>
         <p:spPr>
           <a:xfrm>
-            <a:off x="1188720" y="1435608"/>
-            <a:ext cx="4663440" cy="4672584"/>
+            <a:off x="1325880" y="1435608"/>
+            <a:ext cx="4517136" cy="4672584"/>
           </a:xfrm>
           <a:prstGeom prst="rect">
             <a:avLst/>
@@ -8371,8 +8887,8 @@
         </p:nvSpPr>
         <p:spPr>
           <a:xfrm>
-            <a:off x="6217920" y="1325880"/>
-            <a:ext cx="5577840" cy="4892040"/>
+            <a:off x="6208776" y="1325880"/>
+            <a:ext cx="5431536" cy="4892040"/>
           </a:xfrm>
           <a:prstGeom prst="roundRect">
             <a:avLst>
@@ -8405,7 +8921,7 @@
         </p:nvSpPr>
         <p:spPr>
           <a:xfrm>
-            <a:off x="6400800" y="1508760"/>
+            <a:off x="6391656" y="1508760"/>
             <a:ext cx="457200" cy="457200"/>
           </a:xfrm>
           <a:prstGeom prst="ellipse">
@@ -8425,7 +8941,7 @@
         </p:nvSpPr>
         <p:spPr>
           <a:xfrm>
-            <a:off x="6400800" y="1508760"/>
+            <a:off x="6391656" y="1508760"/>
             <a:ext cx="457200" cy="457200"/>
           </a:xfrm>
           <a:prstGeom prst="rect">
@@ -8464,8 +8980,8 @@
         </p:nvSpPr>
         <p:spPr>
           <a:xfrm>
-            <a:off x="6995160" y="1435608"/>
-            <a:ext cx="4663440" cy="4672584"/>
+            <a:off x="6986016" y="1435608"/>
+            <a:ext cx="4517136" cy="4672584"/>
           </a:xfrm>
           <a:prstGeom prst="rect">
             <a:avLst/>
@@ -8494,6 +9010,54 @@
               <a:t>cliente só entra no rateio depois da etapa 7</a:t>
             </a:r>
             <a:endParaRPr lang="en-US" sz="1800" dirty="0"/>
+          </a:p>
+        </p:txBody>
+      </p:sp>
+      <p:sp>
+        <p:nvSpPr>
+          <p:cNvPr id="25" name="Slide Number Placeholder 0"/>
+          <p:cNvSpPr>
+            <a:spLocks noGrp="1"/>
+          </p:cNvSpPr>
+          <p:nvPr>
+            <p:ph type="sldNum" sz="quarter" idx="4294967295"/>
+          </p:nvPr>
+        </p:nvSpPr>
+        <p:spPr>
+          <a:xfrm>
+            <a:off x="11292840" y="6556248"/>
+            <a:ext cx="548640" cy="256032"/>
+          </a:xfrm>
+          <a:prstGeom prst="rect">
+            <a:avLst/>
+          </a:prstGeom>
+          <a:extLst>
+            <a:ext uri="{C572A759-6A51-4108-AA02-DFA0A04FC94B}">
+              <ma14:wrappingTextBoxFlag xmlns:ma14="http://schemas.microsoft.com/office/mac/drawingml/2011/main" val="0"/>
+            </a:ext>
+          </a:extLst>
+        </p:spPr>
+        <p:txBody>
+          <a:bodyPr/>
+          <a:lstStyle>
+            <a:lvl1pPr>
+              <a:defRPr sz="900">
+                <a:solidFill>
+                  <a:srgbClr val="1B3A6B"/>
+                </a:solidFill>
+                <a:latin typeface="Arial"/>
+                <a:ea typeface="Arial"/>
+                <a:cs typeface="Arial"/>
+              </a:defRPr>
+            </a:lvl1pPr>
+          </a:lstStyle>
+          <a:p>
+            <a:pPr algn="r"/>
+            <a:fld id="{F7021451-1387-4CA6-816F-3879F97B5CBC}" type="slidenum">
+              <a:rPr b="1" lang="en-US"/>
+              <a:t>17</a:t>
+            </a:fld>
+            <a:endParaRPr lang="en-US"/>
           </a:p>
         </p:txBody>
       </p:sp>
@@ -8570,7 +9134,7 @@
         </p:blipFill>
         <p:spPr>
           <a:xfrm>
-            <a:off x="411480" y="6547104"/>
+            <a:off x="548640" y="6547104"/>
             <a:ext cx="274320" cy="274320"/>
           </a:xfrm>
           <a:prstGeom prst="rect">
@@ -8586,7 +9150,7 @@
         </p:nvSpPr>
         <p:spPr>
           <a:xfrm>
-            <a:off x="749808" y="6528816"/>
+            <a:off x="886968" y="6528816"/>
             <a:ext cx="6400800" cy="310896"/>
           </a:xfrm>
           <a:prstGeom prst="rect">
@@ -8626,7 +9190,7 @@
         <p:spPr>
           <a:xfrm>
             <a:off x="7132320" y="6528816"/>
-            <a:ext cx="4663440" cy="310896"/>
+            <a:ext cx="4023360" cy="310896"/>
           </a:xfrm>
           <a:prstGeom prst="rect">
             <a:avLst/>
@@ -8664,7 +9228,7 @@
         </p:nvSpPr>
         <p:spPr>
           <a:xfrm>
-            <a:off x="411480" y="384048"/>
+            <a:off x="548640" y="384048"/>
             <a:ext cx="82296" cy="658368"/>
           </a:xfrm>
           <a:prstGeom prst="rect">
@@ -8684,7 +9248,7 @@
         </p:nvSpPr>
         <p:spPr>
           <a:xfrm>
-            <a:off x="640080" y="292608"/>
+            <a:off x="777240" y="292608"/>
             <a:ext cx="10972800" cy="274320"/>
           </a:xfrm>
           <a:prstGeom prst="rect">
@@ -8723,8 +9287,8 @@
         </p:nvSpPr>
         <p:spPr>
           <a:xfrm>
-            <a:off x="640080" y="530352"/>
-            <a:ext cx="11155680" cy="566928"/>
+            <a:off x="777240" y="530352"/>
+            <a:ext cx="10881360" cy="566928"/>
           </a:xfrm>
           <a:prstGeom prst="rect">
             <a:avLst/>
@@ -8925,6 +9489,54 @@
               <a:t>Usinas Solar → Onboarding de Usinas · cada usina é um cartão · arraste para avançar · parada há mais de 14 dias = destaque</a:t>
             </a:r>
             <a:endParaRPr lang="en-US" sz="1500" dirty="0"/>
+          </a:p>
+        </p:txBody>
+      </p:sp>
+      <p:sp>
+        <p:nvSpPr>
+          <p:cNvPr id="25" name="Slide Number Placeholder 0"/>
+          <p:cNvSpPr>
+            <a:spLocks noGrp="1"/>
+          </p:cNvSpPr>
+          <p:nvPr>
+            <p:ph type="sldNum" sz="quarter" idx="4294967295"/>
+          </p:nvPr>
+        </p:nvSpPr>
+        <p:spPr>
+          <a:xfrm>
+            <a:off x="11292840" y="6556248"/>
+            <a:ext cx="548640" cy="256032"/>
+          </a:xfrm>
+          <a:prstGeom prst="rect">
+            <a:avLst/>
+          </a:prstGeom>
+          <a:extLst>
+            <a:ext uri="{C572A759-6A51-4108-AA02-DFA0A04FC94B}">
+              <ma14:wrappingTextBoxFlag xmlns:ma14="http://schemas.microsoft.com/office/mac/drawingml/2011/main" val="0"/>
+            </a:ext>
+          </a:extLst>
+        </p:spPr>
+        <p:txBody>
+          <a:bodyPr/>
+          <a:lstStyle>
+            <a:lvl1pPr>
+              <a:defRPr sz="900">
+                <a:solidFill>
+                  <a:srgbClr val="1B3A6B"/>
+                </a:solidFill>
+                <a:latin typeface="Arial"/>
+                <a:ea typeface="Arial"/>
+                <a:cs typeface="Arial"/>
+              </a:defRPr>
+            </a:lvl1pPr>
+          </a:lstStyle>
+          <a:p>
+            <a:pPr algn="r"/>
+            <a:fld id="{F7021451-1387-4CA6-816F-3879F97B5CBC}" type="slidenum">
+              <a:rPr b="1" lang="en-US"/>
+              <a:t>18</a:t>
+            </a:fld>
+            <a:endParaRPr lang="en-US"/>
           </a:p>
         </p:txBody>
       </p:sp>
@@ -9001,7 +9613,7 @@
         </p:blipFill>
         <p:spPr>
           <a:xfrm>
-            <a:off x="411480" y="6547104"/>
+            <a:off x="548640" y="6547104"/>
             <a:ext cx="274320" cy="274320"/>
           </a:xfrm>
           <a:prstGeom prst="rect">
@@ -9017,7 +9629,7 @@
         </p:nvSpPr>
         <p:spPr>
           <a:xfrm>
-            <a:off x="749808" y="6528816"/>
+            <a:off x="886968" y="6528816"/>
             <a:ext cx="6400800" cy="310896"/>
           </a:xfrm>
           <a:prstGeom prst="rect">
@@ -9057,7 +9669,7 @@
         <p:spPr>
           <a:xfrm>
             <a:off x="7132320" y="6528816"/>
-            <a:ext cx="4663440" cy="310896"/>
+            <a:ext cx="4023360" cy="310896"/>
           </a:xfrm>
           <a:prstGeom prst="rect">
             <a:avLst/>
@@ -9095,7 +9707,7 @@
         </p:nvSpPr>
         <p:spPr>
           <a:xfrm>
-            <a:off x="411480" y="384048"/>
+            <a:off x="548640" y="384048"/>
             <a:ext cx="82296" cy="658368"/>
           </a:xfrm>
           <a:prstGeom prst="rect">
@@ -9115,7 +9727,7 @@
         </p:nvSpPr>
         <p:spPr>
           <a:xfrm>
-            <a:off x="640080" y="292608"/>
+            <a:off x="777240" y="292608"/>
             <a:ext cx="10972800" cy="274320"/>
           </a:xfrm>
           <a:prstGeom prst="rect">
@@ -9154,8 +9766,8 @@
         </p:nvSpPr>
         <p:spPr>
           <a:xfrm>
-            <a:off x="640080" y="530352"/>
-            <a:ext cx="11155680" cy="566928"/>
+            <a:off x="777240" y="530352"/>
+            <a:ext cx="10881360" cy="566928"/>
           </a:xfrm>
           <a:prstGeom prst="rect">
             <a:avLst/>
@@ -9195,12 +9807,12 @@
         </p:nvSpPr>
         <p:spPr>
           <a:xfrm>
-            <a:off x="411480" y="1325880"/>
-            <a:ext cx="3642360" cy="4892040"/>
+            <a:off x="548640" y="1325880"/>
+            <a:ext cx="3544824" cy="4892040"/>
           </a:xfrm>
           <a:prstGeom prst="roundRect">
             <a:avLst>
-              <a:gd name="adj" fmla="val 2008"/>
+              <a:gd name="adj" fmla="val 2064"/>
             </a:avLst>
           </a:prstGeom>
           <a:solidFill>
@@ -9229,7 +9841,7 @@
         </p:nvSpPr>
         <p:spPr>
           <a:xfrm>
-            <a:off x="594360" y="1508760"/>
+            <a:off x="731520" y="1508760"/>
             <a:ext cx="457200" cy="457200"/>
           </a:xfrm>
           <a:prstGeom prst="ellipse">
@@ -9249,7 +9861,7 @@
         </p:nvSpPr>
         <p:spPr>
           <a:xfrm>
-            <a:off x="594360" y="1508760"/>
+            <a:off x="731520" y="1508760"/>
             <a:ext cx="457200" cy="457200"/>
           </a:xfrm>
           <a:prstGeom prst="rect">
@@ -9288,8 +9900,8 @@
         </p:nvSpPr>
         <p:spPr>
           <a:xfrm>
-            <a:off x="1188720" y="1435608"/>
-            <a:ext cx="2727960" cy="4672584"/>
+            <a:off x="1325880" y="1435608"/>
+            <a:ext cx="2630424" cy="4672584"/>
           </a:xfrm>
           <a:prstGeom prst="rect">
             <a:avLst/>
@@ -9329,12 +9941,12 @@
         </p:nvSpPr>
         <p:spPr>
           <a:xfrm>
-            <a:off x="4282440" y="1325880"/>
-            <a:ext cx="3642360" cy="4892040"/>
+            <a:off x="4322064" y="1325880"/>
+            <a:ext cx="3544824" cy="4892040"/>
           </a:xfrm>
           <a:prstGeom prst="roundRect">
             <a:avLst>
-              <a:gd name="adj" fmla="val 2008"/>
+              <a:gd name="adj" fmla="val 2064"/>
             </a:avLst>
           </a:prstGeom>
           <a:solidFill>
@@ -9363,7 +9975,7 @@
         </p:nvSpPr>
         <p:spPr>
           <a:xfrm>
-            <a:off x="4465320" y="1508760"/>
+            <a:off x="4504944" y="1508760"/>
             <a:ext cx="457200" cy="457200"/>
           </a:xfrm>
           <a:prstGeom prst="ellipse">
@@ -9383,7 +9995,7 @@
         </p:nvSpPr>
         <p:spPr>
           <a:xfrm>
-            <a:off x="4465320" y="1508760"/>
+            <a:off x="4504944" y="1508760"/>
             <a:ext cx="457200" cy="457200"/>
           </a:xfrm>
           <a:prstGeom prst="rect">
@@ -9422,8 +10034,8 @@
         </p:nvSpPr>
         <p:spPr>
           <a:xfrm>
-            <a:off x="5059680" y="1435608"/>
-            <a:ext cx="2727960" cy="4672584"/>
+            <a:off x="5099304" y="1435608"/>
+            <a:ext cx="2630424" cy="4672584"/>
           </a:xfrm>
           <a:prstGeom prst="rect">
             <a:avLst/>
@@ -9463,12 +10075,12 @@
         </p:nvSpPr>
         <p:spPr>
           <a:xfrm>
-            <a:off x="8153400" y="1325880"/>
-            <a:ext cx="3642360" cy="4892040"/>
+            <a:off x="8095488" y="1325880"/>
+            <a:ext cx="3544824" cy="4892040"/>
           </a:xfrm>
           <a:prstGeom prst="roundRect">
             <a:avLst>
-              <a:gd name="adj" fmla="val 2008"/>
+              <a:gd name="adj" fmla="val 2064"/>
             </a:avLst>
           </a:prstGeom>
           <a:solidFill>
@@ -9497,7 +10109,7 @@
         </p:nvSpPr>
         <p:spPr>
           <a:xfrm>
-            <a:off x="8336280" y="1508760"/>
+            <a:off x="8278368" y="1508760"/>
             <a:ext cx="457200" cy="457200"/>
           </a:xfrm>
           <a:prstGeom prst="ellipse">
@@ -9517,7 +10129,7 @@
         </p:nvSpPr>
         <p:spPr>
           <a:xfrm>
-            <a:off x="8336280" y="1508760"/>
+            <a:off x="8278368" y="1508760"/>
             <a:ext cx="457200" cy="457200"/>
           </a:xfrm>
           <a:prstGeom prst="rect">
@@ -9556,8 +10168,8 @@
         </p:nvSpPr>
         <p:spPr>
           <a:xfrm>
-            <a:off x="8930640" y="1435608"/>
-            <a:ext cx="2727960" cy="4672584"/>
+            <a:off x="8872728" y="1435608"/>
+            <a:ext cx="2630424" cy="4672584"/>
           </a:xfrm>
           <a:prstGeom prst="rect">
             <a:avLst/>
@@ -9586,6 +10198,54 @@
               <a:t>rateio só depois de concluído</a:t>
             </a:r>
             <a:endParaRPr lang="en-US" sz="1800" dirty="0"/>
+          </a:p>
+        </p:txBody>
+      </p:sp>
+      <p:sp>
+        <p:nvSpPr>
+          <p:cNvPr id="25" name="Slide Number Placeholder 0"/>
+          <p:cNvSpPr>
+            <a:spLocks noGrp="1"/>
+          </p:cNvSpPr>
+          <p:nvPr>
+            <p:ph type="sldNum" sz="quarter" idx="4294967295"/>
+          </p:nvPr>
+        </p:nvSpPr>
+        <p:spPr>
+          <a:xfrm>
+            <a:off x="11292840" y="6556248"/>
+            <a:ext cx="548640" cy="256032"/>
+          </a:xfrm>
+          <a:prstGeom prst="rect">
+            <a:avLst/>
+          </a:prstGeom>
+          <a:extLst>
+            <a:ext uri="{C572A759-6A51-4108-AA02-DFA0A04FC94B}">
+              <ma14:wrappingTextBoxFlag xmlns:ma14="http://schemas.microsoft.com/office/mac/drawingml/2011/main" val="0"/>
+            </a:ext>
+          </a:extLst>
+        </p:spPr>
+        <p:txBody>
+          <a:bodyPr/>
+          <a:lstStyle>
+            <a:lvl1pPr>
+              <a:defRPr sz="900">
+                <a:solidFill>
+                  <a:srgbClr val="1B3A6B"/>
+                </a:solidFill>
+                <a:latin typeface="Arial"/>
+                <a:ea typeface="Arial"/>
+                <a:cs typeface="Arial"/>
+              </a:defRPr>
+            </a:lvl1pPr>
+          </a:lstStyle>
+          <a:p>
+            <a:pPr algn="r"/>
+            <a:fld id="{F7021451-1387-4CA6-816F-3879F97B5CBC}" type="slidenum">
+              <a:rPr b="1" lang="en-US"/>
+              <a:t>19</a:t>
+            </a:fld>
+            <a:endParaRPr lang="en-US"/>
           </a:p>
         </p:txBody>
       </p:sp>
@@ -9649,6 +10309,45 @@
         </p:nvSpPr>
         <p:spPr>
           <a:xfrm>
+            <a:off x="457200" y="548640"/>
+            <a:ext cx="3474720" cy="1737360"/>
+          </a:xfrm>
+          <a:prstGeom prst="rect">
+            <a:avLst/>
+          </a:prstGeom>
+          <a:noFill/>
+          <a:ln/>
+        </p:spPr>
+        <p:txBody>
+          <a:bodyPr wrap="square" rtlCol="0" anchor="ctr"/>
+          <a:lstStyle/>
+          <a:p>
+            <a:pPr indent="0" marL="0">
+              <a:buNone/>
+            </a:pPr>
+            <a:r>
+              <a:rPr lang="en-US" sz="11000" b="1" dirty="0">
+                <a:solidFill>
+                  <a:srgbClr val="11396F"/>
+                </a:solidFill>
+                <a:latin typeface="Arial" pitchFamily="34" charset="0"/>
+                <a:ea typeface="Arial" pitchFamily="34" charset="-122"/>
+                <a:cs typeface="Arial" pitchFamily="34" charset="-120"/>
+              </a:rPr>
+              <a:t>01</a:t>
+            </a:r>
+            <a:endParaRPr lang="en-US" sz="11000" dirty="0"/>
+          </a:p>
+        </p:txBody>
+      </p:sp>
+      <p:sp>
+        <p:nvSpPr>
+          <p:cNvPr id="4" name="Text 2"/>
+          <p:cNvSpPr/>
+          <p:nvPr/>
+        </p:nvSpPr>
+        <p:spPr>
+          <a:xfrm>
             <a:off x="548640" y="2194560"/>
             <a:ext cx="3291840" cy="548640"/>
           </a:xfrm>
@@ -9682,7 +10381,46 @@
       </p:sp>
       <p:sp>
         <p:nvSpPr>
-          <p:cNvPr id="4" name="Text 2"/>
+          <p:cNvPr id="5" name="Text 3"/>
+          <p:cNvSpPr/>
+          <p:nvPr/>
+        </p:nvSpPr>
+        <p:spPr>
+          <a:xfrm>
+            <a:off x="548640" y="3200400"/>
+            <a:ext cx="3383280" cy="457200"/>
+          </a:xfrm>
+          <a:prstGeom prst="rect">
+            <a:avLst/>
+          </a:prstGeom>
+          <a:noFill/>
+          <a:ln/>
+        </p:spPr>
+        <p:txBody>
+          <a:bodyPr wrap="square" rtlCol="0" anchor="ctr"/>
+          <a:lstStyle/>
+          <a:p>
+            <a:pPr indent="0" marL="0">
+              <a:buNone/>
+            </a:pPr>
+            <a:r>
+              <a:rPr lang="en-US" sz="1100" dirty="0">
+                <a:solidFill>
+                  <a:srgbClr val="C7D2E3"/>
+                </a:solidFill>
+                <a:latin typeface="Arial" pitchFamily="34" charset="0"/>
+                <a:ea typeface="Arial" pitchFamily="34" charset="-122"/>
+                <a:cs typeface="Arial" pitchFamily="34" charset="-120"/>
+              </a:rPr>
+              <a:t>M4 · Etapa 3 · Operação ponta a ponta</a:t>
+            </a:r>
+            <a:endParaRPr lang="en-US" sz="1100" dirty="0"/>
+          </a:p>
+        </p:txBody>
+      </p:sp>
+      <p:sp>
+        <p:nvSpPr>
+          <p:cNvPr id="6" name="Text 4"/>
           <p:cNvSpPr/>
           <p:nvPr/>
         </p:nvSpPr>
@@ -9721,7 +10459,7 @@
       </p:sp>
       <p:pic>
         <p:nvPicPr>
-          <p:cNvPr id="5" name="Image 0" descr="/www/wwwroot/rexar/gdsolar/docs/curso/slides/assets/logo-gdsolar.png">    </p:cNvPr>
+          <p:cNvPr id="7" name="Image 0" descr="/www/wwwroot/rexar/gdsolar/docs/curso/slides/assets/logo-gdsolar.png">    </p:cNvPr>
           <p:cNvPicPr>
             <a:picLocks noChangeAspect="1"/>
           </p:cNvPicPr>
@@ -9745,7 +10483,7 @@
       </p:pic>
       <p:sp>
         <p:nvSpPr>
-          <p:cNvPr id="6" name="Text 3"/>
+          <p:cNvPr id="8" name="Text 5"/>
           <p:cNvSpPr/>
           <p:nvPr/>
         </p:nvSpPr>
@@ -9786,7 +10524,7 @@
       </p:sp>
       <p:sp>
         <p:nvSpPr>
-          <p:cNvPr id="7" name="Text 4"/>
+          <p:cNvPr id="9" name="Text 6"/>
           <p:cNvSpPr/>
           <p:nvPr/>
         </p:nvSpPr>
@@ -9827,7 +10565,7 @@
       </p:sp>
       <p:sp>
         <p:nvSpPr>
-          <p:cNvPr id="8" name="Text 5"/>
+          <p:cNvPr id="10" name="Text 7"/>
           <p:cNvSpPr/>
           <p:nvPr/>
         </p:nvSpPr>
@@ -9993,6 +10731,45 @@
         </p:nvSpPr>
         <p:spPr>
           <a:xfrm>
+            <a:off x="457200" y="548640"/>
+            <a:ext cx="3474720" cy="1737360"/>
+          </a:xfrm>
+          <a:prstGeom prst="rect">
+            <a:avLst/>
+          </a:prstGeom>
+          <a:noFill/>
+          <a:ln/>
+        </p:spPr>
+        <p:txBody>
+          <a:bodyPr wrap="square" rtlCol="0" anchor="ctr"/>
+          <a:lstStyle/>
+          <a:p>
+            <a:pPr indent="0" marL="0">
+              <a:buNone/>
+            </a:pPr>
+            <a:r>
+              <a:rPr lang="en-US" sz="11000" b="1" dirty="0">
+                <a:solidFill>
+                  <a:srgbClr val="11396F"/>
+                </a:solidFill>
+                <a:latin typeface="Arial" pitchFamily="34" charset="0"/>
+                <a:ea typeface="Arial" pitchFamily="34" charset="-122"/>
+                <a:cs typeface="Arial" pitchFamily="34" charset="-120"/>
+              </a:rPr>
+              <a:t>05</a:t>
+            </a:r>
+            <a:endParaRPr lang="en-US" sz="11000" dirty="0"/>
+          </a:p>
+        </p:txBody>
+      </p:sp>
+      <p:sp>
+        <p:nvSpPr>
+          <p:cNvPr id="4" name="Text 2"/>
+          <p:cNvSpPr/>
+          <p:nvPr/>
+        </p:nvSpPr>
+        <p:spPr>
+          <a:xfrm>
             <a:off x="548640" y="2194560"/>
             <a:ext cx="3291840" cy="548640"/>
           </a:xfrm>
@@ -10026,7 +10803,46 @@
       </p:sp>
       <p:sp>
         <p:nvSpPr>
-          <p:cNvPr id="4" name="Text 2"/>
+          <p:cNvPr id="5" name="Text 3"/>
+          <p:cNvSpPr/>
+          <p:nvPr/>
+        </p:nvSpPr>
+        <p:spPr>
+          <a:xfrm>
+            <a:off x="548640" y="3200400"/>
+            <a:ext cx="3383280" cy="457200"/>
+          </a:xfrm>
+          <a:prstGeom prst="rect">
+            <a:avLst/>
+          </a:prstGeom>
+          <a:noFill/>
+          <a:ln/>
+        </p:spPr>
+        <p:txBody>
+          <a:bodyPr wrap="square" rtlCol="0" anchor="ctr"/>
+          <a:lstStyle/>
+          <a:p>
+            <a:pPr indent="0" marL="0">
+              <a:buNone/>
+            </a:pPr>
+            <a:r>
+              <a:rPr lang="en-US" sz="1100" dirty="0">
+                <a:solidFill>
+                  <a:srgbClr val="C7D2E3"/>
+                </a:solidFill>
+                <a:latin typeface="Arial" pitchFamily="34" charset="0"/>
+                <a:ea typeface="Arial" pitchFamily="34" charset="-122"/>
+                <a:cs typeface="Arial" pitchFamily="34" charset="-120"/>
+              </a:rPr>
+              <a:t>M4 · Etapa 3 · Operação ponta a ponta</a:t>
+            </a:r>
+            <a:endParaRPr lang="en-US" sz="1100" dirty="0"/>
+          </a:p>
+        </p:txBody>
+      </p:sp>
+      <p:sp>
+        <p:nvSpPr>
+          <p:cNvPr id="6" name="Text 4"/>
           <p:cNvSpPr/>
           <p:nvPr/>
         </p:nvSpPr>
@@ -10065,7 +10881,7 @@
       </p:sp>
       <p:pic>
         <p:nvPicPr>
-          <p:cNvPr id="5" name="Image 0" descr="/www/wwwroot/rexar/gdsolar/docs/curso/slides/assets/logo-gdsolar.png">    </p:cNvPr>
+          <p:cNvPr id="7" name="Image 0" descr="/www/wwwroot/rexar/gdsolar/docs/curso/slides/assets/logo-gdsolar.png">    </p:cNvPr>
           <p:cNvPicPr>
             <a:picLocks noChangeAspect="1"/>
           </p:cNvPicPr>
@@ -10089,7 +10905,7 @@
       </p:pic>
       <p:sp>
         <p:nvSpPr>
-          <p:cNvPr id="6" name="Text 3"/>
+          <p:cNvPr id="8" name="Text 5"/>
           <p:cNvSpPr/>
           <p:nvPr/>
         </p:nvSpPr>
@@ -10130,7 +10946,7 @@
       </p:sp>
       <p:sp>
         <p:nvSpPr>
-          <p:cNvPr id="7" name="Text 4"/>
+          <p:cNvPr id="9" name="Text 6"/>
           <p:cNvSpPr/>
           <p:nvPr/>
         </p:nvSpPr>
@@ -10171,7 +10987,7 @@
       </p:sp>
       <p:sp>
         <p:nvSpPr>
-          <p:cNvPr id="8" name="Text 5"/>
+          <p:cNvPr id="10" name="Text 7"/>
           <p:cNvSpPr/>
           <p:nvPr/>
         </p:nvSpPr>
@@ -10287,7 +11103,7 @@
         </p:blipFill>
         <p:spPr>
           <a:xfrm>
-            <a:off x="411480" y="6547104"/>
+            <a:off x="548640" y="6547104"/>
             <a:ext cx="274320" cy="274320"/>
           </a:xfrm>
           <a:prstGeom prst="rect">
@@ -10303,7 +11119,7 @@
         </p:nvSpPr>
         <p:spPr>
           <a:xfrm>
-            <a:off x="749808" y="6528816"/>
+            <a:off x="886968" y="6528816"/>
             <a:ext cx="6400800" cy="310896"/>
           </a:xfrm>
           <a:prstGeom prst="rect">
@@ -10343,7 +11159,7 @@
         <p:spPr>
           <a:xfrm>
             <a:off x="7132320" y="6528816"/>
-            <a:ext cx="4663440" cy="310896"/>
+            <a:ext cx="4023360" cy="310896"/>
           </a:xfrm>
           <a:prstGeom prst="rect">
             <a:avLst/>
@@ -10381,7 +11197,7 @@
         </p:nvSpPr>
         <p:spPr>
           <a:xfrm>
-            <a:off x="411480" y="384048"/>
+            <a:off x="548640" y="384048"/>
             <a:ext cx="82296" cy="658368"/>
           </a:xfrm>
           <a:prstGeom prst="rect">
@@ -10401,7 +11217,7 @@
         </p:nvSpPr>
         <p:spPr>
           <a:xfrm>
-            <a:off x="640080" y="292608"/>
+            <a:off x="777240" y="292608"/>
             <a:ext cx="10972800" cy="274320"/>
           </a:xfrm>
           <a:prstGeom prst="rect">
@@ -10440,8 +11256,8 @@
         </p:nvSpPr>
         <p:spPr>
           <a:xfrm>
-            <a:off x="640080" y="530352"/>
-            <a:ext cx="11155680" cy="566928"/>
+            <a:off x="777240" y="530352"/>
+            <a:ext cx="10881360" cy="566928"/>
           </a:xfrm>
           <a:prstGeom prst="rect">
             <a:avLst/>
@@ -10795,6 +11611,54 @@
               <a:t>PDF pronto para enviar: receita mensal · composição do kWh · projeção · condições</a:t>
             </a:r>
             <a:endParaRPr lang="en-US" sz="1500" dirty="0"/>
+          </a:p>
+        </p:txBody>
+      </p:sp>
+      <p:sp>
+        <p:nvSpPr>
+          <p:cNvPr id="25" name="Slide Number Placeholder 0"/>
+          <p:cNvSpPr>
+            <a:spLocks noGrp="1"/>
+          </p:cNvSpPr>
+          <p:nvPr>
+            <p:ph type="sldNum" sz="quarter" idx="4294967295"/>
+          </p:nvPr>
+        </p:nvSpPr>
+        <p:spPr>
+          <a:xfrm>
+            <a:off x="11292840" y="6556248"/>
+            <a:ext cx="548640" cy="256032"/>
+          </a:xfrm>
+          <a:prstGeom prst="rect">
+            <a:avLst/>
+          </a:prstGeom>
+          <a:extLst>
+            <a:ext uri="{C572A759-6A51-4108-AA02-DFA0A04FC94B}">
+              <ma14:wrappingTextBoxFlag xmlns:ma14="http://schemas.microsoft.com/office/mac/drawingml/2011/main" val="0"/>
+            </a:ext>
+          </a:extLst>
+        </p:spPr>
+        <p:txBody>
+          <a:bodyPr/>
+          <a:lstStyle>
+            <a:lvl1pPr>
+              <a:defRPr sz="900">
+                <a:solidFill>
+                  <a:srgbClr val="1B3A6B"/>
+                </a:solidFill>
+                <a:latin typeface="Arial"/>
+                <a:ea typeface="Arial"/>
+                <a:cs typeface="Arial"/>
+              </a:defRPr>
+            </a:lvl1pPr>
+          </a:lstStyle>
+          <a:p>
+            <a:pPr algn="r"/>
+            <a:fld id="{F7021451-1387-4CA6-816F-3879F97B5CBC}" type="slidenum">
+              <a:rPr b="1" lang="en-US"/>
+              <a:t>21</a:t>
+            </a:fld>
+            <a:endParaRPr lang="en-US"/>
           </a:p>
         </p:txBody>
       </p:sp>
@@ -10871,7 +11735,7 @@
         </p:blipFill>
         <p:spPr>
           <a:xfrm>
-            <a:off x="411480" y="6547104"/>
+            <a:off x="548640" y="6547104"/>
             <a:ext cx="274320" cy="274320"/>
           </a:xfrm>
           <a:prstGeom prst="rect">
@@ -10887,7 +11751,7 @@
         </p:nvSpPr>
         <p:spPr>
           <a:xfrm>
-            <a:off x="749808" y="6528816"/>
+            <a:off x="886968" y="6528816"/>
             <a:ext cx="6400800" cy="310896"/>
           </a:xfrm>
           <a:prstGeom prst="rect">
@@ -10927,7 +11791,7 @@
         <p:spPr>
           <a:xfrm>
             <a:off x="7132320" y="6528816"/>
-            <a:ext cx="4663440" cy="310896"/>
+            <a:ext cx="4023360" cy="310896"/>
           </a:xfrm>
           <a:prstGeom prst="rect">
             <a:avLst/>
@@ -10965,7 +11829,7 @@
         </p:nvSpPr>
         <p:spPr>
           <a:xfrm>
-            <a:off x="411480" y="384048"/>
+            <a:off x="548640" y="384048"/>
             <a:ext cx="82296" cy="658368"/>
           </a:xfrm>
           <a:prstGeom prst="rect">
@@ -10985,7 +11849,7 @@
         </p:nvSpPr>
         <p:spPr>
           <a:xfrm>
-            <a:off x="640080" y="292608"/>
+            <a:off x="777240" y="292608"/>
             <a:ext cx="10972800" cy="274320"/>
           </a:xfrm>
           <a:prstGeom prst="rect">
@@ -11024,8 +11888,8 @@
         </p:nvSpPr>
         <p:spPr>
           <a:xfrm>
-            <a:off x="640080" y="530352"/>
-            <a:ext cx="11155680" cy="566928"/>
+            <a:off x="777240" y="530352"/>
+            <a:ext cx="10881360" cy="566928"/>
           </a:xfrm>
           <a:prstGeom prst="rect">
             <a:avLst/>
@@ -11115,6 +11979,54 @@
           </a:prstGeom>
         </p:spPr>
       </p:pic>
+      <p:sp>
+        <p:nvSpPr>
+          <p:cNvPr id="25" name="Slide Number Placeholder 0"/>
+          <p:cNvSpPr>
+            <a:spLocks noGrp="1"/>
+          </p:cNvSpPr>
+          <p:nvPr>
+            <p:ph type="sldNum" sz="quarter" idx="4294967295"/>
+          </p:nvPr>
+        </p:nvSpPr>
+        <p:spPr>
+          <a:xfrm>
+            <a:off x="11292840" y="6556248"/>
+            <a:ext cx="548640" cy="256032"/>
+          </a:xfrm>
+          <a:prstGeom prst="rect">
+            <a:avLst/>
+          </a:prstGeom>
+          <a:extLst>
+            <a:ext uri="{C572A759-6A51-4108-AA02-DFA0A04FC94B}">
+              <ma14:wrappingTextBoxFlag xmlns:ma14="http://schemas.microsoft.com/office/mac/drawingml/2011/main" val="0"/>
+            </a:ext>
+          </a:extLst>
+        </p:spPr>
+        <p:txBody>
+          <a:bodyPr/>
+          <a:lstStyle>
+            <a:lvl1pPr>
+              <a:defRPr sz="900">
+                <a:solidFill>
+                  <a:srgbClr val="1B3A6B"/>
+                </a:solidFill>
+                <a:latin typeface="Arial"/>
+                <a:ea typeface="Arial"/>
+                <a:cs typeface="Arial"/>
+              </a:defRPr>
+            </a:lvl1pPr>
+          </a:lstStyle>
+          <a:p>
+            <a:pPr algn="r"/>
+            <a:fld id="{F7021451-1387-4CA6-816F-3879F97B5CBC}" type="slidenum">
+              <a:rPr b="1" lang="en-US"/>
+              <a:t>22</a:t>
+            </a:fld>
+            <a:endParaRPr lang="en-US"/>
+          </a:p>
+        </p:txBody>
+      </p:sp>
     </p:spTree>
   </p:cSld>
   <p:clrMapOvr>
@@ -11175,6 +12087,45 @@
         </p:nvSpPr>
         <p:spPr>
           <a:xfrm>
+            <a:off x="457200" y="548640"/>
+            <a:ext cx="3474720" cy="1737360"/>
+          </a:xfrm>
+          <a:prstGeom prst="rect">
+            <a:avLst/>
+          </a:prstGeom>
+          <a:noFill/>
+          <a:ln/>
+        </p:spPr>
+        <p:txBody>
+          <a:bodyPr wrap="square" rtlCol="0" anchor="ctr"/>
+          <a:lstStyle/>
+          <a:p>
+            <a:pPr indent="0" marL="0">
+              <a:buNone/>
+            </a:pPr>
+            <a:r>
+              <a:rPr lang="en-US" sz="11000" b="1" dirty="0">
+                <a:solidFill>
+                  <a:srgbClr val="11396F"/>
+                </a:solidFill>
+                <a:latin typeface="Arial" pitchFamily="34" charset="0"/>
+                <a:ea typeface="Arial" pitchFamily="34" charset="-122"/>
+                <a:cs typeface="Arial" pitchFamily="34" charset="-120"/>
+              </a:rPr>
+              <a:t>06</a:t>
+            </a:r>
+            <a:endParaRPr lang="en-US" sz="11000" dirty="0"/>
+          </a:p>
+        </p:txBody>
+      </p:sp>
+      <p:sp>
+        <p:nvSpPr>
+          <p:cNvPr id="4" name="Text 2"/>
+          <p:cNvSpPr/>
+          <p:nvPr/>
+        </p:nvSpPr>
+        <p:spPr>
+          <a:xfrm>
             <a:off x="548640" y="2194560"/>
             <a:ext cx="3291840" cy="548640"/>
           </a:xfrm>
@@ -11208,7 +12159,46 @@
       </p:sp>
       <p:sp>
         <p:nvSpPr>
-          <p:cNvPr id="4" name="Text 2"/>
+          <p:cNvPr id="5" name="Text 3"/>
+          <p:cNvSpPr/>
+          <p:nvPr/>
+        </p:nvSpPr>
+        <p:spPr>
+          <a:xfrm>
+            <a:off x="548640" y="3200400"/>
+            <a:ext cx="3383280" cy="457200"/>
+          </a:xfrm>
+          <a:prstGeom prst="rect">
+            <a:avLst/>
+          </a:prstGeom>
+          <a:noFill/>
+          <a:ln/>
+        </p:spPr>
+        <p:txBody>
+          <a:bodyPr wrap="square" rtlCol="0" anchor="ctr"/>
+          <a:lstStyle/>
+          <a:p>
+            <a:pPr indent="0" marL="0">
+              <a:buNone/>
+            </a:pPr>
+            <a:r>
+              <a:rPr lang="en-US" sz="1100" dirty="0">
+                <a:solidFill>
+                  <a:srgbClr val="C7D2E3"/>
+                </a:solidFill>
+                <a:latin typeface="Arial" pitchFamily="34" charset="0"/>
+                <a:ea typeface="Arial" pitchFamily="34" charset="-122"/>
+                <a:cs typeface="Arial" pitchFamily="34" charset="-120"/>
+              </a:rPr>
+              <a:t>M4 · Etapa 3 · Operação ponta a ponta</a:t>
+            </a:r>
+            <a:endParaRPr lang="en-US" sz="1100" dirty="0"/>
+          </a:p>
+        </p:txBody>
+      </p:sp>
+      <p:sp>
+        <p:nvSpPr>
+          <p:cNvPr id="6" name="Text 4"/>
           <p:cNvSpPr/>
           <p:nvPr/>
         </p:nvSpPr>
@@ -11247,7 +12237,7 @@
       </p:sp>
       <p:pic>
         <p:nvPicPr>
-          <p:cNvPr id="5" name="Image 0" descr="/www/wwwroot/rexar/gdsolar/docs/curso/slides/assets/logo-gdsolar.png">    </p:cNvPr>
+          <p:cNvPr id="7" name="Image 0" descr="/www/wwwroot/rexar/gdsolar/docs/curso/slides/assets/logo-gdsolar.png">    </p:cNvPr>
           <p:cNvPicPr>
             <a:picLocks noChangeAspect="1"/>
           </p:cNvPicPr>
@@ -11271,7 +12261,7 @@
       </p:pic>
       <p:sp>
         <p:nvSpPr>
-          <p:cNvPr id="6" name="Text 3"/>
+          <p:cNvPr id="8" name="Text 5"/>
           <p:cNvSpPr/>
           <p:nvPr/>
         </p:nvSpPr>
@@ -11312,7 +12302,7 @@
       </p:sp>
       <p:sp>
         <p:nvSpPr>
-          <p:cNvPr id="7" name="Text 4"/>
+          <p:cNvPr id="9" name="Text 6"/>
           <p:cNvSpPr/>
           <p:nvPr/>
         </p:nvSpPr>
@@ -11353,7 +12343,7 @@
       </p:sp>
       <p:sp>
         <p:nvSpPr>
-          <p:cNvPr id="8" name="Text 5"/>
+          <p:cNvPr id="10" name="Text 7"/>
           <p:cNvSpPr/>
           <p:nvPr/>
         </p:nvSpPr>
@@ -11469,7 +12459,7 @@
         </p:blipFill>
         <p:spPr>
           <a:xfrm>
-            <a:off x="411480" y="6547104"/>
+            <a:off x="548640" y="6547104"/>
             <a:ext cx="274320" cy="274320"/>
           </a:xfrm>
           <a:prstGeom prst="rect">
@@ -11485,7 +12475,7 @@
         </p:nvSpPr>
         <p:spPr>
           <a:xfrm>
-            <a:off x="749808" y="6528816"/>
+            <a:off x="886968" y="6528816"/>
             <a:ext cx="6400800" cy="310896"/>
           </a:xfrm>
           <a:prstGeom prst="rect">
@@ -11525,7 +12515,7 @@
         <p:spPr>
           <a:xfrm>
             <a:off x="7132320" y="6528816"/>
-            <a:ext cx="4663440" cy="310896"/>
+            <a:ext cx="4023360" cy="310896"/>
           </a:xfrm>
           <a:prstGeom prst="rect">
             <a:avLst/>
@@ -11563,7 +12553,7 @@
         </p:nvSpPr>
         <p:spPr>
           <a:xfrm>
-            <a:off x="411480" y="384048"/>
+            <a:off x="548640" y="384048"/>
             <a:ext cx="82296" cy="658368"/>
           </a:xfrm>
           <a:prstGeom prst="rect">
@@ -11583,7 +12573,7 @@
         </p:nvSpPr>
         <p:spPr>
           <a:xfrm>
-            <a:off x="640080" y="292608"/>
+            <a:off x="777240" y="292608"/>
             <a:ext cx="10972800" cy="274320"/>
           </a:xfrm>
           <a:prstGeom prst="rect">
@@ -11622,8 +12612,8 @@
         </p:nvSpPr>
         <p:spPr>
           <a:xfrm>
-            <a:off x="640080" y="530352"/>
-            <a:ext cx="11155680" cy="566928"/>
+            <a:off x="777240" y="530352"/>
+            <a:ext cx="10881360" cy="566928"/>
           </a:xfrm>
           <a:prstGeom prst="rect">
             <a:avLst/>
@@ -11977,6 +12967,54 @@
               <a:t>O produtor acompanha a usina e a geração no portal</a:t>
             </a:r>
             <a:endParaRPr lang="en-US" sz="1500" dirty="0"/>
+          </a:p>
+        </p:txBody>
+      </p:sp>
+      <p:sp>
+        <p:nvSpPr>
+          <p:cNvPr id="25" name="Slide Number Placeholder 0"/>
+          <p:cNvSpPr>
+            <a:spLocks noGrp="1"/>
+          </p:cNvSpPr>
+          <p:nvPr>
+            <p:ph type="sldNum" sz="quarter" idx="4294967295"/>
+          </p:nvPr>
+        </p:nvSpPr>
+        <p:spPr>
+          <a:xfrm>
+            <a:off x="11292840" y="6556248"/>
+            <a:ext cx="548640" cy="256032"/>
+          </a:xfrm>
+          <a:prstGeom prst="rect">
+            <a:avLst/>
+          </a:prstGeom>
+          <a:extLst>
+            <a:ext uri="{C572A759-6A51-4108-AA02-DFA0A04FC94B}">
+              <ma14:wrappingTextBoxFlag xmlns:ma14="http://schemas.microsoft.com/office/mac/drawingml/2011/main" val="0"/>
+            </a:ext>
+          </a:extLst>
+        </p:spPr>
+        <p:txBody>
+          <a:bodyPr/>
+          <a:lstStyle>
+            <a:lvl1pPr>
+              <a:defRPr sz="900">
+                <a:solidFill>
+                  <a:srgbClr val="1B3A6B"/>
+                </a:solidFill>
+                <a:latin typeface="Arial"/>
+                <a:ea typeface="Arial"/>
+                <a:cs typeface="Arial"/>
+              </a:defRPr>
+            </a:lvl1pPr>
+          </a:lstStyle>
+          <a:p>
+            <a:pPr algn="r"/>
+            <a:fld id="{F7021451-1387-4CA6-816F-3879F97B5CBC}" type="slidenum">
+              <a:rPr b="1" lang="en-US"/>
+              <a:t>24</a:t>
+            </a:fld>
+            <a:endParaRPr lang="en-US"/>
           </a:p>
         </p:txBody>
       </p:sp>
@@ -12053,7 +13091,7 @@
         </p:blipFill>
         <p:spPr>
           <a:xfrm>
-            <a:off x="411480" y="6547104"/>
+            <a:off x="548640" y="6547104"/>
             <a:ext cx="274320" cy="274320"/>
           </a:xfrm>
           <a:prstGeom prst="rect">
@@ -12069,7 +13107,7 @@
         </p:nvSpPr>
         <p:spPr>
           <a:xfrm>
-            <a:off x="749808" y="6528816"/>
+            <a:off x="886968" y="6528816"/>
             <a:ext cx="6400800" cy="310896"/>
           </a:xfrm>
           <a:prstGeom prst="rect">
@@ -12109,7 +13147,7 @@
         <p:spPr>
           <a:xfrm>
             <a:off x="7132320" y="6528816"/>
-            <a:ext cx="4663440" cy="310896"/>
+            <a:ext cx="4023360" cy="310896"/>
           </a:xfrm>
           <a:prstGeom prst="rect">
             <a:avLst/>
@@ -12147,7 +13185,7 @@
         </p:nvSpPr>
         <p:spPr>
           <a:xfrm>
-            <a:off x="411480" y="384048"/>
+            <a:off x="548640" y="384048"/>
             <a:ext cx="82296" cy="658368"/>
           </a:xfrm>
           <a:prstGeom prst="rect">
@@ -12167,7 +13205,7 @@
         </p:nvSpPr>
         <p:spPr>
           <a:xfrm>
-            <a:off x="640080" y="292608"/>
+            <a:off x="777240" y="292608"/>
             <a:ext cx="10972800" cy="274320"/>
           </a:xfrm>
           <a:prstGeom prst="rect">
@@ -12206,8 +13244,8 @@
         </p:nvSpPr>
         <p:spPr>
           <a:xfrm>
-            <a:off x="640080" y="530352"/>
-            <a:ext cx="11155680" cy="566928"/>
+            <a:off x="777240" y="530352"/>
+            <a:ext cx="10881360" cy="566928"/>
           </a:xfrm>
           <a:prstGeom prst="rect">
             <a:avLst/>
@@ -12297,6 +13335,54 @@
           </a:prstGeom>
         </p:spPr>
       </p:pic>
+      <p:sp>
+        <p:nvSpPr>
+          <p:cNvPr id="25" name="Slide Number Placeholder 0"/>
+          <p:cNvSpPr>
+            <a:spLocks noGrp="1"/>
+          </p:cNvSpPr>
+          <p:nvPr>
+            <p:ph type="sldNum" sz="quarter" idx="4294967295"/>
+          </p:nvPr>
+        </p:nvSpPr>
+        <p:spPr>
+          <a:xfrm>
+            <a:off x="11292840" y="6556248"/>
+            <a:ext cx="548640" cy="256032"/>
+          </a:xfrm>
+          <a:prstGeom prst="rect">
+            <a:avLst/>
+          </a:prstGeom>
+          <a:extLst>
+            <a:ext uri="{C572A759-6A51-4108-AA02-DFA0A04FC94B}">
+              <ma14:wrappingTextBoxFlag xmlns:ma14="http://schemas.microsoft.com/office/mac/drawingml/2011/main" val="0"/>
+            </a:ext>
+          </a:extLst>
+        </p:spPr>
+        <p:txBody>
+          <a:bodyPr/>
+          <a:lstStyle>
+            <a:lvl1pPr>
+              <a:defRPr sz="900">
+                <a:solidFill>
+                  <a:srgbClr val="1B3A6B"/>
+                </a:solidFill>
+                <a:latin typeface="Arial"/>
+                <a:ea typeface="Arial"/>
+                <a:cs typeface="Arial"/>
+              </a:defRPr>
+            </a:lvl1pPr>
+          </a:lstStyle>
+          <a:p>
+            <a:pPr algn="r"/>
+            <a:fld id="{F7021451-1387-4CA6-816F-3879F97B5CBC}" type="slidenum">
+              <a:rPr b="1" lang="en-US"/>
+              <a:t>25</a:t>
+            </a:fld>
+            <a:endParaRPr lang="en-US"/>
+          </a:p>
+        </p:txBody>
+      </p:sp>
     </p:spTree>
   </p:cSld>
   <p:clrMapOvr>
@@ -12370,7 +13456,7 @@
         </p:blipFill>
         <p:spPr>
           <a:xfrm>
-            <a:off x="411480" y="6547104"/>
+            <a:off x="548640" y="6547104"/>
             <a:ext cx="274320" cy="274320"/>
           </a:xfrm>
           <a:prstGeom prst="rect">
@@ -12386,7 +13472,7 @@
         </p:nvSpPr>
         <p:spPr>
           <a:xfrm>
-            <a:off x="749808" y="6528816"/>
+            <a:off x="886968" y="6528816"/>
             <a:ext cx="6400800" cy="310896"/>
           </a:xfrm>
           <a:prstGeom prst="rect">
@@ -12426,7 +13512,7 @@
         <p:spPr>
           <a:xfrm>
             <a:off x="7132320" y="6528816"/>
-            <a:ext cx="4663440" cy="310896"/>
+            <a:ext cx="4023360" cy="310896"/>
           </a:xfrm>
           <a:prstGeom prst="rect">
             <a:avLst/>
@@ -12464,7 +13550,7 @@
         </p:nvSpPr>
         <p:spPr>
           <a:xfrm>
-            <a:off x="411480" y="384048"/>
+            <a:off x="548640" y="384048"/>
             <a:ext cx="82296" cy="658368"/>
           </a:xfrm>
           <a:prstGeom prst="rect">
@@ -12484,7 +13570,7 @@
         </p:nvSpPr>
         <p:spPr>
           <a:xfrm>
-            <a:off x="640080" y="292608"/>
+            <a:off x="777240" y="292608"/>
             <a:ext cx="10972800" cy="274320"/>
           </a:xfrm>
           <a:prstGeom prst="rect">
@@ -12523,8 +13609,8 @@
         </p:nvSpPr>
         <p:spPr>
           <a:xfrm>
-            <a:off x="640080" y="530352"/>
-            <a:ext cx="11155680" cy="566928"/>
+            <a:off x="777240" y="530352"/>
+            <a:ext cx="10881360" cy="566928"/>
           </a:xfrm>
           <a:prstGeom prst="rect">
             <a:avLst/>
@@ -12564,8 +13650,8 @@
         </p:nvSpPr>
         <p:spPr>
           <a:xfrm>
-            <a:off x="411480" y="1325880"/>
-            <a:ext cx="5577840" cy="411480"/>
+            <a:off x="548640" y="1325880"/>
+            <a:ext cx="5394960" cy="411480"/>
           </a:xfrm>
           <a:prstGeom prst="rect">
             <a:avLst/>
@@ -12603,8 +13689,8 @@
         </p:nvSpPr>
         <p:spPr>
           <a:xfrm>
-            <a:off x="411480" y="1783080"/>
-            <a:ext cx="5577840" cy="4480560"/>
+            <a:off x="548640" y="1783080"/>
+            <a:ext cx="5394960" cy="4480560"/>
           </a:xfrm>
           <a:prstGeom prst="rect">
             <a:avLst/>
@@ -12625,7 +13711,7 @@
               <a:buNone/>
             </a:pPr>
             <a:r>
-              <a:rPr lang="en-US" sz="1400" dirty="0">
+              <a:rPr lang="en-US" sz="1600" dirty="0">
                 <a:solidFill>
                   <a:srgbClr val="1F2937"/>
                 </a:solidFill>
@@ -12635,7 +13721,7 @@
               </a:rPr>
               <a:t>1. Uma usina tem pedido de acesso protocolado em março/2023 e potência de 800 kW. Ela é GD I? Que risco existe se um único cliente ficar com 30% dos créditos?</a:t>
             </a:r>
-            <a:endParaRPr lang="en-US" sz="1400" dirty="0"/>
+            <a:endParaRPr lang="en-US" sz="1600" dirty="0"/>
           </a:p>
           <a:p>
             <a:pPr indent="0" marL="0">
@@ -12645,7 +13731,7 @@
               <a:buNone/>
             </a:pPr>
             <a:r>
-              <a:rPr lang="en-US" sz="1400" dirty="0">
+              <a:rPr lang="en-US" sz="1600" dirty="0">
                 <a:solidFill>
                   <a:srgbClr val="1F2937"/>
                 </a:solidFill>
@@ -12655,7 +13741,7 @@
               </a:rPr>
               <a:t>2. Usina de 75.000 kWh/mês, crédito R$ 0,68, desconto 20%, taxa 15%. Repasse anual bruto ao produtor?</a:t>
             </a:r>
-            <a:endParaRPr lang="en-US" sz="1400" dirty="0"/>
+            <a:endParaRPr lang="en-US" sz="1600" dirty="0"/>
           </a:p>
           <a:p>
             <a:pPr indent="0" marL="0">
@@ -12665,7 +13751,7 @@
               <a:buNone/>
             </a:pPr>
             <a:r>
-              <a:rPr lang="en-US" sz="1400" dirty="0">
+              <a:rPr lang="en-US" sz="1600" dirty="0">
                 <a:solidFill>
                   <a:srgbClr val="1F2937"/>
                 </a:solidFill>
@@ -12675,7 +13761,7 @@
               </a:rPr>
               <a:t>3. Liste 5 documentos que você pediria antes de assinar com um produtor.</a:t>
             </a:r>
-            <a:endParaRPr lang="en-US" sz="1400" dirty="0"/>
+            <a:endParaRPr lang="en-US" sz="1600" dirty="0"/>
           </a:p>
         </p:txBody>
       </p:sp>
@@ -12687,8 +13773,8 @@
         </p:nvSpPr>
         <p:spPr>
           <a:xfrm>
-            <a:off x="6309360" y="1325880"/>
-            <a:ext cx="5486400" cy="4937760"/>
+            <a:off x="6172200" y="1325880"/>
+            <a:ext cx="5468112" cy="4937760"/>
           </a:xfrm>
           <a:prstGeom prst="roundRect">
             <a:avLst>
@@ -12709,8 +13795,8 @@
         </p:nvSpPr>
         <p:spPr>
           <a:xfrm>
-            <a:off x="6629400" y="1554480"/>
-            <a:ext cx="4846320" cy="4480560"/>
+            <a:off x="6492240" y="1554480"/>
+            <a:ext cx="4828032" cy="4480560"/>
           </a:xfrm>
           <a:prstGeom prst="rect">
             <a:avLst/>
@@ -12754,6 +13840,54 @@
               <a:t>A primeira usina da minha empresa no laboratório: produtor cadastrado, proposta de produtor gerada (PDF), usina cadastrada vinculada ao produtor e ao consultor, 3 meses de geração registrados. Mais o checklist de due diligence preenchido para uma usina real ou hipotética da sua região.</a:t>
             </a:r>
             <a:endParaRPr lang="en-US" sz="1300" dirty="0"/>
+          </a:p>
+        </p:txBody>
+      </p:sp>
+      <p:sp>
+        <p:nvSpPr>
+          <p:cNvPr id="25" name="Slide Number Placeholder 0"/>
+          <p:cNvSpPr>
+            <a:spLocks noGrp="1"/>
+          </p:cNvSpPr>
+          <p:nvPr>
+            <p:ph type="sldNum" sz="quarter" idx="4294967295"/>
+          </p:nvPr>
+        </p:nvSpPr>
+        <p:spPr>
+          <a:xfrm>
+            <a:off x="11292840" y="6556248"/>
+            <a:ext cx="548640" cy="256032"/>
+          </a:xfrm>
+          <a:prstGeom prst="rect">
+            <a:avLst/>
+          </a:prstGeom>
+          <a:extLst>
+            <a:ext uri="{C572A759-6A51-4108-AA02-DFA0A04FC94B}">
+              <ma14:wrappingTextBoxFlag xmlns:ma14="http://schemas.microsoft.com/office/mac/drawingml/2011/main" val="0"/>
+            </a:ext>
+          </a:extLst>
+        </p:spPr>
+        <p:txBody>
+          <a:bodyPr/>
+          <a:lstStyle>
+            <a:lvl1pPr>
+              <a:defRPr sz="900">
+                <a:solidFill>
+                  <a:srgbClr val="1B3A6B"/>
+                </a:solidFill>
+                <a:latin typeface="Arial"/>
+                <a:ea typeface="Arial"/>
+                <a:cs typeface="Arial"/>
+              </a:defRPr>
+            </a:lvl1pPr>
+          </a:lstStyle>
+          <a:p>
+            <a:pPr algn="r"/>
+            <a:fld id="{F7021451-1387-4CA6-816F-3879F97B5CBC}" type="slidenum">
+              <a:rPr b="1" lang="en-US"/>
+              <a:t>26</a:t>
+            </a:fld>
+            <a:endParaRPr lang="en-US"/>
           </a:p>
         </p:txBody>
       </p:sp>
@@ -12830,7 +13964,7 @@
         </p:blipFill>
         <p:spPr>
           <a:xfrm>
-            <a:off x="411480" y="6547104"/>
+            <a:off x="548640" y="6547104"/>
             <a:ext cx="274320" cy="274320"/>
           </a:xfrm>
           <a:prstGeom prst="rect">
@@ -12846,7 +13980,7 @@
         </p:nvSpPr>
         <p:spPr>
           <a:xfrm>
-            <a:off x="749808" y="6528816"/>
+            <a:off x="886968" y="6528816"/>
             <a:ext cx="6400800" cy="310896"/>
           </a:xfrm>
           <a:prstGeom prst="rect">
@@ -12886,7 +14020,7 @@
         <p:spPr>
           <a:xfrm>
             <a:off x="7132320" y="6528816"/>
-            <a:ext cx="4663440" cy="310896"/>
+            <a:ext cx="4023360" cy="310896"/>
           </a:xfrm>
           <a:prstGeom prst="rect">
             <a:avLst/>
@@ -12924,7 +14058,7 @@
         </p:nvSpPr>
         <p:spPr>
           <a:xfrm>
-            <a:off x="411480" y="384048"/>
+            <a:off x="548640" y="384048"/>
             <a:ext cx="82296" cy="658368"/>
           </a:xfrm>
           <a:prstGeom prst="rect">
@@ -12944,7 +14078,7 @@
         </p:nvSpPr>
         <p:spPr>
           <a:xfrm>
-            <a:off x="640080" y="292608"/>
+            <a:off x="777240" y="292608"/>
             <a:ext cx="10972800" cy="274320"/>
           </a:xfrm>
           <a:prstGeom prst="rect">
@@ -12983,8 +14117,8 @@
         </p:nvSpPr>
         <p:spPr>
           <a:xfrm>
-            <a:off x="640080" y="530352"/>
-            <a:ext cx="11155680" cy="566928"/>
+            <a:off x="777240" y="530352"/>
+            <a:ext cx="10881360" cy="566928"/>
           </a:xfrm>
           <a:prstGeom prst="rect">
             <a:avLst/>
@@ -13024,12 +14158,12 @@
         </p:nvSpPr>
         <p:spPr>
           <a:xfrm>
-            <a:off x="411480" y="1325880"/>
-            <a:ext cx="3611880" cy="4937760"/>
+            <a:off x="548640" y="1325880"/>
+            <a:ext cx="3514344" cy="4937760"/>
           </a:xfrm>
           <a:prstGeom prst="roundRect">
             <a:avLst>
-              <a:gd name="adj" fmla="val 2025"/>
+              <a:gd name="adj" fmla="val 2082"/>
             </a:avLst>
           </a:prstGeom>
           <a:solidFill>
@@ -13058,8 +14192,8 @@
         </p:nvSpPr>
         <p:spPr>
           <a:xfrm>
-            <a:off x="411480" y="1325880"/>
-            <a:ext cx="3611880" cy="109728"/>
+            <a:off x="548640" y="1325880"/>
+            <a:ext cx="3514344" cy="109728"/>
           </a:xfrm>
           <a:prstGeom prst="rect">
             <a:avLst/>
@@ -13078,8 +14212,8 @@
         </p:nvSpPr>
         <p:spPr>
           <a:xfrm>
-            <a:off x="685800" y="1554480"/>
-            <a:ext cx="3063240" cy="685800"/>
+            <a:off x="822960" y="1554480"/>
+            <a:ext cx="2965704" cy="685800"/>
           </a:xfrm>
           <a:prstGeom prst="rect">
             <a:avLst/>
@@ -13119,8 +14253,8 @@
         </p:nvSpPr>
         <p:spPr>
           <a:xfrm>
-            <a:off x="685800" y="2286000"/>
-            <a:ext cx="3063240" cy="3749040"/>
+            <a:off x="822960" y="2286000"/>
+            <a:ext cx="2965704" cy="3749040"/>
           </a:xfrm>
           <a:prstGeom prst="rect">
             <a:avLst/>
@@ -13141,7 +14275,7 @@
               <a:buNone/>
             </a:pPr>
             <a:r>
-              <a:rPr lang="en-US" sz="1300" dirty="0">
+              <a:rPr lang="en-US" sz="1700" dirty="0">
                 <a:solidFill>
                   <a:srgbClr val="1F2937"/>
                 </a:solidFill>
@@ -13151,7 +14285,7 @@
               </a:rPr>
               <a:t>1. Usinas prontas sem clientes (ou subutilizadas)</a:t>
             </a:r>
-            <a:endParaRPr lang="en-US" sz="1300" dirty="0"/>
+            <a:endParaRPr lang="en-US" sz="1700" dirty="0"/>
           </a:p>
           <a:p>
             <a:pPr indent="0" marL="0">
@@ -13161,7 +14295,7 @@
               <a:buNone/>
             </a:pPr>
             <a:r>
-              <a:rPr lang="en-US" sz="1300" dirty="0">
+              <a:rPr lang="en-US" sz="1700" dirty="0">
                 <a:solidFill>
                   <a:srgbClr val="1F2937"/>
                 </a:solidFill>
@@ -13171,7 +14305,7 @@
               </a:rPr>
               <a:t>2. Donos de terra próxima à cidade</a:t>
             </a:r>
-            <a:endParaRPr lang="en-US" sz="1300" dirty="0"/>
+            <a:endParaRPr lang="en-US" sz="1700" dirty="0"/>
           </a:p>
           <a:p>
             <a:pPr indent="0" marL="0">
@@ -13181,7 +14315,7 @@
               <a:buNone/>
             </a:pPr>
             <a:r>
-              <a:rPr lang="en-US" sz="1300" dirty="0">
+              <a:rPr lang="en-US" sz="1700" dirty="0">
                 <a:solidFill>
                   <a:srgbClr val="1F2937"/>
                 </a:solidFill>
@@ -13191,7 +14325,7 @@
               </a:rPr>
               <a:t>3. Investidores em busca de renda</a:t>
             </a:r>
-            <a:endParaRPr lang="en-US" sz="1300" dirty="0"/>
+            <a:endParaRPr lang="en-US" sz="1700" dirty="0"/>
           </a:p>
           <a:p>
             <a:pPr indent="0" marL="0">
@@ -13201,7 +14335,7 @@
               <a:buNone/>
             </a:pPr>
             <a:r>
-              <a:rPr lang="en-US" sz="1300" dirty="0">
+              <a:rPr lang="en-US" sz="1700" dirty="0">
                 <a:solidFill>
                   <a:srgbClr val="1F2937"/>
                 </a:solidFill>
@@ -13211,7 +14345,7 @@
               </a:rPr>
               <a:t>4. Integradoras e EPCs com projetos</a:t>
             </a:r>
-            <a:endParaRPr lang="en-US" sz="1300" dirty="0"/>
+            <a:endParaRPr lang="en-US" sz="1700" dirty="0"/>
           </a:p>
           <a:p>
             <a:pPr indent="0" marL="0">
@@ -13221,7 +14355,7 @@
               <a:buNone/>
             </a:pPr>
             <a:r>
-              <a:rPr lang="en-US" sz="1300" dirty="0">
+              <a:rPr lang="en-US" sz="1700" dirty="0">
                 <a:solidFill>
                   <a:srgbClr val="1F2937"/>
                 </a:solidFill>
@@ -13231,7 +14365,7 @@
               </a:rPr>
               <a:t>5. Usinas próprias (asset-heavy)</a:t>
             </a:r>
-            <a:endParaRPr lang="en-US" sz="1300" dirty="0"/>
+            <a:endParaRPr lang="en-US" sz="1700" dirty="0"/>
           </a:p>
         </p:txBody>
       </p:sp>
@@ -13243,12 +14377,12 @@
         </p:nvSpPr>
         <p:spPr>
           <a:xfrm>
-            <a:off x="4297680" y="1325880"/>
-            <a:ext cx="3611880" cy="4937760"/>
+            <a:off x="4337304" y="1325880"/>
+            <a:ext cx="3514344" cy="4937760"/>
           </a:xfrm>
           <a:prstGeom prst="roundRect">
             <a:avLst>
-              <a:gd name="adj" fmla="val 2025"/>
+              <a:gd name="adj" fmla="val 2082"/>
             </a:avLst>
           </a:prstGeom>
           <a:solidFill>
@@ -13277,8 +14411,8 @@
         </p:nvSpPr>
         <p:spPr>
           <a:xfrm>
-            <a:off x="4297680" y="1325880"/>
-            <a:ext cx="3611880" cy="109728"/>
+            <a:off x="4337304" y="1325880"/>
+            <a:ext cx="3514344" cy="109728"/>
           </a:xfrm>
           <a:prstGeom prst="rect">
             <a:avLst/>
@@ -13297,8 +14431,8 @@
         </p:nvSpPr>
         <p:spPr>
           <a:xfrm>
-            <a:off x="4572000" y="1554480"/>
-            <a:ext cx="3063240" cy="685800"/>
+            <a:off x="4611624" y="1554480"/>
+            <a:ext cx="2965704" cy="685800"/>
           </a:xfrm>
           <a:prstGeom prst="rect">
             <a:avLst/>
@@ -13338,8 +14472,8 @@
         </p:nvSpPr>
         <p:spPr>
           <a:xfrm>
-            <a:off x="4572000" y="2286000"/>
-            <a:ext cx="3063240" cy="3749040"/>
+            <a:off x="4611624" y="2286000"/>
+            <a:ext cx="2965704" cy="3749040"/>
           </a:xfrm>
           <a:prstGeom prst="rect">
             <a:avLst/>
@@ -13361,7 +14495,7 @@
               <a:buChar char="●"/>
             </a:pPr>
             <a:r>
-              <a:rPr lang="en-US" sz="1300" dirty="0">
+              <a:rPr lang="en-US" sz="1700" dirty="0">
                 <a:solidFill>
                   <a:srgbClr val="1F2937"/>
                 </a:solidFill>
@@ -13371,7 +14505,7 @@
               </a:rPr>
               <a:t>Rede de integradoras</a:t>
             </a:r>
-            <a:endParaRPr lang="en-US" sz="1300" dirty="0"/>
+            <a:endParaRPr lang="en-US" sz="1700" dirty="0"/>
           </a:p>
           <a:p>
             <a:pPr marL="342900" indent="-342900">
@@ -13382,7 +14516,7 @@
               <a:buChar char="●"/>
             </a:pPr>
             <a:r>
-              <a:rPr lang="en-US" sz="1300" dirty="0">
+              <a:rPr lang="en-US" sz="1700" dirty="0">
                 <a:solidFill>
                   <a:srgbClr val="1F2937"/>
                 </a:solidFill>
@@ -13392,7 +14526,7 @@
               </a:rPr>
               <a:t>Contadores e gerentes de banco</a:t>
             </a:r>
-            <a:endParaRPr lang="en-US" sz="1300" dirty="0"/>
+            <a:endParaRPr lang="en-US" sz="1700" dirty="0"/>
           </a:p>
           <a:p>
             <a:pPr marL="342900" indent="-342900">
@@ -13403,7 +14537,7 @@
               <a:buChar char="●"/>
             </a:pPr>
             <a:r>
-              <a:rPr lang="en-US" sz="1300" dirty="0">
+              <a:rPr lang="en-US" sz="1700" dirty="0">
                 <a:solidFill>
                   <a:srgbClr val="1F2937"/>
                 </a:solidFill>
@@ -13413,7 +14547,7 @@
               </a:rPr>
               <a:t>Associações rurais e cooperativas agro</a:t>
             </a:r>
-            <a:endParaRPr lang="en-US" sz="1300" dirty="0"/>
+            <a:endParaRPr lang="en-US" sz="1700" dirty="0"/>
           </a:p>
           <a:p>
             <a:pPr marL="342900" indent="-342900">
@@ -13424,7 +14558,7 @@
               <a:buChar char="●"/>
             </a:pPr>
             <a:r>
-              <a:rPr lang="en-US" sz="1300" dirty="0">
+              <a:rPr lang="en-US" sz="1700" dirty="0">
                 <a:solidFill>
                   <a:srgbClr val="1F2937"/>
                 </a:solidFill>
@@ -13434,7 +14568,7 @@
               </a:rPr>
               <a:t>Anúncios e conteúdo</a:t>
             </a:r>
-            <a:endParaRPr lang="en-US" sz="1300" dirty="0"/>
+            <a:endParaRPr lang="en-US" sz="1700" dirty="0"/>
           </a:p>
           <a:p>
             <a:pPr marL="342900" indent="-342900">
@@ -13445,7 +14579,7 @@
               <a:buChar char="●"/>
             </a:pPr>
             <a:r>
-              <a:rPr lang="en-US" sz="1300" dirty="0">
+              <a:rPr lang="en-US" sz="1700" dirty="0">
                 <a:solidFill>
                   <a:srgbClr val="1F2937"/>
                 </a:solidFill>
@@ -13455,7 +14589,7 @@
               </a:rPr>
               <a:t>Mapa de usinas conectadas (dados públicos da ANEEL)</a:t>
             </a:r>
-            <a:endParaRPr lang="en-US" sz="1300" dirty="0"/>
+            <a:endParaRPr lang="en-US" sz="1700" dirty="0"/>
           </a:p>
         </p:txBody>
       </p:sp>
@@ -13467,12 +14601,12 @@
         </p:nvSpPr>
         <p:spPr>
           <a:xfrm>
-            <a:off x="8183880" y="1325880"/>
-            <a:ext cx="3611880" cy="4937760"/>
+            <a:off x="8125968" y="1325880"/>
+            <a:ext cx="3514344" cy="4937760"/>
           </a:xfrm>
           <a:prstGeom prst="roundRect">
             <a:avLst>
-              <a:gd name="adj" fmla="val 2025"/>
+              <a:gd name="adj" fmla="val 2082"/>
             </a:avLst>
           </a:prstGeom>
           <a:solidFill>
@@ -13501,8 +14635,8 @@
         </p:nvSpPr>
         <p:spPr>
           <a:xfrm>
-            <a:off x="8183880" y="1325880"/>
-            <a:ext cx="3611880" cy="109728"/>
+            <a:off x="8125968" y="1325880"/>
+            <a:ext cx="3514344" cy="109728"/>
           </a:xfrm>
           <a:prstGeom prst="rect">
             <a:avLst/>
@@ -13521,8 +14655,8 @@
         </p:nvSpPr>
         <p:spPr>
           <a:xfrm>
-            <a:off x="8458200" y="1554480"/>
-            <a:ext cx="3063240" cy="685800"/>
+            <a:off x="8400288" y="1554480"/>
+            <a:ext cx="2965704" cy="685800"/>
           </a:xfrm>
           <a:prstGeom prst="rect">
             <a:avLst/>
@@ -13562,8 +14696,8 @@
         </p:nvSpPr>
         <p:spPr>
           <a:xfrm>
-            <a:off x="8458200" y="2286000"/>
-            <a:ext cx="3063240" cy="3749040"/>
+            <a:off x="8400288" y="2286000"/>
+            <a:ext cx="2965704" cy="3749040"/>
           </a:xfrm>
           <a:prstGeom prst="rect">
             <a:avLst/>
@@ -13585,7 +14719,7 @@
               <a:buChar char="●"/>
             </a:pPr>
             <a:r>
-              <a:rPr lang="en-US" sz="1600" dirty="0">
+              <a:rPr lang="en-US" sz="1700" dirty="0">
                 <a:solidFill>
                   <a:srgbClr val="1F2937"/>
                 </a:solidFill>
@@ -13595,7 +14729,7 @@
               </a:rPr>
               <a:t>Renda previsível</a:t>
             </a:r>
-            <a:endParaRPr lang="en-US" sz="1600" dirty="0"/>
+            <a:endParaRPr lang="en-US" sz="1700" dirty="0"/>
           </a:p>
           <a:p>
             <a:pPr marL="342900" indent="-342900">
@@ -13606,7 +14740,7 @@
               <a:buChar char="●"/>
             </a:pPr>
             <a:r>
-              <a:rPr lang="en-US" sz="1600" dirty="0">
+              <a:rPr lang="en-US" sz="1700" dirty="0">
                 <a:solidFill>
                   <a:srgbClr val="1F2937"/>
                 </a:solidFill>
@@ -13616,7 +14750,7 @@
               </a:rPr>
               <a:t>Usina cheia rápido</a:t>
             </a:r>
-            <a:endParaRPr lang="en-US" sz="1600" dirty="0"/>
+            <a:endParaRPr lang="en-US" sz="1700" dirty="0"/>
           </a:p>
           <a:p>
             <a:pPr marL="342900" indent="-342900">
@@ -13627,7 +14761,7 @@
               <a:buChar char="●"/>
             </a:pPr>
             <a:r>
-              <a:rPr lang="en-US" sz="1600" dirty="0">
+              <a:rPr lang="en-US" sz="1700" dirty="0">
                 <a:solidFill>
                   <a:srgbClr val="1F2937"/>
                 </a:solidFill>
@@ -13637,7 +14771,7 @@
               </a:rPr>
               <a:t>Zero trabalho</a:t>
             </a:r>
-            <a:endParaRPr lang="en-US" sz="1600" dirty="0"/>
+            <a:endParaRPr lang="en-US" sz="1700" dirty="0"/>
           </a:p>
           <a:p>
             <a:pPr marL="342900" indent="-342900">
@@ -13648,7 +14782,7 @@
               <a:buChar char="●"/>
             </a:pPr>
             <a:r>
-              <a:rPr lang="en-US" sz="1600" dirty="0">
+              <a:rPr lang="en-US" sz="1700" dirty="0">
                 <a:solidFill>
                   <a:srgbClr val="1F2937"/>
                 </a:solidFill>
@@ -13658,7 +14792,55 @@
               </a:rPr>
               <a:t>Transparência total (portal do produtor)</a:t>
             </a:r>
-            <a:endParaRPr lang="en-US" sz="1600" dirty="0"/>
+            <a:endParaRPr lang="en-US" sz="1700" dirty="0"/>
+          </a:p>
+        </p:txBody>
+      </p:sp>
+      <p:sp>
+        <p:nvSpPr>
+          <p:cNvPr id="25" name="Slide Number Placeholder 0"/>
+          <p:cNvSpPr>
+            <a:spLocks noGrp="1"/>
+          </p:cNvSpPr>
+          <p:nvPr>
+            <p:ph type="sldNum" sz="quarter" idx="4294967295"/>
+          </p:nvPr>
+        </p:nvSpPr>
+        <p:spPr>
+          <a:xfrm>
+            <a:off x="11292840" y="6556248"/>
+            <a:ext cx="548640" cy="256032"/>
+          </a:xfrm>
+          <a:prstGeom prst="rect">
+            <a:avLst/>
+          </a:prstGeom>
+          <a:extLst>
+            <a:ext uri="{C572A759-6A51-4108-AA02-DFA0A04FC94B}">
+              <ma14:wrappingTextBoxFlag xmlns:ma14="http://schemas.microsoft.com/office/mac/drawingml/2011/main" val="0"/>
+            </a:ext>
+          </a:extLst>
+        </p:spPr>
+        <p:txBody>
+          <a:bodyPr/>
+          <a:lstStyle>
+            <a:lvl1pPr>
+              <a:defRPr sz="900">
+                <a:solidFill>
+                  <a:srgbClr val="1B3A6B"/>
+                </a:solidFill>
+                <a:latin typeface="Arial"/>
+                <a:ea typeface="Arial"/>
+                <a:cs typeface="Arial"/>
+              </a:defRPr>
+            </a:lvl1pPr>
+          </a:lstStyle>
+          <a:p>
+            <a:pPr algn="r"/>
+            <a:fld id="{F7021451-1387-4CA6-816F-3879F97B5CBC}" type="slidenum">
+              <a:rPr b="1" lang="en-US"/>
+              <a:t>3</a:t>
+            </a:fld>
+            <a:endParaRPr lang="en-US"/>
           </a:p>
         </p:txBody>
       </p:sp>
@@ -13735,7 +14917,7 @@
         </p:blipFill>
         <p:spPr>
           <a:xfrm>
-            <a:off x="411480" y="6547104"/>
+            <a:off x="548640" y="6547104"/>
             <a:ext cx="274320" cy="274320"/>
           </a:xfrm>
           <a:prstGeom prst="rect">
@@ -13751,7 +14933,7 @@
         </p:nvSpPr>
         <p:spPr>
           <a:xfrm>
-            <a:off x="749808" y="6528816"/>
+            <a:off x="886968" y="6528816"/>
             <a:ext cx="6400800" cy="310896"/>
           </a:xfrm>
           <a:prstGeom prst="rect">
@@ -13791,7 +14973,7 @@
         <p:spPr>
           <a:xfrm>
             <a:off x="7132320" y="6528816"/>
-            <a:ext cx="4663440" cy="310896"/>
+            <a:ext cx="4023360" cy="310896"/>
           </a:xfrm>
           <a:prstGeom prst="rect">
             <a:avLst/>
@@ -13829,7 +15011,7 @@
         </p:nvSpPr>
         <p:spPr>
           <a:xfrm>
-            <a:off x="411480" y="384048"/>
+            <a:off x="548640" y="384048"/>
             <a:ext cx="82296" cy="658368"/>
           </a:xfrm>
           <a:prstGeom prst="rect">
@@ -13849,7 +15031,7 @@
         </p:nvSpPr>
         <p:spPr>
           <a:xfrm>
-            <a:off x="640080" y="292608"/>
+            <a:off x="777240" y="292608"/>
             <a:ext cx="10972800" cy="274320"/>
           </a:xfrm>
           <a:prstGeom prst="rect">
@@ -13888,8 +15070,8 @@
         </p:nvSpPr>
         <p:spPr>
           <a:xfrm>
-            <a:off x="640080" y="530352"/>
-            <a:ext cx="11155680" cy="566928"/>
+            <a:off x="777240" y="530352"/>
+            <a:ext cx="10881360" cy="566928"/>
           </a:xfrm>
           <a:prstGeom prst="rect">
             <a:avLst/>
@@ -13929,8 +15111,8 @@
         </p:nvSpPr>
         <p:spPr>
           <a:xfrm>
-            <a:off x="411480" y="1325880"/>
-            <a:ext cx="11384280" cy="4937760"/>
+            <a:off x="548640" y="1325880"/>
+            <a:ext cx="11091672" cy="4937760"/>
           </a:xfrm>
           <a:prstGeom prst="roundRect">
             <a:avLst>
@@ -13956,7 +15138,7 @@
         </p:nvSpPr>
         <p:spPr>
           <a:xfrm>
-            <a:off x="594360" y="1508760"/>
+            <a:off x="731520" y="1508760"/>
             <a:ext cx="822960" cy="384048"/>
           </a:xfrm>
           <a:prstGeom prst="roundRect">
@@ -13978,7 +15160,7 @@
         </p:nvSpPr>
         <p:spPr>
           <a:xfrm>
-            <a:off x="594360" y="1508760"/>
+            <a:off x="731520" y="1508760"/>
             <a:ext cx="822960" cy="384048"/>
           </a:xfrm>
           <a:prstGeom prst="rect">
@@ -14017,8 +15199,8 @@
         </p:nvSpPr>
         <p:spPr>
           <a:xfrm>
-            <a:off x="1508760" y="1463040"/>
-            <a:ext cx="10149840" cy="502920"/>
+            <a:off x="1645920" y="1463040"/>
+            <a:ext cx="9857232" cy="502920"/>
           </a:xfrm>
           <a:prstGeom prst="rect">
             <a:avLst/>
@@ -14058,8 +15240,8 @@
         </p:nvSpPr>
         <p:spPr>
           <a:xfrm>
-            <a:off x="640080" y="2057400"/>
-            <a:ext cx="10927080" cy="4069080"/>
+            <a:off x="777240" y="2057400"/>
+            <a:ext cx="10634472" cy="4069080"/>
           </a:xfrm>
           <a:prstGeom prst="rect">
             <a:avLst/>
@@ -14088,6 +15270,54 @@
               <a:t>Produtores Solar → Produtores: todo contato vira cadastro com status</a:t>
             </a:r>
             <a:endParaRPr lang="en-US" sz="1500" dirty="0"/>
+          </a:p>
+        </p:txBody>
+      </p:sp>
+      <p:sp>
+        <p:nvSpPr>
+          <p:cNvPr id="25" name="Slide Number Placeholder 0"/>
+          <p:cNvSpPr>
+            <a:spLocks noGrp="1"/>
+          </p:cNvSpPr>
+          <p:nvPr>
+            <p:ph type="sldNum" sz="quarter" idx="4294967295"/>
+          </p:nvPr>
+        </p:nvSpPr>
+        <p:spPr>
+          <a:xfrm>
+            <a:off x="11292840" y="6556248"/>
+            <a:ext cx="548640" cy="256032"/>
+          </a:xfrm>
+          <a:prstGeom prst="rect">
+            <a:avLst/>
+          </a:prstGeom>
+          <a:extLst>
+            <a:ext uri="{C572A759-6A51-4108-AA02-DFA0A04FC94B}">
+              <ma14:wrappingTextBoxFlag xmlns:ma14="http://schemas.microsoft.com/office/mac/drawingml/2011/main" val="0"/>
+            </a:ext>
+          </a:extLst>
+        </p:spPr>
+        <p:txBody>
+          <a:bodyPr/>
+          <a:lstStyle>
+            <a:lvl1pPr>
+              <a:defRPr sz="900">
+                <a:solidFill>
+                  <a:srgbClr val="1B3A6B"/>
+                </a:solidFill>
+                <a:latin typeface="Arial"/>
+                <a:ea typeface="Arial"/>
+                <a:cs typeface="Arial"/>
+              </a:defRPr>
+            </a:lvl1pPr>
+          </a:lstStyle>
+          <a:p>
+            <a:pPr algn="r"/>
+            <a:fld id="{F7021451-1387-4CA6-816F-3879F97B5CBC}" type="slidenum">
+              <a:rPr b="1" lang="en-US"/>
+              <a:t>4</a:t>
+            </a:fld>
+            <a:endParaRPr lang="en-US"/>
           </a:p>
         </p:txBody>
       </p:sp>
@@ -14164,7 +15394,7 @@
         </p:blipFill>
         <p:spPr>
           <a:xfrm>
-            <a:off x="411480" y="6547104"/>
+            <a:off x="548640" y="6547104"/>
             <a:ext cx="274320" cy="274320"/>
           </a:xfrm>
           <a:prstGeom prst="rect">
@@ -14180,7 +15410,7 @@
         </p:nvSpPr>
         <p:spPr>
           <a:xfrm>
-            <a:off x="749808" y="6528816"/>
+            <a:off x="886968" y="6528816"/>
             <a:ext cx="6400800" cy="310896"/>
           </a:xfrm>
           <a:prstGeom prst="rect">
@@ -14220,7 +15450,7 @@
         <p:spPr>
           <a:xfrm>
             <a:off x="7132320" y="6528816"/>
-            <a:ext cx="4663440" cy="310896"/>
+            <a:ext cx="4023360" cy="310896"/>
           </a:xfrm>
           <a:prstGeom prst="rect">
             <a:avLst/>
@@ -14258,7 +15488,7 @@
         </p:nvSpPr>
         <p:spPr>
           <a:xfrm>
-            <a:off x="411480" y="384048"/>
+            <a:off x="548640" y="384048"/>
             <a:ext cx="82296" cy="658368"/>
           </a:xfrm>
           <a:prstGeom prst="rect">
@@ -14278,7 +15508,7 @@
         </p:nvSpPr>
         <p:spPr>
           <a:xfrm>
-            <a:off x="640080" y="292608"/>
+            <a:off x="777240" y="292608"/>
             <a:ext cx="10972800" cy="274320"/>
           </a:xfrm>
           <a:prstGeom prst="rect">
@@ -14317,8 +15547,8 @@
         </p:nvSpPr>
         <p:spPr>
           <a:xfrm>
-            <a:off x="640080" y="530352"/>
-            <a:ext cx="11155680" cy="566928"/>
+            <a:off x="777240" y="530352"/>
+            <a:ext cx="10881360" cy="566928"/>
           </a:xfrm>
           <a:prstGeom prst="rect">
             <a:avLst/>
@@ -14358,12 +15588,12 @@
         </p:nvSpPr>
         <p:spPr>
           <a:xfrm>
-            <a:off x="411480" y="1325880"/>
-            <a:ext cx="3642360" cy="4892040"/>
+            <a:off x="548640" y="1325880"/>
+            <a:ext cx="3544824" cy="4892040"/>
           </a:xfrm>
           <a:prstGeom prst="roundRect">
             <a:avLst>
-              <a:gd name="adj" fmla="val 2008"/>
+              <a:gd name="adj" fmla="val 2064"/>
             </a:avLst>
           </a:prstGeom>
           <a:solidFill>
@@ -14392,7 +15622,7 @@
         </p:nvSpPr>
         <p:spPr>
           <a:xfrm>
-            <a:off x="594360" y="1508760"/>
+            <a:off x="731520" y="1508760"/>
             <a:ext cx="457200" cy="457200"/>
           </a:xfrm>
           <a:prstGeom prst="ellipse">
@@ -14412,7 +15642,7 @@
         </p:nvSpPr>
         <p:spPr>
           <a:xfrm>
-            <a:off x="594360" y="1508760"/>
+            <a:off x="731520" y="1508760"/>
             <a:ext cx="457200" cy="457200"/>
           </a:xfrm>
           <a:prstGeom prst="rect">
@@ -14451,8 +15681,8 @@
         </p:nvSpPr>
         <p:spPr>
           <a:xfrm>
-            <a:off x="1188720" y="1435608"/>
-            <a:ext cx="2727960" cy="4672584"/>
+            <a:off x="1325880" y="1435608"/>
+            <a:ext cx="2630424" cy="4672584"/>
           </a:xfrm>
           <a:prstGeom prst="rect">
             <a:avLst/>
@@ -14492,12 +15722,12 @@
         </p:nvSpPr>
         <p:spPr>
           <a:xfrm>
-            <a:off x="4282440" y="1325880"/>
-            <a:ext cx="3642360" cy="4892040"/>
+            <a:off x="4322064" y="1325880"/>
+            <a:ext cx="3544824" cy="4892040"/>
           </a:xfrm>
           <a:prstGeom prst="roundRect">
             <a:avLst>
-              <a:gd name="adj" fmla="val 2008"/>
+              <a:gd name="adj" fmla="val 2064"/>
             </a:avLst>
           </a:prstGeom>
           <a:solidFill>
@@ -14526,7 +15756,7 @@
         </p:nvSpPr>
         <p:spPr>
           <a:xfrm>
-            <a:off x="4465320" y="1508760"/>
+            <a:off x="4504944" y="1508760"/>
             <a:ext cx="457200" cy="457200"/>
           </a:xfrm>
           <a:prstGeom prst="ellipse">
@@ -14546,7 +15776,7 @@
         </p:nvSpPr>
         <p:spPr>
           <a:xfrm>
-            <a:off x="4465320" y="1508760"/>
+            <a:off x="4504944" y="1508760"/>
             <a:ext cx="457200" cy="457200"/>
           </a:xfrm>
           <a:prstGeom prst="rect">
@@ -14585,8 +15815,8 @@
         </p:nvSpPr>
         <p:spPr>
           <a:xfrm>
-            <a:off x="5059680" y="1435608"/>
-            <a:ext cx="2727960" cy="4672584"/>
+            <a:off x="5099304" y="1435608"/>
+            <a:ext cx="2630424" cy="4672584"/>
           </a:xfrm>
           <a:prstGeom prst="rect">
             <a:avLst/>
@@ -14626,12 +15856,12 @@
         </p:nvSpPr>
         <p:spPr>
           <a:xfrm>
-            <a:off x="8153400" y="1325880"/>
-            <a:ext cx="3642360" cy="4892040"/>
+            <a:off x="8095488" y="1325880"/>
+            <a:ext cx="3544824" cy="4892040"/>
           </a:xfrm>
           <a:prstGeom prst="roundRect">
             <a:avLst>
-              <a:gd name="adj" fmla="val 2008"/>
+              <a:gd name="adj" fmla="val 2064"/>
             </a:avLst>
           </a:prstGeom>
           <a:solidFill>
@@ -14660,7 +15890,7 @@
         </p:nvSpPr>
         <p:spPr>
           <a:xfrm>
-            <a:off x="8336280" y="1508760"/>
+            <a:off x="8278368" y="1508760"/>
             <a:ext cx="457200" cy="457200"/>
           </a:xfrm>
           <a:prstGeom prst="ellipse">
@@ -14680,7 +15910,7 @@
         </p:nvSpPr>
         <p:spPr>
           <a:xfrm>
-            <a:off x="8336280" y="1508760"/>
+            <a:off x="8278368" y="1508760"/>
             <a:ext cx="457200" cy="457200"/>
           </a:xfrm>
           <a:prstGeom prst="rect">
@@ -14719,8 +15949,8 @@
         </p:nvSpPr>
         <p:spPr>
           <a:xfrm>
-            <a:off x="8930640" y="1435608"/>
-            <a:ext cx="2727960" cy="4672584"/>
+            <a:off x="8872728" y="1435608"/>
+            <a:ext cx="2630424" cy="4672584"/>
           </a:xfrm>
           <a:prstGeom prst="rect">
             <a:avLst/>
@@ -14749,6 +15979,54 @@
               <a:t>renda, usina cheia, zero trabalho, transparência</a:t>
             </a:r>
             <a:endParaRPr lang="en-US" sz="1800" dirty="0"/>
+          </a:p>
+        </p:txBody>
+      </p:sp>
+      <p:sp>
+        <p:nvSpPr>
+          <p:cNvPr id="25" name="Slide Number Placeholder 0"/>
+          <p:cNvSpPr>
+            <a:spLocks noGrp="1"/>
+          </p:cNvSpPr>
+          <p:nvPr>
+            <p:ph type="sldNum" sz="quarter" idx="4294967295"/>
+          </p:nvPr>
+        </p:nvSpPr>
+        <p:spPr>
+          <a:xfrm>
+            <a:off x="11292840" y="6556248"/>
+            <a:ext cx="548640" cy="256032"/>
+          </a:xfrm>
+          <a:prstGeom prst="rect">
+            <a:avLst/>
+          </a:prstGeom>
+          <a:extLst>
+            <a:ext uri="{C572A759-6A51-4108-AA02-DFA0A04FC94B}">
+              <ma14:wrappingTextBoxFlag xmlns:ma14="http://schemas.microsoft.com/office/mac/drawingml/2011/main" val="0"/>
+            </a:ext>
+          </a:extLst>
+        </p:spPr>
+        <p:txBody>
+          <a:bodyPr/>
+          <a:lstStyle>
+            <a:lvl1pPr>
+              <a:defRPr sz="900">
+                <a:solidFill>
+                  <a:srgbClr val="1B3A6B"/>
+                </a:solidFill>
+                <a:latin typeface="Arial"/>
+                <a:ea typeface="Arial"/>
+                <a:cs typeface="Arial"/>
+              </a:defRPr>
+            </a:lvl1pPr>
+          </a:lstStyle>
+          <a:p>
+            <a:pPr algn="r"/>
+            <a:fld id="{F7021451-1387-4CA6-816F-3879F97B5CBC}" type="slidenum">
+              <a:rPr b="1" lang="en-US"/>
+              <a:t>5</a:t>
+            </a:fld>
+            <a:endParaRPr lang="en-US"/>
           </a:p>
         </p:txBody>
       </p:sp>
@@ -14812,6 +16090,45 @@
         </p:nvSpPr>
         <p:spPr>
           <a:xfrm>
+            <a:off x="457200" y="548640"/>
+            <a:ext cx="3474720" cy="1737360"/>
+          </a:xfrm>
+          <a:prstGeom prst="rect">
+            <a:avLst/>
+          </a:prstGeom>
+          <a:noFill/>
+          <a:ln/>
+        </p:spPr>
+        <p:txBody>
+          <a:bodyPr wrap="square" rtlCol="0" anchor="ctr"/>
+          <a:lstStyle/>
+          <a:p>
+            <a:pPr indent="0" marL="0">
+              <a:buNone/>
+            </a:pPr>
+            <a:r>
+              <a:rPr lang="en-US" sz="11000" b="1" dirty="0">
+                <a:solidFill>
+                  <a:srgbClr val="11396F"/>
+                </a:solidFill>
+                <a:latin typeface="Arial" pitchFamily="34" charset="0"/>
+                <a:ea typeface="Arial" pitchFamily="34" charset="-122"/>
+                <a:cs typeface="Arial" pitchFamily="34" charset="-120"/>
+              </a:rPr>
+              <a:t>02</a:t>
+            </a:r>
+            <a:endParaRPr lang="en-US" sz="11000" dirty="0"/>
+          </a:p>
+        </p:txBody>
+      </p:sp>
+      <p:sp>
+        <p:nvSpPr>
+          <p:cNvPr id="4" name="Text 2"/>
+          <p:cNvSpPr/>
+          <p:nvPr/>
+        </p:nvSpPr>
+        <p:spPr>
+          <a:xfrm>
             <a:off x="548640" y="2194560"/>
             <a:ext cx="3291840" cy="548640"/>
           </a:xfrm>
@@ -14845,7 +16162,46 @@
       </p:sp>
       <p:sp>
         <p:nvSpPr>
-          <p:cNvPr id="4" name="Text 2"/>
+          <p:cNvPr id="5" name="Text 3"/>
+          <p:cNvSpPr/>
+          <p:nvPr/>
+        </p:nvSpPr>
+        <p:spPr>
+          <a:xfrm>
+            <a:off x="548640" y="3200400"/>
+            <a:ext cx="3383280" cy="457200"/>
+          </a:xfrm>
+          <a:prstGeom prst="rect">
+            <a:avLst/>
+          </a:prstGeom>
+          <a:noFill/>
+          <a:ln/>
+        </p:spPr>
+        <p:txBody>
+          <a:bodyPr wrap="square" rtlCol="0" anchor="ctr"/>
+          <a:lstStyle/>
+          <a:p>
+            <a:pPr indent="0" marL="0">
+              <a:buNone/>
+            </a:pPr>
+            <a:r>
+              <a:rPr lang="en-US" sz="1100" dirty="0">
+                <a:solidFill>
+                  <a:srgbClr val="C7D2E3"/>
+                </a:solidFill>
+                <a:latin typeface="Arial" pitchFamily="34" charset="0"/>
+                <a:ea typeface="Arial" pitchFamily="34" charset="-122"/>
+                <a:cs typeface="Arial" pitchFamily="34" charset="-120"/>
+              </a:rPr>
+              <a:t>M4 · Etapa 3 · Operação ponta a ponta</a:t>
+            </a:r>
+            <a:endParaRPr lang="en-US" sz="1100" dirty="0"/>
+          </a:p>
+        </p:txBody>
+      </p:sp>
+      <p:sp>
+        <p:nvSpPr>
+          <p:cNvPr id="6" name="Text 4"/>
           <p:cNvSpPr/>
           <p:nvPr/>
         </p:nvSpPr>
@@ -14884,7 +16240,7 @@
       </p:sp>
       <p:pic>
         <p:nvPicPr>
-          <p:cNvPr id="5" name="Image 0" descr="/www/wwwroot/rexar/gdsolar/docs/curso/slides/assets/logo-gdsolar.png">    </p:cNvPr>
+          <p:cNvPr id="7" name="Image 0" descr="/www/wwwroot/rexar/gdsolar/docs/curso/slides/assets/logo-gdsolar.png">    </p:cNvPr>
           <p:cNvPicPr>
             <a:picLocks noChangeAspect="1"/>
           </p:cNvPicPr>
@@ -14908,7 +16264,7 @@
       </p:pic>
       <p:sp>
         <p:nvSpPr>
-          <p:cNvPr id="6" name="Text 3"/>
+          <p:cNvPr id="8" name="Text 5"/>
           <p:cNvSpPr/>
           <p:nvPr/>
         </p:nvSpPr>
@@ -14949,7 +16305,7 @@
       </p:sp>
       <p:sp>
         <p:nvSpPr>
-          <p:cNvPr id="7" name="Text 4"/>
+          <p:cNvPr id="9" name="Text 6"/>
           <p:cNvSpPr/>
           <p:nvPr/>
         </p:nvSpPr>
@@ -14990,7 +16346,7 @@
       </p:sp>
       <p:sp>
         <p:nvSpPr>
-          <p:cNvPr id="8" name="Text 5"/>
+          <p:cNvPr id="10" name="Text 7"/>
           <p:cNvSpPr/>
           <p:nvPr/>
         </p:nvSpPr>
@@ -15190,7 +16546,7 @@
         </p:blipFill>
         <p:spPr>
           <a:xfrm>
-            <a:off x="411480" y="6547104"/>
+            <a:off x="548640" y="6547104"/>
             <a:ext cx="274320" cy="274320"/>
           </a:xfrm>
           <a:prstGeom prst="rect">
@@ -15206,7 +16562,7 @@
         </p:nvSpPr>
         <p:spPr>
           <a:xfrm>
-            <a:off x="749808" y="6528816"/>
+            <a:off x="886968" y="6528816"/>
             <a:ext cx="6400800" cy="310896"/>
           </a:xfrm>
           <a:prstGeom prst="rect">
@@ -15246,7 +16602,7 @@
         <p:spPr>
           <a:xfrm>
             <a:off x="7132320" y="6528816"/>
-            <a:ext cx="4663440" cy="310896"/>
+            <a:ext cx="4023360" cy="310896"/>
           </a:xfrm>
           <a:prstGeom prst="rect">
             <a:avLst/>
@@ -15284,7 +16640,7 @@
         </p:nvSpPr>
         <p:spPr>
           <a:xfrm>
-            <a:off x="411480" y="384048"/>
+            <a:off x="548640" y="384048"/>
             <a:ext cx="82296" cy="658368"/>
           </a:xfrm>
           <a:prstGeom prst="rect">
@@ -15304,7 +16660,7 @@
         </p:nvSpPr>
         <p:spPr>
           <a:xfrm>
-            <a:off x="640080" y="292608"/>
+            <a:off x="777240" y="292608"/>
             <a:ext cx="10972800" cy="274320"/>
           </a:xfrm>
           <a:prstGeom prst="rect">
@@ -15343,8 +16699,8 @@
         </p:nvSpPr>
         <p:spPr>
           <a:xfrm>
-            <a:off x="640080" y="530352"/>
-            <a:ext cx="11155680" cy="566928"/>
+            <a:off x="777240" y="530352"/>
+            <a:ext cx="10881360" cy="566928"/>
           </a:xfrm>
           <a:prstGeom prst="rect">
             <a:avLst/>
@@ -15384,12 +16740,12 @@
         </p:nvSpPr>
         <p:spPr>
           <a:xfrm>
-            <a:off x="411480" y="1325880"/>
-            <a:ext cx="3611880" cy="4937760"/>
+            <a:off x="548640" y="1325880"/>
+            <a:ext cx="3514344" cy="4937760"/>
           </a:xfrm>
           <a:prstGeom prst="roundRect">
             <a:avLst>
-              <a:gd name="adj" fmla="val 2025"/>
+              <a:gd name="adj" fmla="val 2082"/>
             </a:avLst>
           </a:prstGeom>
           <a:solidFill>
@@ -15418,8 +16774,8 @@
         </p:nvSpPr>
         <p:spPr>
           <a:xfrm>
-            <a:off x="411480" y="1325880"/>
-            <a:ext cx="3611880" cy="109728"/>
+            <a:off x="548640" y="1325880"/>
+            <a:ext cx="3514344" cy="109728"/>
           </a:xfrm>
           <a:prstGeom prst="rect">
             <a:avLst/>
@@ -15438,8 +16794,8 @@
         </p:nvSpPr>
         <p:spPr>
           <a:xfrm>
-            <a:off x="685800" y="1554480"/>
-            <a:ext cx="3063240" cy="685800"/>
+            <a:off x="822960" y="1554480"/>
+            <a:ext cx="2965704" cy="685800"/>
           </a:xfrm>
           <a:prstGeom prst="rect">
             <a:avLst/>
@@ -15479,8 +16835,8 @@
         </p:nvSpPr>
         <p:spPr>
           <a:xfrm>
-            <a:off x="685800" y="2286000"/>
-            <a:ext cx="3063240" cy="3749040"/>
+            <a:off x="822960" y="2286000"/>
+            <a:ext cx="2965704" cy="3749040"/>
           </a:xfrm>
           <a:prstGeom prst="rect">
             <a:avLst/>
@@ -15501,7 +16857,7 @@
               <a:buNone/>
             </a:pPr>
             <a:r>
-              <a:rPr lang="en-US" sz="1200" dirty="0">
+              <a:rPr lang="en-US" sz="1700" dirty="0">
                 <a:solidFill>
                   <a:srgbClr val="1F2937"/>
                 </a:solidFill>
@@ -15511,7 +16867,7 @@
               </a:rPr>
               <a:t>☐ Matrícula do imóvel ou contrato de arrendamento do terreno (prazo ≥ contrato com você)</a:t>
             </a:r>
-            <a:endParaRPr lang="en-US" sz="1200" dirty="0"/>
+            <a:endParaRPr lang="en-US" sz="1700" dirty="0"/>
           </a:p>
           <a:p>
             <a:pPr indent="0" marL="0">
@@ -15521,7 +16877,7 @@
               <a:buNone/>
             </a:pPr>
             <a:r>
-              <a:rPr lang="en-US" sz="1200" dirty="0">
+              <a:rPr lang="en-US" sz="1700" dirty="0">
                 <a:solidFill>
                   <a:srgbClr val="1F2937"/>
                 </a:solidFill>
@@ -15531,7 +16887,7 @@
               </a:rPr>
               <a:t>☐ Titular da UC da usina na distribuidora</a:t>
             </a:r>
-            <a:endParaRPr lang="en-US" sz="1200" dirty="0"/>
+            <a:endParaRPr lang="en-US" sz="1700" dirty="0"/>
           </a:p>
           <a:p>
             <a:pPr indent="0" marL="0">
@@ -15541,7 +16897,7 @@
               <a:buNone/>
             </a:pPr>
             <a:r>
-              <a:rPr lang="en-US" sz="1200" dirty="0">
+              <a:rPr lang="en-US" sz="1700" dirty="0">
                 <a:solidFill>
                   <a:srgbClr val="1F2937"/>
                 </a:solidFill>
@@ -15551,7 +16907,7 @@
               </a:rPr>
               <a:t>☐ Ônus: alienação fiduciária, penhora, financiamento</a:t>
             </a:r>
-            <a:endParaRPr lang="en-US" sz="1200" dirty="0"/>
+            <a:endParaRPr lang="en-US" sz="1700" dirty="0"/>
           </a:p>
           <a:p>
             <a:pPr indent="0" marL="0">
@@ -15561,7 +16917,7 @@
               <a:buNone/>
             </a:pPr>
             <a:r>
-              <a:rPr lang="en-US" sz="1200" dirty="0">
+              <a:rPr lang="en-US" sz="1700" dirty="0">
                 <a:solidFill>
                   <a:srgbClr val="1F2937"/>
                 </a:solidFill>
@@ -15571,7 +16927,7 @@
               </a:rPr>
               <a:t>☐ Licenças ambientais e municipais aplicáveis</a:t>
             </a:r>
-            <a:endParaRPr lang="en-US" sz="1200" dirty="0"/>
+            <a:endParaRPr lang="en-US" sz="1700" dirty="0"/>
           </a:p>
         </p:txBody>
       </p:sp>
@@ -15583,12 +16939,12 @@
         </p:nvSpPr>
         <p:spPr>
           <a:xfrm>
-            <a:off x="4297680" y="1325880"/>
-            <a:ext cx="3611880" cy="4937760"/>
+            <a:off x="4337304" y="1325880"/>
+            <a:ext cx="3514344" cy="4937760"/>
           </a:xfrm>
           <a:prstGeom prst="roundRect">
             <a:avLst>
-              <a:gd name="adj" fmla="val 2025"/>
+              <a:gd name="adj" fmla="val 2082"/>
             </a:avLst>
           </a:prstGeom>
           <a:solidFill>
@@ -15617,8 +16973,8 @@
         </p:nvSpPr>
         <p:spPr>
           <a:xfrm>
-            <a:off x="4297680" y="1325880"/>
-            <a:ext cx="3611880" cy="109728"/>
+            <a:off x="4337304" y="1325880"/>
+            <a:ext cx="3514344" cy="109728"/>
           </a:xfrm>
           <a:prstGeom prst="rect">
             <a:avLst/>
@@ -15637,8 +16993,8 @@
         </p:nvSpPr>
         <p:spPr>
           <a:xfrm>
-            <a:off x="4572000" y="1554480"/>
-            <a:ext cx="3063240" cy="685800"/>
+            <a:off x="4611624" y="1554480"/>
+            <a:ext cx="2965704" cy="685800"/>
           </a:xfrm>
           <a:prstGeom prst="rect">
             <a:avLst/>
@@ -15678,8 +17034,8 @@
         </p:nvSpPr>
         <p:spPr>
           <a:xfrm>
-            <a:off x="4572000" y="2286000"/>
-            <a:ext cx="3063240" cy="3749040"/>
+            <a:off x="4611624" y="2286000"/>
+            <a:ext cx="2965704" cy="3749040"/>
           </a:xfrm>
           <a:prstGeom prst="rect">
             <a:avLst/>
@@ -15700,7 +17056,7 @@
               <a:buNone/>
             </a:pPr>
             <a:r>
-              <a:rPr lang="en-US" sz="1200" dirty="0">
+              <a:rPr lang="en-US" sz="1600" dirty="0">
                 <a:solidFill>
                   <a:srgbClr val="1F2937"/>
                 </a:solidFill>
@@ -15710,7 +17066,7 @@
               </a:rPr>
               <a:t>☐ Parecer de acesso e data do protocolo do pedido</a:t>
             </a:r>
-            <a:endParaRPr lang="en-US" sz="1200" dirty="0"/>
+            <a:endParaRPr lang="en-US" sz="1600" dirty="0"/>
           </a:p>
           <a:p>
             <a:pPr indent="0" marL="0">
@@ -15720,7 +17076,7 @@
               <a:buNone/>
             </a:pPr>
             <a:r>
-              <a:rPr lang="en-US" sz="1200" dirty="0">
+              <a:rPr lang="en-US" sz="1600" dirty="0">
                 <a:solidFill>
                   <a:srgbClr val="1F2937"/>
                 </a:solidFill>
@@ -15730,7 +17086,7 @@
               </a:rPr>
               <a:t>☐ Data de conexão e vistoria/aprovação da distribuidora</a:t>
             </a:r>
-            <a:endParaRPr lang="en-US" sz="1200" dirty="0"/>
+            <a:endParaRPr lang="en-US" sz="1600" dirty="0"/>
           </a:p>
           <a:p>
             <a:pPr indent="0" marL="0">
@@ -15740,7 +17096,7 @@
               <a:buNone/>
             </a:pPr>
             <a:r>
-              <a:rPr lang="en-US" sz="1200" dirty="0">
+              <a:rPr lang="en-US" sz="1600" dirty="0">
                 <a:solidFill>
                   <a:srgbClr val="1F2937"/>
                 </a:solidFill>
@@ -15750,7 +17106,7 @@
               </a:rPr>
               <a:t>☐ Potência instalada (kWp) e potência do inversor (kW)</a:t>
             </a:r>
-            <a:endParaRPr lang="en-US" sz="1200" dirty="0"/>
+            <a:endParaRPr lang="en-US" sz="1600" dirty="0"/>
           </a:p>
           <a:p>
             <a:pPr indent="0" marL="0">
@@ -15760,7 +17116,7 @@
               <a:buNone/>
             </a:pPr>
             <a:r>
-              <a:rPr lang="en-US" sz="1200" dirty="0">
+              <a:rPr lang="en-US" sz="1600" dirty="0">
                 <a:solidFill>
                   <a:srgbClr val="1F2937"/>
                 </a:solidFill>
@@ -15770,7 +17126,7 @@
               </a:rPr>
               <a:t>☐ Enquadramento: GD I / GD II / risco de GD III</a:t>
             </a:r>
-            <a:endParaRPr lang="en-US" sz="1200" dirty="0"/>
+            <a:endParaRPr lang="en-US" sz="1600" dirty="0"/>
           </a:p>
           <a:p>
             <a:pPr indent="0" marL="0">
@@ -15780,7 +17136,7 @@
               <a:buNone/>
             </a:pPr>
             <a:r>
-              <a:rPr lang="en-US" sz="1200" dirty="0">
+              <a:rPr lang="en-US" sz="1600" dirty="0">
                 <a:solidFill>
                   <a:srgbClr val="1F2937"/>
                 </a:solidFill>
@@ -15790,7 +17146,7 @@
               </a:rPr>
               <a:t>☐ Mesma distribuidora dos seus clientes</a:t>
             </a:r>
-            <a:endParaRPr lang="en-US" sz="1200" dirty="0"/>
+            <a:endParaRPr lang="en-US" sz="1600" dirty="0"/>
           </a:p>
         </p:txBody>
       </p:sp>
@@ -15802,12 +17158,12 @@
         </p:nvSpPr>
         <p:spPr>
           <a:xfrm>
-            <a:off x="8183880" y="1325880"/>
-            <a:ext cx="3611880" cy="4937760"/>
+            <a:off x="8125968" y="1325880"/>
+            <a:ext cx="3514344" cy="4937760"/>
           </a:xfrm>
           <a:prstGeom prst="roundRect">
             <a:avLst>
-              <a:gd name="adj" fmla="val 2025"/>
+              <a:gd name="adj" fmla="val 2082"/>
             </a:avLst>
           </a:prstGeom>
           <a:solidFill>
@@ -15836,8 +17192,8 @@
         </p:nvSpPr>
         <p:spPr>
           <a:xfrm>
-            <a:off x="8183880" y="1325880"/>
-            <a:ext cx="3611880" cy="109728"/>
+            <a:off x="8125968" y="1325880"/>
+            <a:ext cx="3514344" cy="109728"/>
           </a:xfrm>
           <a:prstGeom prst="rect">
             <a:avLst/>
@@ -15856,8 +17212,8 @@
         </p:nvSpPr>
         <p:spPr>
           <a:xfrm>
-            <a:off x="8458200" y="1554480"/>
-            <a:ext cx="3063240" cy="685800"/>
+            <a:off x="8400288" y="1554480"/>
+            <a:ext cx="2965704" cy="685800"/>
           </a:xfrm>
           <a:prstGeom prst="rect">
             <a:avLst/>
@@ -15897,8 +17253,8 @@
         </p:nvSpPr>
         <p:spPr>
           <a:xfrm>
-            <a:off x="8458200" y="2286000"/>
-            <a:ext cx="3063240" cy="3749040"/>
+            <a:off x="8400288" y="2286000"/>
+            <a:ext cx="2965704" cy="3749040"/>
           </a:xfrm>
           <a:prstGeom prst="rect">
             <a:avLst/>
@@ -15919,7 +17275,7 @@
               <a:buNone/>
             </a:pPr>
             <a:r>
-              <a:rPr lang="en-US" sz="1400" dirty="0">
+              <a:rPr lang="en-US" sz="1700" dirty="0">
                 <a:solidFill>
                   <a:srgbClr val="1F2937"/>
                 </a:solidFill>
@@ -15929,7 +17285,7 @@
               </a:rPr>
               <a:t>☐ Histórico de geração de 12 meses (faturas da UC da usina e monitoramento)</a:t>
             </a:r>
-            <a:endParaRPr lang="en-US" sz="1400" dirty="0"/>
+            <a:endParaRPr lang="en-US" sz="1700" dirty="0"/>
           </a:p>
           <a:p>
             <a:pPr indent="0" marL="0">
@@ -15939,7 +17295,7 @@
               <a:buNone/>
             </a:pPr>
             <a:r>
-              <a:rPr lang="en-US" sz="1400" dirty="0">
+              <a:rPr lang="en-US" sz="1700" dirty="0">
                 <a:solidFill>
                   <a:srgbClr val="1F2937"/>
                 </a:solidFill>
@@ -15949,7 +17305,7 @@
               </a:rPr>
               <a:t>☐ Geração real × projetada (desvio aceitável?)</a:t>
             </a:r>
-            <a:endParaRPr lang="en-US" sz="1400" dirty="0"/>
+            <a:endParaRPr lang="en-US" sz="1700" dirty="0"/>
           </a:p>
           <a:p>
             <a:pPr indent="0" marL="0">
@@ -15959,7 +17315,7 @@
               <a:buNone/>
             </a:pPr>
             <a:r>
-              <a:rPr lang="en-US" sz="1400" dirty="0">
+              <a:rPr lang="en-US" sz="1700" dirty="0">
                 <a:solidFill>
                   <a:srgbClr val="1F2937"/>
                 </a:solidFill>
@@ -15969,7 +17325,55 @@
               </a:rPr>
               <a:t>☐ Paradas e falhas registradas</a:t>
             </a:r>
-            <a:endParaRPr lang="en-US" sz="1400" dirty="0"/>
+            <a:endParaRPr lang="en-US" sz="1700" dirty="0"/>
+          </a:p>
+        </p:txBody>
+      </p:sp>
+      <p:sp>
+        <p:nvSpPr>
+          <p:cNvPr id="25" name="Slide Number Placeholder 0"/>
+          <p:cNvSpPr>
+            <a:spLocks noGrp="1"/>
+          </p:cNvSpPr>
+          <p:nvPr>
+            <p:ph type="sldNum" sz="quarter" idx="4294967295"/>
+          </p:nvPr>
+        </p:nvSpPr>
+        <p:spPr>
+          <a:xfrm>
+            <a:off x="11292840" y="6556248"/>
+            <a:ext cx="548640" cy="256032"/>
+          </a:xfrm>
+          <a:prstGeom prst="rect">
+            <a:avLst/>
+          </a:prstGeom>
+          <a:extLst>
+            <a:ext uri="{C572A759-6A51-4108-AA02-DFA0A04FC94B}">
+              <ma14:wrappingTextBoxFlag xmlns:ma14="http://schemas.microsoft.com/office/mac/drawingml/2011/main" val="0"/>
+            </a:ext>
+          </a:extLst>
+        </p:spPr>
+        <p:txBody>
+          <a:bodyPr/>
+          <a:lstStyle>
+            <a:lvl1pPr>
+              <a:defRPr sz="900">
+                <a:solidFill>
+                  <a:srgbClr val="1B3A6B"/>
+                </a:solidFill>
+                <a:latin typeface="Arial"/>
+                <a:ea typeface="Arial"/>
+                <a:cs typeface="Arial"/>
+              </a:defRPr>
+            </a:lvl1pPr>
+          </a:lstStyle>
+          <a:p>
+            <a:pPr algn="r"/>
+            <a:fld id="{F7021451-1387-4CA6-816F-3879F97B5CBC}" type="slidenum">
+              <a:rPr b="1" lang="en-US"/>
+              <a:t>7</a:t>
+            </a:fld>
+            <a:endParaRPr lang="en-US"/>
           </a:p>
         </p:txBody>
       </p:sp>
@@ -16046,7 +17450,7 @@
         </p:blipFill>
         <p:spPr>
           <a:xfrm>
-            <a:off x="411480" y="6547104"/>
+            <a:off x="548640" y="6547104"/>
             <a:ext cx="274320" cy="274320"/>
           </a:xfrm>
           <a:prstGeom prst="rect">
@@ -16062,7 +17466,7 @@
         </p:nvSpPr>
         <p:spPr>
           <a:xfrm>
-            <a:off x="749808" y="6528816"/>
+            <a:off x="886968" y="6528816"/>
             <a:ext cx="6400800" cy="310896"/>
           </a:xfrm>
           <a:prstGeom prst="rect">
@@ -16102,7 +17506,7 @@
         <p:spPr>
           <a:xfrm>
             <a:off x="7132320" y="6528816"/>
-            <a:ext cx="4663440" cy="310896"/>
+            <a:ext cx="4023360" cy="310896"/>
           </a:xfrm>
           <a:prstGeom prst="rect">
             <a:avLst/>
@@ -16140,7 +17544,7 @@
         </p:nvSpPr>
         <p:spPr>
           <a:xfrm>
-            <a:off x="411480" y="384048"/>
+            <a:off x="548640" y="384048"/>
             <a:ext cx="82296" cy="658368"/>
           </a:xfrm>
           <a:prstGeom prst="rect">
@@ -16160,7 +17564,7 @@
         </p:nvSpPr>
         <p:spPr>
           <a:xfrm>
-            <a:off x="640080" y="292608"/>
+            <a:off x="777240" y="292608"/>
             <a:ext cx="10972800" cy="274320"/>
           </a:xfrm>
           <a:prstGeom prst="rect">
@@ -16199,8 +17603,8 @@
         </p:nvSpPr>
         <p:spPr>
           <a:xfrm>
-            <a:off x="640080" y="530352"/>
-            <a:ext cx="11155680" cy="566928"/>
+            <a:off x="777240" y="530352"/>
+            <a:ext cx="10881360" cy="566928"/>
           </a:xfrm>
           <a:prstGeom prst="rect">
             <a:avLst/>
@@ -16240,8 +17644,8 @@
         </p:nvSpPr>
         <p:spPr>
           <a:xfrm>
-            <a:off x="411480" y="1325880"/>
-            <a:ext cx="5554980" cy="4937760"/>
+            <a:off x="548640" y="1325880"/>
+            <a:ext cx="5408676" cy="4937760"/>
           </a:xfrm>
           <a:prstGeom prst="roundRect">
             <a:avLst>
@@ -16274,8 +17678,8 @@
         </p:nvSpPr>
         <p:spPr>
           <a:xfrm>
-            <a:off x="411480" y="1325880"/>
-            <a:ext cx="5554980" cy="109728"/>
+            <a:off x="548640" y="1325880"/>
+            <a:ext cx="5408676" cy="109728"/>
           </a:xfrm>
           <a:prstGeom prst="rect">
             <a:avLst/>
@@ -16294,8 +17698,8 @@
         </p:nvSpPr>
         <p:spPr>
           <a:xfrm>
-            <a:off x="685800" y="1554480"/>
-            <a:ext cx="5006340" cy="685800"/>
+            <a:off x="822960" y="1554480"/>
+            <a:ext cx="4860036" cy="685800"/>
           </a:xfrm>
           <a:prstGeom prst="rect">
             <a:avLst/>
@@ -16335,8 +17739,8 @@
         </p:nvSpPr>
         <p:spPr>
           <a:xfrm>
-            <a:off x="685800" y="2286000"/>
-            <a:ext cx="5006340" cy="3749040"/>
+            <a:off x="822960" y="2286000"/>
+            <a:ext cx="4860036" cy="3749040"/>
           </a:xfrm>
           <a:prstGeom prst="rect">
             <a:avLst/>
@@ -16357,7 +17761,7 @@
               <a:buNone/>
             </a:pPr>
             <a:r>
-              <a:rPr lang="en-US" sz="1400" dirty="0">
+              <a:rPr lang="en-US" sz="1700" dirty="0">
                 <a:solidFill>
                   <a:srgbClr val="1F2937"/>
                 </a:solidFill>
@@ -16367,7 +17771,7 @@
               </a:rPr>
               <a:t>☐ Marca/modelo de módulos e inversores, garantias</a:t>
             </a:r>
-            <a:endParaRPr lang="en-US" sz="1400" dirty="0"/>
+            <a:endParaRPr lang="en-US" sz="1700" dirty="0"/>
           </a:p>
           <a:p>
             <a:pPr indent="0" marL="0">
@@ -16377,7 +17781,7 @@
               <a:buNone/>
             </a:pPr>
             <a:r>
-              <a:rPr lang="en-US" sz="1400" dirty="0">
+              <a:rPr lang="en-US" sz="1700" dirty="0">
                 <a:solidFill>
                   <a:srgbClr val="1F2937"/>
                 </a:solidFill>
@@ -16387,7 +17791,7 @@
               </a:rPr>
               <a:t>☐ Contrato de operação e manutenção (O&amp;M): limpeza, inspeção, tempo de resposta</a:t>
             </a:r>
-            <a:endParaRPr lang="en-US" sz="1400" dirty="0"/>
+            <a:endParaRPr lang="en-US" sz="1700" dirty="0"/>
           </a:p>
           <a:p>
             <a:pPr indent="0" marL="0">
@@ -16397,7 +17801,7 @@
               <a:buNone/>
             </a:pPr>
             <a:r>
-              <a:rPr lang="en-US" sz="1400" dirty="0">
+              <a:rPr lang="en-US" sz="1700" dirty="0">
                 <a:solidFill>
                   <a:srgbClr val="1F2937"/>
                 </a:solidFill>
@@ -16407,7 +17811,7 @@
               </a:rPr>
               <a:t>☐ Seguro (riscos, roubo, responsabilidade civil)</a:t>
             </a:r>
-            <a:endParaRPr lang="en-US" sz="1400" dirty="0"/>
+            <a:endParaRPr lang="en-US" sz="1700" dirty="0"/>
           </a:p>
           <a:p>
             <a:pPr indent="0" marL="0">
@@ -16417,7 +17821,7 @@
               <a:buNone/>
             </a:pPr>
             <a:r>
-              <a:rPr lang="en-US" sz="1400" dirty="0">
+              <a:rPr lang="en-US" sz="1700" dirty="0">
                 <a:solidFill>
                   <a:srgbClr val="1F2937"/>
                 </a:solidFill>
@@ -16427,7 +17831,7 @@
               </a:rPr>
               <a:t>☐ ART/projeto e as-built</a:t>
             </a:r>
-            <a:endParaRPr lang="en-US" sz="1400" dirty="0"/>
+            <a:endParaRPr lang="en-US" sz="1700" dirty="0"/>
           </a:p>
         </p:txBody>
       </p:sp>
@@ -16439,8 +17843,8 @@
         </p:nvSpPr>
         <p:spPr>
           <a:xfrm>
-            <a:off x="6240780" y="1325880"/>
-            <a:ext cx="5554980" cy="4937760"/>
+            <a:off x="6231636" y="1325880"/>
+            <a:ext cx="5408676" cy="4937760"/>
           </a:xfrm>
           <a:prstGeom prst="roundRect">
             <a:avLst>
@@ -16473,8 +17877,8 @@
         </p:nvSpPr>
         <p:spPr>
           <a:xfrm>
-            <a:off x="6240780" y="1325880"/>
-            <a:ext cx="5554980" cy="109728"/>
+            <a:off x="6231636" y="1325880"/>
+            <a:ext cx="5408676" cy="109728"/>
           </a:xfrm>
           <a:prstGeom prst="rect">
             <a:avLst/>
@@ -16493,8 +17897,8 @@
         </p:nvSpPr>
         <p:spPr>
           <a:xfrm>
-            <a:off x="6515100" y="1554480"/>
-            <a:ext cx="5006340" cy="685800"/>
+            <a:off x="6505956" y="1554480"/>
+            <a:ext cx="4860036" cy="685800"/>
           </a:xfrm>
           <a:prstGeom prst="rect">
             <a:avLst/>
@@ -16534,8 +17938,8 @@
         </p:nvSpPr>
         <p:spPr>
           <a:xfrm>
-            <a:off x="6515100" y="2286000"/>
-            <a:ext cx="5006340" cy="3749040"/>
+            <a:off x="6505956" y="2286000"/>
+            <a:ext cx="4860036" cy="3749040"/>
           </a:xfrm>
           <a:prstGeom prst="rect">
             <a:avLst/>
@@ -16556,7 +17960,7 @@
               <a:buNone/>
             </a:pPr>
             <a:r>
-              <a:rPr lang="en-US" sz="1400" dirty="0">
+              <a:rPr lang="en-US" sz="1700" dirty="0">
                 <a:solidFill>
                   <a:srgbClr val="1F2937"/>
                 </a:solidFill>
@@ -16566,7 +17970,7 @@
               </a:rPr>
               <a:t>☐ Créditos/contratos atuais (há clientes? há outra gestora?)</a:t>
             </a:r>
-            <a:endParaRPr lang="en-US" sz="1400" dirty="0"/>
+            <a:endParaRPr lang="en-US" sz="1700" dirty="0"/>
           </a:p>
           <a:p>
             <a:pPr indent="0" marL="0">
@@ -16576,7 +17980,7 @@
               <a:buNone/>
             </a:pPr>
             <a:r>
-              <a:rPr lang="en-US" sz="1400" dirty="0">
+              <a:rPr lang="en-US" sz="1700" dirty="0">
                 <a:solidFill>
                   <a:srgbClr val="1F2937"/>
                 </a:solidFill>
@@ -16586,7 +17990,7 @@
               </a:rPr>
               <a:t>☐ Expectativa do produtor (R$/mês, prazo, fixo × variável)</a:t>
             </a:r>
-            <a:endParaRPr lang="en-US" sz="1400" dirty="0"/>
+            <a:endParaRPr lang="en-US" sz="1700" dirty="0"/>
           </a:p>
           <a:p>
             <a:pPr indent="0" marL="0">
@@ -16596,7 +18000,7 @@
               <a:buNone/>
             </a:pPr>
             <a:r>
-              <a:rPr lang="en-US" sz="1400" dirty="0">
+              <a:rPr lang="en-US" sz="1700" dirty="0">
                 <a:solidFill>
                   <a:srgbClr val="1F2937"/>
                 </a:solidFill>
@@ -16606,7 +18010,7 @@
               </a:rPr>
               <a:t>☐ Situação do produtor (dívidas, litígios, sucessão)</a:t>
             </a:r>
-            <a:endParaRPr lang="en-US" sz="1400" dirty="0"/>
+            <a:endParaRPr lang="en-US" sz="1700" dirty="0"/>
           </a:p>
           <a:p>
             <a:pPr indent="0" marL="0">
@@ -16616,7 +18020,7 @@
               <a:buNone/>
             </a:pPr>
             <a:r>
-              <a:rPr lang="en-US" sz="1400" dirty="0">
+              <a:rPr lang="en-US" sz="1700" dirty="0">
                 <a:solidFill>
                   <a:srgbClr val="1F2937"/>
                 </a:solidFill>
@@ -16626,7 +18030,55 @@
               </a:rPr>
               <a:t>☐ Decisão: aprovar · aprovar com condições · recusar</a:t>
             </a:r>
-            <a:endParaRPr lang="en-US" sz="1400" dirty="0"/>
+            <a:endParaRPr lang="en-US" sz="1700" dirty="0"/>
+          </a:p>
+        </p:txBody>
+      </p:sp>
+      <p:sp>
+        <p:nvSpPr>
+          <p:cNvPr id="25" name="Slide Number Placeholder 0"/>
+          <p:cNvSpPr>
+            <a:spLocks noGrp="1"/>
+          </p:cNvSpPr>
+          <p:nvPr>
+            <p:ph type="sldNum" sz="quarter" idx="4294967295"/>
+          </p:nvPr>
+        </p:nvSpPr>
+        <p:spPr>
+          <a:xfrm>
+            <a:off x="11292840" y="6556248"/>
+            <a:ext cx="548640" cy="256032"/>
+          </a:xfrm>
+          <a:prstGeom prst="rect">
+            <a:avLst/>
+          </a:prstGeom>
+          <a:extLst>
+            <a:ext uri="{C572A759-6A51-4108-AA02-DFA0A04FC94B}">
+              <ma14:wrappingTextBoxFlag xmlns:ma14="http://schemas.microsoft.com/office/mac/drawingml/2011/main" val="0"/>
+            </a:ext>
+          </a:extLst>
+        </p:spPr>
+        <p:txBody>
+          <a:bodyPr/>
+          <a:lstStyle>
+            <a:lvl1pPr>
+              <a:defRPr sz="900">
+                <a:solidFill>
+                  <a:srgbClr val="1B3A6B"/>
+                </a:solidFill>
+                <a:latin typeface="Arial"/>
+                <a:ea typeface="Arial"/>
+                <a:cs typeface="Arial"/>
+              </a:defRPr>
+            </a:lvl1pPr>
+          </a:lstStyle>
+          <a:p>
+            <a:pPr algn="r"/>
+            <a:fld id="{F7021451-1387-4CA6-816F-3879F97B5CBC}" type="slidenum">
+              <a:rPr b="1" lang="en-US"/>
+              <a:t>8</a:t>
+            </a:fld>
+            <a:endParaRPr lang="en-US"/>
           </a:p>
         </p:txBody>
       </p:sp>
@@ -16703,7 +18155,7 @@
         </p:blipFill>
         <p:spPr>
           <a:xfrm>
-            <a:off x="411480" y="6547104"/>
+            <a:off x="548640" y="6547104"/>
             <a:ext cx="274320" cy="274320"/>
           </a:xfrm>
           <a:prstGeom prst="rect">
@@ -16719,7 +18171,7 @@
         </p:nvSpPr>
         <p:spPr>
           <a:xfrm>
-            <a:off x="749808" y="6528816"/>
+            <a:off x="886968" y="6528816"/>
             <a:ext cx="6400800" cy="310896"/>
           </a:xfrm>
           <a:prstGeom prst="rect">
@@ -16759,7 +18211,7 @@
         <p:spPr>
           <a:xfrm>
             <a:off x="7132320" y="6528816"/>
-            <a:ext cx="4663440" cy="310896"/>
+            <a:ext cx="4023360" cy="310896"/>
           </a:xfrm>
           <a:prstGeom prst="rect">
             <a:avLst/>
@@ -16797,7 +18249,7 @@
         </p:nvSpPr>
         <p:spPr>
           <a:xfrm>
-            <a:off x="411480" y="384048"/>
+            <a:off x="548640" y="384048"/>
             <a:ext cx="82296" cy="658368"/>
           </a:xfrm>
           <a:prstGeom prst="rect">
@@ -16817,7 +18269,7 @@
         </p:nvSpPr>
         <p:spPr>
           <a:xfrm>
-            <a:off x="640080" y="292608"/>
+            <a:off x="777240" y="292608"/>
             <a:ext cx="10972800" cy="274320"/>
           </a:xfrm>
           <a:prstGeom prst="rect">
@@ -16856,8 +18308,8 @@
         </p:nvSpPr>
         <p:spPr>
           <a:xfrm>
-            <a:off x="640080" y="530352"/>
-            <a:ext cx="11155680" cy="566928"/>
+            <a:off x="777240" y="530352"/>
+            <a:ext cx="10881360" cy="566928"/>
           </a:xfrm>
           <a:prstGeom prst="rect">
             <a:avLst/>
@@ -16897,8 +18349,8 @@
         </p:nvSpPr>
         <p:spPr>
           <a:xfrm>
-            <a:off x="411480" y="1325880"/>
-            <a:ext cx="3642360" cy="2331720"/>
+            <a:off x="548640" y="1325880"/>
+            <a:ext cx="3544824" cy="2331720"/>
           </a:xfrm>
           <a:prstGeom prst="roundRect">
             <a:avLst>
@@ -16931,7 +18383,7 @@
         </p:nvSpPr>
         <p:spPr>
           <a:xfrm>
-            <a:off x="594360" y="1508760"/>
+            <a:off x="731520" y="1508760"/>
             <a:ext cx="457200" cy="457200"/>
           </a:xfrm>
           <a:prstGeom prst="ellipse">
@@ -16951,7 +18403,7 @@
         </p:nvSpPr>
         <p:spPr>
           <a:xfrm>
-            <a:off x="594360" y="1508760"/>
+            <a:off x="731520" y="1508760"/>
             <a:ext cx="457200" cy="457200"/>
           </a:xfrm>
           <a:prstGeom prst="rect">
@@ -16990,8 +18442,8 @@
         </p:nvSpPr>
         <p:spPr>
           <a:xfrm>
-            <a:off x="1188720" y="1435608"/>
-            <a:ext cx="2727960" cy="2112264"/>
+            <a:off x="1325880" y="1435608"/>
+            <a:ext cx="2630424" cy="2112264"/>
           </a:xfrm>
           <a:prstGeom prst="rect">
             <a:avLst/>
@@ -17031,8 +18483,8 @@
         </p:nvSpPr>
         <p:spPr>
           <a:xfrm>
-            <a:off x="4282440" y="1325880"/>
-            <a:ext cx="3642360" cy="2331720"/>
+            <a:off x="4322064" y="1325880"/>
+            <a:ext cx="3544824" cy="2331720"/>
           </a:xfrm>
           <a:prstGeom prst="roundRect">
             <a:avLst>
@@ -17065,7 +18517,7 @@
         </p:nvSpPr>
         <p:spPr>
           <a:xfrm>
-            <a:off x="4465320" y="1508760"/>
+            <a:off x="4504944" y="1508760"/>
             <a:ext cx="457200" cy="457200"/>
           </a:xfrm>
           <a:prstGeom prst="ellipse">
@@ -17085,7 +18537,7 @@
         </p:nvSpPr>
         <p:spPr>
           <a:xfrm>
-            <a:off x="4465320" y="1508760"/>
+            <a:off x="4504944" y="1508760"/>
             <a:ext cx="457200" cy="457200"/>
           </a:xfrm>
           <a:prstGeom prst="rect">
@@ -17124,8 +18576,8 @@
         </p:nvSpPr>
         <p:spPr>
           <a:xfrm>
-            <a:off x="5059680" y="1435608"/>
-            <a:ext cx="2727960" cy="2112264"/>
+            <a:off x="5099304" y="1435608"/>
+            <a:ext cx="2630424" cy="2112264"/>
           </a:xfrm>
           <a:prstGeom prst="rect">
             <a:avLst/>
@@ -17165,8 +18617,8 @@
         </p:nvSpPr>
         <p:spPr>
           <a:xfrm>
-            <a:off x="8153400" y="1325880"/>
-            <a:ext cx="3642360" cy="2331720"/>
+            <a:off x="8095488" y="1325880"/>
+            <a:ext cx="3544824" cy="2331720"/>
           </a:xfrm>
           <a:prstGeom prst="roundRect">
             <a:avLst>
@@ -17199,7 +18651,7 @@
         </p:nvSpPr>
         <p:spPr>
           <a:xfrm>
-            <a:off x="8336280" y="1508760"/>
+            <a:off x="8278368" y="1508760"/>
             <a:ext cx="457200" cy="457200"/>
           </a:xfrm>
           <a:prstGeom prst="ellipse">
@@ -17219,7 +18671,7 @@
         </p:nvSpPr>
         <p:spPr>
           <a:xfrm>
-            <a:off x="8336280" y="1508760"/>
+            <a:off x="8278368" y="1508760"/>
             <a:ext cx="457200" cy="457200"/>
           </a:xfrm>
           <a:prstGeom prst="rect">
@@ -17258,8 +18710,8 @@
         </p:nvSpPr>
         <p:spPr>
           <a:xfrm>
-            <a:off x="8930640" y="1435608"/>
-            <a:ext cx="2727960" cy="2112264"/>
+            <a:off x="8872728" y="1435608"/>
+            <a:ext cx="2630424" cy="2112264"/>
           </a:xfrm>
           <a:prstGeom prst="rect">
             <a:avLst/>
@@ -17299,8 +18751,8 @@
         </p:nvSpPr>
         <p:spPr>
           <a:xfrm>
-            <a:off x="411480" y="3886200"/>
-            <a:ext cx="3642360" cy="2331720"/>
+            <a:off x="548640" y="3886200"/>
+            <a:ext cx="3544824" cy="2331720"/>
           </a:xfrm>
           <a:prstGeom prst="roundRect">
             <a:avLst>
@@ -17333,7 +18785,7 @@
         </p:nvSpPr>
         <p:spPr>
           <a:xfrm>
-            <a:off x="594360" y="4069080"/>
+            <a:off x="731520" y="4069080"/>
             <a:ext cx="457200" cy="457200"/>
           </a:xfrm>
           <a:prstGeom prst="ellipse">
@@ -17353,7 +18805,7 @@
         </p:nvSpPr>
         <p:spPr>
           <a:xfrm>
-            <a:off x="594360" y="4069080"/>
+            <a:off x="731520" y="4069080"/>
             <a:ext cx="457200" cy="457200"/>
           </a:xfrm>
           <a:prstGeom prst="rect">
@@ -17392,8 +18844,8 @@
         </p:nvSpPr>
         <p:spPr>
           <a:xfrm>
-            <a:off x="1188720" y="3995928"/>
-            <a:ext cx="2727960" cy="2112264"/>
+            <a:off x="1325880" y="3995928"/>
+            <a:ext cx="2630424" cy="2112264"/>
           </a:xfrm>
           <a:prstGeom prst="rect">
             <a:avLst/>
@@ -17433,8 +18885,8 @@
         </p:nvSpPr>
         <p:spPr>
           <a:xfrm>
-            <a:off x="4282440" y="3886200"/>
-            <a:ext cx="3642360" cy="2331720"/>
+            <a:off x="4322064" y="3886200"/>
+            <a:ext cx="3544824" cy="2331720"/>
           </a:xfrm>
           <a:prstGeom prst="roundRect">
             <a:avLst>
@@ -17467,7 +18919,7 @@
         </p:nvSpPr>
         <p:spPr>
           <a:xfrm>
-            <a:off x="4465320" y="4069080"/>
+            <a:off x="4504944" y="4069080"/>
             <a:ext cx="457200" cy="457200"/>
           </a:xfrm>
           <a:prstGeom prst="ellipse">
@@ -17487,7 +18939,7 @@
         </p:nvSpPr>
         <p:spPr>
           <a:xfrm>
-            <a:off x="4465320" y="4069080"/>
+            <a:off x="4504944" y="4069080"/>
             <a:ext cx="457200" cy="457200"/>
           </a:xfrm>
           <a:prstGeom prst="rect">
@@ -17526,8 +18978,8 @@
         </p:nvSpPr>
         <p:spPr>
           <a:xfrm>
-            <a:off x="5059680" y="3995928"/>
-            <a:ext cx="2727960" cy="2112264"/>
+            <a:off x="5099304" y="3995928"/>
+            <a:ext cx="2630424" cy="2112264"/>
           </a:xfrm>
           <a:prstGeom prst="rect">
             <a:avLst/>
@@ -17556,6 +19008,54 @@
               <a:t>comercial</a:t>
             </a:r>
             <a:endParaRPr lang="en-US" sz="1800" dirty="0"/>
+          </a:p>
+        </p:txBody>
+      </p:sp>
+      <p:sp>
+        <p:nvSpPr>
+          <p:cNvPr id="25" name="Slide Number Placeholder 0"/>
+          <p:cNvSpPr>
+            <a:spLocks noGrp="1"/>
+          </p:cNvSpPr>
+          <p:nvPr>
+            <p:ph type="sldNum" sz="quarter" idx="4294967295"/>
+          </p:nvPr>
+        </p:nvSpPr>
+        <p:spPr>
+          <a:xfrm>
+            <a:off x="11292840" y="6556248"/>
+            <a:ext cx="548640" cy="256032"/>
+          </a:xfrm>
+          <a:prstGeom prst="rect">
+            <a:avLst/>
+          </a:prstGeom>
+          <a:extLst>
+            <a:ext uri="{C572A759-6A51-4108-AA02-DFA0A04FC94B}">
+              <ma14:wrappingTextBoxFlag xmlns:ma14="http://schemas.microsoft.com/office/mac/drawingml/2011/main" val="0"/>
+            </a:ext>
+          </a:extLst>
+        </p:spPr>
+        <p:txBody>
+          <a:bodyPr/>
+          <a:lstStyle>
+            <a:lvl1pPr>
+              <a:defRPr sz="900">
+                <a:solidFill>
+                  <a:srgbClr val="1B3A6B"/>
+                </a:solidFill>
+                <a:latin typeface="Arial"/>
+                <a:ea typeface="Arial"/>
+                <a:cs typeface="Arial"/>
+              </a:defRPr>
+            </a:lvl1pPr>
+          </a:lstStyle>
+          <a:p>
+            <a:pPr algn="r"/>
+            <a:fld id="{F7021451-1387-4CA6-816F-3879F97B5CBC}" type="slidenum">
+              <a:rPr b="1" lang="en-US"/>
+              <a:t>9</a:t>
+            </a:fld>
+            <a:endParaRPr lang="en-US"/>
           </a:p>
         </p:txBody>
       </p:sp>

--- a/docs/curso/slides/m04-usinas-e-produtores.pptx
+++ b/docs/curso/slides/m04-usinas-e-produtores.pptx
@@ -31,9 +31,13 @@
     <p:sldId id="279" r:id="rId25"/>
     <p:sldId id="280" r:id="rId26"/>
     <p:sldId id="281" r:id="rId27"/>
+    <p:sldId id="282" r:id="rId28"/>
+    <p:sldId id="283" r:id="rId29"/>
+    <p:sldId id="284" r:id="rId30"/>
+    <p:sldId id="285" r:id="rId31"/>
   </p:sldIdLst>
   <p:notesMasterIdLst>
-    <p:notesMasterId r:id="rId28"/>
+    <p:notesMasterId r:id="rId32"/>
   </p:notesMasterIdLst>
   <p:sldSz cx="12192000" cy="6858000"/>
   <p:notesSz cx="6858000" cy="12192000"/>
@@ -703,7 +707,7 @@
           <a:p>
             <a:r>
               <a:rPr lang="en-US" dirty="0"/>
-              <a:t>Vamos ler a proposta da usina Sol Nascente I. Ela parte da média de geração mensal, sessenta mil quilowatts-hora, que dá setecentos e vinte mil por ano. Usa a tarifa GD da distribuidora, aquele valor do crédito que você cadastrou no módulo 2: sessenta e oito centavos. Mostra a redução para o consumidor, vinte por cento, e a taxa de administração, quinze por cento. Daí sai o valor pago ao produtor por quilowatt-hora: quarenta e quatro centavos e dois décimos. A proposta também mostra o pagamento anual bruto, que é toda a geração multiplicada pelo valor do crédito, e o líquido, depois da taxa de administração. E o número que o produtor mais quer ver: o pagamento mensal previsto, vinte e seis mil, quinhentos e vinte reais. Uma atenção: o pagamento mensal previsto já desconta o desconto dado aos clientes e a taxa de administração. É ele que deve ser comparado com a expectativa do produtor. Repare que o pagamento anual líquido da proposta desconta só a taxa de administração, e não o desconto dos clientes; por isso ele é maior do que doze vezes o mensal previsto. Na reunião, mostre ao produtor o mensal previsto vezes doze — trezentos e dezoito mil, duzentos e quarenta reais por ano — como a renda esperada com a usina cheia, para não gerar expectativa errada.</a:t>
+              <a:t>O número que importa ao produtor é o pagamento mensal previsto, que já desconta o desconto dos clientes e a taxa de administração. Mostre o mensal vezes doze como a renda com a usina cheia, para não gerar expectativa errada.</a:t>
             </a:r>
             <a:endParaRPr lang="en-US" dirty="0"/>
           </a:p>
@@ -791,7 +795,7 @@
           <a:p>
             <a:r>
               <a:rPr lang="en-US" dirty="0"/>
-              <a:t>Fora dos números, seis pontos são negociados. O prazo: contratos de cinco a dez anos são comuns, e prazos mais longos dão segurança para você investir na carteira de clientes. A forma do aluguel: variável, fixo ou misto, como vimos no módulo 3. O ramp-up: nenhuma usina enche no primeiro dia. Combine um período, por exemplo seis meses, em que o produtor recebe apenas pela energia efetivamente alocada; e apresente o seu plano comercial para esse período. Quem paga a manutenção e o seguro: normalmente o produtor, como dono do ativo, mas há modelos em que a gestora contrata e desconta. O reajuste: o repasse acompanha automaticamente o valor do crédito, que muda com a tarifa e o Fio B; deixe isso claro, com a cláusula de reequilíbrio. E a saída: o que acontece se uma das partes quiser encerrar antes, com aviso prévio e um plano de transição dos clientes — os clientes não podem ficar sem energia de um mês para o outro.</a:t>
+              <a:t>Seis pontos se negociam fora dos números, listados na tela. O mais esquecido é o ramp-up: nenhuma usina enche no primeiro dia, e isso precisa estar combinado.</a:t>
             </a:r>
             <a:endParaRPr lang="en-US" dirty="0"/>
           </a:p>
@@ -879,7 +883,7 @@
           <a:p>
             <a:r>
               <a:rPr lang="en-US" dirty="0"/>
-              <a:t>Algumas objeções vão aparecer. "Outra gestora paga mais por quilowatt-hora." Peça para comparar o líquido mensal, depois de todas as taxas, e pergunte sobre a ocupação real e a inadimplência das usinas dela: pagar muito por quilowatt-hora numa usina meio vazia rende menos. "Quero aluguel fixo." Possível, mas com um valor menor, porque você está assumindo o risco; ou proponha um modelo misto. "E se a usina não encher?" Mostre o seu plano comercial, com metas mensais de alocação. "Como vou saber o que está acontecendo?" Mostre o portal do produtor, com geração e usina. Transparência fecha contrato.</a:t>
+              <a:t>Para as objeções, compare sempre o líquido mensal e mostre o seu plano comercial e a transparência do portal.</a:t>
             </a:r>
             <a:endParaRPr lang="en-US" dirty="0"/>
           </a:p>
@@ -967,7 +971,7 @@
           <a:p>
             <a:r>
               <a:rPr lang="en-US" dirty="0"/>
-              <a:t>Resumindo: a proposta mostra geração, valor do crédito, desconto do consumidor, taxa de administração e o pagamento mensal previsto. Fora dela, negocie prazo, forma do aluguel, ramp-up, manutenção e seguro, reajuste e saída. No laboratório da aula 5, você vai gerar essa proposta na plataforma. Antes, na próxima aula, as sete etapas para colocar a usina em operação depois do sim do produtor.</a:t>
+              <a:t/>
             </a:r>
             <a:endParaRPr lang="en-US" dirty="0"/>
           </a:p>
@@ -1143,7 +1147,7 @@
           <a:p>
             <a:r>
               <a:rPr lang="en-US" dirty="0"/>
-              <a:t>Etapa um: análise de documentos. É a due diligence da aula 2, com o checklist preenchido e a decisão formal de aprovar. Etapa dois: assinatura do contrato entre o produtor e a sua empresa, com os pontos negociados: prazo, remuneração, ramp-up, manutenção, saída. Etapa três: ficha de inscrição. O produtor, ou a usina, é inscrito na entidade que vai deter a usina — o consórcio, a cooperativa ou a associação —, com os dados cadastrais. Etapa quatro: contrato de adesão à entidade, formalizando a participação conforme o estatuto ou o contrato da entidade. Etapa cinco: contrato de aluguel, ou de locação, da usina para a entidade. É ele que dá à entidade o direito de usar a usina e que define o pagamento ao produtor. Etapa seis: troca de titularidade da unidade consumidora da usina na distribuidora, que passa a ficar em nome da entidade. Sem essa etapa, a entidade não pode informar a lista de rateio, e os créditos não chegam aos seus clientes. É a etapa que mais demora, porque depende da distribuidora: acompanhe o protocolo e os prazos. E etapa sete: concluído. A usina está pronta para receber a lista de rateio com os clientes. Atenção: a ordem e os nomes podem variar conforme a estrutura jurídica que você escolheu e o procedimento da sua distribuidora; o seu advogado ajusta essa sequência ao seu caso.</a:t>
+              <a:t>Das sete etapas da tela, a mais sensível é a troca de titularidade: sem ela, a entidade não informa o rateio e os créditos não chegam aos clientes. Acompanhe o protocolo de perto. A sequência exata depende da sua estrutura jurídica e da distribuidora.</a:t>
             </a:r>
             <a:endParaRPr lang="en-US" dirty="0"/>
           </a:p>
@@ -1231,7 +1235,7 @@
           <a:p>
             <a:r>
               <a:rPr lang="en-US" dirty="0"/>
-              <a:t>Posso começar a vender enquanto a usina está no onboarding? Pode, se for honesto com o cliente sobre a data prevista de início dos créditos e se o contrato prever isso. O que não pode é incluir clientes no rateio antes da troca de titularidade estar concluída — simplesmente não vai funcionar. A pré-venda bem feita encurta o ramp-up da usina.</a:t>
+              <a:t>Você pode fazer pré-venda durante o onboarding, com data honesta. Mas o cliente só entra no rateio depois da etapa sete.</a:t>
             </a:r>
             <a:endParaRPr lang="en-US" dirty="0"/>
           </a:p>
@@ -1319,7 +1323,7 @@
           <a:p>
             <a:r>
               <a:rPr lang="en-US" dirty="0"/>
-              <a:t>Na plataforma, essas etapas estão no quadro de onboarding, em Usinas Solar, Onboarding de Usinas. Cada usina é um cartão, com o produtor, a potência e a distribuidora. Toda usina nova cadastrada entra automaticamente na primeira coluna, análise de documentos. Conforme as etapas são concluídas, você arrasta o cartão para a coluna seguinte — ou, se preferir, usa o seletor "mover para" do próprio cartão. Cada cartão mostra há quantos dias está naquela etapa, e o que passa de duas semanas parado fica em destaque, para ninguém esquecer. As usinas concluídas ficam visíveis por trinta dias e depois saem do quadro. Numa reunião semanal, esse quadro mostra de relance onde cada usina está travada e o que precisa ser cobrado de quem.</a:t>
+              <a:t>Usinas Solar → Onboarding de Usinas cada usina é um cartão arraste para avançar parada há mais de 14 dias = destaque</a:t>
             </a:r>
             <a:endParaRPr lang="en-US" dirty="0"/>
           </a:p>
@@ -1407,7 +1411,7 @@
           <a:p>
             <a:r>
               <a:rPr lang="en-US" dirty="0"/>
-              <a:t>Resumindo: são sete etapas, da análise de documentos até a usina concluída, e a troca de titularidade é a mais sensível. Nas próximas duas aulas, você vai para o laboratório cadastrar o produtor, a proposta e a usina.</a:t>
+              <a:t/>
             </a:r>
             <a:endParaRPr lang="en-US" dirty="0"/>
           </a:p>
@@ -1671,10 +1675,10 @@
           <a:p>
             <a:r>
               <a:rPr lang="en-US" dirty="0"/>
-              <a:t>Abra Produtores Solar e depois Produtores. Clique para cadastrar um novo produtor. Escolha pessoa física ou jurídica. Informe o CPF ou o CNPJ — use os documentos fictícios da lista do curso, porque a plataforma valida os dígitos verificadores. Preencha o nome, o celular e o e-mail, e escolha o consultor responsável. Salve. Repare em duas coisas. O produtor recebeu um código, a letra P seguida de um número, e entrou com o status de prospect. E a plataforma já criou para ele a regra de taxa de administração com o padrão que você configurou no módulo 3, de quinze por cento.
-Agora, teste: tente cadastrar outro produtor com o mesmo CPF. A plataforma avisa que o produtor já existe e reaproveita o cadastro. Isso evita um problema clássico de empresas com vários vendedores: dois consultores cadastrando o mesmo produtor e brigando pela comissão, ou duas propostas diferentes para a mesma pessoa.
-Agora abra Produtores Solar, Propostas, e crie uma nova proposta. Selecione o produtor que você acabou de cadastrar. Escolha a concessionária: é dela que vem o valor do crédito, a tarifa GD que você cadastrou no módulo 2. Informe a potência da usina, quinhentos kWp, e a média de geração mensal, sessenta mil quilowatts-hora. Informe o prazo de locação e o endereço da usina. Salve e abra a proposta. Aqui estão os números da aula 3: o valor do crédito, a redução para o consumidor, a dedução de operacionalização — que é a taxa de administração —, o valor pago ao produtor por quilowatt-hora, os pagamentos anuais e o pagamento mensal previsto. Confira se batem com a sua calculadora. Se não baterem, verifique a tarifa GD da concessionária e as configurações padrão.
-Clique para gerar o PDF. A proposta sai com a identidade visual da sua empresa: capa com a receita mensal, a composição do quilowatt-hora — mostrando para o produtor, com transparência, quanto vai para o cliente, quanto para a gestão e quanto para ele —, a projeção de receita ao longo dos anos e as condições. O link do PDF expira depois de algumas horas, por segurança: baixe o arquivo para enviar. Esse documento é o que você leva para a reunião com o produtor.</a:t>
+              <a:t>Em Produtores Solar, Produtores, crie o produtor: tipo de pessoa, CPF ou CNPJ da lista do curso, nome, contatos e consultor.
+Tente cadastrar o mesmo CPF de novo: a plataforma reaproveita o cadastro e evita duplicidade.
+Em Produtores Solar, Propostas, crie a proposta: produtor, concessionária, potência, média de geração e prazo. Confira os números com a calculadora.
+Gere o PDF: capa com receita mensal, composição do kWh, projeção e condições, na marca da sua empresa.</a:t>
             </a:r>
             <a:endParaRPr lang="en-US" dirty="0"/>
           </a:p>
@@ -1938,10 +1942,10 @@
           <a:p>
             <a:r>
               <a:rPr lang="en-US" dirty="0"/>
-              <a:t>Abra Usinas Solar, Usinas, e cadastre uma nova usina. Dê um nome — por exemplo, o nome da sua empresa seguido de "Usina um". Em Produtor Proprietário, busque o produtor que você cadastrou na aula anterior. Esse campo é obrigatório: na plataforma, toda usina pertence a um produtor. Em Consultor Responsável, escolha o consultor que cuida dessa usina; ele também é obrigatório. Escolha a concessionária — a mesma em que os seus clientes vão estar. O grupo de usina é opcional e serve para agrupar usinas, por exemplo por região ou por entidade. Preencha a potência, a média de geração, o prazo de locação e, se tiver, os dados de inversores e módulos, que ajudam a manutenção. E o status: enquanto a usina estiver no onboarding, deixe num status que indique isso; quando concluir as sete etapas, marque como ativa. Salve.
-Agora, a geração. Abra Usinas Solar, Geração Mensal, e crie um registro. Escolha a usina, o ano e o mês. São quatro números. Energia gerada, a que os inversores produziram. Energia injetada, a que a distribuidora mediu entrando na rede — é a base dos créditos. Energia compensada, a que efetivamente abateu o consumo dos clientes no mês. E energia disponível para alocação: quanto você considera que essa usina pode distribuir entre os clientes. Esse último número é o mais importante para a operação, porque, ao salvar, ele passa a ser a energia disponível da usina, usada para controlar quanto ainda pode ser vendido. Use um número conservador: a média, não o melhor mês. Para o exercício, registre três meses, com gerações um pouco diferentes, para simular a sazonalidade. Repare na opção de avisar o produtor por WhatsApp: na operação real, ela gera uma mensagem pronta para o produtor saber a geração do mês. No laboratório, deixe desmarcada.
-Abra agora Usinas Solar, Gestão de Energia. Aqui você vê, para cada usina, a energia disponível, a energia já alocada aos clientes e o saldo. Como você ainda não tem clientes vinculados, a alocada é zero e o saldo é toda a energia disponível. Este é o painel que o seu time comercial vai olhar todos os dias: o saldo é o que ainda pode ser vendido. E a plataforma protege você de duas formas: ela não deixa vincular a um cliente mais energia do que o saldo da usina; e, se depois a geração cair e a energia já alocada passar da disponível, a varredura de alertas acusa um alerta crítico. Vamos testar as duas coisas de propósito no módulo 6.
-Troque para o perfil Produtor. É isso que o dono da usina vê: a usina e o histórico de geração que você acabou de registrar. Toda vez que você registra a geração do mês, o produtor passa a ver. É a transparência que você prometeu na proposta.</a:t>
+              <a:t>Em Usinas Solar, Usinas, cadastre a usina com produtor, consultor e concessionária obrigatórios, potência e média de geração.
+Em Geração Mensal, registre três meses. A energia disponível para alocação passa a ser a da usina: use um valor conservador.
+Em Gestão de Energia, veja disponível, alocada e saldo. A plataforma não deixa vincular acima do saldo.
+Troque para Produtor e confira a usina e a geração no portal.</a:t>
             </a:r>
             <a:endParaRPr lang="en-US" dirty="0"/>
           </a:p>
@@ -2159,6 +2163,270 @@
 </p:notes>
 </file>
 
+<file path=ppt/notesSlides/notesSlide27.xml><?xml version="1.0" encoding="utf-8"?>
+<p:notes xmlns:a="http://schemas.openxmlformats.org/drawingml/2006/main" xmlns:r="http://schemas.openxmlformats.org/officeDocument/2006/relationships" xmlns:p="http://schemas.openxmlformats.org/presentationml/2006/main">
+  <p:cSld>
+    <p:spTree>
+      <p:nvGrpSpPr>
+        <p:cNvPr id="1" name=""/>
+        <p:cNvGrpSpPr/>
+        <p:nvPr/>
+      </p:nvGrpSpPr>
+      <p:grpSpPr>
+        <a:xfrm>
+          <a:off x="0" y="0"/>
+          <a:ext cx="0" cy="0"/>
+          <a:chOff x="0" y="0"/>
+          <a:chExt cx="0" cy="0"/>
+        </a:xfrm>
+      </p:grpSpPr>
+      <p:sp>
+        <p:nvSpPr>
+          <p:cNvPr id="2" name="Slide Image Placeholder 1"/>
+          <p:cNvSpPr>
+            <a:spLocks noGrp="1" noRot="1" noChangeAspect="1"/>
+          </p:cNvSpPr>
+          <p:nvPr>
+            <p:ph type="sldImg"/>
+          </p:nvPr>
+        </p:nvSpPr>
+        <p:spPr/>
+      </p:sp>
+      <p:sp>
+        <p:nvSpPr>
+          <p:cNvPr id="3" name="Notes Placeholder 2"/>
+          <p:cNvSpPr>
+            <a:spLocks noGrp="1"/>
+          </p:cNvSpPr>
+          <p:nvPr>
+            <p:ph type="body" idx="1"/>
+          </p:nvPr>
+        </p:nvSpPr>
+        <p:spPr/>
+        <p:txBody>
+          <a:bodyPr/>
+          <a:lstStyle/>
+          <a:p>
+            <a:r>
+              <a:rPr lang="en-US" dirty="0"/>
+              <a:t/>
+            </a:r>
+            <a:endParaRPr lang="en-US" dirty="0"/>
+          </a:p>
+        </p:txBody>
+      </p:sp>
+      <p:sp>
+        <p:nvSpPr>
+          <p:cNvPr id="4" name="Slide Number Placeholder 3"/>
+          <p:cNvSpPr>
+            <a:spLocks noGrp="1"/>
+          </p:cNvSpPr>
+          <p:nvPr>
+            <p:ph type="sldNum" sz="quarter" idx="10"/>
+          </p:nvPr>
+        </p:nvSpPr>
+        <p:spPr/>
+        <p:txBody>
+          <a:bodyPr/>
+          <a:lstStyle/>
+          <a:p>
+            <a:fld id="{F7021451-1387-4CA6-816F-3879F97B5CBC}" type="slidenum">
+              <a:rPr lang="en-US"/>
+              <a:t>27</a:t>
+            </a:fld>
+            <a:endParaRPr lang="en-US"/>
+          </a:p>
+        </p:txBody>
+      </p:sp>
+    </p:spTree>
+    <p:extLst>
+      <p:ext uri="{BB962C8B-B14F-4D97-AF65-F5344CB8AC3E}">
+        <p14:creationId xmlns:p14="http://schemas.microsoft.com/office/powerpoint/2010/main" val="1024086991"/>
+      </p:ext>
+    </p:extLst>
+  </p:cSld>
+  <p:clrMapOvr>
+    <a:masterClrMapping/>
+  </p:clrMapOvr>
+</p:notes>
+</file>
+
+<file path=ppt/notesSlides/notesSlide28.xml><?xml version="1.0" encoding="utf-8"?>
+<p:notes xmlns:a="http://schemas.openxmlformats.org/drawingml/2006/main" xmlns:r="http://schemas.openxmlformats.org/officeDocument/2006/relationships" xmlns:p="http://schemas.openxmlformats.org/presentationml/2006/main">
+  <p:cSld>
+    <p:spTree>
+      <p:nvGrpSpPr>
+        <p:cNvPr id="1" name=""/>
+        <p:cNvGrpSpPr/>
+        <p:nvPr/>
+      </p:nvGrpSpPr>
+      <p:grpSpPr>
+        <a:xfrm>
+          <a:off x="0" y="0"/>
+          <a:ext cx="0" cy="0"/>
+          <a:chOff x="0" y="0"/>
+          <a:chExt cx="0" cy="0"/>
+        </a:xfrm>
+      </p:grpSpPr>
+      <p:sp>
+        <p:nvSpPr>
+          <p:cNvPr id="2" name="Slide Image Placeholder 1"/>
+          <p:cNvSpPr>
+            <a:spLocks noGrp="1" noRot="1" noChangeAspect="1"/>
+          </p:cNvSpPr>
+          <p:nvPr>
+            <p:ph type="sldImg"/>
+          </p:nvPr>
+        </p:nvSpPr>
+        <p:spPr/>
+      </p:sp>
+      <p:sp>
+        <p:nvSpPr>
+          <p:cNvPr id="3" name="Notes Placeholder 2"/>
+          <p:cNvSpPr>
+            <a:spLocks noGrp="1"/>
+          </p:cNvSpPr>
+          <p:nvPr>
+            <p:ph type="body" idx="1"/>
+          </p:nvPr>
+        </p:nvSpPr>
+        <p:spPr/>
+        <p:txBody>
+          <a:bodyPr/>
+          <a:lstStyle/>
+          <a:p>
+            <a:r>
+              <a:rPr lang="en-US" dirty="0"/>
+              <a:t/>
+            </a:r>
+            <a:endParaRPr lang="en-US" dirty="0"/>
+          </a:p>
+        </p:txBody>
+      </p:sp>
+      <p:sp>
+        <p:nvSpPr>
+          <p:cNvPr id="4" name="Slide Number Placeholder 3"/>
+          <p:cNvSpPr>
+            <a:spLocks noGrp="1"/>
+          </p:cNvSpPr>
+          <p:nvPr>
+            <p:ph type="sldNum" sz="quarter" idx="10"/>
+          </p:nvPr>
+        </p:nvSpPr>
+        <p:spPr/>
+        <p:txBody>
+          <a:bodyPr/>
+          <a:lstStyle/>
+          <a:p>
+            <a:fld id="{F7021451-1387-4CA6-816F-3879F97B5CBC}" type="slidenum">
+              <a:rPr lang="en-US"/>
+              <a:t>28</a:t>
+            </a:fld>
+            <a:endParaRPr lang="en-US"/>
+          </a:p>
+        </p:txBody>
+      </p:sp>
+    </p:spTree>
+    <p:extLst>
+      <p:ext uri="{BB962C8B-B14F-4D97-AF65-F5344CB8AC3E}">
+        <p14:creationId xmlns:p14="http://schemas.microsoft.com/office/powerpoint/2010/main" val="1024086991"/>
+      </p:ext>
+    </p:extLst>
+  </p:cSld>
+  <p:clrMapOvr>
+    <a:masterClrMapping/>
+  </p:clrMapOvr>
+</p:notes>
+</file>
+
+<file path=ppt/notesSlides/notesSlide29.xml><?xml version="1.0" encoding="utf-8"?>
+<p:notes xmlns:a="http://schemas.openxmlformats.org/drawingml/2006/main" xmlns:r="http://schemas.openxmlformats.org/officeDocument/2006/relationships" xmlns:p="http://schemas.openxmlformats.org/presentationml/2006/main">
+  <p:cSld>
+    <p:spTree>
+      <p:nvGrpSpPr>
+        <p:cNvPr id="1" name=""/>
+        <p:cNvGrpSpPr/>
+        <p:nvPr/>
+      </p:nvGrpSpPr>
+      <p:grpSpPr>
+        <a:xfrm>
+          <a:off x="0" y="0"/>
+          <a:ext cx="0" cy="0"/>
+          <a:chOff x="0" y="0"/>
+          <a:chExt cx="0" cy="0"/>
+        </a:xfrm>
+      </p:grpSpPr>
+      <p:sp>
+        <p:nvSpPr>
+          <p:cNvPr id="2" name="Slide Image Placeholder 1"/>
+          <p:cNvSpPr>
+            <a:spLocks noGrp="1" noRot="1" noChangeAspect="1"/>
+          </p:cNvSpPr>
+          <p:nvPr>
+            <p:ph type="sldImg"/>
+          </p:nvPr>
+        </p:nvSpPr>
+        <p:spPr/>
+      </p:sp>
+      <p:sp>
+        <p:nvSpPr>
+          <p:cNvPr id="3" name="Notes Placeholder 2"/>
+          <p:cNvSpPr>
+            <a:spLocks noGrp="1"/>
+          </p:cNvSpPr>
+          <p:nvPr>
+            <p:ph type="body" idx="1"/>
+          </p:nvPr>
+        </p:nvSpPr>
+        <p:spPr/>
+        <p:txBody>
+          <a:bodyPr/>
+          <a:lstStyle/>
+          <a:p>
+            <a:r>
+              <a:rPr lang="en-US" dirty="0"/>
+              <a:t/>
+            </a:r>
+            <a:endParaRPr lang="en-US" dirty="0"/>
+          </a:p>
+        </p:txBody>
+      </p:sp>
+      <p:sp>
+        <p:nvSpPr>
+          <p:cNvPr id="4" name="Slide Number Placeholder 3"/>
+          <p:cNvSpPr>
+            <a:spLocks noGrp="1"/>
+          </p:cNvSpPr>
+          <p:nvPr>
+            <p:ph type="sldNum" sz="quarter" idx="10"/>
+          </p:nvPr>
+        </p:nvSpPr>
+        <p:spPr/>
+        <p:txBody>
+          <a:bodyPr/>
+          <a:lstStyle/>
+          <a:p>
+            <a:fld id="{F7021451-1387-4CA6-816F-3879F97B5CBC}" type="slidenum">
+              <a:rPr lang="en-US"/>
+              <a:t>29</a:t>
+            </a:fld>
+            <a:endParaRPr lang="en-US"/>
+          </a:p>
+        </p:txBody>
+      </p:sp>
+    </p:spTree>
+    <p:extLst>
+      <p:ext uri="{BB962C8B-B14F-4D97-AF65-F5344CB8AC3E}">
+        <p14:creationId xmlns:p14="http://schemas.microsoft.com/office/powerpoint/2010/main" val="1024086991"/>
+      </p:ext>
+    </p:extLst>
+  </p:cSld>
+  <p:clrMapOvr>
+    <a:masterClrMapping/>
+  </p:clrMapOvr>
+</p:notes>
+</file>
+
 <file path=ppt/notesSlides/notesSlide3.xml><?xml version="1.0" encoding="utf-8"?>
 <p:notes xmlns:a="http://schemas.openxmlformats.org/drawingml/2006/main" xmlns:r="http://schemas.openxmlformats.org/officeDocument/2006/relationships" xmlns:p="http://schemas.openxmlformats.org/presentationml/2006/main">
   <p:cSld>
@@ -2205,9 +2473,9 @@
           <a:p>
             <a:r>
               <a:rPr lang="en-US" dirty="0"/>
-              <a:t>Existem cinco fontes principais. A primeira, e a mais rápida, são as usinas prontas sem clientes, ou com clientes de menos. Nos últimos anos, muita gente construiu usinas acreditando que encheria rápido, e não conseguiu: falta estrutura comercial e de gestão. Esse dono tem um ativo parado e um financiamento correndo. Para ele, você é a solução. E, se a usina for antiga, pode ser GD um, o que vale ouro. A segunda fonte são os donos de terra perto das cidades: sítios, chácaras, fazendas com área plana e rede elétrica próxima. Eles podem construir a usina, com financiamento, ou arrendar a terra para um investidor. A terceira são os investidores em busca de renda: médicos, empresários, famílias com patrimônio, que querem algo mais rentável que a renda fixa e mais palpável que a bolsa. A quarta são as integradoras e EPCs, que têm projetos e clientes investidores, mas não querem fazer a gestão. E a quinta são as suas próprias usinas, no modelo asset-heavy.
-Onde encontrar essas pessoas? Se você já tem empresa solar, a sua carteira é o primeiro lugar: clientes que investiram em sistemas grandes são potenciais investidores. Converse com contadores e gerentes de banco: eles conhecem quem tem capital procurando investimento. Para terra e produtores rurais, associações rurais, sindicatos e cooperativas agrícolas. Faça conteúdo e anúncios voltados a investidores: "renda com usina solar, com gestão completa". E use os dados públicos: a ANEEL disponibiliza informações sobre as usinas de geração distribuída conectadas, por distribuidora e município, o que ajuda a mapear quem já tem usina na sua região. Uma visita a uma usina, com o dono, vale mais do que dez e-mails.
-O que o produtor quer ouvir? Quatro coisas. Renda previsível: quanto ele recebe por mês, com a conta feita, como você vai aprender na aula 3. Usina cheia rápido: qual é o seu plano comercial e em quantos meses você aloca toda a energia. Zero trabalho: ele não quer lidar com cliente, fatura, cobrança, inadimplência, distribuidora. E transparência: ele quer ver o que acontece com a usina dele. É aqui que a plataforma vira argumento de venda: o produtor tem um portal próprio, com a usina e a geração mês a mês. Mostre isso na reunião. Um produtor que confia na gestora renova o contrato e indica outros produtores.</a:t>
+              <a:t>As usinas estão em cinco lugares, listados na tela. A oportunidade mais rápida costuma ser a usina pronta e subutilizada, cujo dono tem um ativo parado e um financiamento correndo.
+Para encontrá-las, use a sua rede, contadores e bancos, associações rurais e os dados públicos da ANEEL. Uma visita à usina vale mais que dez e-mails.
+O produtor quer quatro coisas: renda previsível, usina cheia rápido, zero trabalho e transparência. O portal do produtor é um ótimo argumento.</a:t>
             </a:r>
             <a:endParaRPr lang="en-US" dirty="0"/>
           </a:p>
@@ -2231,6 +2499,94 @@
             <a:fld id="{F7021451-1387-4CA6-816F-3879F97B5CBC}" type="slidenum">
               <a:rPr lang="en-US"/>
               <a:t>3</a:t>
+            </a:fld>
+            <a:endParaRPr lang="en-US"/>
+          </a:p>
+        </p:txBody>
+      </p:sp>
+    </p:spTree>
+    <p:extLst>
+      <p:ext uri="{BB962C8B-B14F-4D97-AF65-F5344CB8AC3E}">
+        <p14:creationId xmlns:p14="http://schemas.microsoft.com/office/powerpoint/2010/main" val="1024086991"/>
+      </p:ext>
+    </p:extLst>
+  </p:cSld>
+  <p:clrMapOvr>
+    <a:masterClrMapping/>
+  </p:clrMapOvr>
+</p:notes>
+</file>
+
+<file path=ppt/notesSlides/notesSlide30.xml><?xml version="1.0" encoding="utf-8"?>
+<p:notes xmlns:a="http://schemas.openxmlformats.org/drawingml/2006/main" xmlns:r="http://schemas.openxmlformats.org/officeDocument/2006/relationships" xmlns:p="http://schemas.openxmlformats.org/presentationml/2006/main">
+  <p:cSld>
+    <p:spTree>
+      <p:nvGrpSpPr>
+        <p:cNvPr id="1" name=""/>
+        <p:cNvGrpSpPr/>
+        <p:nvPr/>
+      </p:nvGrpSpPr>
+      <p:grpSpPr>
+        <a:xfrm>
+          <a:off x="0" y="0"/>
+          <a:ext cx="0" cy="0"/>
+          <a:chOff x="0" y="0"/>
+          <a:chExt cx="0" cy="0"/>
+        </a:xfrm>
+      </p:grpSpPr>
+      <p:sp>
+        <p:nvSpPr>
+          <p:cNvPr id="2" name="Slide Image Placeholder 1"/>
+          <p:cNvSpPr>
+            <a:spLocks noGrp="1" noRot="1" noChangeAspect="1"/>
+          </p:cNvSpPr>
+          <p:nvPr>
+            <p:ph type="sldImg"/>
+          </p:nvPr>
+        </p:nvSpPr>
+        <p:spPr/>
+      </p:sp>
+      <p:sp>
+        <p:nvSpPr>
+          <p:cNvPr id="3" name="Notes Placeholder 2"/>
+          <p:cNvSpPr>
+            <a:spLocks noGrp="1"/>
+          </p:cNvSpPr>
+          <p:nvPr>
+            <p:ph type="body" idx="1"/>
+          </p:nvPr>
+        </p:nvSpPr>
+        <p:spPr/>
+        <p:txBody>
+          <a:bodyPr/>
+          <a:lstStyle/>
+          <a:p>
+            <a:r>
+              <a:rPr lang="en-US" dirty="0"/>
+              <a:t/>
+            </a:r>
+            <a:endParaRPr lang="en-US" dirty="0"/>
+          </a:p>
+        </p:txBody>
+      </p:sp>
+      <p:sp>
+        <p:nvSpPr>
+          <p:cNvPr id="4" name="Slide Number Placeholder 3"/>
+          <p:cNvSpPr>
+            <a:spLocks noGrp="1"/>
+          </p:cNvSpPr>
+          <p:nvPr>
+            <p:ph type="sldNum" sz="quarter" idx="10"/>
+          </p:nvPr>
+        </p:nvSpPr>
+        <p:spPr/>
+        <p:txBody>
+          <a:bodyPr/>
+          <a:lstStyle/>
+          <a:p>
+            <a:fld id="{F7021451-1387-4CA6-816F-3879F97B5CBC}" type="slidenum">
+              <a:rPr lang="en-US"/>
+              <a:t>30</a:t>
             </a:fld>
             <a:endParaRPr lang="en-US"/>
           </a:p>
@@ -2295,7 +2651,7 @@
           <a:p>
             <a:r>
               <a:rPr lang="en-US" dirty="0"/>
-              <a:t>Desde o primeiro contato, registre o produtor na plataforma, em Produtores Solar. Ele entra como prospect e avança de status conforme a negociação. Cada produtor fica na carteira do consultor que o trouxe. Isso parece burocracia no início, mas, com vinte negociações em paralelo, é o que impede que um produtor interessado fique esquecido.</a:t>
+              <a:t>Produtores Solar → Produtores: todo contato vira cadastro com status</a:t>
             </a:r>
             <a:endParaRPr lang="en-US" dirty="0"/>
           </a:p>
@@ -2383,7 +2739,7 @@
           <a:p>
             <a:r>
               <a:rPr lang="en-US" dirty="0"/>
-              <a:t>Resumindo: garanta a energia antes de vender. As usinas estão em cinco lugares, e a melhor oportunidade costuma ser a usina pronta e subutilizada. O produtor quer renda, usina cheia, zero trabalho e transparência. Na próxima aula, como verificar se uma usina é segura antes de assinar.</a:t>
+              <a:t/>
             </a:r>
             <a:endParaRPr lang="en-US" dirty="0"/>
           </a:p>
@@ -2559,9 +2915,9 @@
           <a:p>
             <a:r>
               <a:rPr lang="en-US" dirty="0"/>
-              <a:t>Primeiro bloco: titularidade e imóvel. Peça a matrícula atualizada do imóvel ou, se o terreno é arrendado, o contrato de arrendamento, e confira o prazo: ele precisa ser pelo menos tão longo quanto o contrato que você vai assinar. Confira quem é o titular da unidade consumidora da usina na distribuidora. Verifique ônus: muitas usinas são financiadas, e os equipamentos ou os recebíveis podem estar dados em garantia ao banco. Isso não impede o negócio, mas pode exigir a anuência do banco. E verifique as licenças ambientais e municipais exigidas no seu estado e no município. Esse bloco é, idealmente, revisado pelo seu advogado.
-Segundo bloco: conexão e enquadramento. Peça o parecer de acesso e a data em que o pedido de acesso foi protocolado — é ela que diz se a usina é GD um ou GD dois. Confirme a data de conexão e a aprovação da distribuidora. Anote a potência instalada dos painéis e a potência dos inversores: lembre que os limites de micro e minigeração e a regra dos quinhentos quilowatts consideram a potência da instalação conforme a regulação. Avalie o risco de enquadramento no GD três, se a usina passar de quinhentos quilowatts. E, por fim, uma pergunta óbvia que às vezes é esquecida: a usina está na área da mesma distribuidora dos clientes que você vai atender?
-Terceiro bloco: desempenho. Peça o histórico de geração dos últimos doze meses, de duas fontes: as faturas da unidade consumidora da usina, que mostram a energia injetada medida pela distribuidora, e o sistema de monitoramento do inversor. Compare com a projeção do projeto. Uma geração real dez por cento abaixo do projetado pode significar sujeira, sombra, problema de equipamento ou um projeto otimista. E pergunte sobre paradas: quantas vezes a usina ficou sem gerar, e por quanto tempo. Se a usina é nova e não tem histórico, use a projeção com um desconto de segurança na hora de alocar clientes.</a:t>
+              <a:t>Primeiro bloco: imóvel e titularidade. Confira prazos, titular e eventuais garantias dadas ao banco.
+Segundo: conexão e enquadramento. A data do pedido de acesso diz se a usina é GD um ou dois. E confirme que ela está na distribuidora dos seus clientes.
+Terceiro: desempenho. Compare doze meses de geração real com a projeção.</a:t>
             </a:r>
             <a:endParaRPr lang="en-US" dirty="0"/>
           </a:p>
@@ -2649,8 +3005,8 @@
           <a:p>
             <a:r>
               <a:rPr lang="en-US" dirty="0"/>
-              <a:t>Quarto bloco: equipamentos, manutenção e seguro. Anote marca e modelo dos módulos e inversores e as garantias. Verifique se existe contrato de operação e manutenção: quem limpa os painéis, com que frequência, qual o tempo de resposta quando um inversor para. Verifique o seguro: furto de cabos e equipamentos é comum em usinas rurais. E peça a documentação técnica: projeto, responsável técnico e o as-built, o desenho de como foi realmente construída.
-Quinto bloco: comercial e risco do produtor. A usina já tem clientes? Já existe outra gestora com contrato vigente? Qual é a expectativa do produtor de renda e de prazo? E a situação do próprio produtor: dívidas, processos, questões de sucessão familiar. Ao final, tome uma decisão formal: aprovar, aprovar com condições — por exemplo, "desde que o seguro seja contratado" — ou recusar. Guarde o checklist preenchido junto com os documentos. Ele protege você se algo der errado no futuro.</a:t>
+              <a:t>Quarto: equipamentos, manutenção e seguro. Furto de cabos é comum em usinas rurais.
+Quinto: o lado comercial e o próprio produtor. No fim, registre a decisão: aprovar, aprovar com condições ou recusar.</a:t>
             </a:r>
             <a:endParaRPr lang="en-US" dirty="0"/>
           </a:p>
@@ -2738,7 +3094,7 @@
           <a:p>
             <a:r>
               <a:rPr lang="en-US" dirty="0"/>
-              <a:t>Resumindo: a due diligence tem cinco blocos — titularidade e imóvel, conexão e enquadramento, desempenho, equipamentos e seguro, e o lado comercial. O checklist completo está nos materiais. Preencha para uma usina da sua região — esse é parte do entregável do módulo. Na próxima aula, a proposta ao produtor.</a:t>
+              <a:t/>
             </a:r>
             <a:endParaRPr lang="en-US" dirty="0"/>
           </a:p>
@@ -4352,11 +4708,11 @@
         <p:spPr>
           <a:xfrm>
             <a:off x="548640" y="1325880"/>
-            <a:ext cx="3544824" cy="2331720"/>
+            <a:ext cx="3544824" cy="1874520"/>
           </a:xfrm>
           <a:prstGeom prst="roundRect">
             <a:avLst>
-              <a:gd name="adj" fmla="val 3137"/>
+              <a:gd name="adj" fmla="val 3902"/>
             </a:avLst>
           </a:prstGeom>
           <a:solidFill>
@@ -4445,7 +4801,7 @@
         <p:spPr>
           <a:xfrm>
             <a:off x="1325880" y="1435608"/>
-            <a:ext cx="2630424" cy="2112264"/>
+            <a:ext cx="2630424" cy="1655064"/>
           </a:xfrm>
           <a:prstGeom prst="rect">
             <a:avLst/>
@@ -4463,7 +4819,7 @@
               <a:buNone/>
             </a:pPr>
             <a:r>
-              <a:rPr lang="en-US" sz="1800" dirty="0">
+              <a:rPr lang="en-US" sz="1700" dirty="0">
                 <a:solidFill>
                   <a:srgbClr val="1F2937"/>
                 </a:solidFill>
@@ -4473,7 +4829,7 @@
               </a:rPr>
               <a:t>Média de geração: 60.000 kWh/mês → 720.000 kWh/ano</a:t>
             </a:r>
-            <a:endParaRPr lang="en-US" sz="1800" dirty="0"/>
+            <a:endParaRPr lang="en-US" sz="1700" dirty="0"/>
           </a:p>
         </p:txBody>
       </p:sp>
@@ -4486,11 +4842,11 @@
         <p:spPr>
           <a:xfrm>
             <a:off x="4322064" y="1325880"/>
-            <a:ext cx="3544824" cy="2331720"/>
+            <a:ext cx="3544824" cy="1874520"/>
           </a:xfrm>
           <a:prstGeom prst="roundRect">
             <a:avLst>
-              <a:gd name="adj" fmla="val 3137"/>
+              <a:gd name="adj" fmla="val 3902"/>
             </a:avLst>
           </a:prstGeom>
           <a:solidFill>
@@ -4579,7 +4935,7 @@
         <p:spPr>
           <a:xfrm>
             <a:off x="5099304" y="1435608"/>
-            <a:ext cx="2630424" cy="2112264"/>
+            <a:ext cx="2630424" cy="1655064"/>
           </a:xfrm>
           <a:prstGeom prst="rect">
             <a:avLst/>
@@ -4597,7 +4953,7 @@
               <a:buNone/>
             </a:pPr>
             <a:r>
-              <a:rPr lang="en-US" sz="1800" dirty="0">
+              <a:rPr lang="en-US" sz="1700" dirty="0">
                 <a:solidFill>
                   <a:srgbClr val="1F2937"/>
                 </a:solidFill>
@@ -4607,7 +4963,7 @@
               </a:rPr>
               <a:t>Tarifa GD (crédito): R$ 0,68 · Redução ao consumidor: 20% (R$ 0,136) · Taxa de administração: 15% (R$ 0,102)</a:t>
             </a:r>
-            <a:endParaRPr lang="en-US" sz="1800" dirty="0"/>
+            <a:endParaRPr lang="en-US" sz="1700" dirty="0"/>
           </a:p>
         </p:txBody>
       </p:sp>
@@ -4620,11 +4976,11 @@
         <p:spPr>
           <a:xfrm>
             <a:off x="8095488" y="1325880"/>
-            <a:ext cx="3544824" cy="2331720"/>
+            <a:ext cx="3544824" cy="1874520"/>
           </a:xfrm>
           <a:prstGeom prst="roundRect">
             <a:avLst>
-              <a:gd name="adj" fmla="val 3137"/>
+              <a:gd name="adj" fmla="val 3902"/>
             </a:avLst>
           </a:prstGeom>
           <a:solidFill>
@@ -4713,7 +5069,7 @@
         <p:spPr>
           <a:xfrm>
             <a:off x="8872728" y="1435608"/>
-            <a:ext cx="2630424" cy="2112264"/>
+            <a:ext cx="2630424" cy="1655064"/>
           </a:xfrm>
           <a:prstGeom prst="rect">
             <a:avLst/>
@@ -4731,7 +5087,7 @@
               <a:buNone/>
             </a:pPr>
             <a:r>
-              <a:rPr lang="en-US" sz="1800" dirty="0">
+              <a:rPr lang="en-US" sz="1700" dirty="0">
                 <a:solidFill>
                   <a:srgbClr val="1F2937"/>
                 </a:solidFill>
@@ -4741,7 +5097,7 @@
               </a:rPr>
               <a:t>Valor pago ao produtor: R$ 0,442/kWh</a:t>
             </a:r>
-            <a:endParaRPr lang="en-US" sz="1800" dirty="0"/>
+            <a:endParaRPr lang="en-US" sz="1700" dirty="0"/>
           </a:p>
         </p:txBody>
       </p:sp>
@@ -4753,12 +5109,12 @@
         </p:nvSpPr>
         <p:spPr>
           <a:xfrm>
-            <a:off x="548640" y="3886200"/>
-            <a:ext cx="3544824" cy="2331720"/>
+            <a:off x="548640" y="3429000"/>
+            <a:ext cx="3544824" cy="1874520"/>
           </a:xfrm>
           <a:prstGeom prst="roundRect">
             <a:avLst>
-              <a:gd name="adj" fmla="val 3137"/>
+              <a:gd name="adj" fmla="val 3902"/>
             </a:avLst>
           </a:prstGeom>
           <a:solidFill>
@@ -4787,7 +5143,7 @@
         </p:nvSpPr>
         <p:spPr>
           <a:xfrm>
-            <a:off x="731520" y="4069080"/>
+            <a:off x="731520" y="3611880"/>
             <a:ext cx="457200" cy="457200"/>
           </a:xfrm>
           <a:prstGeom prst="ellipse">
@@ -4807,7 +5163,7 @@
         </p:nvSpPr>
         <p:spPr>
           <a:xfrm>
-            <a:off x="731520" y="4069080"/>
+            <a:off x="731520" y="3611880"/>
             <a:ext cx="457200" cy="457200"/>
           </a:xfrm>
           <a:prstGeom prst="rect">
@@ -4846,8 +5202,8 @@
         </p:nvSpPr>
         <p:spPr>
           <a:xfrm>
-            <a:off x="1325880" y="3995928"/>
-            <a:ext cx="2630424" cy="2112264"/>
+            <a:off x="1325880" y="3538728"/>
+            <a:ext cx="2630424" cy="1655064"/>
           </a:xfrm>
           <a:prstGeom prst="rect">
             <a:avLst/>
@@ -4865,7 +5221,7 @@
               <a:buNone/>
             </a:pPr>
             <a:r>
-              <a:rPr lang="en-US" sz="1800" dirty="0">
+              <a:rPr lang="en-US" sz="1700" dirty="0">
                 <a:solidFill>
                   <a:srgbClr val="1F2937"/>
                 </a:solidFill>
@@ -4875,7 +5231,7 @@
               </a:rPr>
               <a:t>Pagamento anual bruto: R$ 489.600 · Líquido (após taxa): R$ 416.160</a:t>
             </a:r>
-            <a:endParaRPr lang="en-US" sz="1800" dirty="0"/>
+            <a:endParaRPr lang="en-US" sz="1700" dirty="0"/>
           </a:p>
         </p:txBody>
       </p:sp>
@@ -4887,12 +5243,12 @@
         </p:nvSpPr>
         <p:spPr>
           <a:xfrm>
-            <a:off x="4322064" y="3886200"/>
-            <a:ext cx="3544824" cy="2331720"/>
+            <a:off x="4322064" y="3429000"/>
+            <a:ext cx="3544824" cy="1874520"/>
           </a:xfrm>
           <a:prstGeom prst="roundRect">
             <a:avLst>
-              <a:gd name="adj" fmla="val 3137"/>
+              <a:gd name="adj" fmla="val 3902"/>
             </a:avLst>
           </a:prstGeom>
           <a:solidFill>
@@ -4921,7 +5277,7 @@
         </p:nvSpPr>
         <p:spPr>
           <a:xfrm>
-            <a:off x="4504944" y="4069080"/>
+            <a:off x="4504944" y="3611880"/>
             <a:ext cx="457200" cy="457200"/>
           </a:xfrm>
           <a:prstGeom prst="ellipse">
@@ -4941,7 +5297,7 @@
         </p:nvSpPr>
         <p:spPr>
           <a:xfrm>
-            <a:off x="4504944" y="4069080"/>
+            <a:off x="4504944" y="3611880"/>
             <a:ext cx="457200" cy="457200"/>
           </a:xfrm>
           <a:prstGeom prst="rect">
@@ -4980,8 +5336,8 @@
         </p:nvSpPr>
         <p:spPr>
           <a:xfrm>
-            <a:off x="5099304" y="3995928"/>
-            <a:ext cx="2630424" cy="2112264"/>
+            <a:off x="5099304" y="3538728"/>
+            <a:ext cx="2630424" cy="1655064"/>
           </a:xfrm>
           <a:prstGeom prst="rect">
             <a:avLst/>
@@ -4999,7 +5355,7 @@
               <a:buNone/>
             </a:pPr>
             <a:r>
-              <a:rPr lang="en-US" sz="1800" dirty="0">
+              <a:rPr lang="en-US" sz="1700" dirty="0">
                 <a:solidFill>
                   <a:srgbClr val="1F2937"/>
                 </a:solidFill>
@@ -5009,7 +5365,93 @@
               </a:rPr>
               <a:t>Pagamento mensal previsto: R$ 26.520</a:t>
             </a:r>
-            <a:endParaRPr lang="en-US" sz="1800" dirty="0"/>
+            <a:endParaRPr lang="en-US" sz="1700" dirty="0"/>
+          </a:p>
+        </p:txBody>
+      </p:sp>
+      <p:sp>
+        <p:nvSpPr>
+          <p:cNvPr id="29" name="Shape 26"/>
+          <p:cNvSpPr/>
+          <p:nvPr/>
+        </p:nvSpPr>
+        <p:spPr>
+          <a:xfrm>
+            <a:off x="548640" y="5413248"/>
+            <a:ext cx="11091672" cy="868680"/>
+          </a:xfrm>
+          <a:prstGeom prst="roundRect">
+            <a:avLst>
+              <a:gd name="adj" fmla="val 8421"/>
+            </a:avLst>
+          </a:prstGeom>
+          <a:solidFill>
+            <a:srgbClr val="EEF3FA"/>
+          </a:solidFill>
+          <a:ln w="6350">
+            <a:solidFill>
+              <a:srgbClr val="D8E0EC"/>
+            </a:solidFill>
+            <a:prstDash val="solid"/>
+          </a:ln>
+        </p:spPr>
+      </p:sp>
+      <p:sp>
+        <p:nvSpPr>
+          <p:cNvPr id="30" name="Shape 27"/>
+          <p:cNvSpPr/>
+          <p:nvPr/>
+        </p:nvSpPr>
+        <p:spPr>
+          <a:xfrm>
+            <a:off x="548640" y="5413248"/>
+            <a:ext cx="91440" cy="868680"/>
+          </a:xfrm>
+          <a:prstGeom prst="rect">
+            <a:avLst/>
+          </a:prstGeom>
+          <a:solidFill>
+            <a:srgbClr val="F7A23B"/>
+          </a:solidFill>
+          <a:ln/>
+        </p:spPr>
+      </p:sp>
+      <p:sp>
+        <p:nvSpPr>
+          <p:cNvPr id="31" name="Text 28"/>
+          <p:cNvSpPr/>
+          <p:nvPr/>
+        </p:nvSpPr>
+        <p:spPr>
+          <a:xfrm>
+            <a:off x="777240" y="5458968"/>
+            <a:ext cx="10744200" cy="777240"/>
+          </a:xfrm>
+          <a:prstGeom prst="rect">
+            <a:avLst/>
+          </a:prstGeom>
+          <a:noFill/>
+          <a:ln/>
+        </p:spPr>
+        <p:txBody>
+          <a:bodyPr wrap="square" rtlCol="0" anchor="ctr"/>
+          <a:lstStyle/>
+          <a:p>
+            <a:pPr indent="0" marL="0">
+              <a:buNone/>
+            </a:pPr>
+            <a:r>
+              <a:rPr lang="en-US" sz="1500" dirty="0">
+                <a:solidFill>
+                  <a:srgbClr val="1F2937"/>
+                </a:solidFill>
+                <a:latin typeface="Arial" pitchFamily="34" charset="0"/>
+                <a:ea typeface="Arial" pitchFamily="34" charset="-122"/>
+                <a:cs typeface="Arial" pitchFamily="34" charset="-120"/>
+              </a:rPr>
+              <a:t>O número que importa ao produtor é o pagamento mensal previsto, que já desconta o desconto dos clientes e a taxa de administração. Mostre o mensal vezes doze como a renda com a usina cheia, para não gerar expectativa errada.</a:t>
+            </a:r>
+            <a:endParaRPr lang="en-US" sz="1500" dirty="0"/>
           </a:p>
         </p:txBody>
       </p:sp>
@@ -5329,11 +5771,11 @@
         <p:spPr>
           <a:xfrm>
             <a:off x="548640" y="1325880"/>
-            <a:ext cx="3544824" cy="2331720"/>
+            <a:ext cx="3544824" cy="1874520"/>
           </a:xfrm>
           <a:prstGeom prst="roundRect">
             <a:avLst>
-              <a:gd name="adj" fmla="val 3137"/>
+              <a:gd name="adj" fmla="val 3902"/>
             </a:avLst>
           </a:prstGeom>
           <a:solidFill>
@@ -5422,7 +5864,7 @@
         <p:spPr>
           <a:xfrm>
             <a:off x="1325880" y="1435608"/>
-            <a:ext cx="2630424" cy="2112264"/>
+            <a:ext cx="2630424" cy="1655064"/>
           </a:xfrm>
           <a:prstGeom prst="rect">
             <a:avLst/>
@@ -5463,11 +5905,11 @@
         <p:spPr>
           <a:xfrm>
             <a:off x="4322064" y="1325880"/>
-            <a:ext cx="3544824" cy="2331720"/>
+            <a:ext cx="3544824" cy="1874520"/>
           </a:xfrm>
           <a:prstGeom prst="roundRect">
             <a:avLst>
-              <a:gd name="adj" fmla="val 3137"/>
+              <a:gd name="adj" fmla="val 3902"/>
             </a:avLst>
           </a:prstGeom>
           <a:solidFill>
@@ -5556,7 +5998,7 @@
         <p:spPr>
           <a:xfrm>
             <a:off x="5099304" y="1435608"/>
-            <a:ext cx="2630424" cy="2112264"/>
+            <a:ext cx="2630424" cy="1655064"/>
           </a:xfrm>
           <a:prstGeom prst="rect">
             <a:avLst/>
@@ -5597,11 +6039,11 @@
         <p:spPr>
           <a:xfrm>
             <a:off x="8095488" y="1325880"/>
-            <a:ext cx="3544824" cy="2331720"/>
+            <a:ext cx="3544824" cy="1874520"/>
           </a:xfrm>
           <a:prstGeom prst="roundRect">
             <a:avLst>
-              <a:gd name="adj" fmla="val 3137"/>
+              <a:gd name="adj" fmla="val 3902"/>
             </a:avLst>
           </a:prstGeom>
           <a:solidFill>
@@ -5690,7 +6132,7 @@
         <p:spPr>
           <a:xfrm>
             <a:off x="8872728" y="1435608"/>
-            <a:ext cx="2630424" cy="2112264"/>
+            <a:ext cx="2630424" cy="1655064"/>
           </a:xfrm>
           <a:prstGeom prst="rect">
             <a:avLst/>
@@ -5730,12 +6172,12 @@
         </p:nvSpPr>
         <p:spPr>
           <a:xfrm>
-            <a:off x="548640" y="3886200"/>
-            <a:ext cx="3544824" cy="2331720"/>
+            <a:off x="548640" y="3429000"/>
+            <a:ext cx="3544824" cy="1874520"/>
           </a:xfrm>
           <a:prstGeom prst="roundRect">
             <a:avLst>
-              <a:gd name="adj" fmla="val 3137"/>
+              <a:gd name="adj" fmla="val 3902"/>
             </a:avLst>
           </a:prstGeom>
           <a:solidFill>
@@ -5764,7 +6206,7 @@
         </p:nvSpPr>
         <p:spPr>
           <a:xfrm>
-            <a:off x="731520" y="4069080"/>
+            <a:off x="731520" y="3611880"/>
             <a:ext cx="457200" cy="457200"/>
           </a:xfrm>
           <a:prstGeom prst="ellipse">
@@ -5784,7 +6226,7 @@
         </p:nvSpPr>
         <p:spPr>
           <a:xfrm>
-            <a:off x="731520" y="4069080"/>
+            <a:off x="731520" y="3611880"/>
             <a:ext cx="457200" cy="457200"/>
           </a:xfrm>
           <a:prstGeom prst="rect">
@@ -5823,8 +6265,8 @@
         </p:nvSpPr>
         <p:spPr>
           <a:xfrm>
-            <a:off x="1325880" y="3995928"/>
-            <a:ext cx="2630424" cy="2112264"/>
+            <a:off x="1325880" y="3538728"/>
+            <a:ext cx="2630424" cy="1655064"/>
           </a:xfrm>
           <a:prstGeom prst="rect">
             <a:avLst/>
@@ -5864,12 +6306,12 @@
         </p:nvSpPr>
         <p:spPr>
           <a:xfrm>
-            <a:off x="4322064" y="3886200"/>
-            <a:ext cx="3544824" cy="2331720"/>
+            <a:off x="4322064" y="3429000"/>
+            <a:ext cx="3544824" cy="1874520"/>
           </a:xfrm>
           <a:prstGeom prst="roundRect">
             <a:avLst>
-              <a:gd name="adj" fmla="val 3137"/>
+              <a:gd name="adj" fmla="val 3902"/>
             </a:avLst>
           </a:prstGeom>
           <a:solidFill>
@@ -5898,7 +6340,7 @@
         </p:nvSpPr>
         <p:spPr>
           <a:xfrm>
-            <a:off x="4504944" y="4069080"/>
+            <a:off x="4504944" y="3611880"/>
             <a:ext cx="457200" cy="457200"/>
           </a:xfrm>
           <a:prstGeom prst="ellipse">
@@ -5918,7 +6360,7 @@
         </p:nvSpPr>
         <p:spPr>
           <a:xfrm>
-            <a:off x="4504944" y="4069080"/>
+            <a:off x="4504944" y="3611880"/>
             <a:ext cx="457200" cy="457200"/>
           </a:xfrm>
           <a:prstGeom prst="rect">
@@ -5957,8 +6399,8 @@
         </p:nvSpPr>
         <p:spPr>
           <a:xfrm>
-            <a:off x="5099304" y="3995928"/>
-            <a:ext cx="2630424" cy="2112264"/>
+            <a:off x="5099304" y="3538728"/>
+            <a:ext cx="2630424" cy="1655064"/>
           </a:xfrm>
           <a:prstGeom prst="rect">
             <a:avLst/>
@@ -5998,12 +6440,12 @@
         </p:nvSpPr>
         <p:spPr>
           <a:xfrm>
-            <a:off x="8095488" y="3886200"/>
-            <a:ext cx="3544824" cy="2331720"/>
+            <a:off x="8095488" y="3429000"/>
+            <a:ext cx="3544824" cy="1874520"/>
           </a:xfrm>
           <a:prstGeom prst="roundRect">
             <a:avLst>
-              <a:gd name="adj" fmla="val 3137"/>
+              <a:gd name="adj" fmla="val 3902"/>
             </a:avLst>
           </a:prstGeom>
           <a:solidFill>
@@ -6032,7 +6474,7 @@
         </p:nvSpPr>
         <p:spPr>
           <a:xfrm>
-            <a:off x="8278368" y="4069080"/>
+            <a:off x="8278368" y="3611880"/>
             <a:ext cx="457200" cy="457200"/>
           </a:xfrm>
           <a:prstGeom prst="ellipse">
@@ -6052,7 +6494,7 @@
         </p:nvSpPr>
         <p:spPr>
           <a:xfrm>
-            <a:off x="8278368" y="4069080"/>
+            <a:off x="8278368" y="3611880"/>
             <a:ext cx="457200" cy="457200"/>
           </a:xfrm>
           <a:prstGeom prst="rect">
@@ -6091,8 +6533,8 @@
         </p:nvSpPr>
         <p:spPr>
           <a:xfrm>
-            <a:off x="8872728" y="3995928"/>
-            <a:ext cx="2630424" cy="2112264"/>
+            <a:off x="8872728" y="3538728"/>
+            <a:ext cx="2630424" cy="1655064"/>
           </a:xfrm>
           <a:prstGeom prst="rect">
             <a:avLst/>
@@ -6121,6 +6563,92 @@
               <a:t>Saída antecipada e transição</a:t>
             </a:r>
             <a:endParaRPr lang="en-US" sz="1800" dirty="0"/>
+          </a:p>
+        </p:txBody>
+      </p:sp>
+      <p:sp>
+        <p:nvSpPr>
+          <p:cNvPr id="33" name="Shape 30"/>
+          <p:cNvSpPr/>
+          <p:nvPr/>
+        </p:nvSpPr>
+        <p:spPr>
+          <a:xfrm>
+            <a:off x="548640" y="5413248"/>
+            <a:ext cx="11091672" cy="868680"/>
+          </a:xfrm>
+          <a:prstGeom prst="roundRect">
+            <a:avLst>
+              <a:gd name="adj" fmla="val 8421"/>
+            </a:avLst>
+          </a:prstGeom>
+          <a:solidFill>
+            <a:srgbClr val="EEF3FA"/>
+          </a:solidFill>
+          <a:ln w="6350">
+            <a:solidFill>
+              <a:srgbClr val="D8E0EC"/>
+            </a:solidFill>
+            <a:prstDash val="solid"/>
+          </a:ln>
+        </p:spPr>
+      </p:sp>
+      <p:sp>
+        <p:nvSpPr>
+          <p:cNvPr id="34" name="Shape 31"/>
+          <p:cNvSpPr/>
+          <p:nvPr/>
+        </p:nvSpPr>
+        <p:spPr>
+          <a:xfrm>
+            <a:off x="548640" y="5413248"/>
+            <a:ext cx="91440" cy="868680"/>
+          </a:xfrm>
+          <a:prstGeom prst="rect">
+            <a:avLst/>
+          </a:prstGeom>
+          <a:solidFill>
+            <a:srgbClr val="F7A23B"/>
+          </a:solidFill>
+          <a:ln/>
+        </p:spPr>
+      </p:sp>
+      <p:sp>
+        <p:nvSpPr>
+          <p:cNvPr id="35" name="Text 32"/>
+          <p:cNvSpPr/>
+          <p:nvPr/>
+        </p:nvSpPr>
+        <p:spPr>
+          <a:xfrm>
+            <a:off x="777240" y="5458968"/>
+            <a:ext cx="10744200" cy="777240"/>
+          </a:xfrm>
+          <a:prstGeom prst="rect">
+            <a:avLst/>
+          </a:prstGeom>
+          <a:noFill/>
+          <a:ln/>
+        </p:spPr>
+        <p:txBody>
+          <a:bodyPr wrap="square" rtlCol="0" anchor="ctr"/>
+          <a:lstStyle/>
+          <a:p>
+            <a:pPr indent="0" marL="0">
+              <a:buNone/>
+            </a:pPr>
+            <a:r>
+              <a:rPr lang="en-US" sz="1500" dirty="0">
+                <a:solidFill>
+                  <a:srgbClr val="1F2937"/>
+                </a:solidFill>
+                <a:latin typeface="Arial" pitchFamily="34" charset="0"/>
+                <a:ea typeface="Arial" pitchFamily="34" charset="-122"/>
+                <a:cs typeface="Arial" pitchFamily="34" charset="-120"/>
+              </a:rPr>
+              <a:t>Seis pontos se negociam fora dos números, listados na tela. O mais esquecido é o ramp-up: nenhuma usina enche no primeiro dia, e isso precisa estar combinado.</a:t>
+            </a:r>
+            <a:endParaRPr lang="en-US" sz="1500" dirty="0"/>
           </a:p>
         </p:txBody>
       </p:sp>
@@ -6440,11 +6968,11 @@
         <p:spPr>
           <a:xfrm>
             <a:off x="548640" y="1325880"/>
-            <a:ext cx="5431536" cy="2331720"/>
+            <a:ext cx="5431536" cy="1874520"/>
           </a:xfrm>
           <a:prstGeom prst="roundRect">
             <a:avLst>
-              <a:gd name="adj" fmla="val 3137"/>
+              <a:gd name="adj" fmla="val 3902"/>
             </a:avLst>
           </a:prstGeom>
           <a:solidFill>
@@ -6533,7 +7061,7 @@
         <p:spPr>
           <a:xfrm>
             <a:off x="1325880" y="1435608"/>
-            <a:ext cx="4517136" cy="2112264"/>
+            <a:ext cx="4517136" cy="1655064"/>
           </a:xfrm>
           <a:prstGeom prst="rect">
             <a:avLst/>
@@ -6574,11 +7102,11 @@
         <p:spPr>
           <a:xfrm>
             <a:off x="6208776" y="1325880"/>
-            <a:ext cx="5431536" cy="2331720"/>
+            <a:ext cx="5431536" cy="1874520"/>
           </a:xfrm>
           <a:prstGeom prst="roundRect">
             <a:avLst>
-              <a:gd name="adj" fmla="val 3137"/>
+              <a:gd name="adj" fmla="val 3902"/>
             </a:avLst>
           </a:prstGeom>
           <a:solidFill>
@@ -6667,7 +7195,7 @@
         <p:spPr>
           <a:xfrm>
             <a:off x="6986016" y="1435608"/>
-            <a:ext cx="4517136" cy="2112264"/>
+            <a:ext cx="4517136" cy="1655064"/>
           </a:xfrm>
           <a:prstGeom prst="rect">
             <a:avLst/>
@@ -6707,12 +7235,12 @@
         </p:nvSpPr>
         <p:spPr>
           <a:xfrm>
-            <a:off x="548640" y="3886200"/>
-            <a:ext cx="5431536" cy="2331720"/>
+            <a:off x="548640" y="3429000"/>
+            <a:ext cx="5431536" cy="1874520"/>
           </a:xfrm>
           <a:prstGeom prst="roundRect">
             <a:avLst>
-              <a:gd name="adj" fmla="val 3137"/>
+              <a:gd name="adj" fmla="val 3902"/>
             </a:avLst>
           </a:prstGeom>
           <a:solidFill>
@@ -6741,7 +7269,7 @@
         </p:nvSpPr>
         <p:spPr>
           <a:xfrm>
-            <a:off x="731520" y="4069080"/>
+            <a:off x="731520" y="3611880"/>
             <a:ext cx="457200" cy="457200"/>
           </a:xfrm>
           <a:prstGeom prst="ellipse">
@@ -6761,7 +7289,7 @@
         </p:nvSpPr>
         <p:spPr>
           <a:xfrm>
-            <a:off x="731520" y="4069080"/>
+            <a:off x="731520" y="3611880"/>
             <a:ext cx="457200" cy="457200"/>
           </a:xfrm>
           <a:prstGeom prst="rect">
@@ -6800,8 +7328,8 @@
         </p:nvSpPr>
         <p:spPr>
           <a:xfrm>
-            <a:off x="1325880" y="3995928"/>
-            <a:ext cx="4517136" cy="2112264"/>
+            <a:off x="1325880" y="3538728"/>
+            <a:ext cx="4517136" cy="1655064"/>
           </a:xfrm>
           <a:prstGeom prst="rect">
             <a:avLst/>
@@ -6841,12 +7369,12 @@
         </p:nvSpPr>
         <p:spPr>
           <a:xfrm>
-            <a:off x="6208776" y="3886200"/>
-            <a:ext cx="5431536" cy="2331720"/>
+            <a:off x="6208776" y="3429000"/>
+            <a:ext cx="5431536" cy="1874520"/>
           </a:xfrm>
           <a:prstGeom prst="roundRect">
             <a:avLst>
-              <a:gd name="adj" fmla="val 3137"/>
+              <a:gd name="adj" fmla="val 3902"/>
             </a:avLst>
           </a:prstGeom>
           <a:solidFill>
@@ -6875,7 +7403,7 @@
         </p:nvSpPr>
         <p:spPr>
           <a:xfrm>
-            <a:off x="6391656" y="4069080"/>
+            <a:off x="6391656" y="3611880"/>
             <a:ext cx="457200" cy="457200"/>
           </a:xfrm>
           <a:prstGeom prst="ellipse">
@@ -6895,7 +7423,7 @@
         </p:nvSpPr>
         <p:spPr>
           <a:xfrm>
-            <a:off x="6391656" y="4069080"/>
+            <a:off x="6391656" y="3611880"/>
             <a:ext cx="457200" cy="457200"/>
           </a:xfrm>
           <a:prstGeom prst="rect">
@@ -6934,8 +7462,8 @@
         </p:nvSpPr>
         <p:spPr>
           <a:xfrm>
-            <a:off x="6986016" y="3995928"/>
-            <a:ext cx="4517136" cy="2112264"/>
+            <a:off x="6986016" y="3538728"/>
+            <a:ext cx="4517136" cy="1655064"/>
           </a:xfrm>
           <a:prstGeom prst="rect">
             <a:avLst/>
@@ -6964,6 +7492,92 @@
               <a:t>'Como sei o que acontece?' → portal do produtor</a:t>
             </a:r>
             <a:endParaRPr lang="en-US" sz="1800" dirty="0"/>
+          </a:p>
+        </p:txBody>
+      </p:sp>
+      <p:sp>
+        <p:nvSpPr>
+          <p:cNvPr id="25" name="Shape 22"/>
+          <p:cNvSpPr/>
+          <p:nvPr/>
+        </p:nvSpPr>
+        <p:spPr>
+          <a:xfrm>
+            <a:off x="548640" y="5413248"/>
+            <a:ext cx="11091672" cy="868680"/>
+          </a:xfrm>
+          <a:prstGeom prst="roundRect">
+            <a:avLst>
+              <a:gd name="adj" fmla="val 8421"/>
+            </a:avLst>
+          </a:prstGeom>
+          <a:solidFill>
+            <a:srgbClr val="EEF3FA"/>
+          </a:solidFill>
+          <a:ln w="6350">
+            <a:solidFill>
+              <a:srgbClr val="D8E0EC"/>
+            </a:solidFill>
+            <a:prstDash val="solid"/>
+          </a:ln>
+        </p:spPr>
+      </p:sp>
+      <p:sp>
+        <p:nvSpPr>
+          <p:cNvPr id="26" name="Shape 23"/>
+          <p:cNvSpPr/>
+          <p:nvPr/>
+        </p:nvSpPr>
+        <p:spPr>
+          <a:xfrm>
+            <a:off x="548640" y="5413248"/>
+            <a:ext cx="91440" cy="868680"/>
+          </a:xfrm>
+          <a:prstGeom prst="rect">
+            <a:avLst/>
+          </a:prstGeom>
+          <a:solidFill>
+            <a:srgbClr val="F7A23B"/>
+          </a:solidFill>
+          <a:ln/>
+        </p:spPr>
+      </p:sp>
+      <p:sp>
+        <p:nvSpPr>
+          <p:cNvPr id="27" name="Text 24"/>
+          <p:cNvSpPr/>
+          <p:nvPr/>
+        </p:nvSpPr>
+        <p:spPr>
+          <a:xfrm>
+            <a:off x="777240" y="5458968"/>
+            <a:ext cx="10744200" cy="777240"/>
+          </a:xfrm>
+          <a:prstGeom prst="rect">
+            <a:avLst/>
+          </a:prstGeom>
+          <a:noFill/>
+          <a:ln/>
+        </p:spPr>
+        <p:txBody>
+          <a:bodyPr wrap="square" rtlCol="0" anchor="ctr"/>
+          <a:lstStyle/>
+          <a:p>
+            <a:pPr indent="0" marL="0">
+              <a:buNone/>
+            </a:pPr>
+            <a:r>
+              <a:rPr lang="en-US" sz="1500" dirty="0">
+                <a:solidFill>
+                  <a:srgbClr val="1F2937"/>
+                </a:solidFill>
+                <a:latin typeface="Arial" pitchFamily="34" charset="0"/>
+                <a:ea typeface="Arial" pitchFamily="34" charset="-122"/>
+                <a:cs typeface="Arial" pitchFamily="34" charset="-120"/>
+              </a:rPr>
+              <a:t>Para as objeções, compare sempre o líquido mensal e mostre o seu plano comercial e a transparência do portal.</a:t>
+            </a:r>
+            <a:endParaRPr lang="en-US" sz="1500" dirty="0"/>
           </a:p>
         </p:txBody>
       </p:sp>
@@ -8259,7 +8873,7 @@
         <p:spPr>
           <a:xfrm>
             <a:off x="548640" y="1325880"/>
-            <a:ext cx="5486400" cy="4937760"/>
+            <a:ext cx="5486400" cy="3977640"/>
           </a:xfrm>
           <a:prstGeom prst="rect">
             <a:avLst/>
@@ -8363,7 +8977,7 @@
         <p:spPr>
           <a:xfrm>
             <a:off x="6263640" y="1325880"/>
-            <a:ext cx="5486400" cy="4937760"/>
+            <a:ext cx="5486400" cy="3977640"/>
           </a:xfrm>
           <a:prstGeom prst="rect">
             <a:avLst/>
@@ -8435,6 +9049,92 @@
               <a:t>7. Concluído</a:t>
             </a:r>
             <a:endParaRPr lang="en-US" sz="1800" dirty="0"/>
+          </a:p>
+        </p:txBody>
+      </p:sp>
+      <p:sp>
+        <p:nvSpPr>
+          <p:cNvPr id="11" name="Shape 8"/>
+          <p:cNvSpPr/>
+          <p:nvPr/>
+        </p:nvSpPr>
+        <p:spPr>
+          <a:xfrm>
+            <a:off x="548640" y="5413248"/>
+            <a:ext cx="11091672" cy="868680"/>
+          </a:xfrm>
+          <a:prstGeom prst="roundRect">
+            <a:avLst>
+              <a:gd name="adj" fmla="val 8421"/>
+            </a:avLst>
+          </a:prstGeom>
+          <a:solidFill>
+            <a:srgbClr val="EEF3FA"/>
+          </a:solidFill>
+          <a:ln w="6350">
+            <a:solidFill>
+              <a:srgbClr val="D8E0EC"/>
+            </a:solidFill>
+            <a:prstDash val="solid"/>
+          </a:ln>
+        </p:spPr>
+      </p:sp>
+      <p:sp>
+        <p:nvSpPr>
+          <p:cNvPr id="12" name="Shape 9"/>
+          <p:cNvSpPr/>
+          <p:nvPr/>
+        </p:nvSpPr>
+        <p:spPr>
+          <a:xfrm>
+            <a:off x="548640" y="5413248"/>
+            <a:ext cx="91440" cy="868680"/>
+          </a:xfrm>
+          <a:prstGeom prst="rect">
+            <a:avLst/>
+          </a:prstGeom>
+          <a:solidFill>
+            <a:srgbClr val="F7A23B"/>
+          </a:solidFill>
+          <a:ln/>
+        </p:spPr>
+      </p:sp>
+      <p:sp>
+        <p:nvSpPr>
+          <p:cNvPr id="13" name="Text 10"/>
+          <p:cNvSpPr/>
+          <p:nvPr/>
+        </p:nvSpPr>
+        <p:spPr>
+          <a:xfrm>
+            <a:off x="777240" y="5458968"/>
+            <a:ext cx="10744200" cy="777240"/>
+          </a:xfrm>
+          <a:prstGeom prst="rect">
+            <a:avLst/>
+          </a:prstGeom>
+          <a:noFill/>
+          <a:ln/>
+        </p:spPr>
+        <p:txBody>
+          <a:bodyPr wrap="square" rtlCol="0" anchor="ctr"/>
+          <a:lstStyle/>
+          <a:p>
+            <a:pPr indent="0" marL="0">
+              <a:buNone/>
+            </a:pPr>
+            <a:r>
+              <a:rPr lang="en-US" sz="1500" dirty="0">
+                <a:solidFill>
+                  <a:srgbClr val="1F2937"/>
+                </a:solidFill>
+                <a:latin typeface="Arial" pitchFamily="34" charset="0"/>
+                <a:ea typeface="Arial" pitchFamily="34" charset="-122"/>
+                <a:cs typeface="Arial" pitchFamily="34" charset="-120"/>
+              </a:rPr>
+              <a:t>Das sete etapas da tela, a mais sensível é a troca de titularidade: sem ela, a entidade não informa o rateio e os créditos não chegam aos clientes. Acompanhe o protocolo de perto. A sequência exata depende da sua estrutura jurídica e da distribuidora.</a:t>
+            </a:r>
+            <a:endParaRPr lang="en-US" sz="1500" dirty="0"/>
           </a:p>
         </p:txBody>
       </p:sp>
@@ -8754,11 +9454,11 @@
         <p:spPr>
           <a:xfrm>
             <a:off x="548640" y="1325880"/>
-            <a:ext cx="5431536" cy="4892040"/>
+            <a:ext cx="5431536" cy="3977640"/>
           </a:xfrm>
           <a:prstGeom prst="roundRect">
             <a:avLst>
-              <a:gd name="adj" fmla="val 1495"/>
+              <a:gd name="adj" fmla="val 1839"/>
             </a:avLst>
           </a:prstGeom>
           <a:solidFill>
@@ -8847,7 +9547,7 @@
         <p:spPr>
           <a:xfrm>
             <a:off x="1325880" y="1435608"/>
-            <a:ext cx="4517136" cy="4672584"/>
+            <a:ext cx="4517136" cy="3758184"/>
           </a:xfrm>
           <a:prstGeom prst="rect">
             <a:avLst/>
@@ -8888,11 +9588,11 @@
         <p:spPr>
           <a:xfrm>
             <a:off x="6208776" y="1325880"/>
-            <a:ext cx="5431536" cy="4892040"/>
+            <a:ext cx="5431536" cy="3977640"/>
           </a:xfrm>
           <a:prstGeom prst="roundRect">
             <a:avLst>
-              <a:gd name="adj" fmla="val 1495"/>
+              <a:gd name="adj" fmla="val 1839"/>
             </a:avLst>
           </a:prstGeom>
           <a:solidFill>
@@ -8981,7 +9681,7 @@
         <p:spPr>
           <a:xfrm>
             <a:off x="6986016" y="1435608"/>
-            <a:ext cx="4517136" cy="4672584"/>
+            <a:ext cx="4517136" cy="3758184"/>
           </a:xfrm>
           <a:prstGeom prst="rect">
             <a:avLst/>
@@ -9010,6 +9710,92 @@
               <a:t>cliente só entra no rateio depois da etapa 7</a:t>
             </a:r>
             <a:endParaRPr lang="en-US" sz="1800" dirty="0"/>
+          </a:p>
+        </p:txBody>
+      </p:sp>
+      <p:sp>
+        <p:nvSpPr>
+          <p:cNvPr id="17" name="Shape 14"/>
+          <p:cNvSpPr/>
+          <p:nvPr/>
+        </p:nvSpPr>
+        <p:spPr>
+          <a:xfrm>
+            <a:off x="548640" y="5413248"/>
+            <a:ext cx="11091672" cy="868680"/>
+          </a:xfrm>
+          <a:prstGeom prst="roundRect">
+            <a:avLst>
+              <a:gd name="adj" fmla="val 8421"/>
+            </a:avLst>
+          </a:prstGeom>
+          <a:solidFill>
+            <a:srgbClr val="EEF3FA"/>
+          </a:solidFill>
+          <a:ln w="6350">
+            <a:solidFill>
+              <a:srgbClr val="D8E0EC"/>
+            </a:solidFill>
+            <a:prstDash val="solid"/>
+          </a:ln>
+        </p:spPr>
+      </p:sp>
+      <p:sp>
+        <p:nvSpPr>
+          <p:cNvPr id="18" name="Shape 15"/>
+          <p:cNvSpPr/>
+          <p:nvPr/>
+        </p:nvSpPr>
+        <p:spPr>
+          <a:xfrm>
+            <a:off x="548640" y="5413248"/>
+            <a:ext cx="91440" cy="868680"/>
+          </a:xfrm>
+          <a:prstGeom prst="rect">
+            <a:avLst/>
+          </a:prstGeom>
+          <a:solidFill>
+            <a:srgbClr val="F7A23B"/>
+          </a:solidFill>
+          <a:ln/>
+        </p:spPr>
+      </p:sp>
+      <p:sp>
+        <p:nvSpPr>
+          <p:cNvPr id="19" name="Text 16"/>
+          <p:cNvSpPr/>
+          <p:nvPr/>
+        </p:nvSpPr>
+        <p:spPr>
+          <a:xfrm>
+            <a:off x="777240" y="5458968"/>
+            <a:ext cx="10744200" cy="777240"/>
+          </a:xfrm>
+          <a:prstGeom prst="rect">
+            <a:avLst/>
+          </a:prstGeom>
+          <a:noFill/>
+          <a:ln/>
+        </p:spPr>
+        <p:txBody>
+          <a:bodyPr wrap="square" rtlCol="0" anchor="ctr"/>
+          <a:lstStyle/>
+          <a:p>
+            <a:pPr indent="0" marL="0">
+              <a:buNone/>
+            </a:pPr>
+            <a:r>
+              <a:rPr lang="en-US" sz="1500" dirty="0">
+                <a:solidFill>
+                  <a:srgbClr val="1F2937"/>
+                </a:solidFill>
+                <a:latin typeface="Arial" pitchFamily="34" charset="0"/>
+                <a:ea typeface="Arial" pitchFamily="34" charset="-122"/>
+                <a:cs typeface="Arial" pitchFamily="34" charset="-120"/>
+              </a:rPr>
+              <a:t>Você pode fazer pré-venda durante o onboarding, com data honesta. Mas o cliente só entra no rateio depois da etapa sete.</a:t>
+            </a:r>
+            <a:endParaRPr lang="en-US" sz="1500" dirty="0"/>
           </a:p>
         </p:txBody>
       </p:sp>
@@ -11455,7 +12241,7 @@
                 <a:ea typeface="Arial" pitchFamily="34" charset="-122"/>
                 <a:cs typeface="Arial" pitchFamily="34" charset="-120"/>
               </a:rPr>
-              <a:t>Produtores Solar → Produtores → Novo · Pessoa Física/Jurídica · CPF/CNPJ · Nome · Contato · Consultor</a:t>
+              <a:t>Em Produtores Solar, Produtores, crie o produtor: tipo de pessoa, CPF ou CNPJ da lista do curso, nome, contatos e consultor.</a:t>
             </a:r>
             <a:endParaRPr lang="en-US" sz="1500" dirty="0"/>
           </a:p>
@@ -11506,7 +12292,7 @@
                 <a:ea typeface="Arial" pitchFamily="34" charset="-122"/>
                 <a:cs typeface="Arial" pitchFamily="34" charset="-120"/>
               </a:rPr>
-              <a:t>Mesmo CPF/CNPJ = mesmo produtor (sem duplicar)</a:t>
+              <a:t>Tente cadastrar o mesmo CPF de novo: a plataforma reaproveita o cadastro e evita duplicidade.</a:t>
             </a:r>
             <a:endParaRPr lang="en-US" sz="1500" dirty="0"/>
           </a:p>
@@ -11557,7 +12343,7 @@
                 <a:ea typeface="Arial" pitchFamily="34" charset="-122"/>
                 <a:cs typeface="Arial" pitchFamily="34" charset="-120"/>
               </a:rPr>
-              <a:t>Produtores Solar → Propostas → Nova · Produtor · Concessionária · Potência · Média de Geração · Prazo</a:t>
+              <a:t>Em Produtores Solar, Propostas, crie a proposta: produtor, concessionária, potência, média de geração e prazo. Confira os números com a calculadora.</a:t>
             </a:r>
             <a:endParaRPr lang="en-US" sz="1500" dirty="0"/>
           </a:p>
@@ -11608,7 +12394,7 @@
                 <a:ea typeface="Arial" pitchFamily="34" charset="-122"/>
                 <a:cs typeface="Arial" pitchFamily="34" charset="-120"/>
               </a:rPr>
-              <a:t>PDF pronto para enviar: receita mensal · composição do kWh · projeção · condições</a:t>
+              <a:t>Gere o PDF: capa com receita mensal, composição do kWh, projeção e condições, na marca da sua empresa.</a:t>
             </a:r>
             <a:endParaRPr lang="en-US" sz="1500" dirty="0"/>
           </a:p>
@@ -12811,7 +13597,7 @@
                 <a:ea typeface="Arial" pitchFamily="34" charset="-122"/>
                 <a:cs typeface="Arial" pitchFamily="34" charset="-120"/>
               </a:rPr>
-              <a:t>Toda usina tem dono (produtor) e responsável (consultor)</a:t>
+              <a:t>Em Usinas Solar, Usinas, cadastre a usina com produtor, consultor e concessionária obrigatórios, potência e média de geração.</a:t>
             </a:r>
             <a:endParaRPr lang="en-US" sz="1500" dirty="0"/>
           </a:p>
@@ -12862,7 +13648,7 @@
                 <a:ea typeface="Arial" pitchFamily="34" charset="-122"/>
                 <a:cs typeface="Arial" pitchFamily="34" charset="-120"/>
               </a:rPr>
-              <a:t>Energia gerada · injetada · compensada · disponível para alocação · A energia disponível registrada passa a ser a da usina</a:t>
+              <a:t>Em Geração Mensal, registre três meses. A energia disponível para alocação passa a ser a da usina: use um valor conservador.</a:t>
             </a:r>
             <a:endParaRPr lang="en-US" sz="1500" dirty="0"/>
           </a:p>
@@ -12913,7 +13699,7 @@
                 <a:ea typeface="Arial" pitchFamily="34" charset="-122"/>
                 <a:cs typeface="Arial" pitchFamily="34" charset="-120"/>
               </a:rPr>
-              <a:t>Disponível − Alocada = Saldo para vender</a:t>
+              <a:t>Em Gestão de Energia, veja disponível, alocada e saldo. A plataforma não deixa vincular acima do saldo.</a:t>
             </a:r>
             <a:endParaRPr lang="en-US" sz="1500" dirty="0"/>
           </a:p>
@@ -12964,7 +13750,7 @@
                 <a:ea typeface="Arial" pitchFamily="34" charset="-122"/>
                 <a:cs typeface="Arial" pitchFamily="34" charset="-120"/>
               </a:rPr>
-              <a:t>O produtor acompanha a usina e a geração no portal</a:t>
+              <a:t>Troque para Produtor e confira a usina e a geração no portal.</a:t>
             </a:r>
             <a:endParaRPr lang="en-US" sz="1500" dirty="0"/>
           </a:p>
@@ -13536,7 +14322,7 @@
                 <a:ea typeface="Arial" pitchFamily="34" charset="-122"/>
                 <a:cs typeface="Arial" pitchFamily="34" charset="-120"/>
               </a:rPr>
-              <a:t>M4 · Fechamento</a:t>
+              <a:t>M4 · Teste rápido</a:t>
             </a:r>
             <a:endParaRPr lang="en-US" sz="900" dirty="0"/>
           </a:p>
@@ -13595,7 +14381,7 @@
                 <a:ea typeface="Arial" pitchFamily="34" charset="-122"/>
                 <a:cs typeface="Arial" pitchFamily="34" charset="-120"/>
               </a:rPr>
-              <a:t>FECHAMENTO DO MÓDULO</a:t>
+              <a:t>QUESTÕES 1–2 DE 6</a:t>
             </a:r>
             <a:endParaRPr lang="en-US" sz="1000" dirty="0"/>
           </a:p>
@@ -13636,7 +14422,7 @@
                 <a:ea typeface="Arial" pitchFamily="34" charset="-122"/>
                 <a:cs typeface="Arial" pitchFamily="34" charset="-120"/>
               </a:rPr>
-              <a:t>Pratique e entregue</a:t>
+              <a:t>Teste rápido</a:t>
             </a:r>
             <a:endParaRPr lang="en-US" sz="2600" dirty="0"/>
           </a:p>
@@ -13644,142 +14430,17 @@
       </p:sp>
       <p:sp>
         <p:nvSpPr>
-          <p:cNvPr id="9" name="Text 6"/>
+          <p:cNvPr id="9" name="Shape 6"/>
           <p:cNvSpPr/>
           <p:nvPr/>
         </p:nvSpPr>
         <p:spPr>
           <a:xfrm>
             <a:off x="548640" y="1325880"/>
-            <a:ext cx="5394960" cy="411480"/>
-          </a:xfrm>
-          <a:prstGeom prst="rect">
-            <a:avLst/>
-          </a:prstGeom>
-          <a:noFill/>
-          <a:ln/>
-        </p:spPr>
-        <p:txBody>
-          <a:bodyPr wrap="square" rtlCol="0" anchor="ctr"/>
-          <a:lstStyle/>
-          <a:p>
-            <a:pPr indent="0" marL="0">
-              <a:buNone/>
-            </a:pPr>
-            <a:r>
-              <a:rPr lang="en-US" sz="1600" b="1" dirty="0">
-                <a:solidFill>
-                  <a:srgbClr val="1B3A6B"/>
-                </a:solidFill>
-                <a:latin typeface="Arial" pitchFamily="34" charset="0"/>
-                <a:ea typeface="Arial" pitchFamily="34" charset="-122"/>
-                <a:cs typeface="Arial" pitchFamily="34" charset="-120"/>
-              </a:rPr>
-              <a:t>Exercícios</a:t>
-            </a:r>
-            <a:endParaRPr lang="en-US" sz="1600" dirty="0"/>
-          </a:p>
-        </p:txBody>
-      </p:sp>
-      <p:sp>
-        <p:nvSpPr>
-          <p:cNvPr id="10" name="Text 7"/>
-          <p:cNvSpPr/>
-          <p:nvPr/>
-        </p:nvSpPr>
-        <p:spPr>
-          <a:xfrm>
-            <a:off x="548640" y="1783080"/>
-            <a:ext cx="5394960" cy="4480560"/>
-          </a:xfrm>
-          <a:prstGeom prst="rect">
-            <a:avLst/>
-          </a:prstGeom>
-          <a:noFill/>
-          <a:ln/>
-        </p:spPr>
-        <p:txBody>
-          <a:bodyPr wrap="square" rtlCol="0" anchor="t">
-            <a:normAutofit/>
-          </a:bodyPr>
-          <a:lstStyle/>
-          <a:p>
-            <a:pPr indent="0" marL="0">
-              <a:spcAft>
-                <a:spcPts val="800"/>
-              </a:spcAft>
-              <a:buNone/>
-            </a:pPr>
-            <a:r>
-              <a:rPr lang="en-US" sz="1600" dirty="0">
-                <a:solidFill>
-                  <a:srgbClr val="1F2937"/>
-                </a:solidFill>
-                <a:latin typeface="Arial" pitchFamily="34" charset="0"/>
-                <a:ea typeface="Arial" pitchFamily="34" charset="-122"/>
-                <a:cs typeface="Arial" pitchFamily="34" charset="-120"/>
-              </a:rPr>
-              <a:t>1. Uma usina tem pedido de acesso protocolado em março/2023 e potência de 800 kW. Ela é GD I? Que risco existe se um único cliente ficar com 30% dos créditos?</a:t>
-            </a:r>
-            <a:endParaRPr lang="en-US" sz="1600" dirty="0"/>
-          </a:p>
-          <a:p>
-            <a:pPr indent="0" marL="0">
-              <a:spcAft>
-                <a:spcPts val="800"/>
-              </a:spcAft>
-              <a:buNone/>
-            </a:pPr>
-            <a:r>
-              <a:rPr lang="en-US" sz="1600" dirty="0">
-                <a:solidFill>
-                  <a:srgbClr val="1F2937"/>
-                </a:solidFill>
-                <a:latin typeface="Arial" pitchFamily="34" charset="0"/>
-                <a:ea typeface="Arial" pitchFamily="34" charset="-122"/>
-                <a:cs typeface="Arial" pitchFamily="34" charset="-120"/>
-              </a:rPr>
-              <a:t>2. Usina de 75.000 kWh/mês, crédito R$ 0,68, desconto 20%, taxa 15%. Repasse anual bruto ao produtor?</a:t>
-            </a:r>
-            <a:endParaRPr lang="en-US" sz="1600" dirty="0"/>
-          </a:p>
-          <a:p>
-            <a:pPr indent="0" marL="0">
-              <a:spcAft>
-                <a:spcPts val="800"/>
-              </a:spcAft>
-              <a:buNone/>
-            </a:pPr>
-            <a:r>
-              <a:rPr lang="en-US" sz="1600" dirty="0">
-                <a:solidFill>
-                  <a:srgbClr val="1F2937"/>
-                </a:solidFill>
-                <a:latin typeface="Arial" pitchFamily="34" charset="0"/>
-                <a:ea typeface="Arial" pitchFamily="34" charset="-122"/>
-                <a:cs typeface="Arial" pitchFamily="34" charset="-120"/>
-              </a:rPr>
-              <a:t>3. Liste 5 documentos que você pediria antes de assinar com um produtor.</a:t>
-            </a:r>
-            <a:endParaRPr lang="en-US" sz="1600" dirty="0"/>
-          </a:p>
-        </p:txBody>
-      </p:sp>
-      <p:sp>
-        <p:nvSpPr>
-          <p:cNvPr id="11" name="Shape 8"/>
-          <p:cNvSpPr/>
-          <p:nvPr/>
-        </p:nvSpPr>
-        <p:spPr>
-          <a:xfrm>
-            <a:off x="6172200" y="1325880"/>
-            <a:ext cx="5468112" cy="4937760"/>
-          </a:xfrm>
-          <a:prstGeom prst="roundRect">
-            <a:avLst>
-              <a:gd name="adj" fmla="val 1852"/>
-            </a:avLst>
+            <a:ext cx="502920" cy="502920"/>
+          </a:xfrm>
+          <a:prstGeom prst="ellipse">
+            <a:avLst/>
           </a:prstGeom>
           <a:solidFill>
             <a:srgbClr val="1B3A6B"/>
@@ -13789,32 +14450,135 @@
       </p:sp>
       <p:sp>
         <p:nvSpPr>
-          <p:cNvPr id="12" name="Text 9"/>
-          <p:cNvSpPr/>
-          <p:nvPr/>
-        </p:nvSpPr>
-        <p:spPr>
-          <a:xfrm>
-            <a:off x="6492240" y="1554480"/>
-            <a:ext cx="4828032" cy="4480560"/>
-          </a:xfrm>
-          <a:prstGeom prst="rect">
-            <a:avLst/>
-          </a:prstGeom>
-          <a:noFill/>
-          <a:ln/>
-        </p:spPr>
-        <p:txBody>
-          <a:bodyPr wrap="square" rtlCol="0" anchor="t">
-            <a:normAutofit/>
-          </a:bodyPr>
-          <a:lstStyle/>
-          <a:p>
-            <a:pPr indent="0" marL="0">
-              <a:buNone/>
-            </a:pPr>
-            <a:r>
-              <a:rPr lang="en-US" sz="1300" b="1" spc="100" kern="0" dirty="0">
+          <p:cNvPr id="10" name="Text 7"/>
+          <p:cNvSpPr/>
+          <p:nvPr/>
+        </p:nvSpPr>
+        <p:spPr>
+          <a:xfrm>
+            <a:off x="548640" y="1325880"/>
+            <a:ext cx="502920" cy="502920"/>
+          </a:xfrm>
+          <a:prstGeom prst="rect">
+            <a:avLst/>
+          </a:prstGeom>
+          <a:noFill/>
+          <a:ln/>
+        </p:spPr>
+        <p:txBody>
+          <a:bodyPr wrap="square" rtlCol="0" anchor="ctr"/>
+          <a:lstStyle/>
+          <a:p>
+            <a:pPr algn="ctr" indent="0" marL="0">
+              <a:buNone/>
+            </a:pPr>
+            <a:r>
+              <a:rPr lang="en-US" sz="1600" b="1" dirty="0">
+                <a:solidFill>
+                  <a:srgbClr val="FFFFFF"/>
+                </a:solidFill>
+                <a:latin typeface="Arial" pitchFamily="34" charset="0"/>
+                <a:ea typeface="Arial" pitchFamily="34" charset="-122"/>
+                <a:cs typeface="Arial" pitchFamily="34" charset="-120"/>
+              </a:rPr>
+              <a:t>1</a:t>
+            </a:r>
+            <a:endParaRPr lang="en-US" sz="1600" dirty="0"/>
+          </a:p>
+        </p:txBody>
+      </p:sp>
+      <p:sp>
+        <p:nvSpPr>
+          <p:cNvPr id="11" name="Text 8"/>
+          <p:cNvSpPr/>
+          <p:nvPr/>
+        </p:nvSpPr>
+        <p:spPr>
+          <a:xfrm>
+            <a:off x="1234440" y="1280160"/>
+            <a:ext cx="10424160" cy="640080"/>
+          </a:xfrm>
+          <a:prstGeom prst="rect">
+            <a:avLst/>
+          </a:prstGeom>
+          <a:noFill/>
+          <a:ln/>
+        </p:spPr>
+        <p:txBody>
+          <a:bodyPr wrap="square" rtlCol="0" anchor="ctr"/>
+          <a:lstStyle/>
+          <a:p>
+            <a:pPr indent="0" marL="0">
+              <a:buNone/>
+            </a:pPr>
+            <a:r>
+              <a:rPr lang="en-US" sz="1800" b="1" dirty="0">
+                <a:solidFill>
+                  <a:srgbClr val="1B3A6B"/>
+                </a:solidFill>
+                <a:latin typeface="Arial" pitchFamily="34" charset="0"/>
+                <a:ea typeface="Arial" pitchFamily="34" charset="-122"/>
+                <a:cs typeface="Arial" pitchFamily="34" charset="-120"/>
+              </a:rPr>
+              <a:t>Qual destes é o melhor sinal de uma usina "pronta para operar"?</a:t>
+            </a:r>
+            <a:endParaRPr lang="en-US" sz="1800" dirty="0"/>
+          </a:p>
+        </p:txBody>
+      </p:sp>
+      <p:sp>
+        <p:nvSpPr>
+          <p:cNvPr id="12" name="Shape 9"/>
+          <p:cNvSpPr/>
+          <p:nvPr/>
+        </p:nvSpPr>
+        <p:spPr>
+          <a:xfrm>
+            <a:off x="548640" y="2057400"/>
+            <a:ext cx="2601468" cy="1463040"/>
+          </a:xfrm>
+          <a:prstGeom prst="roundRect">
+            <a:avLst>
+              <a:gd name="adj" fmla="val 5000"/>
+            </a:avLst>
+          </a:prstGeom>
+          <a:solidFill>
+            <a:srgbClr val="FFFFFF"/>
+          </a:solidFill>
+          <a:ln w="9525">
+            <a:solidFill>
+              <a:srgbClr val="D8E0EC"/>
+            </a:solidFill>
+            <a:prstDash val="solid"/>
+          </a:ln>
+        </p:spPr>
+      </p:sp>
+      <p:sp>
+        <p:nvSpPr>
+          <p:cNvPr id="13" name="Text 10"/>
+          <p:cNvSpPr/>
+          <p:nvPr/>
+        </p:nvSpPr>
+        <p:spPr>
+          <a:xfrm>
+            <a:off x="685800" y="2148840"/>
+            <a:ext cx="365760" cy="365760"/>
+          </a:xfrm>
+          <a:prstGeom prst="rect">
+            <a:avLst/>
+          </a:prstGeom>
+          <a:noFill/>
+          <a:ln/>
+        </p:spPr>
+        <p:txBody>
+          <a:bodyPr wrap="square" rtlCol="0" anchor="ctr"/>
+          <a:lstStyle/>
+          <a:p>
+            <a:pPr indent="0" marL="0">
+              <a:buNone/>
+            </a:pPr>
+            <a:r>
+              <a:rPr lang="en-US" sz="1400" b="1" dirty="0">
                 <a:solidFill>
                   <a:srgbClr val="F7A23B"/>
                 </a:solidFill>
@@ -13822,14 +14586,412 @@
                 <a:ea typeface="Arial" pitchFamily="34" charset="-122"/>
                 <a:cs typeface="Arial" pitchFamily="34" charset="-120"/>
               </a:rPr>
-              <a:t>ENTREGÁVEL DO MÓDULO
-</a:t>
-            </a:r>
-            <a:pPr indent="0" marL="0">
-              <a:buNone/>
-            </a:pPr>
-            <a:r>
-              <a:rPr lang="en-US" sz="1600" dirty="0">
+              <a:t>A</a:t>
+            </a:r>
+            <a:endParaRPr lang="en-US" sz="1400" dirty="0"/>
+          </a:p>
+        </p:txBody>
+      </p:sp>
+      <p:sp>
+        <p:nvSpPr>
+          <p:cNvPr id="14" name="Text 11"/>
+          <p:cNvSpPr/>
+          <p:nvPr/>
+        </p:nvSpPr>
+        <p:spPr>
+          <a:xfrm>
+            <a:off x="685800" y="2514600"/>
+            <a:ext cx="2327148" cy="914400"/>
+          </a:xfrm>
+          <a:prstGeom prst="rect">
+            <a:avLst/>
+          </a:prstGeom>
+          <a:noFill/>
+          <a:ln/>
+        </p:spPr>
+        <p:txBody>
+          <a:bodyPr wrap="square" rtlCol="0" anchor="t"/>
+          <a:lstStyle/>
+          <a:p>
+            <a:pPr indent="0" marL="0">
+              <a:buNone/>
+            </a:pPr>
+            <a:r>
+              <a:rPr lang="en-US" sz="1500" dirty="0">
+                <a:solidFill>
+                  <a:srgbClr val="1F2937"/>
+                </a:solidFill>
+                <a:latin typeface="Arial" pitchFamily="34" charset="0"/>
+                <a:ea typeface="Arial" pitchFamily="34" charset="-122"/>
+                <a:cs typeface="Arial" pitchFamily="34" charset="-120"/>
+              </a:rPr>
+              <a:t>Terreno disponível</a:t>
+            </a:r>
+            <a:endParaRPr lang="en-US" sz="1500" dirty="0"/>
+          </a:p>
+        </p:txBody>
+      </p:sp>
+      <p:sp>
+        <p:nvSpPr>
+          <p:cNvPr id="15" name="Shape 12"/>
+          <p:cNvSpPr/>
+          <p:nvPr/>
+        </p:nvSpPr>
+        <p:spPr>
+          <a:xfrm>
+            <a:off x="3378708" y="2057400"/>
+            <a:ext cx="2601468" cy="1463040"/>
+          </a:xfrm>
+          <a:prstGeom prst="roundRect">
+            <a:avLst>
+              <a:gd name="adj" fmla="val 5000"/>
+            </a:avLst>
+          </a:prstGeom>
+          <a:solidFill>
+            <a:srgbClr val="FFFFFF"/>
+          </a:solidFill>
+          <a:ln w="9525">
+            <a:solidFill>
+              <a:srgbClr val="D8E0EC"/>
+            </a:solidFill>
+            <a:prstDash val="solid"/>
+          </a:ln>
+        </p:spPr>
+      </p:sp>
+      <p:sp>
+        <p:nvSpPr>
+          <p:cNvPr id="16" name="Text 13"/>
+          <p:cNvSpPr/>
+          <p:nvPr/>
+        </p:nvSpPr>
+        <p:spPr>
+          <a:xfrm>
+            <a:off x="3515868" y="2148840"/>
+            <a:ext cx="365760" cy="365760"/>
+          </a:xfrm>
+          <a:prstGeom prst="rect">
+            <a:avLst/>
+          </a:prstGeom>
+          <a:noFill/>
+          <a:ln/>
+        </p:spPr>
+        <p:txBody>
+          <a:bodyPr wrap="square" rtlCol="0" anchor="ctr"/>
+          <a:lstStyle/>
+          <a:p>
+            <a:pPr indent="0" marL="0">
+              <a:buNone/>
+            </a:pPr>
+            <a:r>
+              <a:rPr lang="en-US" sz="1400" b="1" dirty="0">
+                <a:solidFill>
+                  <a:srgbClr val="F7A23B"/>
+                </a:solidFill>
+                <a:latin typeface="Arial" pitchFamily="34" charset="0"/>
+                <a:ea typeface="Arial" pitchFamily="34" charset="-122"/>
+                <a:cs typeface="Arial" pitchFamily="34" charset="-120"/>
+              </a:rPr>
+              <a:t>B</a:t>
+            </a:r>
+            <a:endParaRPr lang="en-US" sz="1400" dirty="0"/>
+          </a:p>
+        </p:txBody>
+      </p:sp>
+      <p:sp>
+        <p:nvSpPr>
+          <p:cNvPr id="17" name="Text 14"/>
+          <p:cNvSpPr/>
+          <p:nvPr/>
+        </p:nvSpPr>
+        <p:spPr>
+          <a:xfrm>
+            <a:off x="3515868" y="2514600"/>
+            <a:ext cx="2327148" cy="914400"/>
+          </a:xfrm>
+          <a:prstGeom prst="rect">
+            <a:avLst/>
+          </a:prstGeom>
+          <a:noFill/>
+          <a:ln/>
+        </p:spPr>
+        <p:txBody>
+          <a:bodyPr wrap="square" rtlCol="0" anchor="t"/>
+          <a:lstStyle/>
+          <a:p>
+            <a:pPr indent="0" marL="0">
+              <a:buNone/>
+            </a:pPr>
+            <a:r>
+              <a:rPr lang="en-US" sz="1500" dirty="0">
+                <a:solidFill>
+                  <a:srgbClr val="1F2937"/>
+                </a:solidFill>
+                <a:latin typeface="Arial" pitchFamily="34" charset="0"/>
+                <a:ea typeface="Arial" pitchFamily="34" charset="-122"/>
+                <a:cs typeface="Arial" pitchFamily="34" charset="-120"/>
+              </a:rPr>
+              <a:t>Usina conectada com parecer de acesso e histórico de geração</a:t>
+            </a:r>
+            <a:endParaRPr lang="en-US" sz="1500" dirty="0"/>
+          </a:p>
+        </p:txBody>
+      </p:sp>
+      <p:sp>
+        <p:nvSpPr>
+          <p:cNvPr id="18" name="Shape 15"/>
+          <p:cNvSpPr/>
+          <p:nvPr/>
+        </p:nvSpPr>
+        <p:spPr>
+          <a:xfrm>
+            <a:off x="6208776" y="2057400"/>
+            <a:ext cx="2601468" cy="1463040"/>
+          </a:xfrm>
+          <a:prstGeom prst="roundRect">
+            <a:avLst>
+              <a:gd name="adj" fmla="val 5000"/>
+            </a:avLst>
+          </a:prstGeom>
+          <a:solidFill>
+            <a:srgbClr val="FFFFFF"/>
+          </a:solidFill>
+          <a:ln w="9525">
+            <a:solidFill>
+              <a:srgbClr val="D8E0EC"/>
+            </a:solidFill>
+            <a:prstDash val="solid"/>
+          </a:ln>
+        </p:spPr>
+      </p:sp>
+      <p:sp>
+        <p:nvSpPr>
+          <p:cNvPr id="19" name="Text 16"/>
+          <p:cNvSpPr/>
+          <p:nvPr/>
+        </p:nvSpPr>
+        <p:spPr>
+          <a:xfrm>
+            <a:off x="6345936" y="2148840"/>
+            <a:ext cx="365760" cy="365760"/>
+          </a:xfrm>
+          <a:prstGeom prst="rect">
+            <a:avLst/>
+          </a:prstGeom>
+          <a:noFill/>
+          <a:ln/>
+        </p:spPr>
+        <p:txBody>
+          <a:bodyPr wrap="square" rtlCol="0" anchor="ctr"/>
+          <a:lstStyle/>
+          <a:p>
+            <a:pPr indent="0" marL="0">
+              <a:buNone/>
+            </a:pPr>
+            <a:r>
+              <a:rPr lang="en-US" sz="1400" b="1" dirty="0">
+                <a:solidFill>
+                  <a:srgbClr val="F7A23B"/>
+                </a:solidFill>
+                <a:latin typeface="Arial" pitchFamily="34" charset="0"/>
+                <a:ea typeface="Arial" pitchFamily="34" charset="-122"/>
+                <a:cs typeface="Arial" pitchFamily="34" charset="-120"/>
+              </a:rPr>
+              <a:t>C</a:t>
+            </a:r>
+            <a:endParaRPr lang="en-US" sz="1400" dirty="0"/>
+          </a:p>
+        </p:txBody>
+      </p:sp>
+      <p:sp>
+        <p:nvSpPr>
+          <p:cNvPr id="20" name="Text 17"/>
+          <p:cNvSpPr/>
+          <p:nvPr/>
+        </p:nvSpPr>
+        <p:spPr>
+          <a:xfrm>
+            <a:off x="6345936" y="2514600"/>
+            <a:ext cx="2327148" cy="914400"/>
+          </a:xfrm>
+          <a:prstGeom prst="rect">
+            <a:avLst/>
+          </a:prstGeom>
+          <a:noFill/>
+          <a:ln/>
+        </p:spPr>
+        <p:txBody>
+          <a:bodyPr wrap="square" rtlCol="0" anchor="t"/>
+          <a:lstStyle/>
+          <a:p>
+            <a:pPr indent="0" marL="0">
+              <a:buNone/>
+            </a:pPr>
+            <a:r>
+              <a:rPr lang="en-US" sz="1500" dirty="0">
+                <a:solidFill>
+                  <a:srgbClr val="1F2937"/>
+                </a:solidFill>
+                <a:latin typeface="Arial" pitchFamily="34" charset="0"/>
+                <a:ea typeface="Arial" pitchFamily="34" charset="-122"/>
+                <a:cs typeface="Arial" pitchFamily="34" charset="-120"/>
+              </a:rPr>
+              <a:t>Orçamento de painéis</a:t>
+            </a:r>
+            <a:endParaRPr lang="en-US" sz="1500" dirty="0"/>
+          </a:p>
+        </p:txBody>
+      </p:sp>
+      <p:sp>
+        <p:nvSpPr>
+          <p:cNvPr id="21" name="Shape 18"/>
+          <p:cNvSpPr/>
+          <p:nvPr/>
+        </p:nvSpPr>
+        <p:spPr>
+          <a:xfrm>
+            <a:off x="9038844" y="2057400"/>
+            <a:ext cx="2601468" cy="1463040"/>
+          </a:xfrm>
+          <a:prstGeom prst="roundRect">
+            <a:avLst>
+              <a:gd name="adj" fmla="val 5000"/>
+            </a:avLst>
+          </a:prstGeom>
+          <a:solidFill>
+            <a:srgbClr val="FFFFFF"/>
+          </a:solidFill>
+          <a:ln w="9525">
+            <a:solidFill>
+              <a:srgbClr val="D8E0EC"/>
+            </a:solidFill>
+            <a:prstDash val="solid"/>
+          </a:ln>
+        </p:spPr>
+      </p:sp>
+      <p:sp>
+        <p:nvSpPr>
+          <p:cNvPr id="22" name="Text 19"/>
+          <p:cNvSpPr/>
+          <p:nvPr/>
+        </p:nvSpPr>
+        <p:spPr>
+          <a:xfrm>
+            <a:off x="9176004" y="2148840"/>
+            <a:ext cx="365760" cy="365760"/>
+          </a:xfrm>
+          <a:prstGeom prst="rect">
+            <a:avLst/>
+          </a:prstGeom>
+          <a:noFill/>
+          <a:ln/>
+        </p:spPr>
+        <p:txBody>
+          <a:bodyPr wrap="square" rtlCol="0" anchor="ctr"/>
+          <a:lstStyle/>
+          <a:p>
+            <a:pPr indent="0" marL="0">
+              <a:buNone/>
+            </a:pPr>
+            <a:r>
+              <a:rPr lang="en-US" sz="1400" b="1" dirty="0">
+                <a:solidFill>
+                  <a:srgbClr val="F7A23B"/>
+                </a:solidFill>
+                <a:latin typeface="Arial" pitchFamily="34" charset="0"/>
+                <a:ea typeface="Arial" pitchFamily="34" charset="-122"/>
+                <a:cs typeface="Arial" pitchFamily="34" charset="-120"/>
+              </a:rPr>
+              <a:t>D</a:t>
+            </a:r>
+            <a:endParaRPr lang="en-US" sz="1400" dirty="0"/>
+          </a:p>
+        </p:txBody>
+      </p:sp>
+      <p:sp>
+        <p:nvSpPr>
+          <p:cNvPr id="23" name="Text 20"/>
+          <p:cNvSpPr/>
+          <p:nvPr/>
+        </p:nvSpPr>
+        <p:spPr>
+          <a:xfrm>
+            <a:off x="9176004" y="2514600"/>
+            <a:ext cx="2327148" cy="914400"/>
+          </a:xfrm>
+          <a:prstGeom prst="rect">
+            <a:avLst/>
+          </a:prstGeom>
+          <a:noFill/>
+          <a:ln/>
+        </p:spPr>
+        <p:txBody>
+          <a:bodyPr wrap="square" rtlCol="0" anchor="t"/>
+          <a:lstStyle/>
+          <a:p>
+            <a:pPr indent="0" marL="0">
+              <a:buNone/>
+            </a:pPr>
+            <a:r>
+              <a:rPr lang="en-US" sz="1500" dirty="0">
+                <a:solidFill>
+                  <a:srgbClr val="1F2937"/>
+                </a:solidFill>
+                <a:latin typeface="Arial" pitchFamily="34" charset="0"/>
+                <a:ea typeface="Arial" pitchFamily="34" charset="-122"/>
+                <a:cs typeface="Arial" pitchFamily="34" charset="-120"/>
+              </a:rPr>
+              <a:t>Licença de construção</a:t>
+            </a:r>
+            <a:endParaRPr lang="en-US" sz="1500" dirty="0"/>
+          </a:p>
+        </p:txBody>
+      </p:sp>
+      <p:sp>
+        <p:nvSpPr>
+          <p:cNvPr id="24" name="Shape 21"/>
+          <p:cNvSpPr/>
+          <p:nvPr/>
+        </p:nvSpPr>
+        <p:spPr>
+          <a:xfrm>
+            <a:off x="548640" y="3840480"/>
+            <a:ext cx="502920" cy="502920"/>
+          </a:xfrm>
+          <a:prstGeom prst="ellipse">
+            <a:avLst/>
+          </a:prstGeom>
+          <a:solidFill>
+            <a:srgbClr val="1B3A6B"/>
+          </a:solidFill>
+          <a:ln/>
+        </p:spPr>
+      </p:sp>
+      <p:sp>
+        <p:nvSpPr>
+          <p:cNvPr id="25" name="Text 22"/>
+          <p:cNvSpPr/>
+          <p:nvPr/>
+        </p:nvSpPr>
+        <p:spPr>
+          <a:xfrm>
+            <a:off x="548640" y="3840480"/>
+            <a:ext cx="502920" cy="502920"/>
+          </a:xfrm>
+          <a:prstGeom prst="rect">
+            <a:avLst/>
+          </a:prstGeom>
+          <a:noFill/>
+          <a:ln/>
+        </p:spPr>
+        <p:txBody>
+          <a:bodyPr wrap="square" rtlCol="0" anchor="ctr"/>
+          <a:lstStyle/>
+          <a:p>
+            <a:pPr algn="ctr" indent="0" marL="0">
+              <a:buNone/>
+            </a:pPr>
+            <a:r>
+              <a:rPr lang="en-US" sz="1600" b="1" dirty="0">
                 <a:solidFill>
                   <a:srgbClr val="FFFFFF"/>
                 </a:solidFill>
@@ -13837,9 +14999,468 @@
                 <a:ea typeface="Arial" pitchFamily="34" charset="-122"/>
                 <a:cs typeface="Arial" pitchFamily="34" charset="-120"/>
               </a:rPr>
-              <a:t>A primeira usina da minha empresa no laboratório: produtor cadastrado, proposta de produtor gerada (PDF), usina cadastrada vinculada ao produtor e ao consultor, 3 meses de geração registrados. Mais o checklist de due diligence preenchido para uma usina real ou hipotética da sua região.</a:t>
-            </a:r>
-            <a:endParaRPr lang="en-US" sz="1300" dirty="0"/>
+              <a:t>2</a:t>
+            </a:r>
+            <a:endParaRPr lang="en-US" sz="1600" dirty="0"/>
+          </a:p>
+        </p:txBody>
+      </p:sp>
+      <p:sp>
+        <p:nvSpPr>
+          <p:cNvPr id="26" name="Text 23"/>
+          <p:cNvSpPr/>
+          <p:nvPr/>
+        </p:nvSpPr>
+        <p:spPr>
+          <a:xfrm>
+            <a:off x="1234440" y="3794760"/>
+            <a:ext cx="10424160" cy="640080"/>
+          </a:xfrm>
+          <a:prstGeom prst="rect">
+            <a:avLst/>
+          </a:prstGeom>
+          <a:noFill/>
+          <a:ln/>
+        </p:spPr>
+        <p:txBody>
+          <a:bodyPr wrap="square" rtlCol="0" anchor="ctr"/>
+          <a:lstStyle/>
+          <a:p>
+            <a:pPr indent="0" marL="0">
+              <a:buNone/>
+            </a:pPr>
+            <a:r>
+              <a:rPr lang="en-US" sz="1800" b="1" dirty="0">
+                <a:solidFill>
+                  <a:srgbClr val="1B3A6B"/>
+                </a:solidFill>
+                <a:latin typeface="Arial" pitchFamily="34" charset="0"/>
+                <a:ea typeface="Arial" pitchFamily="34" charset="-122"/>
+                <a:cs typeface="Arial" pitchFamily="34" charset="-120"/>
+              </a:rPr>
+              <a:t>Por que verificar a data do pedido de acesso?</a:t>
+            </a:r>
+            <a:endParaRPr lang="en-US" sz="1800" dirty="0"/>
+          </a:p>
+        </p:txBody>
+      </p:sp>
+      <p:sp>
+        <p:nvSpPr>
+          <p:cNvPr id="27" name="Shape 24"/>
+          <p:cNvSpPr/>
+          <p:nvPr/>
+        </p:nvSpPr>
+        <p:spPr>
+          <a:xfrm>
+            <a:off x="548640" y="4572000"/>
+            <a:ext cx="2601468" cy="1463040"/>
+          </a:xfrm>
+          <a:prstGeom prst="roundRect">
+            <a:avLst>
+              <a:gd name="adj" fmla="val 5000"/>
+            </a:avLst>
+          </a:prstGeom>
+          <a:solidFill>
+            <a:srgbClr val="FFFFFF"/>
+          </a:solidFill>
+          <a:ln w="9525">
+            <a:solidFill>
+              <a:srgbClr val="D8E0EC"/>
+            </a:solidFill>
+            <a:prstDash val="solid"/>
+          </a:ln>
+        </p:spPr>
+      </p:sp>
+      <p:sp>
+        <p:nvSpPr>
+          <p:cNvPr id="28" name="Text 25"/>
+          <p:cNvSpPr/>
+          <p:nvPr/>
+        </p:nvSpPr>
+        <p:spPr>
+          <a:xfrm>
+            <a:off x="685800" y="4663440"/>
+            <a:ext cx="365760" cy="365760"/>
+          </a:xfrm>
+          <a:prstGeom prst="rect">
+            <a:avLst/>
+          </a:prstGeom>
+          <a:noFill/>
+          <a:ln/>
+        </p:spPr>
+        <p:txBody>
+          <a:bodyPr wrap="square" rtlCol="0" anchor="ctr"/>
+          <a:lstStyle/>
+          <a:p>
+            <a:pPr indent="0" marL="0">
+              <a:buNone/>
+            </a:pPr>
+            <a:r>
+              <a:rPr lang="en-US" sz="1400" b="1" dirty="0">
+                <a:solidFill>
+                  <a:srgbClr val="F7A23B"/>
+                </a:solidFill>
+                <a:latin typeface="Arial" pitchFamily="34" charset="0"/>
+                <a:ea typeface="Arial" pitchFamily="34" charset="-122"/>
+                <a:cs typeface="Arial" pitchFamily="34" charset="-120"/>
+              </a:rPr>
+              <a:t>A</a:t>
+            </a:r>
+            <a:endParaRPr lang="en-US" sz="1400" dirty="0"/>
+          </a:p>
+        </p:txBody>
+      </p:sp>
+      <p:sp>
+        <p:nvSpPr>
+          <p:cNvPr id="29" name="Text 26"/>
+          <p:cNvSpPr/>
+          <p:nvPr/>
+        </p:nvSpPr>
+        <p:spPr>
+          <a:xfrm>
+            <a:off x="685800" y="5029200"/>
+            <a:ext cx="2327148" cy="914400"/>
+          </a:xfrm>
+          <a:prstGeom prst="rect">
+            <a:avLst/>
+          </a:prstGeom>
+          <a:noFill/>
+          <a:ln/>
+        </p:spPr>
+        <p:txBody>
+          <a:bodyPr wrap="square" rtlCol="0" anchor="t"/>
+          <a:lstStyle/>
+          <a:p>
+            <a:pPr indent="0" marL="0">
+              <a:buNone/>
+            </a:pPr>
+            <a:r>
+              <a:rPr lang="en-US" sz="1500" dirty="0">
+                <a:solidFill>
+                  <a:srgbClr val="1F2937"/>
+                </a:solidFill>
+                <a:latin typeface="Arial" pitchFamily="34" charset="0"/>
+                <a:ea typeface="Arial" pitchFamily="34" charset="-122"/>
+                <a:cs typeface="Arial" pitchFamily="34" charset="-120"/>
+              </a:rPr>
+              <a:t>Para saber se é GD I ou GD II</a:t>
+            </a:r>
+            <a:endParaRPr lang="en-US" sz="1500" dirty="0"/>
+          </a:p>
+        </p:txBody>
+      </p:sp>
+      <p:sp>
+        <p:nvSpPr>
+          <p:cNvPr id="30" name="Shape 27"/>
+          <p:cNvSpPr/>
+          <p:nvPr/>
+        </p:nvSpPr>
+        <p:spPr>
+          <a:xfrm>
+            <a:off x="3378708" y="4572000"/>
+            <a:ext cx="2601468" cy="1463040"/>
+          </a:xfrm>
+          <a:prstGeom prst="roundRect">
+            <a:avLst>
+              <a:gd name="adj" fmla="val 5000"/>
+            </a:avLst>
+          </a:prstGeom>
+          <a:solidFill>
+            <a:srgbClr val="FFFFFF"/>
+          </a:solidFill>
+          <a:ln w="9525">
+            <a:solidFill>
+              <a:srgbClr val="D8E0EC"/>
+            </a:solidFill>
+            <a:prstDash val="solid"/>
+          </a:ln>
+        </p:spPr>
+      </p:sp>
+      <p:sp>
+        <p:nvSpPr>
+          <p:cNvPr id="31" name="Text 28"/>
+          <p:cNvSpPr/>
+          <p:nvPr/>
+        </p:nvSpPr>
+        <p:spPr>
+          <a:xfrm>
+            <a:off x="3515868" y="4663440"/>
+            <a:ext cx="365760" cy="365760"/>
+          </a:xfrm>
+          <a:prstGeom prst="rect">
+            <a:avLst/>
+          </a:prstGeom>
+          <a:noFill/>
+          <a:ln/>
+        </p:spPr>
+        <p:txBody>
+          <a:bodyPr wrap="square" rtlCol="0" anchor="ctr"/>
+          <a:lstStyle/>
+          <a:p>
+            <a:pPr indent="0" marL="0">
+              <a:buNone/>
+            </a:pPr>
+            <a:r>
+              <a:rPr lang="en-US" sz="1400" b="1" dirty="0">
+                <a:solidFill>
+                  <a:srgbClr val="F7A23B"/>
+                </a:solidFill>
+                <a:latin typeface="Arial" pitchFamily="34" charset="0"/>
+                <a:ea typeface="Arial" pitchFamily="34" charset="-122"/>
+                <a:cs typeface="Arial" pitchFamily="34" charset="-120"/>
+              </a:rPr>
+              <a:t>B</a:t>
+            </a:r>
+            <a:endParaRPr lang="en-US" sz="1400" dirty="0"/>
+          </a:p>
+        </p:txBody>
+      </p:sp>
+      <p:sp>
+        <p:nvSpPr>
+          <p:cNvPr id="32" name="Text 29"/>
+          <p:cNvSpPr/>
+          <p:nvPr/>
+        </p:nvSpPr>
+        <p:spPr>
+          <a:xfrm>
+            <a:off x="3515868" y="5029200"/>
+            <a:ext cx="2327148" cy="914400"/>
+          </a:xfrm>
+          <a:prstGeom prst="rect">
+            <a:avLst/>
+          </a:prstGeom>
+          <a:noFill/>
+          <a:ln/>
+        </p:spPr>
+        <p:txBody>
+          <a:bodyPr wrap="square" rtlCol="0" anchor="t"/>
+          <a:lstStyle/>
+          <a:p>
+            <a:pPr indent="0" marL="0">
+              <a:buNone/>
+            </a:pPr>
+            <a:r>
+              <a:rPr lang="en-US" sz="1500" dirty="0">
+                <a:solidFill>
+                  <a:srgbClr val="1F2937"/>
+                </a:solidFill>
+                <a:latin typeface="Arial" pitchFamily="34" charset="0"/>
+                <a:ea typeface="Arial" pitchFamily="34" charset="-122"/>
+                <a:cs typeface="Arial" pitchFamily="34" charset="-120"/>
+              </a:rPr>
+              <a:t>para saber a cor dos painéis</a:t>
+            </a:r>
+            <a:endParaRPr lang="en-US" sz="1500" dirty="0"/>
+          </a:p>
+        </p:txBody>
+      </p:sp>
+      <p:sp>
+        <p:nvSpPr>
+          <p:cNvPr id="33" name="Shape 30"/>
+          <p:cNvSpPr/>
+          <p:nvPr/>
+        </p:nvSpPr>
+        <p:spPr>
+          <a:xfrm>
+            <a:off x="6208776" y="4572000"/>
+            <a:ext cx="2601468" cy="1463040"/>
+          </a:xfrm>
+          <a:prstGeom prst="roundRect">
+            <a:avLst>
+              <a:gd name="adj" fmla="val 5000"/>
+            </a:avLst>
+          </a:prstGeom>
+          <a:solidFill>
+            <a:srgbClr val="FFFFFF"/>
+          </a:solidFill>
+          <a:ln w="9525">
+            <a:solidFill>
+              <a:srgbClr val="D8E0EC"/>
+            </a:solidFill>
+            <a:prstDash val="solid"/>
+          </a:ln>
+        </p:spPr>
+      </p:sp>
+      <p:sp>
+        <p:nvSpPr>
+          <p:cNvPr id="34" name="Text 31"/>
+          <p:cNvSpPr/>
+          <p:nvPr/>
+        </p:nvSpPr>
+        <p:spPr>
+          <a:xfrm>
+            <a:off x="6345936" y="4663440"/>
+            <a:ext cx="365760" cy="365760"/>
+          </a:xfrm>
+          <a:prstGeom prst="rect">
+            <a:avLst/>
+          </a:prstGeom>
+          <a:noFill/>
+          <a:ln/>
+        </p:spPr>
+        <p:txBody>
+          <a:bodyPr wrap="square" rtlCol="0" anchor="ctr"/>
+          <a:lstStyle/>
+          <a:p>
+            <a:pPr indent="0" marL="0">
+              <a:buNone/>
+            </a:pPr>
+            <a:r>
+              <a:rPr lang="en-US" sz="1400" b="1" dirty="0">
+                <a:solidFill>
+                  <a:srgbClr val="F7A23B"/>
+                </a:solidFill>
+                <a:latin typeface="Arial" pitchFamily="34" charset="0"/>
+                <a:ea typeface="Arial" pitchFamily="34" charset="-122"/>
+                <a:cs typeface="Arial" pitchFamily="34" charset="-120"/>
+              </a:rPr>
+              <a:t>C</a:t>
+            </a:r>
+            <a:endParaRPr lang="en-US" sz="1400" dirty="0"/>
+          </a:p>
+        </p:txBody>
+      </p:sp>
+      <p:sp>
+        <p:nvSpPr>
+          <p:cNvPr id="35" name="Text 32"/>
+          <p:cNvSpPr/>
+          <p:nvPr/>
+        </p:nvSpPr>
+        <p:spPr>
+          <a:xfrm>
+            <a:off x="6345936" y="5029200"/>
+            <a:ext cx="2327148" cy="914400"/>
+          </a:xfrm>
+          <a:prstGeom prst="rect">
+            <a:avLst/>
+          </a:prstGeom>
+          <a:noFill/>
+          <a:ln/>
+        </p:spPr>
+        <p:txBody>
+          <a:bodyPr wrap="square" rtlCol="0" anchor="t"/>
+          <a:lstStyle/>
+          <a:p>
+            <a:pPr indent="0" marL="0">
+              <a:buNone/>
+            </a:pPr>
+            <a:r>
+              <a:rPr lang="en-US" sz="1500" dirty="0">
+                <a:solidFill>
+                  <a:srgbClr val="1F2937"/>
+                </a:solidFill>
+                <a:latin typeface="Arial" pitchFamily="34" charset="0"/>
+                <a:ea typeface="Arial" pitchFamily="34" charset="-122"/>
+                <a:cs typeface="Arial" pitchFamily="34" charset="-120"/>
+              </a:rPr>
+              <a:t>por exigência do banco</a:t>
+            </a:r>
+            <a:endParaRPr lang="en-US" sz="1500" dirty="0"/>
+          </a:p>
+        </p:txBody>
+      </p:sp>
+      <p:sp>
+        <p:nvSpPr>
+          <p:cNvPr id="36" name="Shape 33"/>
+          <p:cNvSpPr/>
+          <p:nvPr/>
+        </p:nvSpPr>
+        <p:spPr>
+          <a:xfrm>
+            <a:off x="9038844" y="4572000"/>
+            <a:ext cx="2601468" cy="1463040"/>
+          </a:xfrm>
+          <a:prstGeom prst="roundRect">
+            <a:avLst>
+              <a:gd name="adj" fmla="val 5000"/>
+            </a:avLst>
+          </a:prstGeom>
+          <a:solidFill>
+            <a:srgbClr val="FFFFFF"/>
+          </a:solidFill>
+          <a:ln w="9525">
+            <a:solidFill>
+              <a:srgbClr val="D8E0EC"/>
+            </a:solidFill>
+            <a:prstDash val="solid"/>
+          </a:ln>
+        </p:spPr>
+      </p:sp>
+      <p:sp>
+        <p:nvSpPr>
+          <p:cNvPr id="37" name="Text 34"/>
+          <p:cNvSpPr/>
+          <p:nvPr/>
+        </p:nvSpPr>
+        <p:spPr>
+          <a:xfrm>
+            <a:off x="9176004" y="4663440"/>
+            <a:ext cx="365760" cy="365760"/>
+          </a:xfrm>
+          <a:prstGeom prst="rect">
+            <a:avLst/>
+          </a:prstGeom>
+          <a:noFill/>
+          <a:ln/>
+        </p:spPr>
+        <p:txBody>
+          <a:bodyPr wrap="square" rtlCol="0" anchor="ctr"/>
+          <a:lstStyle/>
+          <a:p>
+            <a:pPr indent="0" marL="0">
+              <a:buNone/>
+            </a:pPr>
+            <a:r>
+              <a:rPr lang="en-US" sz="1400" b="1" dirty="0">
+                <a:solidFill>
+                  <a:srgbClr val="F7A23B"/>
+                </a:solidFill>
+                <a:latin typeface="Arial" pitchFamily="34" charset="0"/>
+                <a:ea typeface="Arial" pitchFamily="34" charset="-122"/>
+                <a:cs typeface="Arial" pitchFamily="34" charset="-120"/>
+              </a:rPr>
+              <a:t>D</a:t>
+            </a:r>
+            <a:endParaRPr lang="en-US" sz="1400" dirty="0"/>
+          </a:p>
+        </p:txBody>
+      </p:sp>
+      <p:sp>
+        <p:nvSpPr>
+          <p:cNvPr id="38" name="Text 35"/>
+          <p:cNvSpPr/>
+          <p:nvPr/>
+        </p:nvSpPr>
+        <p:spPr>
+          <a:xfrm>
+            <a:off x="9176004" y="5029200"/>
+            <a:ext cx="2327148" cy="914400"/>
+          </a:xfrm>
+          <a:prstGeom prst="rect">
+            <a:avLst/>
+          </a:prstGeom>
+          <a:noFill/>
+          <a:ln/>
+        </p:spPr>
+        <p:txBody>
+          <a:bodyPr wrap="square" rtlCol="0" anchor="t"/>
+          <a:lstStyle/>
+          <a:p>
+            <a:pPr indent="0" marL="0">
+              <a:buNone/>
+            </a:pPr>
+            <a:r>
+              <a:rPr lang="en-US" sz="1500" dirty="0">
+                <a:solidFill>
+                  <a:srgbClr val="1F2937"/>
+                </a:solidFill>
+                <a:latin typeface="Arial" pitchFamily="34" charset="0"/>
+                <a:ea typeface="Arial" pitchFamily="34" charset="-122"/>
+                <a:cs typeface="Arial" pitchFamily="34" charset="-120"/>
+              </a:rPr>
+              <a:t>não importa</a:t>
+            </a:r>
+            <a:endParaRPr lang="en-US" sz="1500" dirty="0"/>
           </a:p>
         </p:txBody>
       </p:sp>
@@ -13886,6 +15507,3593 @@
             <a:fld id="{F7021451-1387-4CA6-816F-3879F97B5CBC}" type="slidenum">
               <a:rPr b="1" lang="en-US"/>
               <a:t>26</a:t>
+            </a:fld>
+            <a:endParaRPr lang="en-US"/>
+          </a:p>
+        </p:txBody>
+      </p:sp>
+    </p:spTree>
+  </p:cSld>
+  <p:clrMapOvr>
+    <a:masterClrMapping/>
+  </p:clrMapOvr>
+</p:sld>
+</file>
+
+<file path=ppt/slides/slide27.xml><?xml version="1.0" encoding="utf-8"?>
+<p:sld xmlns:a="http://schemas.openxmlformats.org/drawingml/2006/main" xmlns:r="http://schemas.openxmlformats.org/officeDocument/2006/relationships" xmlns:p="http://schemas.openxmlformats.org/presentationml/2006/main">
+  <p:cSld name="Slide 27">
+    <p:bg>
+      <p:bgPr>
+        <a:solidFill>
+          <a:srgbClr val="F6F8FB"/>
+        </a:solidFill>
+      </p:bgPr>
+    </p:bg>
+    <p:spTree>
+      <p:nvGrpSpPr>
+        <p:cNvPr id="1" name=""/>
+        <p:cNvGrpSpPr/>
+        <p:nvPr/>
+      </p:nvGrpSpPr>
+      <p:grpSpPr>
+        <a:xfrm>
+          <a:off x="0" y="0"/>
+          <a:ext cx="0" cy="0"/>
+          <a:chOff x="0" y="0"/>
+          <a:chExt cx="0" cy="0"/>
+        </a:xfrm>
+      </p:grpSpPr>
+      <p:sp>
+        <p:nvSpPr>
+          <p:cNvPr id="2" name="Shape 0"/>
+          <p:cNvSpPr/>
+          <p:nvPr/>
+        </p:nvSpPr>
+        <p:spPr>
+          <a:xfrm>
+            <a:off x="0" y="6510528"/>
+            <a:ext cx="12191695" cy="347472"/>
+          </a:xfrm>
+          <a:prstGeom prst="rect">
+            <a:avLst/>
+          </a:prstGeom>
+          <a:solidFill>
+            <a:srgbClr val="FFFFFF"/>
+          </a:solidFill>
+          <a:ln w="6350">
+            <a:solidFill>
+              <a:srgbClr val="D8E0EC"/>
+            </a:solidFill>
+            <a:prstDash val="solid"/>
+          </a:ln>
+        </p:spPr>
+      </p:sp>
+      <p:pic>
+        <p:nvPicPr>
+          <p:cNvPr id="3" name="Image 0" descr="/www/wwwroot/rexar/gdsolar/docs/curso/slides/assets/logo-gdsolar.png">    </p:cNvPr>
+          <p:cNvPicPr>
+            <a:picLocks noChangeAspect="1"/>
+          </p:cNvPicPr>
+          <p:nvPr/>
+        </p:nvPicPr>
+        <p:blipFill>
+          <a:blip r:embed="rId1"/>
+          <a:stretch>
+            <a:fillRect/>
+          </a:stretch>
+        </p:blipFill>
+        <p:spPr>
+          <a:xfrm>
+            <a:off x="548640" y="6547104"/>
+            <a:ext cx="274320" cy="274320"/>
+          </a:xfrm>
+          <a:prstGeom prst="rect">
+            <a:avLst/>
+          </a:prstGeom>
+        </p:spPr>
+      </p:pic>
+      <p:sp>
+        <p:nvSpPr>
+          <p:cNvPr id="4" name="Text 1"/>
+          <p:cNvSpPr/>
+          <p:nvPr/>
+        </p:nvSpPr>
+        <p:spPr>
+          <a:xfrm>
+            <a:off x="886968" y="6528816"/>
+            <a:ext cx="6400800" cy="310896"/>
+          </a:xfrm>
+          <a:prstGeom prst="rect">
+            <a:avLst/>
+          </a:prstGeom>
+          <a:noFill/>
+          <a:ln/>
+        </p:spPr>
+        <p:txBody>
+          <a:bodyPr wrap="square" rtlCol="0" anchor="ctr"/>
+          <a:lstStyle/>
+          <a:p>
+            <a:pPr indent="0" marL="0">
+              <a:buNone/>
+            </a:pPr>
+            <a:r>
+              <a:rPr lang="en-US" sz="900" b="1" dirty="0">
+                <a:solidFill>
+                  <a:srgbClr val="64748B"/>
+                </a:solidFill>
+                <a:latin typeface="Arial" pitchFamily="34" charset="0"/>
+                <a:ea typeface="Arial" pitchFamily="34" charset="-122"/>
+                <a:cs typeface="Arial" pitchFamily="34" charset="-120"/>
+              </a:rPr>
+              <a:t>GD Solar  ·  Formação em Energia por Assinatura</a:t>
+            </a:r>
+            <a:endParaRPr lang="en-US" sz="900" dirty="0"/>
+          </a:p>
+        </p:txBody>
+      </p:sp>
+      <p:sp>
+        <p:nvSpPr>
+          <p:cNvPr id="5" name="Text 2"/>
+          <p:cNvSpPr/>
+          <p:nvPr/>
+        </p:nvSpPr>
+        <p:spPr>
+          <a:xfrm>
+            <a:off x="7132320" y="6528816"/>
+            <a:ext cx="4023360" cy="310896"/>
+          </a:xfrm>
+          <a:prstGeom prst="rect">
+            <a:avLst/>
+          </a:prstGeom>
+          <a:noFill/>
+          <a:ln/>
+        </p:spPr>
+        <p:txBody>
+          <a:bodyPr wrap="square" rtlCol="0" anchor="ctr"/>
+          <a:lstStyle/>
+          <a:p>
+            <a:pPr algn="r" indent="0" marL="0">
+              <a:buNone/>
+            </a:pPr>
+            <a:r>
+              <a:rPr lang="en-US" sz="900" dirty="0">
+                <a:solidFill>
+                  <a:srgbClr val="64748B"/>
+                </a:solidFill>
+                <a:latin typeface="Arial" pitchFamily="34" charset="0"/>
+                <a:ea typeface="Arial" pitchFamily="34" charset="-122"/>
+                <a:cs typeface="Arial" pitchFamily="34" charset="-120"/>
+              </a:rPr>
+              <a:t>M4 · Teste rápido</a:t>
+            </a:r>
+            <a:endParaRPr lang="en-US" sz="900" dirty="0"/>
+          </a:p>
+        </p:txBody>
+      </p:sp>
+      <p:sp>
+        <p:nvSpPr>
+          <p:cNvPr id="6" name="Shape 3"/>
+          <p:cNvSpPr/>
+          <p:nvPr/>
+        </p:nvSpPr>
+        <p:spPr>
+          <a:xfrm>
+            <a:off x="548640" y="384048"/>
+            <a:ext cx="82296" cy="658368"/>
+          </a:xfrm>
+          <a:prstGeom prst="rect">
+            <a:avLst/>
+          </a:prstGeom>
+          <a:solidFill>
+            <a:srgbClr val="F7A23B"/>
+          </a:solidFill>
+          <a:ln/>
+        </p:spPr>
+      </p:sp>
+      <p:sp>
+        <p:nvSpPr>
+          <p:cNvPr id="7" name="Text 4"/>
+          <p:cNvSpPr/>
+          <p:nvPr/>
+        </p:nvSpPr>
+        <p:spPr>
+          <a:xfrm>
+            <a:off x="777240" y="292608"/>
+            <a:ext cx="10972800" cy="274320"/>
+          </a:xfrm>
+          <a:prstGeom prst="rect">
+            <a:avLst/>
+          </a:prstGeom>
+          <a:noFill/>
+          <a:ln/>
+        </p:spPr>
+        <p:txBody>
+          <a:bodyPr wrap="square" rtlCol="0" anchor="ctr"/>
+          <a:lstStyle/>
+          <a:p>
+            <a:pPr indent="0" marL="0">
+              <a:buNone/>
+            </a:pPr>
+            <a:r>
+              <a:rPr lang="en-US" sz="1000" b="1" spc="100" kern="0" dirty="0">
+                <a:solidFill>
+                  <a:srgbClr val="F7A23B"/>
+                </a:solidFill>
+                <a:latin typeface="Arial" pitchFamily="34" charset="0"/>
+                <a:ea typeface="Arial" pitchFamily="34" charset="-122"/>
+                <a:cs typeface="Arial" pitchFamily="34" charset="-120"/>
+              </a:rPr>
+              <a:t>QUESTÕES 3–4 DE 6</a:t>
+            </a:r>
+            <a:endParaRPr lang="en-US" sz="1000" dirty="0"/>
+          </a:p>
+        </p:txBody>
+      </p:sp>
+      <p:sp>
+        <p:nvSpPr>
+          <p:cNvPr id="8" name="Text 5"/>
+          <p:cNvSpPr/>
+          <p:nvPr/>
+        </p:nvSpPr>
+        <p:spPr>
+          <a:xfrm>
+            <a:off x="777240" y="530352"/>
+            <a:ext cx="10881360" cy="566928"/>
+          </a:xfrm>
+          <a:prstGeom prst="rect">
+            <a:avLst/>
+          </a:prstGeom>
+          <a:noFill/>
+          <a:ln/>
+        </p:spPr>
+        <p:txBody>
+          <a:bodyPr wrap="square" rtlCol="0" anchor="ctr">
+            <a:normAutofit/>
+          </a:bodyPr>
+          <a:lstStyle/>
+          <a:p>
+            <a:pPr indent="0" marL="0">
+              <a:buNone/>
+            </a:pPr>
+            <a:r>
+              <a:rPr lang="en-US" sz="2600" b="1" dirty="0">
+                <a:solidFill>
+                  <a:srgbClr val="1B3A6B"/>
+                </a:solidFill>
+                <a:latin typeface="Arial" pitchFamily="34" charset="0"/>
+                <a:ea typeface="Arial" pitchFamily="34" charset="-122"/>
+                <a:cs typeface="Arial" pitchFamily="34" charset="-120"/>
+              </a:rPr>
+              <a:t>Teste rápido</a:t>
+            </a:r>
+            <a:endParaRPr lang="en-US" sz="2600" dirty="0"/>
+          </a:p>
+        </p:txBody>
+      </p:sp>
+      <p:sp>
+        <p:nvSpPr>
+          <p:cNvPr id="9" name="Shape 6"/>
+          <p:cNvSpPr/>
+          <p:nvPr/>
+        </p:nvSpPr>
+        <p:spPr>
+          <a:xfrm>
+            <a:off x="548640" y="1325880"/>
+            <a:ext cx="502920" cy="502920"/>
+          </a:xfrm>
+          <a:prstGeom prst="ellipse">
+            <a:avLst/>
+          </a:prstGeom>
+          <a:solidFill>
+            <a:srgbClr val="1B3A6B"/>
+          </a:solidFill>
+          <a:ln/>
+        </p:spPr>
+      </p:sp>
+      <p:sp>
+        <p:nvSpPr>
+          <p:cNvPr id="10" name="Text 7"/>
+          <p:cNvSpPr/>
+          <p:nvPr/>
+        </p:nvSpPr>
+        <p:spPr>
+          <a:xfrm>
+            <a:off x="548640" y="1325880"/>
+            <a:ext cx="502920" cy="502920"/>
+          </a:xfrm>
+          <a:prstGeom prst="rect">
+            <a:avLst/>
+          </a:prstGeom>
+          <a:noFill/>
+          <a:ln/>
+        </p:spPr>
+        <p:txBody>
+          <a:bodyPr wrap="square" rtlCol="0" anchor="ctr"/>
+          <a:lstStyle/>
+          <a:p>
+            <a:pPr algn="ctr" indent="0" marL="0">
+              <a:buNone/>
+            </a:pPr>
+            <a:r>
+              <a:rPr lang="en-US" sz="1600" b="1" dirty="0">
+                <a:solidFill>
+                  <a:srgbClr val="FFFFFF"/>
+                </a:solidFill>
+                <a:latin typeface="Arial" pitchFamily="34" charset="0"/>
+                <a:ea typeface="Arial" pitchFamily="34" charset="-122"/>
+                <a:cs typeface="Arial" pitchFamily="34" charset="-120"/>
+              </a:rPr>
+              <a:t>3</a:t>
+            </a:r>
+            <a:endParaRPr lang="en-US" sz="1600" dirty="0"/>
+          </a:p>
+        </p:txBody>
+      </p:sp>
+      <p:sp>
+        <p:nvSpPr>
+          <p:cNvPr id="11" name="Text 8"/>
+          <p:cNvSpPr/>
+          <p:nvPr/>
+        </p:nvSpPr>
+        <p:spPr>
+          <a:xfrm>
+            <a:off x="1234440" y="1280160"/>
+            <a:ext cx="10424160" cy="640080"/>
+          </a:xfrm>
+          <a:prstGeom prst="rect">
+            <a:avLst/>
+          </a:prstGeom>
+          <a:noFill/>
+          <a:ln/>
+        </p:spPr>
+        <p:txBody>
+          <a:bodyPr wrap="square" rtlCol="0" anchor="ctr"/>
+          <a:lstStyle/>
+          <a:p>
+            <a:pPr indent="0" marL="0">
+              <a:buNone/>
+            </a:pPr>
+            <a:r>
+              <a:rPr lang="en-US" sz="1800" b="1" dirty="0">
+                <a:solidFill>
+                  <a:srgbClr val="1B3A6B"/>
+                </a:solidFill>
+                <a:latin typeface="Arial" pitchFamily="34" charset="0"/>
+                <a:ea typeface="Arial" pitchFamily="34" charset="-122"/>
+                <a:cs typeface="Arial" pitchFamily="34" charset="-120"/>
+              </a:rPr>
+              <a:t>Uma usina dada em garantia a um banco (alienação fiduciária) exige:</a:t>
+            </a:r>
+            <a:endParaRPr lang="en-US" sz="1800" dirty="0"/>
+          </a:p>
+        </p:txBody>
+      </p:sp>
+      <p:sp>
+        <p:nvSpPr>
+          <p:cNvPr id="12" name="Shape 9"/>
+          <p:cNvSpPr/>
+          <p:nvPr/>
+        </p:nvSpPr>
+        <p:spPr>
+          <a:xfrm>
+            <a:off x="548640" y="2057400"/>
+            <a:ext cx="2601468" cy="1463040"/>
+          </a:xfrm>
+          <a:prstGeom prst="roundRect">
+            <a:avLst>
+              <a:gd name="adj" fmla="val 5000"/>
+            </a:avLst>
+          </a:prstGeom>
+          <a:solidFill>
+            <a:srgbClr val="FFFFFF"/>
+          </a:solidFill>
+          <a:ln w="9525">
+            <a:solidFill>
+              <a:srgbClr val="D8E0EC"/>
+            </a:solidFill>
+            <a:prstDash val="solid"/>
+          </a:ln>
+        </p:spPr>
+      </p:sp>
+      <p:sp>
+        <p:nvSpPr>
+          <p:cNvPr id="13" name="Text 10"/>
+          <p:cNvSpPr/>
+          <p:nvPr/>
+        </p:nvSpPr>
+        <p:spPr>
+          <a:xfrm>
+            <a:off x="685800" y="2148840"/>
+            <a:ext cx="365760" cy="365760"/>
+          </a:xfrm>
+          <a:prstGeom prst="rect">
+            <a:avLst/>
+          </a:prstGeom>
+          <a:noFill/>
+          <a:ln/>
+        </p:spPr>
+        <p:txBody>
+          <a:bodyPr wrap="square" rtlCol="0" anchor="ctr"/>
+          <a:lstStyle/>
+          <a:p>
+            <a:pPr indent="0" marL="0">
+              <a:buNone/>
+            </a:pPr>
+            <a:r>
+              <a:rPr lang="en-US" sz="1400" b="1" dirty="0">
+                <a:solidFill>
+                  <a:srgbClr val="F7A23B"/>
+                </a:solidFill>
+                <a:latin typeface="Arial" pitchFamily="34" charset="0"/>
+                <a:ea typeface="Arial" pitchFamily="34" charset="-122"/>
+                <a:cs typeface="Arial" pitchFamily="34" charset="-120"/>
+              </a:rPr>
+              <a:t>A</a:t>
+            </a:r>
+            <a:endParaRPr lang="en-US" sz="1400" dirty="0"/>
+          </a:p>
+        </p:txBody>
+      </p:sp>
+      <p:sp>
+        <p:nvSpPr>
+          <p:cNvPr id="14" name="Text 11"/>
+          <p:cNvSpPr/>
+          <p:nvPr/>
+        </p:nvSpPr>
+        <p:spPr>
+          <a:xfrm>
+            <a:off x="685800" y="2514600"/>
+            <a:ext cx="2327148" cy="914400"/>
+          </a:xfrm>
+          <a:prstGeom prst="rect">
+            <a:avLst/>
+          </a:prstGeom>
+          <a:noFill/>
+          <a:ln/>
+        </p:spPr>
+        <p:txBody>
+          <a:bodyPr wrap="square" rtlCol="0" anchor="t"/>
+          <a:lstStyle/>
+          <a:p>
+            <a:pPr indent="0" marL="0">
+              <a:buNone/>
+            </a:pPr>
+            <a:r>
+              <a:rPr lang="en-US" sz="1500" dirty="0">
+                <a:solidFill>
+                  <a:srgbClr val="1F2937"/>
+                </a:solidFill>
+                <a:latin typeface="Arial" pitchFamily="34" charset="0"/>
+                <a:ea typeface="Arial" pitchFamily="34" charset="-122"/>
+                <a:cs typeface="Arial" pitchFamily="34" charset="-120"/>
+              </a:rPr>
+              <a:t>nada</a:t>
+            </a:r>
+            <a:endParaRPr lang="en-US" sz="1500" dirty="0"/>
+          </a:p>
+        </p:txBody>
+      </p:sp>
+      <p:sp>
+        <p:nvSpPr>
+          <p:cNvPr id="15" name="Shape 12"/>
+          <p:cNvSpPr/>
+          <p:nvPr/>
+        </p:nvSpPr>
+        <p:spPr>
+          <a:xfrm>
+            <a:off x="3378708" y="2057400"/>
+            <a:ext cx="2601468" cy="1463040"/>
+          </a:xfrm>
+          <a:prstGeom prst="roundRect">
+            <a:avLst>
+              <a:gd name="adj" fmla="val 5000"/>
+            </a:avLst>
+          </a:prstGeom>
+          <a:solidFill>
+            <a:srgbClr val="FFFFFF"/>
+          </a:solidFill>
+          <a:ln w="9525">
+            <a:solidFill>
+              <a:srgbClr val="D8E0EC"/>
+            </a:solidFill>
+            <a:prstDash val="solid"/>
+          </a:ln>
+        </p:spPr>
+      </p:sp>
+      <p:sp>
+        <p:nvSpPr>
+          <p:cNvPr id="16" name="Text 13"/>
+          <p:cNvSpPr/>
+          <p:nvPr/>
+        </p:nvSpPr>
+        <p:spPr>
+          <a:xfrm>
+            <a:off x="3515868" y="2148840"/>
+            <a:ext cx="365760" cy="365760"/>
+          </a:xfrm>
+          <a:prstGeom prst="rect">
+            <a:avLst/>
+          </a:prstGeom>
+          <a:noFill/>
+          <a:ln/>
+        </p:spPr>
+        <p:txBody>
+          <a:bodyPr wrap="square" rtlCol="0" anchor="ctr"/>
+          <a:lstStyle/>
+          <a:p>
+            <a:pPr indent="0" marL="0">
+              <a:buNone/>
+            </a:pPr>
+            <a:r>
+              <a:rPr lang="en-US" sz="1400" b="1" dirty="0">
+                <a:solidFill>
+                  <a:srgbClr val="F7A23B"/>
+                </a:solidFill>
+                <a:latin typeface="Arial" pitchFamily="34" charset="0"/>
+                <a:ea typeface="Arial" pitchFamily="34" charset="-122"/>
+                <a:cs typeface="Arial" pitchFamily="34" charset="-120"/>
+              </a:rPr>
+              <a:t>B</a:t>
+            </a:r>
+            <a:endParaRPr lang="en-US" sz="1400" dirty="0"/>
+          </a:p>
+        </p:txBody>
+      </p:sp>
+      <p:sp>
+        <p:nvSpPr>
+          <p:cNvPr id="17" name="Text 14"/>
+          <p:cNvSpPr/>
+          <p:nvPr/>
+        </p:nvSpPr>
+        <p:spPr>
+          <a:xfrm>
+            <a:off x="3515868" y="2514600"/>
+            <a:ext cx="2327148" cy="914400"/>
+          </a:xfrm>
+          <a:prstGeom prst="rect">
+            <a:avLst/>
+          </a:prstGeom>
+          <a:noFill/>
+          <a:ln/>
+        </p:spPr>
+        <p:txBody>
+          <a:bodyPr wrap="square" rtlCol="0" anchor="t"/>
+          <a:lstStyle/>
+          <a:p>
+            <a:pPr indent="0" marL="0">
+              <a:buNone/>
+            </a:pPr>
+            <a:r>
+              <a:rPr lang="en-US" sz="1500" dirty="0">
+                <a:solidFill>
+                  <a:srgbClr val="1F2937"/>
+                </a:solidFill>
+                <a:latin typeface="Arial" pitchFamily="34" charset="0"/>
+                <a:ea typeface="Arial" pitchFamily="34" charset="-122"/>
+                <a:cs typeface="Arial" pitchFamily="34" charset="-120"/>
+              </a:rPr>
+              <a:t>atenção a ônus e anuência do credor</a:t>
+            </a:r>
+            <a:endParaRPr lang="en-US" sz="1500" dirty="0"/>
+          </a:p>
+        </p:txBody>
+      </p:sp>
+      <p:sp>
+        <p:nvSpPr>
+          <p:cNvPr id="18" name="Shape 15"/>
+          <p:cNvSpPr/>
+          <p:nvPr/>
+        </p:nvSpPr>
+        <p:spPr>
+          <a:xfrm>
+            <a:off x="6208776" y="2057400"/>
+            <a:ext cx="2601468" cy="1463040"/>
+          </a:xfrm>
+          <a:prstGeom prst="roundRect">
+            <a:avLst>
+              <a:gd name="adj" fmla="val 5000"/>
+            </a:avLst>
+          </a:prstGeom>
+          <a:solidFill>
+            <a:srgbClr val="FFFFFF"/>
+          </a:solidFill>
+          <a:ln w="9525">
+            <a:solidFill>
+              <a:srgbClr val="D8E0EC"/>
+            </a:solidFill>
+            <a:prstDash val="solid"/>
+          </a:ln>
+        </p:spPr>
+      </p:sp>
+      <p:sp>
+        <p:nvSpPr>
+          <p:cNvPr id="19" name="Text 16"/>
+          <p:cNvSpPr/>
+          <p:nvPr/>
+        </p:nvSpPr>
+        <p:spPr>
+          <a:xfrm>
+            <a:off x="6345936" y="2148840"/>
+            <a:ext cx="365760" cy="365760"/>
+          </a:xfrm>
+          <a:prstGeom prst="rect">
+            <a:avLst/>
+          </a:prstGeom>
+          <a:noFill/>
+          <a:ln/>
+        </p:spPr>
+        <p:txBody>
+          <a:bodyPr wrap="square" rtlCol="0" anchor="ctr"/>
+          <a:lstStyle/>
+          <a:p>
+            <a:pPr indent="0" marL="0">
+              <a:buNone/>
+            </a:pPr>
+            <a:r>
+              <a:rPr lang="en-US" sz="1400" b="1" dirty="0">
+                <a:solidFill>
+                  <a:srgbClr val="F7A23B"/>
+                </a:solidFill>
+                <a:latin typeface="Arial" pitchFamily="34" charset="0"/>
+                <a:ea typeface="Arial" pitchFamily="34" charset="-122"/>
+                <a:cs typeface="Arial" pitchFamily="34" charset="-120"/>
+              </a:rPr>
+              <a:t>C</a:t>
+            </a:r>
+            <a:endParaRPr lang="en-US" sz="1400" dirty="0"/>
+          </a:p>
+        </p:txBody>
+      </p:sp>
+      <p:sp>
+        <p:nvSpPr>
+          <p:cNvPr id="20" name="Text 17"/>
+          <p:cNvSpPr/>
+          <p:nvPr/>
+        </p:nvSpPr>
+        <p:spPr>
+          <a:xfrm>
+            <a:off x="6345936" y="2514600"/>
+            <a:ext cx="2327148" cy="914400"/>
+          </a:xfrm>
+          <a:prstGeom prst="rect">
+            <a:avLst/>
+          </a:prstGeom>
+          <a:noFill/>
+          <a:ln/>
+        </p:spPr>
+        <p:txBody>
+          <a:bodyPr wrap="square" rtlCol="0" anchor="t"/>
+          <a:lstStyle/>
+          <a:p>
+            <a:pPr indent="0" marL="0">
+              <a:buNone/>
+            </a:pPr>
+            <a:r>
+              <a:rPr lang="en-US" sz="1500" dirty="0">
+                <a:solidFill>
+                  <a:srgbClr val="1F2937"/>
+                </a:solidFill>
+                <a:latin typeface="Arial" pitchFamily="34" charset="0"/>
+                <a:ea typeface="Arial" pitchFamily="34" charset="-122"/>
+                <a:cs typeface="Arial" pitchFamily="34" charset="-120"/>
+              </a:rPr>
+              <a:t>troca de distribuidora</a:t>
+            </a:r>
+            <a:endParaRPr lang="en-US" sz="1500" dirty="0"/>
+          </a:p>
+        </p:txBody>
+      </p:sp>
+      <p:sp>
+        <p:nvSpPr>
+          <p:cNvPr id="21" name="Shape 18"/>
+          <p:cNvSpPr/>
+          <p:nvPr/>
+        </p:nvSpPr>
+        <p:spPr>
+          <a:xfrm>
+            <a:off x="9038844" y="2057400"/>
+            <a:ext cx="2601468" cy="1463040"/>
+          </a:xfrm>
+          <a:prstGeom prst="roundRect">
+            <a:avLst>
+              <a:gd name="adj" fmla="val 5000"/>
+            </a:avLst>
+          </a:prstGeom>
+          <a:solidFill>
+            <a:srgbClr val="FFFFFF"/>
+          </a:solidFill>
+          <a:ln w="9525">
+            <a:solidFill>
+              <a:srgbClr val="D8E0EC"/>
+            </a:solidFill>
+            <a:prstDash val="solid"/>
+          </a:ln>
+        </p:spPr>
+      </p:sp>
+      <p:sp>
+        <p:nvSpPr>
+          <p:cNvPr id="22" name="Text 19"/>
+          <p:cNvSpPr/>
+          <p:nvPr/>
+        </p:nvSpPr>
+        <p:spPr>
+          <a:xfrm>
+            <a:off x="9176004" y="2148840"/>
+            <a:ext cx="365760" cy="365760"/>
+          </a:xfrm>
+          <a:prstGeom prst="rect">
+            <a:avLst/>
+          </a:prstGeom>
+          <a:noFill/>
+          <a:ln/>
+        </p:spPr>
+        <p:txBody>
+          <a:bodyPr wrap="square" rtlCol="0" anchor="ctr"/>
+          <a:lstStyle/>
+          <a:p>
+            <a:pPr indent="0" marL="0">
+              <a:buNone/>
+            </a:pPr>
+            <a:r>
+              <a:rPr lang="en-US" sz="1400" b="1" dirty="0">
+                <a:solidFill>
+                  <a:srgbClr val="F7A23B"/>
+                </a:solidFill>
+                <a:latin typeface="Arial" pitchFamily="34" charset="0"/>
+                <a:ea typeface="Arial" pitchFamily="34" charset="-122"/>
+                <a:cs typeface="Arial" pitchFamily="34" charset="-120"/>
+              </a:rPr>
+              <a:t>D</a:t>
+            </a:r>
+            <a:endParaRPr lang="en-US" sz="1400" dirty="0"/>
+          </a:p>
+        </p:txBody>
+      </p:sp>
+      <p:sp>
+        <p:nvSpPr>
+          <p:cNvPr id="23" name="Text 20"/>
+          <p:cNvSpPr/>
+          <p:nvPr/>
+        </p:nvSpPr>
+        <p:spPr>
+          <a:xfrm>
+            <a:off x="9176004" y="2514600"/>
+            <a:ext cx="2327148" cy="914400"/>
+          </a:xfrm>
+          <a:prstGeom prst="rect">
+            <a:avLst/>
+          </a:prstGeom>
+          <a:noFill/>
+          <a:ln/>
+        </p:spPr>
+        <p:txBody>
+          <a:bodyPr wrap="square" rtlCol="0" anchor="t"/>
+          <a:lstStyle/>
+          <a:p>
+            <a:pPr indent="0" marL="0">
+              <a:buNone/>
+            </a:pPr>
+            <a:r>
+              <a:rPr lang="en-US" sz="1500" dirty="0">
+                <a:solidFill>
+                  <a:srgbClr val="1F2937"/>
+                </a:solidFill>
+                <a:latin typeface="Arial" pitchFamily="34" charset="0"/>
+                <a:ea typeface="Arial" pitchFamily="34" charset="-122"/>
+                <a:cs typeface="Arial" pitchFamily="34" charset="-120"/>
+              </a:rPr>
+              <a:t>cancelamento</a:t>
+            </a:r>
+            <a:endParaRPr lang="en-US" sz="1500" dirty="0"/>
+          </a:p>
+        </p:txBody>
+      </p:sp>
+      <p:sp>
+        <p:nvSpPr>
+          <p:cNvPr id="24" name="Shape 21"/>
+          <p:cNvSpPr/>
+          <p:nvPr/>
+        </p:nvSpPr>
+        <p:spPr>
+          <a:xfrm>
+            <a:off x="548640" y="3840480"/>
+            <a:ext cx="502920" cy="502920"/>
+          </a:xfrm>
+          <a:prstGeom prst="ellipse">
+            <a:avLst/>
+          </a:prstGeom>
+          <a:solidFill>
+            <a:srgbClr val="1B3A6B"/>
+          </a:solidFill>
+          <a:ln/>
+        </p:spPr>
+      </p:sp>
+      <p:sp>
+        <p:nvSpPr>
+          <p:cNvPr id="25" name="Text 22"/>
+          <p:cNvSpPr/>
+          <p:nvPr/>
+        </p:nvSpPr>
+        <p:spPr>
+          <a:xfrm>
+            <a:off x="548640" y="3840480"/>
+            <a:ext cx="502920" cy="502920"/>
+          </a:xfrm>
+          <a:prstGeom prst="rect">
+            <a:avLst/>
+          </a:prstGeom>
+          <a:noFill/>
+          <a:ln/>
+        </p:spPr>
+        <p:txBody>
+          <a:bodyPr wrap="square" rtlCol="0" anchor="ctr"/>
+          <a:lstStyle/>
+          <a:p>
+            <a:pPr algn="ctr" indent="0" marL="0">
+              <a:buNone/>
+            </a:pPr>
+            <a:r>
+              <a:rPr lang="en-US" sz="1600" b="1" dirty="0">
+                <a:solidFill>
+                  <a:srgbClr val="FFFFFF"/>
+                </a:solidFill>
+                <a:latin typeface="Arial" pitchFamily="34" charset="0"/>
+                <a:ea typeface="Arial" pitchFamily="34" charset="-122"/>
+                <a:cs typeface="Arial" pitchFamily="34" charset="-120"/>
+              </a:rPr>
+              <a:t>4</a:t>
+            </a:r>
+            <a:endParaRPr lang="en-US" sz="1600" dirty="0"/>
+          </a:p>
+        </p:txBody>
+      </p:sp>
+      <p:sp>
+        <p:nvSpPr>
+          <p:cNvPr id="26" name="Text 23"/>
+          <p:cNvSpPr/>
+          <p:nvPr/>
+        </p:nvSpPr>
+        <p:spPr>
+          <a:xfrm>
+            <a:off x="1234440" y="3794760"/>
+            <a:ext cx="10424160" cy="640080"/>
+          </a:xfrm>
+          <a:prstGeom prst="rect">
+            <a:avLst/>
+          </a:prstGeom>
+          <a:noFill/>
+          <a:ln/>
+        </p:spPr>
+        <p:txBody>
+          <a:bodyPr wrap="square" rtlCol="0" anchor="ctr"/>
+          <a:lstStyle/>
+          <a:p>
+            <a:pPr indent="0" marL="0">
+              <a:buNone/>
+            </a:pPr>
+            <a:r>
+              <a:rPr lang="en-US" sz="1800" b="1" dirty="0">
+                <a:solidFill>
+                  <a:srgbClr val="1B3A6B"/>
+                </a:solidFill>
+                <a:latin typeface="Arial" pitchFamily="34" charset="0"/>
+                <a:ea typeface="Arial" pitchFamily="34" charset="-122"/>
+                <a:cs typeface="Arial" pitchFamily="34" charset="-120"/>
+              </a:rPr>
+              <a:t>Na proposta da plataforma, o repasse por kWh ao produtor é:</a:t>
+            </a:r>
+            <a:endParaRPr lang="en-US" sz="1800" dirty="0"/>
+          </a:p>
+        </p:txBody>
+      </p:sp>
+      <p:sp>
+        <p:nvSpPr>
+          <p:cNvPr id="27" name="Shape 24"/>
+          <p:cNvSpPr/>
+          <p:nvPr/>
+        </p:nvSpPr>
+        <p:spPr>
+          <a:xfrm>
+            <a:off x="548640" y="4572000"/>
+            <a:ext cx="2601468" cy="1463040"/>
+          </a:xfrm>
+          <a:prstGeom prst="roundRect">
+            <a:avLst>
+              <a:gd name="adj" fmla="val 5000"/>
+            </a:avLst>
+          </a:prstGeom>
+          <a:solidFill>
+            <a:srgbClr val="FFFFFF"/>
+          </a:solidFill>
+          <a:ln w="9525">
+            <a:solidFill>
+              <a:srgbClr val="D8E0EC"/>
+            </a:solidFill>
+            <a:prstDash val="solid"/>
+          </a:ln>
+        </p:spPr>
+      </p:sp>
+      <p:sp>
+        <p:nvSpPr>
+          <p:cNvPr id="28" name="Text 25"/>
+          <p:cNvSpPr/>
+          <p:nvPr/>
+        </p:nvSpPr>
+        <p:spPr>
+          <a:xfrm>
+            <a:off x="685800" y="4663440"/>
+            <a:ext cx="365760" cy="365760"/>
+          </a:xfrm>
+          <a:prstGeom prst="rect">
+            <a:avLst/>
+          </a:prstGeom>
+          <a:noFill/>
+          <a:ln/>
+        </p:spPr>
+        <p:txBody>
+          <a:bodyPr wrap="square" rtlCol="0" anchor="ctr"/>
+          <a:lstStyle/>
+          <a:p>
+            <a:pPr indent="0" marL="0">
+              <a:buNone/>
+            </a:pPr>
+            <a:r>
+              <a:rPr lang="en-US" sz="1400" b="1" dirty="0">
+                <a:solidFill>
+                  <a:srgbClr val="F7A23B"/>
+                </a:solidFill>
+                <a:latin typeface="Arial" pitchFamily="34" charset="0"/>
+                <a:ea typeface="Arial" pitchFamily="34" charset="-122"/>
+                <a:cs typeface="Arial" pitchFamily="34" charset="-120"/>
+              </a:rPr>
+              <a:t>A</a:t>
+            </a:r>
+            <a:endParaRPr lang="en-US" sz="1400" dirty="0"/>
+          </a:p>
+        </p:txBody>
+      </p:sp>
+      <p:sp>
+        <p:nvSpPr>
+          <p:cNvPr id="29" name="Text 26"/>
+          <p:cNvSpPr/>
+          <p:nvPr/>
+        </p:nvSpPr>
+        <p:spPr>
+          <a:xfrm>
+            <a:off x="685800" y="5029200"/>
+            <a:ext cx="2327148" cy="914400"/>
+          </a:xfrm>
+          <a:prstGeom prst="rect">
+            <a:avLst/>
+          </a:prstGeom>
+          <a:noFill/>
+          <a:ln/>
+        </p:spPr>
+        <p:txBody>
+          <a:bodyPr wrap="square" rtlCol="0" anchor="t"/>
+          <a:lstStyle/>
+          <a:p>
+            <a:pPr indent="0" marL="0">
+              <a:buNone/>
+            </a:pPr>
+            <a:r>
+              <a:rPr lang="en-US" sz="1500" dirty="0">
+                <a:solidFill>
+                  <a:srgbClr val="1F2937"/>
+                </a:solidFill>
+                <a:latin typeface="Arial" pitchFamily="34" charset="0"/>
+                <a:ea typeface="Arial" pitchFamily="34" charset="-122"/>
+                <a:cs typeface="Arial" pitchFamily="34" charset="-120"/>
+              </a:rPr>
+              <a:t>crédito − desconto do consumidor − taxa de administração</a:t>
+            </a:r>
+            <a:endParaRPr lang="en-US" sz="1500" dirty="0"/>
+          </a:p>
+        </p:txBody>
+      </p:sp>
+      <p:sp>
+        <p:nvSpPr>
+          <p:cNvPr id="30" name="Shape 27"/>
+          <p:cNvSpPr/>
+          <p:nvPr/>
+        </p:nvSpPr>
+        <p:spPr>
+          <a:xfrm>
+            <a:off x="3378708" y="4572000"/>
+            <a:ext cx="2601468" cy="1463040"/>
+          </a:xfrm>
+          <a:prstGeom prst="roundRect">
+            <a:avLst>
+              <a:gd name="adj" fmla="val 5000"/>
+            </a:avLst>
+          </a:prstGeom>
+          <a:solidFill>
+            <a:srgbClr val="FFFFFF"/>
+          </a:solidFill>
+          <a:ln w="9525">
+            <a:solidFill>
+              <a:srgbClr val="D8E0EC"/>
+            </a:solidFill>
+            <a:prstDash val="solid"/>
+          </a:ln>
+        </p:spPr>
+      </p:sp>
+      <p:sp>
+        <p:nvSpPr>
+          <p:cNvPr id="31" name="Text 28"/>
+          <p:cNvSpPr/>
+          <p:nvPr/>
+        </p:nvSpPr>
+        <p:spPr>
+          <a:xfrm>
+            <a:off x="3515868" y="4663440"/>
+            <a:ext cx="365760" cy="365760"/>
+          </a:xfrm>
+          <a:prstGeom prst="rect">
+            <a:avLst/>
+          </a:prstGeom>
+          <a:noFill/>
+          <a:ln/>
+        </p:spPr>
+        <p:txBody>
+          <a:bodyPr wrap="square" rtlCol="0" anchor="ctr"/>
+          <a:lstStyle/>
+          <a:p>
+            <a:pPr indent="0" marL="0">
+              <a:buNone/>
+            </a:pPr>
+            <a:r>
+              <a:rPr lang="en-US" sz="1400" b="1" dirty="0">
+                <a:solidFill>
+                  <a:srgbClr val="F7A23B"/>
+                </a:solidFill>
+                <a:latin typeface="Arial" pitchFamily="34" charset="0"/>
+                <a:ea typeface="Arial" pitchFamily="34" charset="-122"/>
+                <a:cs typeface="Arial" pitchFamily="34" charset="-120"/>
+              </a:rPr>
+              <a:t>B</a:t>
+            </a:r>
+            <a:endParaRPr lang="en-US" sz="1400" dirty="0"/>
+          </a:p>
+        </p:txBody>
+      </p:sp>
+      <p:sp>
+        <p:nvSpPr>
+          <p:cNvPr id="32" name="Text 29"/>
+          <p:cNvSpPr/>
+          <p:nvPr/>
+        </p:nvSpPr>
+        <p:spPr>
+          <a:xfrm>
+            <a:off x="3515868" y="5029200"/>
+            <a:ext cx="2327148" cy="914400"/>
+          </a:xfrm>
+          <a:prstGeom prst="rect">
+            <a:avLst/>
+          </a:prstGeom>
+          <a:noFill/>
+          <a:ln/>
+        </p:spPr>
+        <p:txBody>
+          <a:bodyPr wrap="square" rtlCol="0" anchor="t"/>
+          <a:lstStyle/>
+          <a:p>
+            <a:pPr indent="0" marL="0">
+              <a:buNone/>
+            </a:pPr>
+            <a:r>
+              <a:rPr lang="en-US" sz="1500" dirty="0">
+                <a:solidFill>
+                  <a:srgbClr val="1F2937"/>
+                </a:solidFill>
+                <a:latin typeface="Arial" pitchFamily="34" charset="0"/>
+                <a:ea typeface="Arial" pitchFamily="34" charset="-122"/>
+                <a:cs typeface="Arial" pitchFamily="34" charset="-120"/>
+              </a:rPr>
+              <a:t>crédito + taxa</a:t>
+            </a:r>
+            <a:endParaRPr lang="en-US" sz="1500" dirty="0"/>
+          </a:p>
+        </p:txBody>
+      </p:sp>
+      <p:sp>
+        <p:nvSpPr>
+          <p:cNvPr id="33" name="Shape 30"/>
+          <p:cNvSpPr/>
+          <p:nvPr/>
+        </p:nvSpPr>
+        <p:spPr>
+          <a:xfrm>
+            <a:off x="6208776" y="4572000"/>
+            <a:ext cx="2601468" cy="1463040"/>
+          </a:xfrm>
+          <a:prstGeom prst="roundRect">
+            <a:avLst>
+              <a:gd name="adj" fmla="val 5000"/>
+            </a:avLst>
+          </a:prstGeom>
+          <a:solidFill>
+            <a:srgbClr val="FFFFFF"/>
+          </a:solidFill>
+          <a:ln w="9525">
+            <a:solidFill>
+              <a:srgbClr val="D8E0EC"/>
+            </a:solidFill>
+            <a:prstDash val="solid"/>
+          </a:ln>
+        </p:spPr>
+      </p:sp>
+      <p:sp>
+        <p:nvSpPr>
+          <p:cNvPr id="34" name="Text 31"/>
+          <p:cNvSpPr/>
+          <p:nvPr/>
+        </p:nvSpPr>
+        <p:spPr>
+          <a:xfrm>
+            <a:off x="6345936" y="4663440"/>
+            <a:ext cx="365760" cy="365760"/>
+          </a:xfrm>
+          <a:prstGeom prst="rect">
+            <a:avLst/>
+          </a:prstGeom>
+          <a:noFill/>
+          <a:ln/>
+        </p:spPr>
+        <p:txBody>
+          <a:bodyPr wrap="square" rtlCol="0" anchor="ctr"/>
+          <a:lstStyle/>
+          <a:p>
+            <a:pPr indent="0" marL="0">
+              <a:buNone/>
+            </a:pPr>
+            <a:r>
+              <a:rPr lang="en-US" sz="1400" b="1" dirty="0">
+                <a:solidFill>
+                  <a:srgbClr val="F7A23B"/>
+                </a:solidFill>
+                <a:latin typeface="Arial" pitchFamily="34" charset="0"/>
+                <a:ea typeface="Arial" pitchFamily="34" charset="-122"/>
+                <a:cs typeface="Arial" pitchFamily="34" charset="-120"/>
+              </a:rPr>
+              <a:t>C</a:t>
+            </a:r>
+            <a:endParaRPr lang="en-US" sz="1400" dirty="0"/>
+          </a:p>
+        </p:txBody>
+      </p:sp>
+      <p:sp>
+        <p:nvSpPr>
+          <p:cNvPr id="35" name="Text 32"/>
+          <p:cNvSpPr/>
+          <p:nvPr/>
+        </p:nvSpPr>
+        <p:spPr>
+          <a:xfrm>
+            <a:off x="6345936" y="5029200"/>
+            <a:ext cx="2327148" cy="914400"/>
+          </a:xfrm>
+          <a:prstGeom prst="rect">
+            <a:avLst/>
+          </a:prstGeom>
+          <a:noFill/>
+          <a:ln/>
+        </p:spPr>
+        <p:txBody>
+          <a:bodyPr wrap="square" rtlCol="0" anchor="t"/>
+          <a:lstStyle/>
+          <a:p>
+            <a:pPr indent="0" marL="0">
+              <a:buNone/>
+            </a:pPr>
+            <a:r>
+              <a:rPr lang="en-US" sz="1500" dirty="0">
+                <a:solidFill>
+                  <a:srgbClr val="1F2937"/>
+                </a:solidFill>
+                <a:latin typeface="Arial" pitchFamily="34" charset="0"/>
+                <a:ea typeface="Arial" pitchFamily="34" charset="-122"/>
+                <a:cs typeface="Arial" pitchFamily="34" charset="-120"/>
+              </a:rPr>
+              <a:t>tarifa cheia</a:t>
+            </a:r>
+            <a:endParaRPr lang="en-US" sz="1500" dirty="0"/>
+          </a:p>
+        </p:txBody>
+      </p:sp>
+      <p:sp>
+        <p:nvSpPr>
+          <p:cNvPr id="36" name="Shape 33"/>
+          <p:cNvSpPr/>
+          <p:nvPr/>
+        </p:nvSpPr>
+        <p:spPr>
+          <a:xfrm>
+            <a:off x="9038844" y="4572000"/>
+            <a:ext cx="2601468" cy="1463040"/>
+          </a:xfrm>
+          <a:prstGeom prst="roundRect">
+            <a:avLst>
+              <a:gd name="adj" fmla="val 5000"/>
+            </a:avLst>
+          </a:prstGeom>
+          <a:solidFill>
+            <a:srgbClr val="FFFFFF"/>
+          </a:solidFill>
+          <a:ln w="9525">
+            <a:solidFill>
+              <a:srgbClr val="D8E0EC"/>
+            </a:solidFill>
+            <a:prstDash val="solid"/>
+          </a:ln>
+        </p:spPr>
+      </p:sp>
+      <p:sp>
+        <p:nvSpPr>
+          <p:cNvPr id="37" name="Text 34"/>
+          <p:cNvSpPr/>
+          <p:nvPr/>
+        </p:nvSpPr>
+        <p:spPr>
+          <a:xfrm>
+            <a:off x="9176004" y="4663440"/>
+            <a:ext cx="365760" cy="365760"/>
+          </a:xfrm>
+          <a:prstGeom prst="rect">
+            <a:avLst/>
+          </a:prstGeom>
+          <a:noFill/>
+          <a:ln/>
+        </p:spPr>
+        <p:txBody>
+          <a:bodyPr wrap="square" rtlCol="0" anchor="ctr"/>
+          <a:lstStyle/>
+          <a:p>
+            <a:pPr indent="0" marL="0">
+              <a:buNone/>
+            </a:pPr>
+            <a:r>
+              <a:rPr lang="en-US" sz="1400" b="1" dirty="0">
+                <a:solidFill>
+                  <a:srgbClr val="F7A23B"/>
+                </a:solidFill>
+                <a:latin typeface="Arial" pitchFamily="34" charset="0"/>
+                <a:ea typeface="Arial" pitchFamily="34" charset="-122"/>
+                <a:cs typeface="Arial" pitchFamily="34" charset="-120"/>
+              </a:rPr>
+              <a:t>D</a:t>
+            </a:r>
+            <a:endParaRPr lang="en-US" sz="1400" dirty="0"/>
+          </a:p>
+        </p:txBody>
+      </p:sp>
+      <p:sp>
+        <p:nvSpPr>
+          <p:cNvPr id="38" name="Text 35"/>
+          <p:cNvSpPr/>
+          <p:nvPr/>
+        </p:nvSpPr>
+        <p:spPr>
+          <a:xfrm>
+            <a:off x="9176004" y="5029200"/>
+            <a:ext cx="2327148" cy="914400"/>
+          </a:xfrm>
+          <a:prstGeom prst="rect">
+            <a:avLst/>
+          </a:prstGeom>
+          <a:noFill/>
+          <a:ln/>
+        </p:spPr>
+        <p:txBody>
+          <a:bodyPr wrap="square" rtlCol="0" anchor="t"/>
+          <a:lstStyle/>
+          <a:p>
+            <a:pPr indent="0" marL="0">
+              <a:buNone/>
+            </a:pPr>
+            <a:r>
+              <a:rPr lang="en-US" sz="1500" dirty="0">
+                <a:solidFill>
+                  <a:srgbClr val="1F2937"/>
+                </a:solidFill>
+                <a:latin typeface="Arial" pitchFamily="34" charset="0"/>
+                <a:ea typeface="Arial" pitchFamily="34" charset="-122"/>
+                <a:cs typeface="Arial" pitchFamily="34" charset="-120"/>
+              </a:rPr>
+              <a:t>taxa de administração</a:t>
+            </a:r>
+            <a:endParaRPr lang="en-US" sz="1500" dirty="0"/>
+          </a:p>
+        </p:txBody>
+      </p:sp>
+      <p:sp>
+        <p:nvSpPr>
+          <p:cNvPr id="25" name="Slide Number Placeholder 0"/>
+          <p:cNvSpPr>
+            <a:spLocks noGrp="1"/>
+          </p:cNvSpPr>
+          <p:nvPr>
+            <p:ph type="sldNum" sz="quarter" idx="4294967295"/>
+          </p:nvPr>
+        </p:nvSpPr>
+        <p:spPr>
+          <a:xfrm>
+            <a:off x="11292840" y="6556248"/>
+            <a:ext cx="548640" cy="256032"/>
+          </a:xfrm>
+          <a:prstGeom prst="rect">
+            <a:avLst/>
+          </a:prstGeom>
+          <a:extLst>
+            <a:ext uri="{C572A759-6A51-4108-AA02-DFA0A04FC94B}">
+              <ma14:wrappingTextBoxFlag xmlns:ma14="http://schemas.microsoft.com/office/mac/drawingml/2011/main" val="0"/>
+            </a:ext>
+          </a:extLst>
+        </p:spPr>
+        <p:txBody>
+          <a:bodyPr/>
+          <a:lstStyle>
+            <a:lvl1pPr>
+              <a:defRPr sz="900">
+                <a:solidFill>
+                  <a:srgbClr val="1B3A6B"/>
+                </a:solidFill>
+                <a:latin typeface="Arial"/>
+                <a:ea typeface="Arial"/>
+                <a:cs typeface="Arial"/>
+              </a:defRPr>
+            </a:lvl1pPr>
+          </a:lstStyle>
+          <a:p>
+            <a:pPr algn="r"/>
+            <a:fld id="{F7021451-1387-4CA6-816F-3879F97B5CBC}" type="slidenum">
+              <a:rPr b="1" lang="en-US"/>
+              <a:t>27</a:t>
+            </a:fld>
+            <a:endParaRPr lang="en-US"/>
+          </a:p>
+        </p:txBody>
+      </p:sp>
+    </p:spTree>
+  </p:cSld>
+  <p:clrMapOvr>
+    <a:masterClrMapping/>
+  </p:clrMapOvr>
+</p:sld>
+</file>
+
+<file path=ppt/slides/slide28.xml><?xml version="1.0" encoding="utf-8"?>
+<p:sld xmlns:a="http://schemas.openxmlformats.org/drawingml/2006/main" xmlns:r="http://schemas.openxmlformats.org/officeDocument/2006/relationships" xmlns:p="http://schemas.openxmlformats.org/presentationml/2006/main">
+  <p:cSld name="Slide 28">
+    <p:bg>
+      <p:bgPr>
+        <a:solidFill>
+          <a:srgbClr val="F6F8FB"/>
+        </a:solidFill>
+      </p:bgPr>
+    </p:bg>
+    <p:spTree>
+      <p:nvGrpSpPr>
+        <p:cNvPr id="1" name=""/>
+        <p:cNvGrpSpPr/>
+        <p:nvPr/>
+      </p:nvGrpSpPr>
+      <p:grpSpPr>
+        <a:xfrm>
+          <a:off x="0" y="0"/>
+          <a:ext cx="0" cy="0"/>
+          <a:chOff x="0" y="0"/>
+          <a:chExt cx="0" cy="0"/>
+        </a:xfrm>
+      </p:grpSpPr>
+      <p:sp>
+        <p:nvSpPr>
+          <p:cNvPr id="2" name="Shape 0"/>
+          <p:cNvSpPr/>
+          <p:nvPr/>
+        </p:nvSpPr>
+        <p:spPr>
+          <a:xfrm>
+            <a:off x="0" y="6510528"/>
+            <a:ext cx="12191695" cy="347472"/>
+          </a:xfrm>
+          <a:prstGeom prst="rect">
+            <a:avLst/>
+          </a:prstGeom>
+          <a:solidFill>
+            <a:srgbClr val="FFFFFF"/>
+          </a:solidFill>
+          <a:ln w="6350">
+            <a:solidFill>
+              <a:srgbClr val="D8E0EC"/>
+            </a:solidFill>
+            <a:prstDash val="solid"/>
+          </a:ln>
+        </p:spPr>
+      </p:sp>
+      <p:pic>
+        <p:nvPicPr>
+          <p:cNvPr id="3" name="Image 0" descr="/www/wwwroot/rexar/gdsolar/docs/curso/slides/assets/logo-gdsolar.png">    </p:cNvPr>
+          <p:cNvPicPr>
+            <a:picLocks noChangeAspect="1"/>
+          </p:cNvPicPr>
+          <p:nvPr/>
+        </p:nvPicPr>
+        <p:blipFill>
+          <a:blip r:embed="rId1"/>
+          <a:stretch>
+            <a:fillRect/>
+          </a:stretch>
+        </p:blipFill>
+        <p:spPr>
+          <a:xfrm>
+            <a:off x="548640" y="6547104"/>
+            <a:ext cx="274320" cy="274320"/>
+          </a:xfrm>
+          <a:prstGeom prst="rect">
+            <a:avLst/>
+          </a:prstGeom>
+        </p:spPr>
+      </p:pic>
+      <p:sp>
+        <p:nvSpPr>
+          <p:cNvPr id="4" name="Text 1"/>
+          <p:cNvSpPr/>
+          <p:nvPr/>
+        </p:nvSpPr>
+        <p:spPr>
+          <a:xfrm>
+            <a:off x="886968" y="6528816"/>
+            <a:ext cx="6400800" cy="310896"/>
+          </a:xfrm>
+          <a:prstGeom prst="rect">
+            <a:avLst/>
+          </a:prstGeom>
+          <a:noFill/>
+          <a:ln/>
+        </p:spPr>
+        <p:txBody>
+          <a:bodyPr wrap="square" rtlCol="0" anchor="ctr"/>
+          <a:lstStyle/>
+          <a:p>
+            <a:pPr indent="0" marL="0">
+              <a:buNone/>
+            </a:pPr>
+            <a:r>
+              <a:rPr lang="en-US" sz="900" b="1" dirty="0">
+                <a:solidFill>
+                  <a:srgbClr val="64748B"/>
+                </a:solidFill>
+                <a:latin typeface="Arial" pitchFamily="34" charset="0"/>
+                <a:ea typeface="Arial" pitchFamily="34" charset="-122"/>
+                <a:cs typeface="Arial" pitchFamily="34" charset="-120"/>
+              </a:rPr>
+              <a:t>GD Solar  ·  Formação em Energia por Assinatura</a:t>
+            </a:r>
+            <a:endParaRPr lang="en-US" sz="900" dirty="0"/>
+          </a:p>
+        </p:txBody>
+      </p:sp>
+      <p:sp>
+        <p:nvSpPr>
+          <p:cNvPr id="5" name="Text 2"/>
+          <p:cNvSpPr/>
+          <p:nvPr/>
+        </p:nvSpPr>
+        <p:spPr>
+          <a:xfrm>
+            <a:off x="7132320" y="6528816"/>
+            <a:ext cx="4023360" cy="310896"/>
+          </a:xfrm>
+          <a:prstGeom prst="rect">
+            <a:avLst/>
+          </a:prstGeom>
+          <a:noFill/>
+          <a:ln/>
+        </p:spPr>
+        <p:txBody>
+          <a:bodyPr wrap="square" rtlCol="0" anchor="ctr"/>
+          <a:lstStyle/>
+          <a:p>
+            <a:pPr algn="r" indent="0" marL="0">
+              <a:buNone/>
+            </a:pPr>
+            <a:r>
+              <a:rPr lang="en-US" sz="900" dirty="0">
+                <a:solidFill>
+                  <a:srgbClr val="64748B"/>
+                </a:solidFill>
+                <a:latin typeface="Arial" pitchFamily="34" charset="0"/>
+                <a:ea typeface="Arial" pitchFamily="34" charset="-122"/>
+                <a:cs typeface="Arial" pitchFamily="34" charset="-120"/>
+              </a:rPr>
+              <a:t>M4 · Teste rápido</a:t>
+            </a:r>
+            <a:endParaRPr lang="en-US" sz="900" dirty="0"/>
+          </a:p>
+        </p:txBody>
+      </p:sp>
+      <p:sp>
+        <p:nvSpPr>
+          <p:cNvPr id="6" name="Shape 3"/>
+          <p:cNvSpPr/>
+          <p:nvPr/>
+        </p:nvSpPr>
+        <p:spPr>
+          <a:xfrm>
+            <a:off x="548640" y="384048"/>
+            <a:ext cx="82296" cy="658368"/>
+          </a:xfrm>
+          <a:prstGeom prst="rect">
+            <a:avLst/>
+          </a:prstGeom>
+          <a:solidFill>
+            <a:srgbClr val="F7A23B"/>
+          </a:solidFill>
+          <a:ln/>
+        </p:spPr>
+      </p:sp>
+      <p:sp>
+        <p:nvSpPr>
+          <p:cNvPr id="7" name="Text 4"/>
+          <p:cNvSpPr/>
+          <p:nvPr/>
+        </p:nvSpPr>
+        <p:spPr>
+          <a:xfrm>
+            <a:off x="777240" y="292608"/>
+            <a:ext cx="10972800" cy="274320"/>
+          </a:xfrm>
+          <a:prstGeom prst="rect">
+            <a:avLst/>
+          </a:prstGeom>
+          <a:noFill/>
+          <a:ln/>
+        </p:spPr>
+        <p:txBody>
+          <a:bodyPr wrap="square" rtlCol="0" anchor="ctr"/>
+          <a:lstStyle/>
+          <a:p>
+            <a:pPr indent="0" marL="0">
+              <a:buNone/>
+            </a:pPr>
+            <a:r>
+              <a:rPr lang="en-US" sz="1000" b="1" spc="100" kern="0" dirty="0">
+                <a:solidFill>
+                  <a:srgbClr val="F7A23B"/>
+                </a:solidFill>
+                <a:latin typeface="Arial" pitchFamily="34" charset="0"/>
+                <a:ea typeface="Arial" pitchFamily="34" charset="-122"/>
+                <a:cs typeface="Arial" pitchFamily="34" charset="-120"/>
+              </a:rPr>
+              <a:t>QUESTÕES 5–6 DE 6</a:t>
+            </a:r>
+            <a:endParaRPr lang="en-US" sz="1000" dirty="0"/>
+          </a:p>
+        </p:txBody>
+      </p:sp>
+      <p:sp>
+        <p:nvSpPr>
+          <p:cNvPr id="8" name="Text 5"/>
+          <p:cNvSpPr/>
+          <p:nvPr/>
+        </p:nvSpPr>
+        <p:spPr>
+          <a:xfrm>
+            <a:off x="777240" y="530352"/>
+            <a:ext cx="10881360" cy="566928"/>
+          </a:xfrm>
+          <a:prstGeom prst="rect">
+            <a:avLst/>
+          </a:prstGeom>
+          <a:noFill/>
+          <a:ln/>
+        </p:spPr>
+        <p:txBody>
+          <a:bodyPr wrap="square" rtlCol="0" anchor="ctr">
+            <a:normAutofit/>
+          </a:bodyPr>
+          <a:lstStyle/>
+          <a:p>
+            <a:pPr indent="0" marL="0">
+              <a:buNone/>
+            </a:pPr>
+            <a:r>
+              <a:rPr lang="en-US" sz="2600" b="1" dirty="0">
+                <a:solidFill>
+                  <a:srgbClr val="1B3A6B"/>
+                </a:solidFill>
+                <a:latin typeface="Arial" pitchFamily="34" charset="0"/>
+                <a:ea typeface="Arial" pitchFamily="34" charset="-122"/>
+                <a:cs typeface="Arial" pitchFamily="34" charset="-120"/>
+              </a:rPr>
+              <a:t>Teste rápido</a:t>
+            </a:r>
+            <a:endParaRPr lang="en-US" sz="2600" dirty="0"/>
+          </a:p>
+        </p:txBody>
+      </p:sp>
+      <p:sp>
+        <p:nvSpPr>
+          <p:cNvPr id="9" name="Shape 6"/>
+          <p:cNvSpPr/>
+          <p:nvPr/>
+        </p:nvSpPr>
+        <p:spPr>
+          <a:xfrm>
+            <a:off x="548640" y="1325880"/>
+            <a:ext cx="502920" cy="502920"/>
+          </a:xfrm>
+          <a:prstGeom prst="ellipse">
+            <a:avLst/>
+          </a:prstGeom>
+          <a:solidFill>
+            <a:srgbClr val="1B3A6B"/>
+          </a:solidFill>
+          <a:ln/>
+        </p:spPr>
+      </p:sp>
+      <p:sp>
+        <p:nvSpPr>
+          <p:cNvPr id="10" name="Text 7"/>
+          <p:cNvSpPr/>
+          <p:nvPr/>
+        </p:nvSpPr>
+        <p:spPr>
+          <a:xfrm>
+            <a:off x="548640" y="1325880"/>
+            <a:ext cx="502920" cy="502920"/>
+          </a:xfrm>
+          <a:prstGeom prst="rect">
+            <a:avLst/>
+          </a:prstGeom>
+          <a:noFill/>
+          <a:ln/>
+        </p:spPr>
+        <p:txBody>
+          <a:bodyPr wrap="square" rtlCol="0" anchor="ctr"/>
+          <a:lstStyle/>
+          <a:p>
+            <a:pPr algn="ctr" indent="0" marL="0">
+              <a:buNone/>
+            </a:pPr>
+            <a:r>
+              <a:rPr lang="en-US" sz="1600" b="1" dirty="0">
+                <a:solidFill>
+                  <a:srgbClr val="FFFFFF"/>
+                </a:solidFill>
+                <a:latin typeface="Arial" pitchFamily="34" charset="0"/>
+                <a:ea typeface="Arial" pitchFamily="34" charset="-122"/>
+                <a:cs typeface="Arial" pitchFamily="34" charset="-120"/>
+              </a:rPr>
+              <a:t>5</a:t>
+            </a:r>
+            <a:endParaRPr lang="en-US" sz="1600" dirty="0"/>
+          </a:p>
+        </p:txBody>
+      </p:sp>
+      <p:sp>
+        <p:nvSpPr>
+          <p:cNvPr id="11" name="Text 8"/>
+          <p:cNvSpPr/>
+          <p:nvPr/>
+        </p:nvSpPr>
+        <p:spPr>
+          <a:xfrm>
+            <a:off x="1234440" y="1280160"/>
+            <a:ext cx="10424160" cy="640080"/>
+          </a:xfrm>
+          <a:prstGeom prst="rect">
+            <a:avLst/>
+          </a:prstGeom>
+          <a:noFill/>
+          <a:ln/>
+        </p:spPr>
+        <p:txBody>
+          <a:bodyPr wrap="square" rtlCol="0" anchor="ctr"/>
+          <a:lstStyle/>
+          <a:p>
+            <a:pPr indent="0" marL="0">
+              <a:buNone/>
+            </a:pPr>
+            <a:r>
+              <a:rPr lang="en-US" sz="1800" b="1" dirty="0">
+                <a:solidFill>
+                  <a:srgbClr val="1B3A6B"/>
+                </a:solidFill>
+                <a:latin typeface="Arial" pitchFamily="34" charset="0"/>
+                <a:ea typeface="Arial" pitchFamily="34" charset="-122"/>
+                <a:cs typeface="Arial" pitchFamily="34" charset="-120"/>
+              </a:rPr>
+              <a:t>A troca de titularidade da UC da usina transfere a titularidade para:</a:t>
+            </a:r>
+            <a:endParaRPr lang="en-US" sz="1800" dirty="0"/>
+          </a:p>
+        </p:txBody>
+      </p:sp>
+      <p:sp>
+        <p:nvSpPr>
+          <p:cNvPr id="12" name="Shape 9"/>
+          <p:cNvSpPr/>
+          <p:nvPr/>
+        </p:nvSpPr>
+        <p:spPr>
+          <a:xfrm>
+            <a:off x="548640" y="2057400"/>
+            <a:ext cx="2601468" cy="1463040"/>
+          </a:xfrm>
+          <a:prstGeom prst="roundRect">
+            <a:avLst>
+              <a:gd name="adj" fmla="val 5000"/>
+            </a:avLst>
+          </a:prstGeom>
+          <a:solidFill>
+            <a:srgbClr val="FFFFFF"/>
+          </a:solidFill>
+          <a:ln w="9525">
+            <a:solidFill>
+              <a:srgbClr val="D8E0EC"/>
+            </a:solidFill>
+            <a:prstDash val="solid"/>
+          </a:ln>
+        </p:spPr>
+      </p:sp>
+      <p:sp>
+        <p:nvSpPr>
+          <p:cNvPr id="13" name="Text 10"/>
+          <p:cNvSpPr/>
+          <p:nvPr/>
+        </p:nvSpPr>
+        <p:spPr>
+          <a:xfrm>
+            <a:off x="685800" y="2148840"/>
+            <a:ext cx="365760" cy="365760"/>
+          </a:xfrm>
+          <a:prstGeom prst="rect">
+            <a:avLst/>
+          </a:prstGeom>
+          <a:noFill/>
+          <a:ln/>
+        </p:spPr>
+        <p:txBody>
+          <a:bodyPr wrap="square" rtlCol="0" anchor="ctr"/>
+          <a:lstStyle/>
+          <a:p>
+            <a:pPr indent="0" marL="0">
+              <a:buNone/>
+            </a:pPr>
+            <a:r>
+              <a:rPr lang="en-US" sz="1400" b="1" dirty="0">
+                <a:solidFill>
+                  <a:srgbClr val="F7A23B"/>
+                </a:solidFill>
+                <a:latin typeface="Arial" pitchFamily="34" charset="0"/>
+                <a:ea typeface="Arial" pitchFamily="34" charset="-122"/>
+                <a:cs typeface="Arial" pitchFamily="34" charset="-120"/>
+              </a:rPr>
+              <a:t>A</a:t>
+            </a:r>
+            <a:endParaRPr lang="en-US" sz="1400" dirty="0"/>
+          </a:p>
+        </p:txBody>
+      </p:sp>
+      <p:sp>
+        <p:nvSpPr>
+          <p:cNvPr id="14" name="Text 11"/>
+          <p:cNvSpPr/>
+          <p:nvPr/>
+        </p:nvSpPr>
+        <p:spPr>
+          <a:xfrm>
+            <a:off x="685800" y="2514600"/>
+            <a:ext cx="2327148" cy="914400"/>
+          </a:xfrm>
+          <a:prstGeom prst="rect">
+            <a:avLst/>
+          </a:prstGeom>
+          <a:noFill/>
+          <a:ln/>
+        </p:spPr>
+        <p:txBody>
+          <a:bodyPr wrap="square" rtlCol="0" anchor="t"/>
+          <a:lstStyle/>
+          <a:p>
+            <a:pPr indent="0" marL="0">
+              <a:buNone/>
+            </a:pPr>
+            <a:r>
+              <a:rPr lang="en-US" sz="1500" dirty="0">
+                <a:solidFill>
+                  <a:srgbClr val="1F2937"/>
+                </a:solidFill>
+                <a:latin typeface="Arial" pitchFamily="34" charset="0"/>
+                <a:ea typeface="Arial" pitchFamily="34" charset="-122"/>
+                <a:cs typeface="Arial" pitchFamily="34" charset="-120"/>
+              </a:rPr>
+              <a:t>o cliente</a:t>
+            </a:r>
+            <a:endParaRPr lang="en-US" sz="1500" dirty="0"/>
+          </a:p>
+        </p:txBody>
+      </p:sp>
+      <p:sp>
+        <p:nvSpPr>
+          <p:cNvPr id="15" name="Shape 12"/>
+          <p:cNvSpPr/>
+          <p:nvPr/>
+        </p:nvSpPr>
+        <p:spPr>
+          <a:xfrm>
+            <a:off x="3378708" y="2057400"/>
+            <a:ext cx="2601468" cy="1463040"/>
+          </a:xfrm>
+          <a:prstGeom prst="roundRect">
+            <a:avLst>
+              <a:gd name="adj" fmla="val 5000"/>
+            </a:avLst>
+          </a:prstGeom>
+          <a:solidFill>
+            <a:srgbClr val="FFFFFF"/>
+          </a:solidFill>
+          <a:ln w="9525">
+            <a:solidFill>
+              <a:srgbClr val="D8E0EC"/>
+            </a:solidFill>
+            <a:prstDash val="solid"/>
+          </a:ln>
+        </p:spPr>
+      </p:sp>
+      <p:sp>
+        <p:nvSpPr>
+          <p:cNvPr id="16" name="Text 13"/>
+          <p:cNvSpPr/>
+          <p:nvPr/>
+        </p:nvSpPr>
+        <p:spPr>
+          <a:xfrm>
+            <a:off x="3515868" y="2148840"/>
+            <a:ext cx="365760" cy="365760"/>
+          </a:xfrm>
+          <a:prstGeom prst="rect">
+            <a:avLst/>
+          </a:prstGeom>
+          <a:noFill/>
+          <a:ln/>
+        </p:spPr>
+        <p:txBody>
+          <a:bodyPr wrap="square" rtlCol="0" anchor="ctr"/>
+          <a:lstStyle/>
+          <a:p>
+            <a:pPr indent="0" marL="0">
+              <a:buNone/>
+            </a:pPr>
+            <a:r>
+              <a:rPr lang="en-US" sz="1400" b="1" dirty="0">
+                <a:solidFill>
+                  <a:srgbClr val="F7A23B"/>
+                </a:solidFill>
+                <a:latin typeface="Arial" pitchFamily="34" charset="0"/>
+                <a:ea typeface="Arial" pitchFamily="34" charset="-122"/>
+                <a:cs typeface="Arial" pitchFamily="34" charset="-120"/>
+              </a:rPr>
+              <a:t>C</a:t>
+            </a:r>
+            <a:endParaRPr lang="en-US" sz="1400" dirty="0"/>
+          </a:p>
+        </p:txBody>
+      </p:sp>
+      <p:sp>
+        <p:nvSpPr>
+          <p:cNvPr id="17" name="Text 14"/>
+          <p:cNvSpPr/>
+          <p:nvPr/>
+        </p:nvSpPr>
+        <p:spPr>
+          <a:xfrm>
+            <a:off x="3515868" y="2514600"/>
+            <a:ext cx="2327148" cy="914400"/>
+          </a:xfrm>
+          <a:prstGeom prst="rect">
+            <a:avLst/>
+          </a:prstGeom>
+          <a:noFill/>
+          <a:ln/>
+        </p:spPr>
+        <p:txBody>
+          <a:bodyPr wrap="square" rtlCol="0" anchor="t"/>
+          <a:lstStyle/>
+          <a:p>
+            <a:pPr indent="0" marL="0">
+              <a:buNone/>
+            </a:pPr>
+            <a:r>
+              <a:rPr lang="en-US" sz="1500" dirty="0">
+                <a:solidFill>
+                  <a:srgbClr val="1F2937"/>
+                </a:solidFill>
+                <a:latin typeface="Arial" pitchFamily="34" charset="0"/>
+                <a:ea typeface="Arial" pitchFamily="34" charset="-122"/>
+                <a:cs typeface="Arial" pitchFamily="34" charset="-120"/>
+              </a:rPr>
+              <a:t>a gestora sempre</a:t>
+            </a:r>
+            <a:endParaRPr lang="en-US" sz="1500" dirty="0"/>
+          </a:p>
+        </p:txBody>
+      </p:sp>
+      <p:sp>
+        <p:nvSpPr>
+          <p:cNvPr id="18" name="Shape 15"/>
+          <p:cNvSpPr/>
+          <p:nvPr/>
+        </p:nvSpPr>
+        <p:spPr>
+          <a:xfrm>
+            <a:off x="6208776" y="2057400"/>
+            <a:ext cx="2601468" cy="1463040"/>
+          </a:xfrm>
+          <a:prstGeom prst="roundRect">
+            <a:avLst>
+              <a:gd name="adj" fmla="val 5000"/>
+            </a:avLst>
+          </a:prstGeom>
+          <a:solidFill>
+            <a:srgbClr val="FFFFFF"/>
+          </a:solidFill>
+          <a:ln w="9525">
+            <a:solidFill>
+              <a:srgbClr val="D8E0EC"/>
+            </a:solidFill>
+            <a:prstDash val="solid"/>
+          </a:ln>
+        </p:spPr>
+      </p:sp>
+      <p:sp>
+        <p:nvSpPr>
+          <p:cNvPr id="19" name="Text 16"/>
+          <p:cNvSpPr/>
+          <p:nvPr/>
+        </p:nvSpPr>
+        <p:spPr>
+          <a:xfrm>
+            <a:off x="6345936" y="2148840"/>
+            <a:ext cx="365760" cy="365760"/>
+          </a:xfrm>
+          <a:prstGeom prst="rect">
+            <a:avLst/>
+          </a:prstGeom>
+          <a:noFill/>
+          <a:ln/>
+        </p:spPr>
+        <p:txBody>
+          <a:bodyPr wrap="square" rtlCol="0" anchor="ctr"/>
+          <a:lstStyle/>
+          <a:p>
+            <a:pPr indent="0" marL="0">
+              <a:buNone/>
+            </a:pPr>
+            <a:r>
+              <a:rPr lang="en-US" sz="1400" b="1" dirty="0">
+                <a:solidFill>
+                  <a:srgbClr val="F7A23B"/>
+                </a:solidFill>
+                <a:latin typeface="Arial" pitchFamily="34" charset="0"/>
+                <a:ea typeface="Arial" pitchFamily="34" charset="-122"/>
+                <a:cs typeface="Arial" pitchFamily="34" charset="-120"/>
+              </a:rPr>
+              <a:t>D</a:t>
+            </a:r>
+            <a:endParaRPr lang="en-US" sz="1400" dirty="0"/>
+          </a:p>
+        </p:txBody>
+      </p:sp>
+      <p:sp>
+        <p:nvSpPr>
+          <p:cNvPr id="20" name="Text 17"/>
+          <p:cNvSpPr/>
+          <p:nvPr/>
+        </p:nvSpPr>
+        <p:spPr>
+          <a:xfrm>
+            <a:off x="6345936" y="2514600"/>
+            <a:ext cx="2327148" cy="914400"/>
+          </a:xfrm>
+          <a:prstGeom prst="rect">
+            <a:avLst/>
+          </a:prstGeom>
+          <a:noFill/>
+          <a:ln/>
+        </p:spPr>
+        <p:txBody>
+          <a:bodyPr wrap="square" rtlCol="0" anchor="t"/>
+          <a:lstStyle/>
+          <a:p>
+            <a:pPr indent="0" marL="0">
+              <a:buNone/>
+            </a:pPr>
+            <a:r>
+              <a:rPr lang="en-US" sz="1500" dirty="0">
+                <a:solidFill>
+                  <a:srgbClr val="1F2937"/>
+                </a:solidFill>
+                <a:latin typeface="Arial" pitchFamily="34" charset="0"/>
+                <a:ea typeface="Arial" pitchFamily="34" charset="-122"/>
+                <a:cs typeface="Arial" pitchFamily="34" charset="-120"/>
+              </a:rPr>
+              <a:t>o produtor</a:t>
+            </a:r>
+            <a:endParaRPr lang="en-US" sz="1500" dirty="0"/>
+          </a:p>
+        </p:txBody>
+      </p:sp>
+      <p:sp>
+        <p:nvSpPr>
+          <p:cNvPr id="21" name="Shape 18"/>
+          <p:cNvSpPr/>
+          <p:nvPr/>
+        </p:nvSpPr>
+        <p:spPr>
+          <a:xfrm>
+            <a:off x="548640" y="3840480"/>
+            <a:ext cx="502920" cy="502920"/>
+          </a:xfrm>
+          <a:prstGeom prst="ellipse">
+            <a:avLst/>
+          </a:prstGeom>
+          <a:solidFill>
+            <a:srgbClr val="1B3A6B"/>
+          </a:solidFill>
+          <a:ln/>
+        </p:spPr>
+      </p:sp>
+      <p:sp>
+        <p:nvSpPr>
+          <p:cNvPr id="22" name="Text 19"/>
+          <p:cNvSpPr/>
+          <p:nvPr/>
+        </p:nvSpPr>
+        <p:spPr>
+          <a:xfrm>
+            <a:off x="548640" y="3840480"/>
+            <a:ext cx="502920" cy="502920"/>
+          </a:xfrm>
+          <a:prstGeom prst="rect">
+            <a:avLst/>
+          </a:prstGeom>
+          <a:noFill/>
+          <a:ln/>
+        </p:spPr>
+        <p:txBody>
+          <a:bodyPr wrap="square" rtlCol="0" anchor="ctr"/>
+          <a:lstStyle/>
+          <a:p>
+            <a:pPr algn="ctr" indent="0" marL="0">
+              <a:buNone/>
+            </a:pPr>
+            <a:r>
+              <a:rPr lang="en-US" sz="1600" b="1" dirty="0">
+                <a:solidFill>
+                  <a:srgbClr val="FFFFFF"/>
+                </a:solidFill>
+                <a:latin typeface="Arial" pitchFamily="34" charset="0"/>
+                <a:ea typeface="Arial" pitchFamily="34" charset="-122"/>
+                <a:cs typeface="Arial" pitchFamily="34" charset="-120"/>
+              </a:rPr>
+              <a:t>6</a:t>
+            </a:r>
+            <a:endParaRPr lang="en-US" sz="1600" dirty="0"/>
+          </a:p>
+        </p:txBody>
+      </p:sp>
+      <p:sp>
+        <p:nvSpPr>
+          <p:cNvPr id="23" name="Text 20"/>
+          <p:cNvSpPr/>
+          <p:nvPr/>
+        </p:nvSpPr>
+        <p:spPr>
+          <a:xfrm>
+            <a:off x="1234440" y="3794760"/>
+            <a:ext cx="10424160" cy="640080"/>
+          </a:xfrm>
+          <a:prstGeom prst="rect">
+            <a:avLst/>
+          </a:prstGeom>
+          <a:noFill/>
+          <a:ln/>
+        </p:spPr>
+        <p:txBody>
+          <a:bodyPr wrap="square" rtlCol="0" anchor="ctr"/>
+          <a:lstStyle/>
+          <a:p>
+            <a:pPr indent="0" marL="0">
+              <a:buNone/>
+            </a:pPr>
+            <a:r>
+              <a:rPr lang="en-US" sz="1800" b="1" dirty="0">
+                <a:solidFill>
+                  <a:srgbClr val="1B3A6B"/>
+                </a:solidFill>
+                <a:latin typeface="Arial" pitchFamily="34" charset="0"/>
+                <a:ea typeface="Arial" pitchFamily="34" charset="-122"/>
+                <a:cs typeface="Arial" pitchFamily="34" charset="-120"/>
+              </a:rPr>
+              <a:t>Na plataforma, a energia disponível da usina para alocação vem de:</a:t>
+            </a:r>
+            <a:endParaRPr lang="en-US" sz="1800" dirty="0"/>
+          </a:p>
+        </p:txBody>
+      </p:sp>
+      <p:sp>
+        <p:nvSpPr>
+          <p:cNvPr id="24" name="Shape 21"/>
+          <p:cNvSpPr/>
+          <p:nvPr/>
+        </p:nvSpPr>
+        <p:spPr>
+          <a:xfrm>
+            <a:off x="548640" y="4572000"/>
+            <a:ext cx="2601468" cy="1463040"/>
+          </a:xfrm>
+          <a:prstGeom prst="roundRect">
+            <a:avLst>
+              <a:gd name="adj" fmla="val 5000"/>
+            </a:avLst>
+          </a:prstGeom>
+          <a:solidFill>
+            <a:srgbClr val="FFFFFF"/>
+          </a:solidFill>
+          <a:ln w="9525">
+            <a:solidFill>
+              <a:srgbClr val="D8E0EC"/>
+            </a:solidFill>
+            <a:prstDash val="solid"/>
+          </a:ln>
+        </p:spPr>
+      </p:sp>
+      <p:sp>
+        <p:nvSpPr>
+          <p:cNvPr id="25" name="Text 22"/>
+          <p:cNvSpPr/>
+          <p:nvPr/>
+        </p:nvSpPr>
+        <p:spPr>
+          <a:xfrm>
+            <a:off x="685800" y="4663440"/>
+            <a:ext cx="365760" cy="365760"/>
+          </a:xfrm>
+          <a:prstGeom prst="rect">
+            <a:avLst/>
+          </a:prstGeom>
+          <a:noFill/>
+          <a:ln/>
+        </p:spPr>
+        <p:txBody>
+          <a:bodyPr wrap="square" rtlCol="0" anchor="ctr"/>
+          <a:lstStyle/>
+          <a:p>
+            <a:pPr indent="0" marL="0">
+              <a:buNone/>
+            </a:pPr>
+            <a:r>
+              <a:rPr lang="en-US" sz="1400" b="1" dirty="0">
+                <a:solidFill>
+                  <a:srgbClr val="F7A23B"/>
+                </a:solidFill>
+                <a:latin typeface="Arial" pitchFamily="34" charset="0"/>
+                <a:ea typeface="Arial" pitchFamily="34" charset="-122"/>
+                <a:cs typeface="Arial" pitchFamily="34" charset="-120"/>
+              </a:rPr>
+              <a:t>A</a:t>
+            </a:r>
+            <a:endParaRPr lang="en-US" sz="1400" dirty="0"/>
+          </a:p>
+        </p:txBody>
+      </p:sp>
+      <p:sp>
+        <p:nvSpPr>
+          <p:cNvPr id="26" name="Text 23"/>
+          <p:cNvSpPr/>
+          <p:nvPr/>
+        </p:nvSpPr>
+        <p:spPr>
+          <a:xfrm>
+            <a:off x="685800" y="5029200"/>
+            <a:ext cx="2327148" cy="914400"/>
+          </a:xfrm>
+          <a:prstGeom prst="rect">
+            <a:avLst/>
+          </a:prstGeom>
+          <a:noFill/>
+          <a:ln/>
+        </p:spPr>
+        <p:txBody>
+          <a:bodyPr wrap="square" rtlCol="0" anchor="t"/>
+          <a:lstStyle/>
+          <a:p>
+            <a:pPr indent="0" marL="0">
+              <a:buNone/>
+            </a:pPr>
+            <a:r>
+              <a:rPr lang="en-US" sz="1500" dirty="0">
+                <a:solidFill>
+                  <a:srgbClr val="1F2937"/>
+                </a:solidFill>
+                <a:latin typeface="Arial" pitchFamily="34" charset="0"/>
+                <a:ea typeface="Arial" pitchFamily="34" charset="-122"/>
+                <a:cs typeface="Arial" pitchFamily="34" charset="-120"/>
+              </a:rPr>
+              <a:t>potência × 30</a:t>
+            </a:r>
+            <a:endParaRPr lang="en-US" sz="1500" dirty="0"/>
+          </a:p>
+        </p:txBody>
+      </p:sp>
+      <p:sp>
+        <p:nvSpPr>
+          <p:cNvPr id="27" name="Shape 24"/>
+          <p:cNvSpPr/>
+          <p:nvPr/>
+        </p:nvSpPr>
+        <p:spPr>
+          <a:xfrm>
+            <a:off x="3378708" y="4572000"/>
+            <a:ext cx="2601468" cy="1463040"/>
+          </a:xfrm>
+          <a:prstGeom prst="roundRect">
+            <a:avLst>
+              <a:gd name="adj" fmla="val 5000"/>
+            </a:avLst>
+          </a:prstGeom>
+          <a:solidFill>
+            <a:srgbClr val="FFFFFF"/>
+          </a:solidFill>
+          <a:ln w="9525">
+            <a:solidFill>
+              <a:srgbClr val="D8E0EC"/>
+            </a:solidFill>
+            <a:prstDash val="solid"/>
+          </a:ln>
+        </p:spPr>
+      </p:sp>
+      <p:sp>
+        <p:nvSpPr>
+          <p:cNvPr id="28" name="Text 25"/>
+          <p:cNvSpPr/>
+          <p:nvPr/>
+        </p:nvSpPr>
+        <p:spPr>
+          <a:xfrm>
+            <a:off x="3515868" y="4663440"/>
+            <a:ext cx="365760" cy="365760"/>
+          </a:xfrm>
+          <a:prstGeom prst="rect">
+            <a:avLst/>
+          </a:prstGeom>
+          <a:noFill/>
+          <a:ln/>
+        </p:spPr>
+        <p:txBody>
+          <a:bodyPr wrap="square" rtlCol="0" anchor="ctr"/>
+          <a:lstStyle/>
+          <a:p>
+            <a:pPr indent="0" marL="0">
+              <a:buNone/>
+            </a:pPr>
+            <a:r>
+              <a:rPr lang="en-US" sz="1400" b="1" dirty="0">
+                <a:solidFill>
+                  <a:srgbClr val="F7A23B"/>
+                </a:solidFill>
+                <a:latin typeface="Arial" pitchFamily="34" charset="0"/>
+                <a:ea typeface="Arial" pitchFamily="34" charset="-122"/>
+                <a:cs typeface="Arial" pitchFamily="34" charset="-120"/>
+              </a:rPr>
+              <a:t>C</a:t>
+            </a:r>
+            <a:endParaRPr lang="en-US" sz="1400" dirty="0"/>
+          </a:p>
+        </p:txBody>
+      </p:sp>
+      <p:sp>
+        <p:nvSpPr>
+          <p:cNvPr id="29" name="Text 26"/>
+          <p:cNvSpPr/>
+          <p:nvPr/>
+        </p:nvSpPr>
+        <p:spPr>
+          <a:xfrm>
+            <a:off x="3515868" y="5029200"/>
+            <a:ext cx="2327148" cy="914400"/>
+          </a:xfrm>
+          <a:prstGeom prst="rect">
+            <a:avLst/>
+          </a:prstGeom>
+          <a:noFill/>
+          <a:ln/>
+        </p:spPr>
+        <p:txBody>
+          <a:bodyPr wrap="square" rtlCol="0" anchor="t"/>
+          <a:lstStyle/>
+          <a:p>
+            <a:pPr indent="0" marL="0">
+              <a:buNone/>
+            </a:pPr>
+            <a:r>
+              <a:rPr lang="en-US" sz="1500" dirty="0">
+                <a:solidFill>
+                  <a:srgbClr val="1F2937"/>
+                </a:solidFill>
+                <a:latin typeface="Arial" pitchFamily="34" charset="0"/>
+                <a:ea typeface="Arial" pitchFamily="34" charset="-122"/>
+                <a:cs typeface="Arial" pitchFamily="34" charset="-120"/>
+              </a:rPr>
+              <a:t>o número de clientes</a:t>
+            </a:r>
+            <a:endParaRPr lang="en-US" sz="1500" dirty="0"/>
+          </a:p>
+        </p:txBody>
+      </p:sp>
+      <p:sp>
+        <p:nvSpPr>
+          <p:cNvPr id="30" name="Shape 27"/>
+          <p:cNvSpPr/>
+          <p:nvPr/>
+        </p:nvSpPr>
+        <p:spPr>
+          <a:xfrm>
+            <a:off x="6208776" y="4572000"/>
+            <a:ext cx="2601468" cy="1463040"/>
+          </a:xfrm>
+          <a:prstGeom prst="roundRect">
+            <a:avLst>
+              <a:gd name="adj" fmla="val 5000"/>
+            </a:avLst>
+          </a:prstGeom>
+          <a:solidFill>
+            <a:srgbClr val="FFFFFF"/>
+          </a:solidFill>
+          <a:ln w="9525">
+            <a:solidFill>
+              <a:srgbClr val="D8E0EC"/>
+            </a:solidFill>
+            <a:prstDash val="solid"/>
+          </a:ln>
+        </p:spPr>
+      </p:sp>
+      <p:sp>
+        <p:nvSpPr>
+          <p:cNvPr id="31" name="Text 28"/>
+          <p:cNvSpPr/>
+          <p:nvPr/>
+        </p:nvSpPr>
+        <p:spPr>
+          <a:xfrm>
+            <a:off x="6345936" y="4663440"/>
+            <a:ext cx="365760" cy="365760"/>
+          </a:xfrm>
+          <a:prstGeom prst="rect">
+            <a:avLst/>
+          </a:prstGeom>
+          <a:noFill/>
+          <a:ln/>
+        </p:spPr>
+        <p:txBody>
+          <a:bodyPr wrap="square" rtlCol="0" anchor="ctr"/>
+          <a:lstStyle/>
+          <a:p>
+            <a:pPr indent="0" marL="0">
+              <a:buNone/>
+            </a:pPr>
+            <a:r>
+              <a:rPr lang="en-US" sz="1400" b="1" dirty="0">
+                <a:solidFill>
+                  <a:srgbClr val="F7A23B"/>
+                </a:solidFill>
+                <a:latin typeface="Arial" pitchFamily="34" charset="0"/>
+                <a:ea typeface="Arial" pitchFamily="34" charset="-122"/>
+                <a:cs typeface="Arial" pitchFamily="34" charset="-120"/>
+              </a:rPr>
+              <a:t>D</a:t>
+            </a:r>
+            <a:endParaRPr lang="en-US" sz="1400" dirty="0"/>
+          </a:p>
+        </p:txBody>
+      </p:sp>
+      <p:sp>
+        <p:nvSpPr>
+          <p:cNvPr id="32" name="Text 29"/>
+          <p:cNvSpPr/>
+          <p:nvPr/>
+        </p:nvSpPr>
+        <p:spPr>
+          <a:xfrm>
+            <a:off x="6345936" y="5029200"/>
+            <a:ext cx="2327148" cy="914400"/>
+          </a:xfrm>
+          <a:prstGeom prst="rect">
+            <a:avLst/>
+          </a:prstGeom>
+          <a:noFill/>
+          <a:ln/>
+        </p:spPr>
+        <p:txBody>
+          <a:bodyPr wrap="square" rtlCol="0" anchor="t"/>
+          <a:lstStyle/>
+          <a:p>
+            <a:pPr indent="0" marL="0">
+              <a:buNone/>
+            </a:pPr>
+            <a:r>
+              <a:rPr lang="en-US" sz="1500" dirty="0">
+                <a:solidFill>
+                  <a:srgbClr val="1F2937"/>
+                </a:solidFill>
+                <a:latin typeface="Arial" pitchFamily="34" charset="0"/>
+                <a:ea typeface="Arial" pitchFamily="34" charset="-122"/>
+                <a:cs typeface="Arial" pitchFamily="34" charset="-120"/>
+              </a:rPr>
+              <a:t>a tarifa</a:t>
+            </a:r>
+            <a:endParaRPr lang="en-US" sz="1500" dirty="0"/>
+          </a:p>
+        </p:txBody>
+      </p:sp>
+      <p:sp>
+        <p:nvSpPr>
+          <p:cNvPr id="25" name="Slide Number Placeholder 0"/>
+          <p:cNvSpPr>
+            <a:spLocks noGrp="1"/>
+          </p:cNvSpPr>
+          <p:nvPr>
+            <p:ph type="sldNum" sz="quarter" idx="4294967295"/>
+          </p:nvPr>
+        </p:nvSpPr>
+        <p:spPr>
+          <a:xfrm>
+            <a:off x="11292840" y="6556248"/>
+            <a:ext cx="548640" cy="256032"/>
+          </a:xfrm>
+          <a:prstGeom prst="rect">
+            <a:avLst/>
+          </a:prstGeom>
+          <a:extLst>
+            <a:ext uri="{C572A759-6A51-4108-AA02-DFA0A04FC94B}">
+              <ma14:wrappingTextBoxFlag xmlns:ma14="http://schemas.microsoft.com/office/mac/drawingml/2011/main" val="0"/>
+            </a:ext>
+          </a:extLst>
+        </p:spPr>
+        <p:txBody>
+          <a:bodyPr/>
+          <a:lstStyle>
+            <a:lvl1pPr>
+              <a:defRPr sz="900">
+                <a:solidFill>
+                  <a:srgbClr val="1B3A6B"/>
+                </a:solidFill>
+                <a:latin typeface="Arial"/>
+                <a:ea typeface="Arial"/>
+                <a:cs typeface="Arial"/>
+              </a:defRPr>
+            </a:lvl1pPr>
+          </a:lstStyle>
+          <a:p>
+            <a:pPr algn="r"/>
+            <a:fld id="{F7021451-1387-4CA6-816F-3879F97B5CBC}" type="slidenum">
+              <a:rPr b="1" lang="en-US"/>
+              <a:t>28</a:t>
+            </a:fld>
+            <a:endParaRPr lang="en-US"/>
+          </a:p>
+        </p:txBody>
+      </p:sp>
+    </p:spTree>
+  </p:cSld>
+  <p:clrMapOvr>
+    <a:masterClrMapping/>
+  </p:clrMapOvr>
+</p:sld>
+</file>
+
+<file path=ppt/slides/slide29.xml><?xml version="1.0" encoding="utf-8"?>
+<p:sld xmlns:a="http://schemas.openxmlformats.org/drawingml/2006/main" xmlns:r="http://schemas.openxmlformats.org/officeDocument/2006/relationships" xmlns:p="http://schemas.openxmlformats.org/presentationml/2006/main">
+  <p:cSld name="Slide 29">
+    <p:bg>
+      <p:bgPr>
+        <a:solidFill>
+          <a:srgbClr val="EEF3FA"/>
+        </a:solidFill>
+      </p:bgPr>
+    </p:bg>
+    <p:spTree>
+      <p:nvGrpSpPr>
+        <p:cNvPr id="1" name=""/>
+        <p:cNvGrpSpPr/>
+        <p:nvPr/>
+      </p:nvGrpSpPr>
+      <p:grpSpPr>
+        <a:xfrm>
+          <a:off x="0" y="0"/>
+          <a:ext cx="0" cy="0"/>
+          <a:chOff x="0" y="0"/>
+          <a:chExt cx="0" cy="0"/>
+        </a:xfrm>
+      </p:grpSpPr>
+      <p:sp>
+        <p:nvSpPr>
+          <p:cNvPr id="2" name="Shape 0"/>
+          <p:cNvSpPr/>
+          <p:nvPr/>
+        </p:nvSpPr>
+        <p:spPr>
+          <a:xfrm>
+            <a:off x="0" y="6510528"/>
+            <a:ext cx="12191695" cy="347472"/>
+          </a:xfrm>
+          <a:prstGeom prst="rect">
+            <a:avLst/>
+          </a:prstGeom>
+          <a:solidFill>
+            <a:srgbClr val="FFFFFF"/>
+          </a:solidFill>
+          <a:ln w="6350">
+            <a:solidFill>
+              <a:srgbClr val="D8E0EC"/>
+            </a:solidFill>
+            <a:prstDash val="solid"/>
+          </a:ln>
+        </p:spPr>
+      </p:sp>
+      <p:pic>
+        <p:nvPicPr>
+          <p:cNvPr id="3" name="Image 0" descr="/www/wwwroot/rexar/gdsolar/docs/curso/slides/assets/logo-gdsolar.png">    </p:cNvPr>
+          <p:cNvPicPr>
+            <a:picLocks noChangeAspect="1"/>
+          </p:cNvPicPr>
+          <p:nvPr/>
+        </p:nvPicPr>
+        <p:blipFill>
+          <a:blip r:embed="rId1"/>
+          <a:stretch>
+            <a:fillRect/>
+          </a:stretch>
+        </p:blipFill>
+        <p:spPr>
+          <a:xfrm>
+            <a:off x="548640" y="6547104"/>
+            <a:ext cx="274320" cy="274320"/>
+          </a:xfrm>
+          <a:prstGeom prst="rect">
+            <a:avLst/>
+          </a:prstGeom>
+        </p:spPr>
+      </p:pic>
+      <p:sp>
+        <p:nvSpPr>
+          <p:cNvPr id="4" name="Text 1"/>
+          <p:cNvSpPr/>
+          <p:nvPr/>
+        </p:nvSpPr>
+        <p:spPr>
+          <a:xfrm>
+            <a:off x="886968" y="6528816"/>
+            <a:ext cx="6400800" cy="310896"/>
+          </a:xfrm>
+          <a:prstGeom prst="rect">
+            <a:avLst/>
+          </a:prstGeom>
+          <a:noFill/>
+          <a:ln/>
+        </p:spPr>
+        <p:txBody>
+          <a:bodyPr wrap="square" rtlCol="0" anchor="ctr"/>
+          <a:lstStyle/>
+          <a:p>
+            <a:pPr indent="0" marL="0">
+              <a:buNone/>
+            </a:pPr>
+            <a:r>
+              <a:rPr lang="en-US" sz="900" b="1" dirty="0">
+                <a:solidFill>
+                  <a:srgbClr val="64748B"/>
+                </a:solidFill>
+                <a:latin typeface="Arial" pitchFamily="34" charset="0"/>
+                <a:ea typeface="Arial" pitchFamily="34" charset="-122"/>
+                <a:cs typeface="Arial" pitchFamily="34" charset="-120"/>
+              </a:rPr>
+              <a:t>GD Solar  ·  Formação em Energia por Assinatura</a:t>
+            </a:r>
+            <a:endParaRPr lang="en-US" sz="900" dirty="0"/>
+          </a:p>
+        </p:txBody>
+      </p:sp>
+      <p:sp>
+        <p:nvSpPr>
+          <p:cNvPr id="5" name="Text 2"/>
+          <p:cNvSpPr/>
+          <p:nvPr/>
+        </p:nvSpPr>
+        <p:spPr>
+          <a:xfrm>
+            <a:off x="7132320" y="6528816"/>
+            <a:ext cx="4023360" cy="310896"/>
+          </a:xfrm>
+          <a:prstGeom prst="rect">
+            <a:avLst/>
+          </a:prstGeom>
+          <a:noFill/>
+          <a:ln/>
+        </p:spPr>
+        <p:txBody>
+          <a:bodyPr wrap="square" rtlCol="0" anchor="ctr"/>
+          <a:lstStyle/>
+          <a:p>
+            <a:pPr algn="r" indent="0" marL="0">
+              <a:buNone/>
+            </a:pPr>
+            <a:r>
+              <a:rPr lang="en-US" sz="900" dirty="0">
+                <a:solidFill>
+                  <a:srgbClr val="64748B"/>
+                </a:solidFill>
+                <a:latin typeface="Arial" pitchFamily="34" charset="0"/>
+                <a:ea typeface="Arial" pitchFamily="34" charset="-122"/>
+                <a:cs typeface="Arial" pitchFamily="34" charset="-120"/>
+              </a:rPr>
+              <a:t>M4 · Teste rápido</a:t>
+            </a:r>
+            <a:endParaRPr lang="en-US" sz="900" dirty="0"/>
+          </a:p>
+        </p:txBody>
+      </p:sp>
+      <p:sp>
+        <p:nvSpPr>
+          <p:cNvPr id="6" name="Shape 3"/>
+          <p:cNvSpPr/>
+          <p:nvPr/>
+        </p:nvSpPr>
+        <p:spPr>
+          <a:xfrm>
+            <a:off x="548640" y="384048"/>
+            <a:ext cx="82296" cy="658368"/>
+          </a:xfrm>
+          <a:prstGeom prst="rect">
+            <a:avLst/>
+          </a:prstGeom>
+          <a:solidFill>
+            <a:srgbClr val="F7A23B"/>
+          </a:solidFill>
+          <a:ln/>
+        </p:spPr>
+      </p:sp>
+      <p:sp>
+        <p:nvSpPr>
+          <p:cNvPr id="7" name="Text 4"/>
+          <p:cNvSpPr/>
+          <p:nvPr/>
+        </p:nvSpPr>
+        <p:spPr>
+          <a:xfrm>
+            <a:off x="777240" y="292608"/>
+            <a:ext cx="10972800" cy="274320"/>
+          </a:xfrm>
+          <a:prstGeom prst="rect">
+            <a:avLst/>
+          </a:prstGeom>
+          <a:noFill/>
+          <a:ln/>
+        </p:spPr>
+        <p:txBody>
+          <a:bodyPr wrap="square" rtlCol="0" anchor="ctr"/>
+          <a:lstStyle/>
+          <a:p>
+            <a:pPr indent="0" marL="0">
+              <a:buNone/>
+            </a:pPr>
+            <a:r>
+              <a:rPr lang="en-US" sz="1000" b="1" spc="100" kern="0" dirty="0">
+                <a:solidFill>
+                  <a:srgbClr val="F7A23B"/>
+                </a:solidFill>
+                <a:latin typeface="Arial" pitchFamily="34" charset="0"/>
+                <a:ea typeface="Arial" pitchFamily="34" charset="-122"/>
+                <a:cs typeface="Arial" pitchFamily="34" charset="-120"/>
+              </a:rPr>
+              <a:t>CONFIRA SUAS RESPOSTAS</a:t>
+            </a:r>
+            <a:endParaRPr lang="en-US" sz="1000" dirty="0"/>
+          </a:p>
+        </p:txBody>
+      </p:sp>
+      <p:sp>
+        <p:nvSpPr>
+          <p:cNvPr id="8" name="Text 5"/>
+          <p:cNvSpPr/>
+          <p:nvPr/>
+        </p:nvSpPr>
+        <p:spPr>
+          <a:xfrm>
+            <a:off x="777240" y="530352"/>
+            <a:ext cx="10881360" cy="566928"/>
+          </a:xfrm>
+          <a:prstGeom prst="rect">
+            <a:avLst/>
+          </a:prstGeom>
+          <a:noFill/>
+          <a:ln/>
+        </p:spPr>
+        <p:txBody>
+          <a:bodyPr wrap="square" rtlCol="0" anchor="ctr">
+            <a:normAutofit/>
+          </a:bodyPr>
+          <a:lstStyle/>
+          <a:p>
+            <a:pPr indent="0" marL="0">
+              <a:buNone/>
+            </a:pPr>
+            <a:r>
+              <a:rPr lang="en-US" sz="2600" b="1" dirty="0">
+                <a:solidFill>
+                  <a:srgbClr val="1B3A6B"/>
+                </a:solidFill>
+                <a:latin typeface="Arial" pitchFamily="34" charset="0"/>
+                <a:ea typeface="Arial" pitchFamily="34" charset="-122"/>
+                <a:cs typeface="Arial" pitchFamily="34" charset="-120"/>
+              </a:rPr>
+              <a:t>Gabarito do teste rápido</a:t>
+            </a:r>
+            <a:endParaRPr lang="en-US" sz="2600" dirty="0"/>
+          </a:p>
+        </p:txBody>
+      </p:sp>
+      <p:sp>
+        <p:nvSpPr>
+          <p:cNvPr id="9" name="Shape 6"/>
+          <p:cNvSpPr/>
+          <p:nvPr/>
+        </p:nvSpPr>
+        <p:spPr>
+          <a:xfrm>
+            <a:off x="548640" y="1325880"/>
+            <a:ext cx="3544824" cy="2331720"/>
+          </a:xfrm>
+          <a:prstGeom prst="roundRect">
+            <a:avLst>
+              <a:gd name="adj" fmla="val 3137"/>
+            </a:avLst>
+          </a:prstGeom>
+          <a:solidFill>
+            <a:srgbClr val="FFFFFF"/>
+          </a:solidFill>
+          <a:ln w="9525">
+            <a:solidFill>
+              <a:srgbClr val="D8E0EC"/>
+            </a:solidFill>
+            <a:prstDash val="solid"/>
+          </a:ln>
+          <a:effectLst>
+            <a:outerShdw sx="100000" sy="100000" kx="0" ky="0" algn="bl" rotWithShape="0" blurRad="38100" dist="12700" dir="5400000">
+              <a:srgbClr val="000000">
+                <a:alpha val="8000"/>
+              </a:srgbClr>
+            </a:outerShdw>
+          </a:effectLst>
+        </p:spPr>
+      </p:sp>
+      <p:sp>
+        <p:nvSpPr>
+          <p:cNvPr id="10" name="Shape 7"/>
+          <p:cNvSpPr/>
+          <p:nvPr/>
+        </p:nvSpPr>
+        <p:spPr>
+          <a:xfrm>
+            <a:off x="731520" y="1508760"/>
+            <a:ext cx="457200" cy="457200"/>
+          </a:xfrm>
+          <a:prstGeom prst="ellipse">
+            <a:avLst/>
+          </a:prstGeom>
+          <a:solidFill>
+            <a:srgbClr val="1B3A6B"/>
+          </a:solidFill>
+          <a:ln/>
+        </p:spPr>
+      </p:sp>
+      <p:sp>
+        <p:nvSpPr>
+          <p:cNvPr id="11" name="Text 8"/>
+          <p:cNvSpPr/>
+          <p:nvPr/>
+        </p:nvSpPr>
+        <p:spPr>
+          <a:xfrm>
+            <a:off x="731520" y="1508760"/>
+            <a:ext cx="457200" cy="457200"/>
+          </a:xfrm>
+          <a:prstGeom prst="rect">
+            <a:avLst/>
+          </a:prstGeom>
+          <a:noFill/>
+          <a:ln/>
+        </p:spPr>
+        <p:txBody>
+          <a:bodyPr wrap="square" rtlCol="0" anchor="ctr"/>
+          <a:lstStyle/>
+          <a:p>
+            <a:pPr algn="ctr" indent="0" marL="0">
+              <a:buNone/>
+            </a:pPr>
+            <a:r>
+              <a:rPr lang="en-US" sz="1400" b="1" dirty="0">
+                <a:solidFill>
+                  <a:srgbClr val="FFFFFF"/>
+                </a:solidFill>
+                <a:latin typeface="Arial" pitchFamily="34" charset="0"/>
+                <a:ea typeface="Arial" pitchFamily="34" charset="-122"/>
+                <a:cs typeface="Arial" pitchFamily="34" charset="-120"/>
+              </a:rPr>
+              <a:t>1</a:t>
+            </a:r>
+            <a:endParaRPr lang="en-US" sz="1400" dirty="0"/>
+          </a:p>
+        </p:txBody>
+      </p:sp>
+      <p:sp>
+        <p:nvSpPr>
+          <p:cNvPr id="12" name="Text 9"/>
+          <p:cNvSpPr/>
+          <p:nvPr/>
+        </p:nvSpPr>
+        <p:spPr>
+          <a:xfrm>
+            <a:off x="1325880" y="1435608"/>
+            <a:ext cx="2630424" cy="2112264"/>
+          </a:xfrm>
+          <a:prstGeom prst="rect">
+            <a:avLst/>
+          </a:prstGeom>
+          <a:noFill/>
+          <a:ln/>
+        </p:spPr>
+        <p:txBody>
+          <a:bodyPr wrap="square" rtlCol="0" anchor="ctr">
+            <a:normAutofit/>
+          </a:bodyPr>
+          <a:lstStyle/>
+          <a:p>
+            <a:pPr indent="0" marL="0">
+              <a:buNone/>
+            </a:pPr>
+            <a:r>
+              <a:rPr lang="en-US" sz="1800" dirty="0">
+                <a:solidFill>
+                  <a:srgbClr val="1F2937"/>
+                </a:solidFill>
+                <a:latin typeface="Arial" pitchFamily="34" charset="0"/>
+                <a:ea typeface="Arial" pitchFamily="34" charset="-122"/>
+                <a:cs typeface="Arial" pitchFamily="34" charset="-120"/>
+              </a:rPr>
+              <a:t>B) Usina conectada com parecer de acesso e histórico de geração</a:t>
+            </a:r>
+            <a:endParaRPr lang="en-US" sz="1800" dirty="0"/>
+          </a:p>
+        </p:txBody>
+      </p:sp>
+      <p:sp>
+        <p:nvSpPr>
+          <p:cNvPr id="13" name="Shape 10"/>
+          <p:cNvSpPr/>
+          <p:nvPr/>
+        </p:nvSpPr>
+        <p:spPr>
+          <a:xfrm>
+            <a:off x="4322064" y="1325880"/>
+            <a:ext cx="3544824" cy="2331720"/>
+          </a:xfrm>
+          <a:prstGeom prst="roundRect">
+            <a:avLst>
+              <a:gd name="adj" fmla="val 3137"/>
+            </a:avLst>
+          </a:prstGeom>
+          <a:solidFill>
+            <a:srgbClr val="FFFFFF"/>
+          </a:solidFill>
+          <a:ln w="9525">
+            <a:solidFill>
+              <a:srgbClr val="D8E0EC"/>
+            </a:solidFill>
+            <a:prstDash val="solid"/>
+          </a:ln>
+          <a:effectLst>
+            <a:outerShdw sx="100000" sy="100000" kx="0" ky="0" algn="bl" rotWithShape="0" blurRad="38100" dist="12700" dir="5400000">
+              <a:srgbClr val="000000">
+                <a:alpha val="8000"/>
+              </a:srgbClr>
+            </a:outerShdw>
+          </a:effectLst>
+        </p:spPr>
+      </p:sp>
+      <p:sp>
+        <p:nvSpPr>
+          <p:cNvPr id="14" name="Shape 11"/>
+          <p:cNvSpPr/>
+          <p:nvPr/>
+        </p:nvSpPr>
+        <p:spPr>
+          <a:xfrm>
+            <a:off x="4504944" y="1508760"/>
+            <a:ext cx="457200" cy="457200"/>
+          </a:xfrm>
+          <a:prstGeom prst="ellipse">
+            <a:avLst/>
+          </a:prstGeom>
+          <a:solidFill>
+            <a:srgbClr val="F7A23B"/>
+          </a:solidFill>
+          <a:ln/>
+        </p:spPr>
+      </p:sp>
+      <p:sp>
+        <p:nvSpPr>
+          <p:cNvPr id="15" name="Text 12"/>
+          <p:cNvSpPr/>
+          <p:nvPr/>
+        </p:nvSpPr>
+        <p:spPr>
+          <a:xfrm>
+            <a:off x="4504944" y="1508760"/>
+            <a:ext cx="457200" cy="457200"/>
+          </a:xfrm>
+          <a:prstGeom prst="rect">
+            <a:avLst/>
+          </a:prstGeom>
+          <a:noFill/>
+          <a:ln/>
+        </p:spPr>
+        <p:txBody>
+          <a:bodyPr wrap="square" rtlCol="0" anchor="ctr"/>
+          <a:lstStyle/>
+          <a:p>
+            <a:pPr algn="ctr" indent="0" marL="0">
+              <a:buNone/>
+            </a:pPr>
+            <a:r>
+              <a:rPr lang="en-US" sz="1400" b="1" dirty="0">
+                <a:solidFill>
+                  <a:srgbClr val="FFFFFF"/>
+                </a:solidFill>
+                <a:latin typeface="Arial" pitchFamily="34" charset="0"/>
+                <a:ea typeface="Arial" pitchFamily="34" charset="-122"/>
+                <a:cs typeface="Arial" pitchFamily="34" charset="-120"/>
+              </a:rPr>
+              <a:t>2</a:t>
+            </a:r>
+            <a:endParaRPr lang="en-US" sz="1400" dirty="0"/>
+          </a:p>
+        </p:txBody>
+      </p:sp>
+      <p:sp>
+        <p:nvSpPr>
+          <p:cNvPr id="16" name="Text 13"/>
+          <p:cNvSpPr/>
+          <p:nvPr/>
+        </p:nvSpPr>
+        <p:spPr>
+          <a:xfrm>
+            <a:off x="5099304" y="1435608"/>
+            <a:ext cx="2630424" cy="2112264"/>
+          </a:xfrm>
+          <a:prstGeom prst="rect">
+            <a:avLst/>
+          </a:prstGeom>
+          <a:noFill/>
+          <a:ln/>
+        </p:spPr>
+        <p:txBody>
+          <a:bodyPr wrap="square" rtlCol="0" anchor="ctr">
+            <a:normAutofit/>
+          </a:bodyPr>
+          <a:lstStyle/>
+          <a:p>
+            <a:pPr indent="0" marL="0">
+              <a:buNone/>
+            </a:pPr>
+            <a:r>
+              <a:rPr lang="en-US" sz="1800" dirty="0">
+                <a:solidFill>
+                  <a:srgbClr val="1F2937"/>
+                </a:solidFill>
+                <a:latin typeface="Arial" pitchFamily="34" charset="0"/>
+                <a:ea typeface="Arial" pitchFamily="34" charset="-122"/>
+                <a:cs typeface="Arial" pitchFamily="34" charset="-120"/>
+              </a:rPr>
+              <a:t>A) Para saber se é GD I ou GD II</a:t>
+            </a:r>
+            <a:endParaRPr lang="en-US" sz="1800" dirty="0"/>
+          </a:p>
+        </p:txBody>
+      </p:sp>
+      <p:sp>
+        <p:nvSpPr>
+          <p:cNvPr id="17" name="Shape 14"/>
+          <p:cNvSpPr/>
+          <p:nvPr/>
+        </p:nvSpPr>
+        <p:spPr>
+          <a:xfrm>
+            <a:off x="8095488" y="1325880"/>
+            <a:ext cx="3544824" cy="2331720"/>
+          </a:xfrm>
+          <a:prstGeom prst="roundRect">
+            <a:avLst>
+              <a:gd name="adj" fmla="val 3137"/>
+            </a:avLst>
+          </a:prstGeom>
+          <a:solidFill>
+            <a:srgbClr val="FFFFFF"/>
+          </a:solidFill>
+          <a:ln w="9525">
+            <a:solidFill>
+              <a:srgbClr val="D8E0EC"/>
+            </a:solidFill>
+            <a:prstDash val="solid"/>
+          </a:ln>
+          <a:effectLst>
+            <a:outerShdw sx="100000" sy="100000" kx="0" ky="0" algn="bl" rotWithShape="0" blurRad="38100" dist="12700" dir="5400000">
+              <a:srgbClr val="000000">
+                <a:alpha val="8000"/>
+              </a:srgbClr>
+            </a:outerShdw>
+          </a:effectLst>
+        </p:spPr>
+      </p:sp>
+      <p:sp>
+        <p:nvSpPr>
+          <p:cNvPr id="18" name="Shape 15"/>
+          <p:cNvSpPr/>
+          <p:nvPr/>
+        </p:nvSpPr>
+        <p:spPr>
+          <a:xfrm>
+            <a:off x="8278368" y="1508760"/>
+            <a:ext cx="457200" cy="457200"/>
+          </a:xfrm>
+          <a:prstGeom prst="ellipse">
+            <a:avLst/>
+          </a:prstGeom>
+          <a:solidFill>
+            <a:srgbClr val="1B3A6B"/>
+          </a:solidFill>
+          <a:ln/>
+        </p:spPr>
+      </p:sp>
+      <p:sp>
+        <p:nvSpPr>
+          <p:cNvPr id="19" name="Text 16"/>
+          <p:cNvSpPr/>
+          <p:nvPr/>
+        </p:nvSpPr>
+        <p:spPr>
+          <a:xfrm>
+            <a:off x="8278368" y="1508760"/>
+            <a:ext cx="457200" cy="457200"/>
+          </a:xfrm>
+          <a:prstGeom prst="rect">
+            <a:avLst/>
+          </a:prstGeom>
+          <a:noFill/>
+          <a:ln/>
+        </p:spPr>
+        <p:txBody>
+          <a:bodyPr wrap="square" rtlCol="0" anchor="ctr"/>
+          <a:lstStyle/>
+          <a:p>
+            <a:pPr algn="ctr" indent="0" marL="0">
+              <a:buNone/>
+            </a:pPr>
+            <a:r>
+              <a:rPr lang="en-US" sz="1400" b="1" dirty="0">
+                <a:solidFill>
+                  <a:srgbClr val="FFFFFF"/>
+                </a:solidFill>
+                <a:latin typeface="Arial" pitchFamily="34" charset="0"/>
+                <a:ea typeface="Arial" pitchFamily="34" charset="-122"/>
+                <a:cs typeface="Arial" pitchFamily="34" charset="-120"/>
+              </a:rPr>
+              <a:t>3</a:t>
+            </a:r>
+            <a:endParaRPr lang="en-US" sz="1400" dirty="0"/>
+          </a:p>
+        </p:txBody>
+      </p:sp>
+      <p:sp>
+        <p:nvSpPr>
+          <p:cNvPr id="20" name="Text 17"/>
+          <p:cNvSpPr/>
+          <p:nvPr/>
+        </p:nvSpPr>
+        <p:spPr>
+          <a:xfrm>
+            <a:off x="8872728" y="1435608"/>
+            <a:ext cx="2630424" cy="2112264"/>
+          </a:xfrm>
+          <a:prstGeom prst="rect">
+            <a:avLst/>
+          </a:prstGeom>
+          <a:noFill/>
+          <a:ln/>
+        </p:spPr>
+        <p:txBody>
+          <a:bodyPr wrap="square" rtlCol="0" anchor="ctr">
+            <a:normAutofit/>
+          </a:bodyPr>
+          <a:lstStyle/>
+          <a:p>
+            <a:pPr indent="0" marL="0">
+              <a:buNone/>
+            </a:pPr>
+            <a:r>
+              <a:rPr lang="en-US" sz="1800" dirty="0">
+                <a:solidFill>
+                  <a:srgbClr val="1F2937"/>
+                </a:solidFill>
+                <a:latin typeface="Arial" pitchFamily="34" charset="0"/>
+                <a:ea typeface="Arial" pitchFamily="34" charset="-122"/>
+                <a:cs typeface="Arial" pitchFamily="34" charset="-120"/>
+              </a:rPr>
+              <a:t>B) atenção a ônus e anuência do credor</a:t>
+            </a:r>
+            <a:endParaRPr lang="en-US" sz="1800" dirty="0"/>
+          </a:p>
+        </p:txBody>
+      </p:sp>
+      <p:sp>
+        <p:nvSpPr>
+          <p:cNvPr id="21" name="Shape 18"/>
+          <p:cNvSpPr/>
+          <p:nvPr/>
+        </p:nvSpPr>
+        <p:spPr>
+          <a:xfrm>
+            <a:off x="548640" y="3886200"/>
+            <a:ext cx="3544824" cy="2331720"/>
+          </a:xfrm>
+          <a:prstGeom prst="roundRect">
+            <a:avLst>
+              <a:gd name="adj" fmla="val 3137"/>
+            </a:avLst>
+          </a:prstGeom>
+          <a:solidFill>
+            <a:srgbClr val="FFFFFF"/>
+          </a:solidFill>
+          <a:ln w="9525">
+            <a:solidFill>
+              <a:srgbClr val="D8E0EC"/>
+            </a:solidFill>
+            <a:prstDash val="solid"/>
+          </a:ln>
+          <a:effectLst>
+            <a:outerShdw sx="100000" sy="100000" kx="0" ky="0" algn="bl" rotWithShape="0" blurRad="38100" dist="12700" dir="5400000">
+              <a:srgbClr val="000000">
+                <a:alpha val="8000"/>
+              </a:srgbClr>
+            </a:outerShdw>
+          </a:effectLst>
+        </p:spPr>
+      </p:sp>
+      <p:sp>
+        <p:nvSpPr>
+          <p:cNvPr id="22" name="Shape 19"/>
+          <p:cNvSpPr/>
+          <p:nvPr/>
+        </p:nvSpPr>
+        <p:spPr>
+          <a:xfrm>
+            <a:off x="731520" y="4069080"/>
+            <a:ext cx="457200" cy="457200"/>
+          </a:xfrm>
+          <a:prstGeom prst="ellipse">
+            <a:avLst/>
+          </a:prstGeom>
+          <a:solidFill>
+            <a:srgbClr val="F7A23B"/>
+          </a:solidFill>
+          <a:ln/>
+        </p:spPr>
+      </p:sp>
+      <p:sp>
+        <p:nvSpPr>
+          <p:cNvPr id="23" name="Text 20"/>
+          <p:cNvSpPr/>
+          <p:nvPr/>
+        </p:nvSpPr>
+        <p:spPr>
+          <a:xfrm>
+            <a:off x="731520" y="4069080"/>
+            <a:ext cx="457200" cy="457200"/>
+          </a:xfrm>
+          <a:prstGeom prst="rect">
+            <a:avLst/>
+          </a:prstGeom>
+          <a:noFill/>
+          <a:ln/>
+        </p:spPr>
+        <p:txBody>
+          <a:bodyPr wrap="square" rtlCol="0" anchor="ctr"/>
+          <a:lstStyle/>
+          <a:p>
+            <a:pPr algn="ctr" indent="0" marL="0">
+              <a:buNone/>
+            </a:pPr>
+            <a:r>
+              <a:rPr lang="en-US" sz="1400" b="1" dirty="0">
+                <a:solidFill>
+                  <a:srgbClr val="FFFFFF"/>
+                </a:solidFill>
+                <a:latin typeface="Arial" pitchFamily="34" charset="0"/>
+                <a:ea typeface="Arial" pitchFamily="34" charset="-122"/>
+                <a:cs typeface="Arial" pitchFamily="34" charset="-120"/>
+              </a:rPr>
+              <a:t>4</a:t>
+            </a:r>
+            <a:endParaRPr lang="en-US" sz="1400" dirty="0"/>
+          </a:p>
+        </p:txBody>
+      </p:sp>
+      <p:sp>
+        <p:nvSpPr>
+          <p:cNvPr id="24" name="Text 21"/>
+          <p:cNvSpPr/>
+          <p:nvPr/>
+        </p:nvSpPr>
+        <p:spPr>
+          <a:xfrm>
+            <a:off x="1325880" y="3995928"/>
+            <a:ext cx="2630424" cy="2112264"/>
+          </a:xfrm>
+          <a:prstGeom prst="rect">
+            <a:avLst/>
+          </a:prstGeom>
+          <a:noFill/>
+          <a:ln/>
+        </p:spPr>
+        <p:txBody>
+          <a:bodyPr wrap="square" rtlCol="0" anchor="ctr">
+            <a:normAutofit/>
+          </a:bodyPr>
+          <a:lstStyle/>
+          <a:p>
+            <a:pPr indent="0" marL="0">
+              <a:buNone/>
+            </a:pPr>
+            <a:r>
+              <a:rPr lang="en-US" sz="1800" dirty="0">
+                <a:solidFill>
+                  <a:srgbClr val="1F2937"/>
+                </a:solidFill>
+                <a:latin typeface="Arial" pitchFamily="34" charset="0"/>
+                <a:ea typeface="Arial" pitchFamily="34" charset="-122"/>
+                <a:cs typeface="Arial" pitchFamily="34" charset="-120"/>
+              </a:rPr>
+              <a:t>A) crédito − desconto do consumidor − taxa de administração</a:t>
+            </a:r>
+            <a:endParaRPr lang="en-US" sz="1800" dirty="0"/>
+          </a:p>
+        </p:txBody>
+      </p:sp>
+      <p:sp>
+        <p:nvSpPr>
+          <p:cNvPr id="25" name="Shape 22"/>
+          <p:cNvSpPr/>
+          <p:nvPr/>
+        </p:nvSpPr>
+        <p:spPr>
+          <a:xfrm>
+            <a:off x="4322064" y="3886200"/>
+            <a:ext cx="3544824" cy="2331720"/>
+          </a:xfrm>
+          <a:prstGeom prst="roundRect">
+            <a:avLst>
+              <a:gd name="adj" fmla="val 3137"/>
+            </a:avLst>
+          </a:prstGeom>
+          <a:solidFill>
+            <a:srgbClr val="FFFFFF"/>
+          </a:solidFill>
+          <a:ln w="9525">
+            <a:solidFill>
+              <a:srgbClr val="D8E0EC"/>
+            </a:solidFill>
+            <a:prstDash val="solid"/>
+          </a:ln>
+          <a:effectLst>
+            <a:outerShdw sx="100000" sy="100000" kx="0" ky="0" algn="bl" rotWithShape="0" blurRad="38100" dist="12700" dir="5400000">
+              <a:srgbClr val="000000">
+                <a:alpha val="8000"/>
+              </a:srgbClr>
+            </a:outerShdw>
+          </a:effectLst>
+        </p:spPr>
+      </p:sp>
+      <p:sp>
+        <p:nvSpPr>
+          <p:cNvPr id="26" name="Shape 23"/>
+          <p:cNvSpPr/>
+          <p:nvPr/>
+        </p:nvSpPr>
+        <p:spPr>
+          <a:xfrm>
+            <a:off x="4504944" y="4069080"/>
+            <a:ext cx="457200" cy="457200"/>
+          </a:xfrm>
+          <a:prstGeom prst="ellipse">
+            <a:avLst/>
+          </a:prstGeom>
+          <a:solidFill>
+            <a:srgbClr val="1B3A6B"/>
+          </a:solidFill>
+          <a:ln/>
+        </p:spPr>
+      </p:sp>
+      <p:sp>
+        <p:nvSpPr>
+          <p:cNvPr id="27" name="Text 24"/>
+          <p:cNvSpPr/>
+          <p:nvPr/>
+        </p:nvSpPr>
+        <p:spPr>
+          <a:xfrm>
+            <a:off x="4504944" y="4069080"/>
+            <a:ext cx="457200" cy="457200"/>
+          </a:xfrm>
+          <a:prstGeom prst="rect">
+            <a:avLst/>
+          </a:prstGeom>
+          <a:noFill/>
+          <a:ln/>
+        </p:spPr>
+        <p:txBody>
+          <a:bodyPr wrap="square" rtlCol="0" anchor="ctr"/>
+          <a:lstStyle/>
+          <a:p>
+            <a:pPr algn="ctr" indent="0" marL="0">
+              <a:buNone/>
+            </a:pPr>
+            <a:r>
+              <a:rPr lang="en-US" sz="1400" b="1" dirty="0">
+                <a:solidFill>
+                  <a:srgbClr val="FFFFFF"/>
+                </a:solidFill>
+                <a:latin typeface="Arial" pitchFamily="34" charset="0"/>
+                <a:ea typeface="Arial" pitchFamily="34" charset="-122"/>
+                <a:cs typeface="Arial" pitchFamily="34" charset="-120"/>
+              </a:rPr>
+              <a:t>5</a:t>
+            </a:r>
+            <a:endParaRPr lang="en-US" sz="1400" dirty="0"/>
+          </a:p>
+        </p:txBody>
+      </p:sp>
+      <p:sp>
+        <p:nvSpPr>
+          <p:cNvPr id="28" name="Text 25"/>
+          <p:cNvSpPr/>
+          <p:nvPr/>
+        </p:nvSpPr>
+        <p:spPr>
+          <a:xfrm>
+            <a:off x="5099304" y="3995928"/>
+            <a:ext cx="2630424" cy="2112264"/>
+          </a:xfrm>
+          <a:prstGeom prst="rect">
+            <a:avLst/>
+          </a:prstGeom>
+          <a:noFill/>
+          <a:ln/>
+        </p:spPr>
+        <p:txBody>
+          <a:bodyPr wrap="square" rtlCol="0" anchor="ctr">
+            <a:normAutofit/>
+          </a:bodyPr>
+          <a:lstStyle/>
+          <a:p>
+            <a:pPr indent="0" marL="0">
+              <a:buNone/>
+            </a:pPr>
+            <a:r>
+              <a:rPr lang="en-US" sz="1800" dirty="0">
+                <a:solidFill>
+                  <a:srgbClr val="1F2937"/>
+                </a:solidFill>
+                <a:latin typeface="Arial" pitchFamily="34" charset="0"/>
+                <a:ea typeface="Arial" pitchFamily="34" charset="-122"/>
+                <a:cs typeface="Arial" pitchFamily="34" charset="-120"/>
+              </a:rPr>
+              <a:t>-) </a:t>
+            </a:r>
+            <a:endParaRPr lang="en-US" sz="1800" dirty="0"/>
+          </a:p>
+        </p:txBody>
+      </p:sp>
+      <p:sp>
+        <p:nvSpPr>
+          <p:cNvPr id="29" name="Shape 26"/>
+          <p:cNvSpPr/>
+          <p:nvPr/>
+        </p:nvSpPr>
+        <p:spPr>
+          <a:xfrm>
+            <a:off x="8095488" y="3886200"/>
+            <a:ext cx="3544824" cy="2331720"/>
+          </a:xfrm>
+          <a:prstGeom prst="roundRect">
+            <a:avLst>
+              <a:gd name="adj" fmla="val 3137"/>
+            </a:avLst>
+          </a:prstGeom>
+          <a:solidFill>
+            <a:srgbClr val="FFFFFF"/>
+          </a:solidFill>
+          <a:ln w="9525">
+            <a:solidFill>
+              <a:srgbClr val="D8E0EC"/>
+            </a:solidFill>
+            <a:prstDash val="solid"/>
+          </a:ln>
+          <a:effectLst>
+            <a:outerShdw sx="100000" sy="100000" kx="0" ky="0" algn="bl" rotWithShape="0" blurRad="38100" dist="12700" dir="5400000">
+              <a:srgbClr val="000000">
+                <a:alpha val="8000"/>
+              </a:srgbClr>
+            </a:outerShdw>
+          </a:effectLst>
+        </p:spPr>
+      </p:sp>
+      <p:sp>
+        <p:nvSpPr>
+          <p:cNvPr id="30" name="Shape 27"/>
+          <p:cNvSpPr/>
+          <p:nvPr/>
+        </p:nvSpPr>
+        <p:spPr>
+          <a:xfrm>
+            <a:off x="8278368" y="4069080"/>
+            <a:ext cx="457200" cy="457200"/>
+          </a:xfrm>
+          <a:prstGeom prst="ellipse">
+            <a:avLst/>
+          </a:prstGeom>
+          <a:solidFill>
+            <a:srgbClr val="F7A23B"/>
+          </a:solidFill>
+          <a:ln/>
+        </p:spPr>
+      </p:sp>
+      <p:sp>
+        <p:nvSpPr>
+          <p:cNvPr id="31" name="Text 28"/>
+          <p:cNvSpPr/>
+          <p:nvPr/>
+        </p:nvSpPr>
+        <p:spPr>
+          <a:xfrm>
+            <a:off x="8278368" y="4069080"/>
+            <a:ext cx="457200" cy="457200"/>
+          </a:xfrm>
+          <a:prstGeom prst="rect">
+            <a:avLst/>
+          </a:prstGeom>
+          <a:noFill/>
+          <a:ln/>
+        </p:spPr>
+        <p:txBody>
+          <a:bodyPr wrap="square" rtlCol="0" anchor="ctr"/>
+          <a:lstStyle/>
+          <a:p>
+            <a:pPr algn="ctr" indent="0" marL="0">
+              <a:buNone/>
+            </a:pPr>
+            <a:r>
+              <a:rPr lang="en-US" sz="1400" b="1" dirty="0">
+                <a:solidFill>
+                  <a:srgbClr val="FFFFFF"/>
+                </a:solidFill>
+                <a:latin typeface="Arial" pitchFamily="34" charset="0"/>
+                <a:ea typeface="Arial" pitchFamily="34" charset="-122"/>
+                <a:cs typeface="Arial" pitchFamily="34" charset="-120"/>
+              </a:rPr>
+              <a:t>6</a:t>
+            </a:r>
+            <a:endParaRPr lang="en-US" sz="1400" dirty="0"/>
+          </a:p>
+        </p:txBody>
+      </p:sp>
+      <p:sp>
+        <p:nvSpPr>
+          <p:cNvPr id="32" name="Text 29"/>
+          <p:cNvSpPr/>
+          <p:nvPr/>
+        </p:nvSpPr>
+        <p:spPr>
+          <a:xfrm>
+            <a:off x="8872728" y="3995928"/>
+            <a:ext cx="2630424" cy="2112264"/>
+          </a:xfrm>
+          <a:prstGeom prst="rect">
+            <a:avLst/>
+          </a:prstGeom>
+          <a:noFill/>
+          <a:ln/>
+        </p:spPr>
+        <p:txBody>
+          <a:bodyPr wrap="square" rtlCol="0" anchor="ctr">
+            <a:normAutofit/>
+          </a:bodyPr>
+          <a:lstStyle/>
+          <a:p>
+            <a:pPr indent="0" marL="0">
+              <a:buNone/>
+            </a:pPr>
+            <a:r>
+              <a:rPr lang="en-US" sz="1800" dirty="0">
+                <a:solidFill>
+                  <a:srgbClr val="1F2937"/>
+                </a:solidFill>
+                <a:latin typeface="Arial" pitchFamily="34" charset="0"/>
+                <a:ea typeface="Arial" pitchFamily="34" charset="-122"/>
+                <a:cs typeface="Arial" pitchFamily="34" charset="-120"/>
+              </a:rPr>
+              <a:t>-) </a:t>
+            </a:r>
+            <a:endParaRPr lang="en-US" sz="1800" dirty="0"/>
+          </a:p>
+        </p:txBody>
+      </p:sp>
+      <p:sp>
+        <p:nvSpPr>
+          <p:cNvPr id="25" name="Slide Number Placeholder 0"/>
+          <p:cNvSpPr>
+            <a:spLocks noGrp="1"/>
+          </p:cNvSpPr>
+          <p:nvPr>
+            <p:ph type="sldNum" sz="quarter" idx="4294967295"/>
+          </p:nvPr>
+        </p:nvSpPr>
+        <p:spPr>
+          <a:xfrm>
+            <a:off x="11292840" y="6556248"/>
+            <a:ext cx="548640" cy="256032"/>
+          </a:xfrm>
+          <a:prstGeom prst="rect">
+            <a:avLst/>
+          </a:prstGeom>
+          <a:extLst>
+            <a:ext uri="{C572A759-6A51-4108-AA02-DFA0A04FC94B}">
+              <ma14:wrappingTextBoxFlag xmlns:ma14="http://schemas.microsoft.com/office/mac/drawingml/2011/main" val="0"/>
+            </a:ext>
+          </a:extLst>
+        </p:spPr>
+        <p:txBody>
+          <a:bodyPr/>
+          <a:lstStyle>
+            <a:lvl1pPr>
+              <a:defRPr sz="900">
+                <a:solidFill>
+                  <a:srgbClr val="1B3A6B"/>
+                </a:solidFill>
+                <a:latin typeface="Arial"/>
+                <a:ea typeface="Arial"/>
+                <a:cs typeface="Arial"/>
+              </a:defRPr>
+            </a:lvl1pPr>
+          </a:lstStyle>
+          <a:p>
+            <a:pPr algn="r"/>
+            <a:fld id="{F7021451-1387-4CA6-816F-3879F97B5CBC}" type="slidenum">
+              <a:rPr b="1" lang="en-US"/>
+              <a:t>29</a:t>
             </a:fld>
             <a:endParaRPr lang="en-US"/>
           </a:p>
@@ -14254,7 +19462,7 @@
         <p:spPr>
           <a:xfrm>
             <a:off x="822960" y="2286000"/>
-            <a:ext cx="2965704" cy="3749040"/>
+            <a:ext cx="2965704" cy="2286000"/>
           </a:xfrm>
           <a:prstGeom prst="rect">
             <a:avLst/>
@@ -14275,7 +19483,7 @@
               <a:buNone/>
             </a:pPr>
             <a:r>
-              <a:rPr lang="en-US" sz="1700" dirty="0">
+              <a:rPr lang="en-US" sz="1200" dirty="0">
                 <a:solidFill>
                   <a:srgbClr val="1F2937"/>
                 </a:solidFill>
@@ -14285,7 +19493,7 @@
               </a:rPr>
               <a:t>1. Usinas prontas sem clientes (ou subutilizadas)</a:t>
             </a:r>
-            <a:endParaRPr lang="en-US" sz="1700" dirty="0"/>
+            <a:endParaRPr lang="en-US" sz="1200" dirty="0"/>
           </a:p>
           <a:p>
             <a:pPr indent="0" marL="0">
@@ -14295,7 +19503,7 @@
               <a:buNone/>
             </a:pPr>
             <a:r>
-              <a:rPr lang="en-US" sz="1700" dirty="0">
+              <a:rPr lang="en-US" sz="1200" dirty="0">
                 <a:solidFill>
                   <a:srgbClr val="1F2937"/>
                 </a:solidFill>
@@ -14305,7 +19513,7 @@
               </a:rPr>
               <a:t>2. Donos de terra próxima à cidade</a:t>
             </a:r>
-            <a:endParaRPr lang="en-US" sz="1700" dirty="0"/>
+            <a:endParaRPr lang="en-US" sz="1200" dirty="0"/>
           </a:p>
           <a:p>
             <a:pPr indent="0" marL="0">
@@ -14315,7 +19523,7 @@
               <a:buNone/>
             </a:pPr>
             <a:r>
-              <a:rPr lang="en-US" sz="1700" dirty="0">
+              <a:rPr lang="en-US" sz="1200" dirty="0">
                 <a:solidFill>
                   <a:srgbClr val="1F2937"/>
                 </a:solidFill>
@@ -14325,7 +19533,7 @@
               </a:rPr>
               <a:t>3. Investidores em busca de renda</a:t>
             </a:r>
-            <a:endParaRPr lang="en-US" sz="1700" dirty="0"/>
+            <a:endParaRPr lang="en-US" sz="1200" dirty="0"/>
           </a:p>
           <a:p>
             <a:pPr indent="0" marL="0">
@@ -14335,7 +19543,7 @@
               <a:buNone/>
             </a:pPr>
             <a:r>
-              <a:rPr lang="en-US" sz="1700" dirty="0">
+              <a:rPr lang="en-US" sz="1200" dirty="0">
                 <a:solidFill>
                   <a:srgbClr val="1F2937"/>
                 </a:solidFill>
@@ -14345,7 +19553,7 @@
               </a:rPr>
               <a:t>4. Integradoras e EPCs com projetos</a:t>
             </a:r>
-            <a:endParaRPr lang="en-US" sz="1700" dirty="0"/>
+            <a:endParaRPr lang="en-US" sz="1200" dirty="0"/>
           </a:p>
           <a:p>
             <a:pPr indent="0" marL="0">
@@ -14355,7 +19563,7 @@
               <a:buNone/>
             </a:pPr>
             <a:r>
-              <a:rPr lang="en-US" sz="1700" dirty="0">
+              <a:rPr lang="en-US" sz="1200" dirty="0">
                 <a:solidFill>
                   <a:srgbClr val="1F2937"/>
                 </a:solidFill>
@@ -14365,13 +19573,72 @@
               </a:rPr>
               <a:t>5. Usinas próprias (asset-heavy)</a:t>
             </a:r>
-            <a:endParaRPr lang="en-US" sz="1700" dirty="0"/>
+            <a:endParaRPr lang="en-US" sz="1200" dirty="0"/>
           </a:p>
         </p:txBody>
       </p:sp>
       <p:sp>
         <p:nvSpPr>
           <p:cNvPr id="13" name="Shape 10"/>
+          <p:cNvSpPr/>
+          <p:nvPr/>
+        </p:nvSpPr>
+        <p:spPr>
+          <a:xfrm>
+            <a:off x="822960" y="4663440"/>
+            <a:ext cx="2965704" cy="18288"/>
+          </a:xfrm>
+          <a:prstGeom prst="rect">
+            <a:avLst/>
+          </a:prstGeom>
+          <a:solidFill>
+            <a:srgbClr val="D8E0EC"/>
+          </a:solidFill>
+          <a:ln/>
+        </p:spPr>
+      </p:sp>
+      <p:sp>
+        <p:nvSpPr>
+          <p:cNvPr id="14" name="Text 11"/>
+          <p:cNvSpPr/>
+          <p:nvPr/>
+        </p:nvSpPr>
+        <p:spPr>
+          <a:xfrm>
+            <a:off x="822960" y="4754880"/>
+            <a:ext cx="2965704" cy="1371600"/>
+          </a:xfrm>
+          <a:prstGeom prst="rect">
+            <a:avLst/>
+          </a:prstGeom>
+          <a:noFill/>
+          <a:ln/>
+        </p:spPr>
+        <p:txBody>
+          <a:bodyPr wrap="square" rtlCol="0" anchor="t"/>
+          <a:lstStyle/>
+          <a:p>
+            <a:pPr indent="0" marL="0">
+              <a:buNone/>
+            </a:pPr>
+            <a:r>
+              <a:rPr lang="en-US" sz="1300" i="1" dirty="0">
+                <a:solidFill>
+                  <a:srgbClr val="64748B"/>
+                </a:solidFill>
+                <a:latin typeface="Arial" pitchFamily="34" charset="0"/>
+                <a:ea typeface="Arial" pitchFamily="34" charset="-122"/>
+                <a:cs typeface="Arial" pitchFamily="34" charset="-120"/>
+              </a:rPr>
+              <a:t>As usinas estão em cinco lugares, listados na tela. A oportunidade mais rápida costuma ser a usina pronta e subutilizada, cujo dono tem um ativo parado e um financiamento correndo.</a:t>
+            </a:r>
+            <a:endParaRPr lang="en-US" sz="1300" dirty="0"/>
+          </a:p>
+        </p:txBody>
+      </p:sp>
+      <p:sp>
+        <p:nvSpPr>
+          <p:cNvPr id="15" name="Shape 12"/>
           <p:cNvSpPr/>
           <p:nvPr/>
         </p:nvSpPr>
@@ -14405,7 +19672,7 @@
       </p:sp>
       <p:sp>
         <p:nvSpPr>
-          <p:cNvPr id="14" name="Shape 11"/>
+          <p:cNvPr id="16" name="Shape 13"/>
           <p:cNvSpPr/>
           <p:nvPr/>
         </p:nvSpPr>
@@ -14425,7 +19692,7 @@
       </p:sp>
       <p:sp>
         <p:nvSpPr>
-          <p:cNvPr id="15" name="Text 12"/>
+          <p:cNvPr id="17" name="Text 14"/>
           <p:cNvSpPr/>
           <p:nvPr/>
         </p:nvSpPr>
@@ -14466,14 +19733,14 @@
       </p:sp>
       <p:sp>
         <p:nvSpPr>
-          <p:cNvPr id="16" name="Text 13"/>
+          <p:cNvPr id="18" name="Text 15"/>
           <p:cNvSpPr/>
           <p:nvPr/>
         </p:nvSpPr>
         <p:spPr>
           <a:xfrm>
             <a:off x="4611624" y="2286000"/>
-            <a:ext cx="2965704" cy="3749040"/>
+            <a:ext cx="2965704" cy="2286000"/>
           </a:xfrm>
           <a:prstGeom prst="rect">
             <a:avLst/>
@@ -14495,7 +19762,7 @@
               <a:buChar char="●"/>
             </a:pPr>
             <a:r>
-              <a:rPr lang="en-US" sz="1700" dirty="0">
+              <a:rPr lang="en-US" sz="1400" dirty="0">
                 <a:solidFill>
                   <a:srgbClr val="1F2937"/>
                 </a:solidFill>
@@ -14505,7 +19772,7 @@
               </a:rPr>
               <a:t>Rede de integradoras</a:t>
             </a:r>
-            <a:endParaRPr lang="en-US" sz="1700" dirty="0"/>
+            <a:endParaRPr lang="en-US" sz="1400" dirty="0"/>
           </a:p>
           <a:p>
             <a:pPr marL="342900" indent="-342900">
@@ -14516,7 +19783,7 @@
               <a:buChar char="●"/>
             </a:pPr>
             <a:r>
-              <a:rPr lang="en-US" sz="1700" dirty="0">
+              <a:rPr lang="en-US" sz="1400" dirty="0">
                 <a:solidFill>
                   <a:srgbClr val="1F2937"/>
                 </a:solidFill>
@@ -14526,7 +19793,7 @@
               </a:rPr>
               <a:t>Contadores e gerentes de banco</a:t>
             </a:r>
-            <a:endParaRPr lang="en-US" sz="1700" dirty="0"/>
+            <a:endParaRPr lang="en-US" sz="1400" dirty="0"/>
           </a:p>
           <a:p>
             <a:pPr marL="342900" indent="-342900">
@@ -14537,7 +19804,7 @@
               <a:buChar char="●"/>
             </a:pPr>
             <a:r>
-              <a:rPr lang="en-US" sz="1700" dirty="0">
+              <a:rPr lang="en-US" sz="1400" dirty="0">
                 <a:solidFill>
                   <a:srgbClr val="1F2937"/>
                 </a:solidFill>
@@ -14547,7 +19814,7 @@
               </a:rPr>
               <a:t>Associações rurais e cooperativas agro</a:t>
             </a:r>
-            <a:endParaRPr lang="en-US" sz="1700" dirty="0"/>
+            <a:endParaRPr lang="en-US" sz="1400" dirty="0"/>
           </a:p>
           <a:p>
             <a:pPr marL="342900" indent="-342900">
@@ -14558,7 +19825,7 @@
               <a:buChar char="●"/>
             </a:pPr>
             <a:r>
-              <a:rPr lang="en-US" sz="1700" dirty="0">
+              <a:rPr lang="en-US" sz="1400" dirty="0">
                 <a:solidFill>
                   <a:srgbClr val="1F2937"/>
                 </a:solidFill>
@@ -14568,7 +19835,7 @@
               </a:rPr>
               <a:t>Anúncios e conteúdo</a:t>
             </a:r>
-            <a:endParaRPr lang="en-US" sz="1700" dirty="0"/>
+            <a:endParaRPr lang="en-US" sz="1400" dirty="0"/>
           </a:p>
           <a:p>
             <a:pPr marL="342900" indent="-342900">
@@ -14579,7 +19846,7 @@
               <a:buChar char="●"/>
             </a:pPr>
             <a:r>
-              <a:rPr lang="en-US" sz="1700" dirty="0">
+              <a:rPr lang="en-US" sz="1400" dirty="0">
                 <a:solidFill>
                   <a:srgbClr val="1F2937"/>
                 </a:solidFill>
@@ -14589,13 +19856,72 @@
               </a:rPr>
               <a:t>Mapa de usinas conectadas (dados públicos da ANEEL)</a:t>
             </a:r>
-            <a:endParaRPr lang="en-US" sz="1700" dirty="0"/>
-          </a:p>
-        </p:txBody>
-      </p:sp>
-      <p:sp>
-        <p:nvSpPr>
-          <p:cNvPr id="17" name="Shape 14"/>
+            <a:endParaRPr lang="en-US" sz="1400" dirty="0"/>
+          </a:p>
+        </p:txBody>
+      </p:sp>
+      <p:sp>
+        <p:nvSpPr>
+          <p:cNvPr id="19" name="Shape 16"/>
+          <p:cNvSpPr/>
+          <p:nvPr/>
+        </p:nvSpPr>
+        <p:spPr>
+          <a:xfrm>
+            <a:off x="4611624" y="4663440"/>
+            <a:ext cx="2965704" cy="18288"/>
+          </a:xfrm>
+          <a:prstGeom prst="rect">
+            <a:avLst/>
+          </a:prstGeom>
+          <a:solidFill>
+            <a:srgbClr val="D8E0EC"/>
+          </a:solidFill>
+          <a:ln/>
+        </p:spPr>
+      </p:sp>
+      <p:sp>
+        <p:nvSpPr>
+          <p:cNvPr id="20" name="Text 17"/>
+          <p:cNvSpPr/>
+          <p:nvPr/>
+        </p:nvSpPr>
+        <p:spPr>
+          <a:xfrm>
+            <a:off x="4611624" y="4754880"/>
+            <a:ext cx="2965704" cy="1371600"/>
+          </a:xfrm>
+          <a:prstGeom prst="rect">
+            <a:avLst/>
+          </a:prstGeom>
+          <a:noFill/>
+          <a:ln/>
+        </p:spPr>
+        <p:txBody>
+          <a:bodyPr wrap="square" rtlCol="0" anchor="t"/>
+          <a:lstStyle/>
+          <a:p>
+            <a:pPr indent="0" marL="0">
+              <a:buNone/>
+            </a:pPr>
+            <a:r>
+              <a:rPr lang="en-US" sz="1300" i="1" dirty="0">
+                <a:solidFill>
+                  <a:srgbClr val="64748B"/>
+                </a:solidFill>
+                <a:latin typeface="Arial" pitchFamily="34" charset="0"/>
+                <a:ea typeface="Arial" pitchFamily="34" charset="-122"/>
+                <a:cs typeface="Arial" pitchFamily="34" charset="-120"/>
+              </a:rPr>
+              <a:t>Para encontrá-las, use a sua rede, contadores e bancos, associações rurais e os dados públicos da ANEEL. Uma visita à usina vale mais que dez e-mails.</a:t>
+            </a:r>
+            <a:endParaRPr lang="en-US" sz="1300" dirty="0"/>
+          </a:p>
+        </p:txBody>
+      </p:sp>
+      <p:sp>
+        <p:nvSpPr>
+          <p:cNvPr id="21" name="Shape 18"/>
           <p:cNvSpPr/>
           <p:nvPr/>
         </p:nvSpPr>
@@ -14629,7 +19955,7 @@
       </p:sp>
       <p:sp>
         <p:nvSpPr>
-          <p:cNvPr id="18" name="Shape 15"/>
+          <p:cNvPr id="22" name="Shape 19"/>
           <p:cNvSpPr/>
           <p:nvPr/>
         </p:nvSpPr>
@@ -14649,7 +19975,7 @@
       </p:sp>
       <p:sp>
         <p:nvSpPr>
-          <p:cNvPr id="19" name="Text 16"/>
+          <p:cNvPr id="23" name="Text 20"/>
           <p:cNvSpPr/>
           <p:nvPr/>
         </p:nvSpPr>
@@ -14690,14 +20016,14 @@
       </p:sp>
       <p:sp>
         <p:nvSpPr>
-          <p:cNvPr id="20" name="Text 17"/>
+          <p:cNvPr id="24" name="Text 21"/>
           <p:cNvSpPr/>
           <p:nvPr/>
         </p:nvSpPr>
         <p:spPr>
           <a:xfrm>
             <a:off x="8400288" y="2286000"/>
-            <a:ext cx="2965704" cy="3749040"/>
+            <a:ext cx="2965704" cy="2286000"/>
           </a:xfrm>
           <a:prstGeom prst="rect">
             <a:avLst/>
@@ -14793,6 +20119,65 @@
               <a:t>Transparência total (portal do produtor)</a:t>
             </a:r>
             <a:endParaRPr lang="en-US" sz="1700" dirty="0"/>
+          </a:p>
+        </p:txBody>
+      </p:sp>
+      <p:sp>
+        <p:nvSpPr>
+          <p:cNvPr id="25" name="Shape 22"/>
+          <p:cNvSpPr/>
+          <p:nvPr/>
+        </p:nvSpPr>
+        <p:spPr>
+          <a:xfrm>
+            <a:off x="8400288" y="4663440"/>
+            <a:ext cx="2965704" cy="18288"/>
+          </a:xfrm>
+          <a:prstGeom prst="rect">
+            <a:avLst/>
+          </a:prstGeom>
+          <a:solidFill>
+            <a:srgbClr val="D8E0EC"/>
+          </a:solidFill>
+          <a:ln/>
+        </p:spPr>
+      </p:sp>
+      <p:sp>
+        <p:nvSpPr>
+          <p:cNvPr id="26" name="Text 23"/>
+          <p:cNvSpPr/>
+          <p:nvPr/>
+        </p:nvSpPr>
+        <p:spPr>
+          <a:xfrm>
+            <a:off x="8400288" y="4754880"/>
+            <a:ext cx="2965704" cy="1371600"/>
+          </a:xfrm>
+          <a:prstGeom prst="rect">
+            <a:avLst/>
+          </a:prstGeom>
+          <a:noFill/>
+          <a:ln/>
+        </p:spPr>
+        <p:txBody>
+          <a:bodyPr wrap="square" rtlCol="0" anchor="t"/>
+          <a:lstStyle/>
+          <a:p>
+            <a:pPr indent="0" marL="0">
+              <a:buNone/>
+            </a:pPr>
+            <a:r>
+              <a:rPr lang="en-US" sz="1300" i="1" dirty="0">
+                <a:solidFill>
+                  <a:srgbClr val="64748B"/>
+                </a:solidFill>
+                <a:latin typeface="Arial" pitchFamily="34" charset="0"/>
+                <a:ea typeface="Arial" pitchFamily="34" charset="-122"/>
+                <a:cs typeface="Arial" pitchFamily="34" charset="-120"/>
+              </a:rPr>
+              <a:t>O produtor quer quatro coisas: renda previsível, usina cheia rápido, zero trabalho e transparência. O portal do produtor é um ótimo argumento.</a:t>
+            </a:r>
+            <a:endParaRPr lang="en-US" sz="1300" dirty="0"/>
           </a:p>
         </p:txBody>
       </p:sp>
@@ -14839,6 +20224,514 @@
             <a:fld id="{F7021451-1387-4CA6-816F-3879F97B5CBC}" type="slidenum">
               <a:rPr b="1" lang="en-US"/>
               <a:t>3</a:t>
+            </a:fld>
+            <a:endParaRPr lang="en-US"/>
+          </a:p>
+        </p:txBody>
+      </p:sp>
+    </p:spTree>
+  </p:cSld>
+  <p:clrMapOvr>
+    <a:masterClrMapping/>
+  </p:clrMapOvr>
+</p:sld>
+</file>
+
+<file path=ppt/slides/slide30.xml><?xml version="1.0" encoding="utf-8"?>
+<p:sld xmlns:a="http://schemas.openxmlformats.org/drawingml/2006/main" xmlns:r="http://schemas.openxmlformats.org/officeDocument/2006/relationships" xmlns:p="http://schemas.openxmlformats.org/presentationml/2006/main">
+  <p:cSld name="Slide 30">
+    <p:bg>
+      <p:bgPr>
+        <a:solidFill>
+          <a:srgbClr val="F6F8FB"/>
+        </a:solidFill>
+      </p:bgPr>
+    </p:bg>
+    <p:spTree>
+      <p:nvGrpSpPr>
+        <p:cNvPr id="1" name=""/>
+        <p:cNvGrpSpPr/>
+        <p:nvPr/>
+      </p:nvGrpSpPr>
+      <p:grpSpPr>
+        <a:xfrm>
+          <a:off x="0" y="0"/>
+          <a:ext cx="0" cy="0"/>
+          <a:chOff x="0" y="0"/>
+          <a:chExt cx="0" cy="0"/>
+        </a:xfrm>
+      </p:grpSpPr>
+      <p:sp>
+        <p:nvSpPr>
+          <p:cNvPr id="2" name="Shape 0"/>
+          <p:cNvSpPr/>
+          <p:nvPr/>
+        </p:nvSpPr>
+        <p:spPr>
+          <a:xfrm>
+            <a:off x="0" y="6510528"/>
+            <a:ext cx="12191695" cy="347472"/>
+          </a:xfrm>
+          <a:prstGeom prst="rect">
+            <a:avLst/>
+          </a:prstGeom>
+          <a:solidFill>
+            <a:srgbClr val="FFFFFF"/>
+          </a:solidFill>
+          <a:ln w="6350">
+            <a:solidFill>
+              <a:srgbClr val="D8E0EC"/>
+            </a:solidFill>
+            <a:prstDash val="solid"/>
+          </a:ln>
+        </p:spPr>
+      </p:sp>
+      <p:pic>
+        <p:nvPicPr>
+          <p:cNvPr id="3" name="Image 0" descr="/www/wwwroot/rexar/gdsolar/docs/curso/slides/assets/logo-gdsolar.png">    </p:cNvPr>
+          <p:cNvPicPr>
+            <a:picLocks noChangeAspect="1"/>
+          </p:cNvPicPr>
+          <p:nvPr/>
+        </p:nvPicPr>
+        <p:blipFill>
+          <a:blip r:embed="rId1"/>
+          <a:stretch>
+            <a:fillRect/>
+          </a:stretch>
+        </p:blipFill>
+        <p:spPr>
+          <a:xfrm>
+            <a:off x="548640" y="6547104"/>
+            <a:ext cx="274320" cy="274320"/>
+          </a:xfrm>
+          <a:prstGeom prst="rect">
+            <a:avLst/>
+          </a:prstGeom>
+        </p:spPr>
+      </p:pic>
+      <p:sp>
+        <p:nvSpPr>
+          <p:cNvPr id="4" name="Text 1"/>
+          <p:cNvSpPr/>
+          <p:nvPr/>
+        </p:nvSpPr>
+        <p:spPr>
+          <a:xfrm>
+            <a:off x="886968" y="6528816"/>
+            <a:ext cx="6400800" cy="310896"/>
+          </a:xfrm>
+          <a:prstGeom prst="rect">
+            <a:avLst/>
+          </a:prstGeom>
+          <a:noFill/>
+          <a:ln/>
+        </p:spPr>
+        <p:txBody>
+          <a:bodyPr wrap="square" rtlCol="0" anchor="ctr"/>
+          <a:lstStyle/>
+          <a:p>
+            <a:pPr indent="0" marL="0">
+              <a:buNone/>
+            </a:pPr>
+            <a:r>
+              <a:rPr lang="en-US" sz="900" b="1" dirty="0">
+                <a:solidFill>
+                  <a:srgbClr val="64748B"/>
+                </a:solidFill>
+                <a:latin typeface="Arial" pitchFamily="34" charset="0"/>
+                <a:ea typeface="Arial" pitchFamily="34" charset="-122"/>
+                <a:cs typeface="Arial" pitchFamily="34" charset="-120"/>
+              </a:rPr>
+              <a:t>GD Solar  ·  Formação em Energia por Assinatura</a:t>
+            </a:r>
+            <a:endParaRPr lang="en-US" sz="900" dirty="0"/>
+          </a:p>
+        </p:txBody>
+      </p:sp>
+      <p:sp>
+        <p:nvSpPr>
+          <p:cNvPr id="5" name="Text 2"/>
+          <p:cNvSpPr/>
+          <p:nvPr/>
+        </p:nvSpPr>
+        <p:spPr>
+          <a:xfrm>
+            <a:off x="7132320" y="6528816"/>
+            <a:ext cx="4023360" cy="310896"/>
+          </a:xfrm>
+          <a:prstGeom prst="rect">
+            <a:avLst/>
+          </a:prstGeom>
+          <a:noFill/>
+          <a:ln/>
+        </p:spPr>
+        <p:txBody>
+          <a:bodyPr wrap="square" rtlCol="0" anchor="ctr"/>
+          <a:lstStyle/>
+          <a:p>
+            <a:pPr algn="r" indent="0" marL="0">
+              <a:buNone/>
+            </a:pPr>
+            <a:r>
+              <a:rPr lang="en-US" sz="900" dirty="0">
+                <a:solidFill>
+                  <a:srgbClr val="64748B"/>
+                </a:solidFill>
+                <a:latin typeface="Arial" pitchFamily="34" charset="0"/>
+                <a:ea typeface="Arial" pitchFamily="34" charset="-122"/>
+                <a:cs typeface="Arial" pitchFamily="34" charset="-120"/>
+              </a:rPr>
+              <a:t>M4 · Fechamento</a:t>
+            </a:r>
+            <a:endParaRPr lang="en-US" sz="900" dirty="0"/>
+          </a:p>
+        </p:txBody>
+      </p:sp>
+      <p:sp>
+        <p:nvSpPr>
+          <p:cNvPr id="6" name="Shape 3"/>
+          <p:cNvSpPr/>
+          <p:nvPr/>
+        </p:nvSpPr>
+        <p:spPr>
+          <a:xfrm>
+            <a:off x="548640" y="384048"/>
+            <a:ext cx="82296" cy="658368"/>
+          </a:xfrm>
+          <a:prstGeom prst="rect">
+            <a:avLst/>
+          </a:prstGeom>
+          <a:solidFill>
+            <a:srgbClr val="F7A23B"/>
+          </a:solidFill>
+          <a:ln/>
+        </p:spPr>
+      </p:sp>
+      <p:sp>
+        <p:nvSpPr>
+          <p:cNvPr id="7" name="Text 4"/>
+          <p:cNvSpPr/>
+          <p:nvPr/>
+        </p:nvSpPr>
+        <p:spPr>
+          <a:xfrm>
+            <a:off x="777240" y="292608"/>
+            <a:ext cx="10972800" cy="274320"/>
+          </a:xfrm>
+          <a:prstGeom prst="rect">
+            <a:avLst/>
+          </a:prstGeom>
+          <a:noFill/>
+          <a:ln/>
+        </p:spPr>
+        <p:txBody>
+          <a:bodyPr wrap="square" rtlCol="0" anchor="ctr"/>
+          <a:lstStyle/>
+          <a:p>
+            <a:pPr indent="0" marL="0">
+              <a:buNone/>
+            </a:pPr>
+            <a:r>
+              <a:rPr lang="en-US" sz="1000" b="1" spc="100" kern="0" dirty="0">
+                <a:solidFill>
+                  <a:srgbClr val="F7A23B"/>
+                </a:solidFill>
+                <a:latin typeface="Arial" pitchFamily="34" charset="0"/>
+                <a:ea typeface="Arial" pitchFamily="34" charset="-122"/>
+                <a:cs typeface="Arial" pitchFamily="34" charset="-120"/>
+              </a:rPr>
+              <a:t>FECHAMENTO DO MÓDULO</a:t>
+            </a:r>
+            <a:endParaRPr lang="en-US" sz="1000" dirty="0"/>
+          </a:p>
+        </p:txBody>
+      </p:sp>
+      <p:sp>
+        <p:nvSpPr>
+          <p:cNvPr id="8" name="Text 5"/>
+          <p:cNvSpPr/>
+          <p:nvPr/>
+        </p:nvSpPr>
+        <p:spPr>
+          <a:xfrm>
+            <a:off x="777240" y="530352"/>
+            <a:ext cx="10881360" cy="566928"/>
+          </a:xfrm>
+          <a:prstGeom prst="rect">
+            <a:avLst/>
+          </a:prstGeom>
+          <a:noFill/>
+          <a:ln/>
+        </p:spPr>
+        <p:txBody>
+          <a:bodyPr wrap="square" rtlCol="0" anchor="ctr">
+            <a:normAutofit/>
+          </a:bodyPr>
+          <a:lstStyle/>
+          <a:p>
+            <a:pPr indent="0" marL="0">
+              <a:buNone/>
+            </a:pPr>
+            <a:r>
+              <a:rPr lang="en-US" sz="2600" b="1" dirty="0">
+                <a:solidFill>
+                  <a:srgbClr val="1B3A6B"/>
+                </a:solidFill>
+                <a:latin typeface="Arial" pitchFamily="34" charset="0"/>
+                <a:ea typeface="Arial" pitchFamily="34" charset="-122"/>
+                <a:cs typeface="Arial" pitchFamily="34" charset="-120"/>
+              </a:rPr>
+              <a:t>Pratique e entregue</a:t>
+            </a:r>
+            <a:endParaRPr lang="en-US" sz="2600" dirty="0"/>
+          </a:p>
+        </p:txBody>
+      </p:sp>
+      <p:sp>
+        <p:nvSpPr>
+          <p:cNvPr id="9" name="Text 6"/>
+          <p:cNvSpPr/>
+          <p:nvPr/>
+        </p:nvSpPr>
+        <p:spPr>
+          <a:xfrm>
+            <a:off x="548640" y="1325880"/>
+            <a:ext cx="5394960" cy="411480"/>
+          </a:xfrm>
+          <a:prstGeom prst="rect">
+            <a:avLst/>
+          </a:prstGeom>
+          <a:noFill/>
+          <a:ln/>
+        </p:spPr>
+        <p:txBody>
+          <a:bodyPr wrap="square" rtlCol="0" anchor="ctr"/>
+          <a:lstStyle/>
+          <a:p>
+            <a:pPr indent="0" marL="0">
+              <a:buNone/>
+            </a:pPr>
+            <a:r>
+              <a:rPr lang="en-US" sz="1600" b="1" dirty="0">
+                <a:solidFill>
+                  <a:srgbClr val="1B3A6B"/>
+                </a:solidFill>
+                <a:latin typeface="Arial" pitchFamily="34" charset="0"/>
+                <a:ea typeface="Arial" pitchFamily="34" charset="-122"/>
+                <a:cs typeface="Arial" pitchFamily="34" charset="-120"/>
+              </a:rPr>
+              <a:t>Exercícios</a:t>
+            </a:r>
+            <a:endParaRPr lang="en-US" sz="1600" dirty="0"/>
+          </a:p>
+        </p:txBody>
+      </p:sp>
+      <p:sp>
+        <p:nvSpPr>
+          <p:cNvPr id="10" name="Text 7"/>
+          <p:cNvSpPr/>
+          <p:nvPr/>
+        </p:nvSpPr>
+        <p:spPr>
+          <a:xfrm>
+            <a:off x="548640" y="1783080"/>
+            <a:ext cx="5394960" cy="4480560"/>
+          </a:xfrm>
+          <a:prstGeom prst="rect">
+            <a:avLst/>
+          </a:prstGeom>
+          <a:noFill/>
+          <a:ln/>
+        </p:spPr>
+        <p:txBody>
+          <a:bodyPr wrap="square" rtlCol="0" anchor="t">
+            <a:normAutofit/>
+          </a:bodyPr>
+          <a:lstStyle/>
+          <a:p>
+            <a:pPr indent="0" marL="0">
+              <a:spcAft>
+                <a:spcPts val="800"/>
+              </a:spcAft>
+              <a:buNone/>
+            </a:pPr>
+            <a:r>
+              <a:rPr lang="en-US" sz="1600" dirty="0">
+                <a:solidFill>
+                  <a:srgbClr val="1F2937"/>
+                </a:solidFill>
+                <a:latin typeface="Arial" pitchFamily="34" charset="0"/>
+                <a:ea typeface="Arial" pitchFamily="34" charset="-122"/>
+                <a:cs typeface="Arial" pitchFamily="34" charset="-120"/>
+              </a:rPr>
+              <a:t>1. Uma usina tem pedido de acesso protocolado em março/2023 e potência de 800 kW. Ela é GD I? Que risco existe se um único cliente ficar com 30% dos créditos?</a:t>
+            </a:r>
+            <a:endParaRPr lang="en-US" sz="1600" dirty="0"/>
+          </a:p>
+          <a:p>
+            <a:pPr indent="0" marL="0">
+              <a:spcAft>
+                <a:spcPts val="800"/>
+              </a:spcAft>
+              <a:buNone/>
+            </a:pPr>
+            <a:r>
+              <a:rPr lang="en-US" sz="1600" dirty="0">
+                <a:solidFill>
+                  <a:srgbClr val="1F2937"/>
+                </a:solidFill>
+                <a:latin typeface="Arial" pitchFamily="34" charset="0"/>
+                <a:ea typeface="Arial" pitchFamily="34" charset="-122"/>
+                <a:cs typeface="Arial" pitchFamily="34" charset="-120"/>
+              </a:rPr>
+              <a:t>2. Usina de 75.000 kWh/mês, crédito R$ 0,68, desconto 20%, taxa 15%. Repasse anual bruto ao produtor?</a:t>
+            </a:r>
+            <a:endParaRPr lang="en-US" sz="1600" dirty="0"/>
+          </a:p>
+          <a:p>
+            <a:pPr indent="0" marL="0">
+              <a:spcAft>
+                <a:spcPts val="800"/>
+              </a:spcAft>
+              <a:buNone/>
+            </a:pPr>
+            <a:r>
+              <a:rPr lang="en-US" sz="1600" dirty="0">
+                <a:solidFill>
+                  <a:srgbClr val="1F2937"/>
+                </a:solidFill>
+                <a:latin typeface="Arial" pitchFamily="34" charset="0"/>
+                <a:ea typeface="Arial" pitchFamily="34" charset="-122"/>
+                <a:cs typeface="Arial" pitchFamily="34" charset="-120"/>
+              </a:rPr>
+              <a:t>3. Liste 5 documentos que você pediria antes de assinar com um produtor.</a:t>
+            </a:r>
+            <a:endParaRPr lang="en-US" sz="1600" dirty="0"/>
+          </a:p>
+        </p:txBody>
+      </p:sp>
+      <p:sp>
+        <p:nvSpPr>
+          <p:cNvPr id="11" name="Shape 8"/>
+          <p:cNvSpPr/>
+          <p:nvPr/>
+        </p:nvSpPr>
+        <p:spPr>
+          <a:xfrm>
+            <a:off x="6172200" y="1325880"/>
+            <a:ext cx="5468112" cy="4937760"/>
+          </a:xfrm>
+          <a:prstGeom prst="roundRect">
+            <a:avLst>
+              <a:gd name="adj" fmla="val 1852"/>
+            </a:avLst>
+          </a:prstGeom>
+          <a:solidFill>
+            <a:srgbClr val="1B3A6B"/>
+          </a:solidFill>
+          <a:ln/>
+        </p:spPr>
+      </p:sp>
+      <p:sp>
+        <p:nvSpPr>
+          <p:cNvPr id="12" name="Text 9"/>
+          <p:cNvSpPr/>
+          <p:nvPr/>
+        </p:nvSpPr>
+        <p:spPr>
+          <a:xfrm>
+            <a:off x="6492240" y="1554480"/>
+            <a:ext cx="4828032" cy="4480560"/>
+          </a:xfrm>
+          <a:prstGeom prst="rect">
+            <a:avLst/>
+          </a:prstGeom>
+          <a:noFill/>
+          <a:ln/>
+        </p:spPr>
+        <p:txBody>
+          <a:bodyPr wrap="square" rtlCol="0" anchor="t">
+            <a:normAutofit/>
+          </a:bodyPr>
+          <a:lstStyle/>
+          <a:p>
+            <a:pPr indent="0" marL="0">
+              <a:buNone/>
+            </a:pPr>
+            <a:r>
+              <a:rPr lang="en-US" sz="1300" b="1" spc="100" kern="0" dirty="0">
+                <a:solidFill>
+                  <a:srgbClr val="F7A23B"/>
+                </a:solidFill>
+                <a:latin typeface="Arial" pitchFamily="34" charset="0"/>
+                <a:ea typeface="Arial" pitchFamily="34" charset="-122"/>
+                <a:cs typeface="Arial" pitchFamily="34" charset="-120"/>
+              </a:rPr>
+              <a:t>ENTREGÁVEL DO MÓDULO
+</a:t>
+            </a:r>
+            <a:pPr indent="0" marL="0">
+              <a:buNone/>
+            </a:pPr>
+            <a:r>
+              <a:rPr lang="en-US" sz="1600" dirty="0">
+                <a:solidFill>
+                  <a:srgbClr val="FFFFFF"/>
+                </a:solidFill>
+                <a:latin typeface="Arial" pitchFamily="34" charset="0"/>
+                <a:ea typeface="Arial" pitchFamily="34" charset="-122"/>
+                <a:cs typeface="Arial" pitchFamily="34" charset="-120"/>
+              </a:rPr>
+              <a:t>A primeira usina da minha empresa no laboratório: produtor cadastrado, proposta de produtor gerada (PDF), usina cadastrada vinculada ao produtor e ao consultor, 3 meses de geração registrados. Mais o checklist de due diligence preenchido para uma usina real ou hipotética da sua região.</a:t>
+            </a:r>
+            <a:endParaRPr lang="en-US" sz="1300" dirty="0"/>
+          </a:p>
+        </p:txBody>
+      </p:sp>
+      <p:sp>
+        <p:nvSpPr>
+          <p:cNvPr id="25" name="Slide Number Placeholder 0"/>
+          <p:cNvSpPr>
+            <a:spLocks noGrp="1"/>
+          </p:cNvSpPr>
+          <p:nvPr>
+            <p:ph type="sldNum" sz="quarter" idx="4294967295"/>
+          </p:nvPr>
+        </p:nvSpPr>
+        <p:spPr>
+          <a:xfrm>
+            <a:off x="11292840" y="6556248"/>
+            <a:ext cx="548640" cy="256032"/>
+          </a:xfrm>
+          <a:prstGeom prst="rect">
+            <a:avLst/>
+          </a:prstGeom>
+          <a:extLst>
+            <a:ext uri="{C572A759-6A51-4108-AA02-DFA0A04FC94B}">
+              <ma14:wrappingTextBoxFlag xmlns:ma14="http://schemas.microsoft.com/office/mac/drawingml/2011/main" val="0"/>
+            </a:ext>
+          </a:extLst>
+        </p:spPr>
+        <p:txBody>
+          <a:bodyPr/>
+          <a:lstStyle>
+            <a:lvl1pPr>
+              <a:defRPr sz="900">
+                <a:solidFill>
+                  <a:srgbClr val="1B3A6B"/>
+                </a:solidFill>
+                <a:latin typeface="Arial"/>
+                <a:ea typeface="Arial"/>
+                <a:cs typeface="Arial"/>
+              </a:defRPr>
+            </a:lvl1pPr>
+          </a:lstStyle>
+          <a:p>
+            <a:pPr algn="r"/>
+            <a:fld id="{F7021451-1387-4CA6-816F-3879F97B5CBC}" type="slidenum">
+              <a:rPr b="1" lang="en-US"/>
+              <a:t>30</a:t>
             </a:fld>
             <a:endParaRPr lang="en-US"/>
           </a:p>
@@ -16836,7 +22729,7 @@
         <p:spPr>
           <a:xfrm>
             <a:off x="822960" y="2286000"/>
-            <a:ext cx="2965704" cy="3749040"/>
+            <a:ext cx="2965704" cy="2286000"/>
           </a:xfrm>
           <a:prstGeom prst="rect">
             <a:avLst/>
@@ -16857,7 +22750,7 @@
               <a:buNone/>
             </a:pPr>
             <a:r>
-              <a:rPr lang="en-US" sz="1700" dirty="0">
+              <a:rPr lang="en-US" sz="1300" dirty="0">
                 <a:solidFill>
                   <a:srgbClr val="1F2937"/>
                 </a:solidFill>
@@ -16867,7 +22760,7 @@
               </a:rPr>
               <a:t>☐ Matrícula do imóvel ou contrato de arrendamento do terreno (prazo ≥ contrato com você)</a:t>
             </a:r>
-            <a:endParaRPr lang="en-US" sz="1700" dirty="0"/>
+            <a:endParaRPr lang="en-US" sz="1300" dirty="0"/>
           </a:p>
           <a:p>
             <a:pPr indent="0" marL="0">
@@ -16877,7 +22770,7 @@
               <a:buNone/>
             </a:pPr>
             <a:r>
-              <a:rPr lang="en-US" sz="1700" dirty="0">
+              <a:rPr lang="en-US" sz="1300" dirty="0">
                 <a:solidFill>
                   <a:srgbClr val="1F2937"/>
                 </a:solidFill>
@@ -16887,7 +22780,7 @@
               </a:rPr>
               <a:t>☐ Titular da UC da usina na distribuidora</a:t>
             </a:r>
-            <a:endParaRPr lang="en-US" sz="1700" dirty="0"/>
+            <a:endParaRPr lang="en-US" sz="1300" dirty="0"/>
           </a:p>
           <a:p>
             <a:pPr indent="0" marL="0">
@@ -16897,7 +22790,7 @@
               <a:buNone/>
             </a:pPr>
             <a:r>
-              <a:rPr lang="en-US" sz="1700" dirty="0">
+              <a:rPr lang="en-US" sz="1300" dirty="0">
                 <a:solidFill>
                   <a:srgbClr val="1F2937"/>
                 </a:solidFill>
@@ -16907,7 +22800,7 @@
               </a:rPr>
               <a:t>☐ Ônus: alienação fiduciária, penhora, financiamento</a:t>
             </a:r>
-            <a:endParaRPr lang="en-US" sz="1700" dirty="0"/>
+            <a:endParaRPr lang="en-US" sz="1300" dirty="0"/>
           </a:p>
           <a:p>
             <a:pPr indent="0" marL="0">
@@ -16917,7 +22810,7 @@
               <a:buNone/>
             </a:pPr>
             <a:r>
-              <a:rPr lang="en-US" sz="1700" dirty="0">
+              <a:rPr lang="en-US" sz="1300" dirty="0">
                 <a:solidFill>
                   <a:srgbClr val="1F2937"/>
                 </a:solidFill>
@@ -16927,13 +22820,72 @@
               </a:rPr>
               <a:t>☐ Licenças ambientais e municipais aplicáveis</a:t>
             </a:r>
-            <a:endParaRPr lang="en-US" sz="1700" dirty="0"/>
+            <a:endParaRPr lang="en-US" sz="1300" dirty="0"/>
           </a:p>
         </p:txBody>
       </p:sp>
       <p:sp>
         <p:nvSpPr>
           <p:cNvPr id="13" name="Shape 10"/>
+          <p:cNvSpPr/>
+          <p:nvPr/>
+        </p:nvSpPr>
+        <p:spPr>
+          <a:xfrm>
+            <a:off x="822960" y="4663440"/>
+            <a:ext cx="2965704" cy="18288"/>
+          </a:xfrm>
+          <a:prstGeom prst="rect">
+            <a:avLst/>
+          </a:prstGeom>
+          <a:solidFill>
+            <a:srgbClr val="D8E0EC"/>
+          </a:solidFill>
+          <a:ln/>
+        </p:spPr>
+      </p:sp>
+      <p:sp>
+        <p:nvSpPr>
+          <p:cNvPr id="14" name="Text 11"/>
+          <p:cNvSpPr/>
+          <p:nvPr/>
+        </p:nvSpPr>
+        <p:spPr>
+          <a:xfrm>
+            <a:off x="822960" y="4754880"/>
+            <a:ext cx="2965704" cy="1371600"/>
+          </a:xfrm>
+          <a:prstGeom prst="rect">
+            <a:avLst/>
+          </a:prstGeom>
+          <a:noFill/>
+          <a:ln/>
+        </p:spPr>
+        <p:txBody>
+          <a:bodyPr wrap="square" rtlCol="0" anchor="t"/>
+          <a:lstStyle/>
+          <a:p>
+            <a:pPr indent="0" marL="0">
+              <a:buNone/>
+            </a:pPr>
+            <a:r>
+              <a:rPr lang="en-US" sz="1300" i="1" dirty="0">
+                <a:solidFill>
+                  <a:srgbClr val="64748B"/>
+                </a:solidFill>
+                <a:latin typeface="Arial" pitchFamily="34" charset="0"/>
+                <a:ea typeface="Arial" pitchFamily="34" charset="-122"/>
+                <a:cs typeface="Arial" pitchFamily="34" charset="-120"/>
+              </a:rPr>
+              <a:t>Primeiro bloco: imóvel e titularidade. Confira prazos, titular e eventuais garantias dadas ao banco.</a:t>
+            </a:r>
+            <a:endParaRPr lang="en-US" sz="1300" dirty="0"/>
+          </a:p>
+        </p:txBody>
+      </p:sp>
+      <p:sp>
+        <p:nvSpPr>
+          <p:cNvPr id="15" name="Shape 12"/>
           <p:cNvSpPr/>
           <p:nvPr/>
         </p:nvSpPr>
@@ -16967,7 +22919,7 @@
       </p:sp>
       <p:sp>
         <p:nvSpPr>
-          <p:cNvPr id="14" name="Shape 11"/>
+          <p:cNvPr id="16" name="Shape 13"/>
           <p:cNvSpPr/>
           <p:nvPr/>
         </p:nvSpPr>
@@ -16987,7 +22939,7 @@
       </p:sp>
       <p:sp>
         <p:nvSpPr>
-          <p:cNvPr id="15" name="Text 12"/>
+          <p:cNvPr id="17" name="Text 14"/>
           <p:cNvSpPr/>
           <p:nvPr/>
         </p:nvSpPr>
@@ -17028,14 +22980,14 @@
       </p:sp>
       <p:sp>
         <p:nvSpPr>
-          <p:cNvPr id="16" name="Text 13"/>
+          <p:cNvPr id="18" name="Text 15"/>
           <p:cNvSpPr/>
           <p:nvPr/>
         </p:nvSpPr>
         <p:spPr>
           <a:xfrm>
             <a:off x="4611624" y="2286000"/>
-            <a:ext cx="2965704" cy="3749040"/>
+            <a:ext cx="2965704" cy="2286000"/>
           </a:xfrm>
           <a:prstGeom prst="rect">
             <a:avLst/>
@@ -17056,7 +23008,7 @@
               <a:buNone/>
             </a:pPr>
             <a:r>
-              <a:rPr lang="en-US" sz="1600" dirty="0">
+              <a:rPr lang="en-US" sz="1100" dirty="0">
                 <a:solidFill>
                   <a:srgbClr val="1F2937"/>
                 </a:solidFill>
@@ -17066,7 +23018,7 @@
               </a:rPr>
               <a:t>☐ Parecer de acesso e data do protocolo do pedido</a:t>
             </a:r>
-            <a:endParaRPr lang="en-US" sz="1600" dirty="0"/>
+            <a:endParaRPr lang="en-US" sz="1100" dirty="0"/>
           </a:p>
           <a:p>
             <a:pPr indent="0" marL="0">
@@ -17076,7 +23028,7 @@
               <a:buNone/>
             </a:pPr>
             <a:r>
-              <a:rPr lang="en-US" sz="1600" dirty="0">
+              <a:rPr lang="en-US" sz="1100" dirty="0">
                 <a:solidFill>
                   <a:srgbClr val="1F2937"/>
                 </a:solidFill>
@@ -17086,7 +23038,7 @@
               </a:rPr>
               <a:t>☐ Data de conexão e vistoria/aprovação da distribuidora</a:t>
             </a:r>
-            <a:endParaRPr lang="en-US" sz="1600" dirty="0"/>
+            <a:endParaRPr lang="en-US" sz="1100" dirty="0"/>
           </a:p>
           <a:p>
             <a:pPr indent="0" marL="0">
@@ -17096,7 +23048,7 @@
               <a:buNone/>
             </a:pPr>
             <a:r>
-              <a:rPr lang="en-US" sz="1600" dirty="0">
+              <a:rPr lang="en-US" sz="1100" dirty="0">
                 <a:solidFill>
                   <a:srgbClr val="1F2937"/>
                 </a:solidFill>
@@ -17106,7 +23058,7 @@
               </a:rPr>
               <a:t>☐ Potência instalada (kWp) e potência do inversor (kW)</a:t>
             </a:r>
-            <a:endParaRPr lang="en-US" sz="1600" dirty="0"/>
+            <a:endParaRPr lang="en-US" sz="1100" dirty="0"/>
           </a:p>
           <a:p>
             <a:pPr indent="0" marL="0">
@@ -17116,7 +23068,7 @@
               <a:buNone/>
             </a:pPr>
             <a:r>
-              <a:rPr lang="en-US" sz="1600" dirty="0">
+              <a:rPr lang="en-US" sz="1100" dirty="0">
                 <a:solidFill>
                   <a:srgbClr val="1F2937"/>
                 </a:solidFill>
@@ -17126,7 +23078,7 @@
               </a:rPr>
               <a:t>☐ Enquadramento: GD I / GD II / risco de GD III</a:t>
             </a:r>
-            <a:endParaRPr lang="en-US" sz="1600" dirty="0"/>
+            <a:endParaRPr lang="en-US" sz="1100" dirty="0"/>
           </a:p>
           <a:p>
             <a:pPr indent="0" marL="0">
@@ -17136,7 +23088,7 @@
               <a:buNone/>
             </a:pPr>
             <a:r>
-              <a:rPr lang="en-US" sz="1600" dirty="0">
+              <a:rPr lang="en-US" sz="1100" dirty="0">
                 <a:solidFill>
                   <a:srgbClr val="1F2937"/>
                 </a:solidFill>
@@ -17146,13 +23098,72 @@
               </a:rPr>
               <a:t>☐ Mesma distribuidora dos seus clientes</a:t>
             </a:r>
-            <a:endParaRPr lang="en-US" sz="1600" dirty="0"/>
-          </a:p>
-        </p:txBody>
-      </p:sp>
-      <p:sp>
-        <p:nvSpPr>
-          <p:cNvPr id="17" name="Shape 14"/>
+            <a:endParaRPr lang="en-US" sz="1100" dirty="0"/>
+          </a:p>
+        </p:txBody>
+      </p:sp>
+      <p:sp>
+        <p:nvSpPr>
+          <p:cNvPr id="19" name="Shape 16"/>
+          <p:cNvSpPr/>
+          <p:nvPr/>
+        </p:nvSpPr>
+        <p:spPr>
+          <a:xfrm>
+            <a:off x="4611624" y="4663440"/>
+            <a:ext cx="2965704" cy="18288"/>
+          </a:xfrm>
+          <a:prstGeom prst="rect">
+            <a:avLst/>
+          </a:prstGeom>
+          <a:solidFill>
+            <a:srgbClr val="D8E0EC"/>
+          </a:solidFill>
+          <a:ln/>
+        </p:spPr>
+      </p:sp>
+      <p:sp>
+        <p:nvSpPr>
+          <p:cNvPr id="20" name="Text 17"/>
+          <p:cNvSpPr/>
+          <p:nvPr/>
+        </p:nvSpPr>
+        <p:spPr>
+          <a:xfrm>
+            <a:off x="4611624" y="4754880"/>
+            <a:ext cx="2965704" cy="1371600"/>
+          </a:xfrm>
+          <a:prstGeom prst="rect">
+            <a:avLst/>
+          </a:prstGeom>
+          <a:noFill/>
+          <a:ln/>
+        </p:spPr>
+        <p:txBody>
+          <a:bodyPr wrap="square" rtlCol="0" anchor="t"/>
+          <a:lstStyle/>
+          <a:p>
+            <a:pPr indent="0" marL="0">
+              <a:buNone/>
+            </a:pPr>
+            <a:r>
+              <a:rPr lang="en-US" sz="1300" i="1" dirty="0">
+                <a:solidFill>
+                  <a:srgbClr val="64748B"/>
+                </a:solidFill>
+                <a:latin typeface="Arial" pitchFamily="34" charset="0"/>
+                <a:ea typeface="Arial" pitchFamily="34" charset="-122"/>
+                <a:cs typeface="Arial" pitchFamily="34" charset="-120"/>
+              </a:rPr>
+              <a:t>Segundo: conexão e enquadramento. A data do pedido de acesso diz se a usina é GD um ou dois. E confirme que ela está na distribuidora dos seus clientes.</a:t>
+            </a:r>
+            <a:endParaRPr lang="en-US" sz="1300" dirty="0"/>
+          </a:p>
+        </p:txBody>
+      </p:sp>
+      <p:sp>
+        <p:nvSpPr>
+          <p:cNvPr id="21" name="Shape 18"/>
           <p:cNvSpPr/>
           <p:nvPr/>
         </p:nvSpPr>
@@ -17186,7 +23197,7 @@
       </p:sp>
       <p:sp>
         <p:nvSpPr>
-          <p:cNvPr id="18" name="Shape 15"/>
+          <p:cNvPr id="22" name="Shape 19"/>
           <p:cNvSpPr/>
           <p:nvPr/>
         </p:nvSpPr>
@@ -17206,7 +23217,7 @@
       </p:sp>
       <p:sp>
         <p:nvSpPr>
-          <p:cNvPr id="19" name="Text 16"/>
+          <p:cNvPr id="23" name="Text 20"/>
           <p:cNvSpPr/>
           <p:nvPr/>
         </p:nvSpPr>
@@ -17247,14 +23258,14 @@
       </p:sp>
       <p:sp>
         <p:nvSpPr>
-          <p:cNvPr id="20" name="Text 17"/>
+          <p:cNvPr id="24" name="Text 21"/>
           <p:cNvSpPr/>
           <p:nvPr/>
         </p:nvSpPr>
         <p:spPr>
           <a:xfrm>
             <a:off x="8400288" y="2286000"/>
-            <a:ext cx="2965704" cy="3749040"/>
+            <a:ext cx="2965704" cy="2286000"/>
           </a:xfrm>
           <a:prstGeom prst="rect">
             <a:avLst/>
@@ -17275,7 +23286,7 @@
               <a:buNone/>
             </a:pPr>
             <a:r>
-              <a:rPr lang="en-US" sz="1700" dirty="0">
+              <a:rPr lang="en-US" sz="1600" dirty="0">
                 <a:solidFill>
                   <a:srgbClr val="1F2937"/>
                 </a:solidFill>
@@ -17285,7 +23296,7 @@
               </a:rPr>
               <a:t>☐ Histórico de geração de 12 meses (faturas da UC da usina e monitoramento)</a:t>
             </a:r>
-            <a:endParaRPr lang="en-US" sz="1700" dirty="0"/>
+            <a:endParaRPr lang="en-US" sz="1600" dirty="0"/>
           </a:p>
           <a:p>
             <a:pPr indent="0" marL="0">
@@ -17295,7 +23306,7 @@
               <a:buNone/>
             </a:pPr>
             <a:r>
-              <a:rPr lang="en-US" sz="1700" dirty="0">
+              <a:rPr lang="en-US" sz="1600" dirty="0">
                 <a:solidFill>
                   <a:srgbClr val="1F2937"/>
                 </a:solidFill>
@@ -17305,7 +23316,7 @@
               </a:rPr>
               <a:t>☐ Geração real × projetada (desvio aceitável?)</a:t>
             </a:r>
-            <a:endParaRPr lang="en-US" sz="1700" dirty="0"/>
+            <a:endParaRPr lang="en-US" sz="1600" dirty="0"/>
           </a:p>
           <a:p>
             <a:pPr indent="0" marL="0">
@@ -17315,7 +23326,7 @@
               <a:buNone/>
             </a:pPr>
             <a:r>
-              <a:rPr lang="en-US" sz="1700" dirty="0">
+              <a:rPr lang="en-US" sz="1600" dirty="0">
                 <a:solidFill>
                   <a:srgbClr val="1F2937"/>
                 </a:solidFill>
@@ -17325,7 +23336,66 @@
               </a:rPr>
               <a:t>☐ Paradas e falhas registradas</a:t>
             </a:r>
-            <a:endParaRPr lang="en-US" sz="1700" dirty="0"/>
+            <a:endParaRPr lang="en-US" sz="1600" dirty="0"/>
+          </a:p>
+        </p:txBody>
+      </p:sp>
+      <p:sp>
+        <p:nvSpPr>
+          <p:cNvPr id="25" name="Shape 22"/>
+          <p:cNvSpPr/>
+          <p:nvPr/>
+        </p:nvSpPr>
+        <p:spPr>
+          <a:xfrm>
+            <a:off x="8400288" y="4663440"/>
+            <a:ext cx="2965704" cy="18288"/>
+          </a:xfrm>
+          <a:prstGeom prst="rect">
+            <a:avLst/>
+          </a:prstGeom>
+          <a:solidFill>
+            <a:srgbClr val="D8E0EC"/>
+          </a:solidFill>
+          <a:ln/>
+        </p:spPr>
+      </p:sp>
+      <p:sp>
+        <p:nvSpPr>
+          <p:cNvPr id="26" name="Text 23"/>
+          <p:cNvSpPr/>
+          <p:nvPr/>
+        </p:nvSpPr>
+        <p:spPr>
+          <a:xfrm>
+            <a:off x="8400288" y="4754880"/>
+            <a:ext cx="2965704" cy="1371600"/>
+          </a:xfrm>
+          <a:prstGeom prst="rect">
+            <a:avLst/>
+          </a:prstGeom>
+          <a:noFill/>
+          <a:ln/>
+        </p:spPr>
+        <p:txBody>
+          <a:bodyPr wrap="square" rtlCol="0" anchor="t"/>
+          <a:lstStyle/>
+          <a:p>
+            <a:pPr indent="0" marL="0">
+              <a:buNone/>
+            </a:pPr>
+            <a:r>
+              <a:rPr lang="en-US" sz="1300" i="1" dirty="0">
+                <a:solidFill>
+                  <a:srgbClr val="64748B"/>
+                </a:solidFill>
+                <a:latin typeface="Arial" pitchFamily="34" charset="0"/>
+                <a:ea typeface="Arial" pitchFamily="34" charset="-122"/>
+                <a:cs typeface="Arial" pitchFamily="34" charset="-120"/>
+              </a:rPr>
+              <a:t>Terceiro: desempenho. Compare doze meses de geração real com a projeção.</a:t>
+            </a:r>
+            <a:endParaRPr lang="en-US" sz="1300" dirty="0"/>
           </a:p>
         </p:txBody>
       </p:sp>
@@ -17740,7 +23810,7 @@
         <p:spPr>
           <a:xfrm>
             <a:off x="822960" y="2286000"/>
-            <a:ext cx="4860036" cy="3749040"/>
+            <a:ext cx="4860036" cy="2286000"/>
           </a:xfrm>
           <a:prstGeom prst="rect">
             <a:avLst/>
@@ -17838,6 +23908,65 @@
       <p:sp>
         <p:nvSpPr>
           <p:cNvPr id="13" name="Shape 10"/>
+          <p:cNvSpPr/>
+          <p:nvPr/>
+        </p:nvSpPr>
+        <p:spPr>
+          <a:xfrm>
+            <a:off x="822960" y="4663440"/>
+            <a:ext cx="4860036" cy="18288"/>
+          </a:xfrm>
+          <a:prstGeom prst="rect">
+            <a:avLst/>
+          </a:prstGeom>
+          <a:solidFill>
+            <a:srgbClr val="D8E0EC"/>
+          </a:solidFill>
+          <a:ln/>
+        </p:spPr>
+      </p:sp>
+      <p:sp>
+        <p:nvSpPr>
+          <p:cNvPr id="14" name="Text 11"/>
+          <p:cNvSpPr/>
+          <p:nvPr/>
+        </p:nvSpPr>
+        <p:spPr>
+          <a:xfrm>
+            <a:off x="822960" y="4754880"/>
+            <a:ext cx="4860036" cy="1371600"/>
+          </a:xfrm>
+          <a:prstGeom prst="rect">
+            <a:avLst/>
+          </a:prstGeom>
+          <a:noFill/>
+          <a:ln/>
+        </p:spPr>
+        <p:txBody>
+          <a:bodyPr wrap="square" rtlCol="0" anchor="t"/>
+          <a:lstStyle/>
+          <a:p>
+            <a:pPr indent="0" marL="0">
+              <a:buNone/>
+            </a:pPr>
+            <a:r>
+              <a:rPr lang="en-US" sz="1300" i="1" dirty="0">
+                <a:solidFill>
+                  <a:srgbClr val="64748B"/>
+                </a:solidFill>
+                <a:latin typeface="Arial" pitchFamily="34" charset="0"/>
+                <a:ea typeface="Arial" pitchFamily="34" charset="-122"/>
+                <a:cs typeface="Arial" pitchFamily="34" charset="-120"/>
+              </a:rPr>
+              <a:t>Quarto: equipamentos, manutenção e seguro. Furto de cabos é comum em usinas rurais.</a:t>
+            </a:r>
+            <a:endParaRPr lang="en-US" sz="1300" dirty="0"/>
+          </a:p>
+        </p:txBody>
+      </p:sp>
+      <p:sp>
+        <p:nvSpPr>
+          <p:cNvPr id="15" name="Shape 12"/>
           <p:cNvSpPr/>
           <p:nvPr/>
         </p:nvSpPr>
@@ -17871,7 +24000,7 @@
       </p:sp>
       <p:sp>
         <p:nvSpPr>
-          <p:cNvPr id="14" name="Shape 11"/>
+          <p:cNvPr id="16" name="Shape 13"/>
           <p:cNvSpPr/>
           <p:nvPr/>
         </p:nvSpPr>
@@ -17891,7 +24020,7 @@
       </p:sp>
       <p:sp>
         <p:nvSpPr>
-          <p:cNvPr id="15" name="Text 12"/>
+          <p:cNvPr id="17" name="Text 14"/>
           <p:cNvSpPr/>
           <p:nvPr/>
         </p:nvSpPr>
@@ -17932,14 +24061,14 @@
       </p:sp>
       <p:sp>
         <p:nvSpPr>
-          <p:cNvPr id="16" name="Text 13"/>
+          <p:cNvPr id="18" name="Text 15"/>
           <p:cNvSpPr/>
           <p:nvPr/>
         </p:nvSpPr>
         <p:spPr>
           <a:xfrm>
             <a:off x="6505956" y="2286000"/>
-            <a:ext cx="4860036" cy="3749040"/>
+            <a:ext cx="4860036" cy="2286000"/>
           </a:xfrm>
           <a:prstGeom prst="rect">
             <a:avLst/>
@@ -17960,7 +24089,7 @@
               <a:buNone/>
             </a:pPr>
             <a:r>
-              <a:rPr lang="en-US" sz="1700" dirty="0">
+              <a:rPr lang="en-US" sz="1400" dirty="0">
                 <a:solidFill>
                   <a:srgbClr val="1F2937"/>
                 </a:solidFill>
@@ -17970,7 +24099,7 @@
               </a:rPr>
               <a:t>☐ Créditos/contratos atuais (há clientes? há outra gestora?)</a:t>
             </a:r>
-            <a:endParaRPr lang="en-US" sz="1700" dirty="0"/>
+            <a:endParaRPr lang="en-US" sz="1400" dirty="0"/>
           </a:p>
           <a:p>
             <a:pPr indent="0" marL="0">
@@ -17980,7 +24109,7 @@
               <a:buNone/>
             </a:pPr>
             <a:r>
-              <a:rPr lang="en-US" sz="1700" dirty="0">
+              <a:rPr lang="en-US" sz="1400" dirty="0">
                 <a:solidFill>
                   <a:srgbClr val="1F2937"/>
                 </a:solidFill>
@@ -17990,7 +24119,7 @@
               </a:rPr>
               <a:t>☐ Expectativa do produtor (R$/mês, prazo, fixo × variável)</a:t>
             </a:r>
-            <a:endParaRPr lang="en-US" sz="1700" dirty="0"/>
+            <a:endParaRPr lang="en-US" sz="1400" dirty="0"/>
           </a:p>
           <a:p>
             <a:pPr indent="0" marL="0">
@@ -18000,7 +24129,7 @@
               <a:buNone/>
             </a:pPr>
             <a:r>
-              <a:rPr lang="en-US" sz="1700" dirty="0">
+              <a:rPr lang="en-US" sz="1400" dirty="0">
                 <a:solidFill>
                   <a:srgbClr val="1F2937"/>
                 </a:solidFill>
@@ -18010,7 +24139,7 @@
               </a:rPr>
               <a:t>☐ Situação do produtor (dívidas, litígios, sucessão)</a:t>
             </a:r>
-            <a:endParaRPr lang="en-US" sz="1700" dirty="0"/>
+            <a:endParaRPr lang="en-US" sz="1400" dirty="0"/>
           </a:p>
           <a:p>
             <a:pPr indent="0" marL="0">
@@ -18020,7 +24149,7 @@
               <a:buNone/>
             </a:pPr>
             <a:r>
-              <a:rPr lang="en-US" sz="1700" dirty="0">
+              <a:rPr lang="en-US" sz="1400" dirty="0">
                 <a:solidFill>
                   <a:srgbClr val="1F2937"/>
                 </a:solidFill>
@@ -18030,7 +24159,66 @@
               </a:rPr>
               <a:t>☐ Decisão: aprovar · aprovar com condições · recusar</a:t>
             </a:r>
-            <a:endParaRPr lang="en-US" sz="1700" dirty="0"/>
+            <a:endParaRPr lang="en-US" sz="1400" dirty="0"/>
+          </a:p>
+        </p:txBody>
+      </p:sp>
+      <p:sp>
+        <p:nvSpPr>
+          <p:cNvPr id="19" name="Shape 16"/>
+          <p:cNvSpPr/>
+          <p:nvPr/>
+        </p:nvSpPr>
+        <p:spPr>
+          <a:xfrm>
+            <a:off x="6505956" y="4663440"/>
+            <a:ext cx="4860036" cy="18288"/>
+          </a:xfrm>
+          <a:prstGeom prst="rect">
+            <a:avLst/>
+          </a:prstGeom>
+          <a:solidFill>
+            <a:srgbClr val="D8E0EC"/>
+          </a:solidFill>
+          <a:ln/>
+        </p:spPr>
+      </p:sp>
+      <p:sp>
+        <p:nvSpPr>
+          <p:cNvPr id="20" name="Text 17"/>
+          <p:cNvSpPr/>
+          <p:nvPr/>
+        </p:nvSpPr>
+        <p:spPr>
+          <a:xfrm>
+            <a:off x="6505956" y="4754880"/>
+            <a:ext cx="4860036" cy="1371600"/>
+          </a:xfrm>
+          <a:prstGeom prst="rect">
+            <a:avLst/>
+          </a:prstGeom>
+          <a:noFill/>
+          <a:ln/>
+        </p:spPr>
+        <p:txBody>
+          <a:bodyPr wrap="square" rtlCol="0" anchor="t"/>
+          <a:lstStyle/>
+          <a:p>
+            <a:pPr indent="0" marL="0">
+              <a:buNone/>
+            </a:pPr>
+            <a:r>
+              <a:rPr lang="en-US" sz="1300" i="1" dirty="0">
+                <a:solidFill>
+                  <a:srgbClr val="64748B"/>
+                </a:solidFill>
+                <a:latin typeface="Arial" pitchFamily="34" charset="0"/>
+                <a:ea typeface="Arial" pitchFamily="34" charset="-122"/>
+                <a:cs typeface="Arial" pitchFamily="34" charset="-120"/>
+              </a:rPr>
+              <a:t>Quinto: o lado comercial e o próprio produtor. No fim, registre a decisão: aprovar, aprovar com condições ou recusar.</a:t>
+            </a:r>
+            <a:endParaRPr lang="en-US" sz="1300" dirty="0"/>
           </a:p>
         </p:txBody>
       </p:sp>

--- a/docs/curso/slides/m04-usinas-e-produtores.pptx
+++ b/docs/curso/slides/m04-usinas-e-produtores.pptx
@@ -1235,7 +1235,8 @@
           <a:p>
             <a:r>
               <a:rPr lang="en-US" dirty="0"/>
-              <a:t>Você pode fazer pré-venda durante o onboarding, com data honesta. Mas o cliente só entra no rateio depois da etapa sete.</a:t>
+              <a:t>Na plataforma, cada usina é um cartão no quadro de onboarding. Usina nova entra sozinha na primeira etapa, e cartão parado há mais de duas semanas fica em destaque.
+Você pode fazer pré-venda durante o onboarding, com data honesta. Mas o cliente só entra no rateio depois da etapa sete.</a:t>
             </a:r>
             <a:endParaRPr lang="en-US" dirty="0"/>
           </a:p>
@@ -1323,7 +1324,7 @@
           <a:p>
             <a:r>
               <a:rPr lang="en-US" dirty="0"/>
-              <a:t>Usinas Solar → Onboarding de Usinas cada usina é um cartão arraste para avançar parada há mais de 14 dias = destaque</a:t>
+              <a:t/>
             </a:r>
             <a:endParaRPr lang="en-US" dirty="0"/>
           </a:p>
@@ -2651,7 +2652,7 @@
           <a:p>
             <a:r>
               <a:rPr lang="en-US" dirty="0"/>
-              <a:t>Produtores Solar → Produtores: todo contato vira cadastro com status</a:t>
+              <a:t/>
             </a:r>
             <a:endParaRPr lang="en-US" dirty="0"/>
           </a:p>
@@ -3859,7 +3860,7 @@
                 <a:ea typeface="Arial" pitchFamily="34" charset="-122"/>
                 <a:cs typeface="Arial" pitchFamily="34" charset="-120"/>
               </a:rPr>
-              <a:t>5. cadastrando o produtor e a proposta de produtor</a:t>
+              <a:t>5. Cadastrando o produtor e a proposta de produtor</a:t>
             </a:r>
             <a:endParaRPr lang="en-US" sz="1400" dirty="0"/>
           </a:p>
@@ -3879,7 +3880,7 @@
                 <a:ea typeface="Arial" pitchFamily="34" charset="-122"/>
                 <a:cs typeface="Arial" pitchFamily="34" charset="-120"/>
               </a:rPr>
-              <a:t>6. cadastrando a usina e registrando a geração</a:t>
+              <a:t>6. Cadastrando a usina e registrando a geração</a:t>
             </a:r>
             <a:endParaRPr lang="en-US" sz="1400" dirty="0"/>
           </a:p>
@@ -4118,7 +4119,7 @@
             <a:r>
               <a:rPr lang="en-US" sz="11000" b="1" dirty="0">
                 <a:solidFill>
-                  <a:srgbClr val="11396F"/>
+                  <a:srgbClr val="F7A23B"/>
                 </a:solidFill>
                 <a:latin typeface="Arial" pitchFamily="34" charset="0"/>
                 <a:ea typeface="Arial" pitchFamily="34" charset="-122"/>
@@ -4241,7 +4242,7 @@
                 <a:ea typeface="Arial" pitchFamily="34" charset="-122"/>
                 <a:cs typeface="Arial" pitchFamily="34" charset="-120"/>
               </a:rPr>
-              <a:t>Aula</a:t>
+              <a:t>Aula teórica</a:t>
             </a:r>
             <a:endParaRPr lang="en-US" sz="1400" dirty="0"/>
           </a:p>
@@ -8283,7 +8284,7 @@
             <a:r>
               <a:rPr lang="en-US" sz="11000" b="1" dirty="0">
                 <a:solidFill>
-                  <a:srgbClr val="11396F"/>
+                  <a:srgbClr val="F7A23B"/>
                 </a:solidFill>
                 <a:latin typeface="Arial" pitchFamily="34" charset="0"/>
                 <a:ea typeface="Arial" pitchFamily="34" charset="-122"/>
@@ -8406,7 +8407,7 @@
                 <a:ea typeface="Arial" pitchFamily="34" charset="-122"/>
                 <a:cs typeface="Arial" pitchFamily="34" charset="-120"/>
               </a:rPr>
-              <a:t>Aula</a:t>
+              <a:t>Aula teórica</a:t>
             </a:r>
             <a:endParaRPr lang="en-US" sz="1400" dirty="0"/>
           </a:p>
@@ -8578,7 +8579,7 @@
                 <a:ea typeface="Arial" pitchFamily="34" charset="-122"/>
                 <a:cs typeface="Arial" pitchFamily="34" charset="-120"/>
               </a:rPr>
-              <a:t>Vender durante o onboarding?</a:t>
+              <a:t>O quadro de onboarding na plataforma</a:t>
             </a:r>
             <a:endParaRPr lang="en-US" sz="1500" dirty="0"/>
           </a:p>
@@ -8599,7 +8600,7 @@
                 <a:ea typeface="Arial" pitchFamily="34" charset="-122"/>
                 <a:cs typeface="Arial" pitchFamily="34" charset="-120"/>
               </a:rPr>
-              <a:t>Passo a passo na plataforma</a:t>
+              <a:t>Vender durante o onboarding?</a:t>
             </a:r>
             <a:endParaRPr lang="en-US" sz="1500" dirty="0"/>
           </a:p>
@@ -9398,7 +9399,7 @@
                 <a:ea typeface="Arial" pitchFamily="34" charset="-122"/>
                 <a:cs typeface="Arial" pitchFamily="34" charset="-120"/>
               </a:rPr>
-              <a:t>AULA 4 · ONBOARDING DA USINA EM SETE ETAPAS</a:t>
+              <a:t>AULA 4</a:t>
             </a:r>
             <a:endParaRPr lang="en-US" sz="1000" dirty="0"/>
           </a:p>
@@ -9439,7 +9440,7 @@
                 <a:ea typeface="Arial" pitchFamily="34" charset="-122"/>
                 <a:cs typeface="Arial" pitchFamily="34" charset="-120"/>
               </a:rPr>
-              <a:t>Vender durante o onboarding?</a:t>
+              <a:t>Onboarding da usina em sete etapas</a:t>
             </a:r>
             <a:endParaRPr lang="en-US" sz="2600" dirty="0"/>
           </a:p>
@@ -9454,11 +9455,11 @@
         <p:spPr>
           <a:xfrm>
             <a:off x="548640" y="1325880"/>
-            <a:ext cx="5431536" cy="3977640"/>
+            <a:ext cx="5408676" cy="4937760"/>
           </a:xfrm>
           <a:prstGeom prst="roundRect">
             <a:avLst>
-              <a:gd name="adj" fmla="val 1839"/>
+              <a:gd name="adj" fmla="val 1481"/>
             </a:avLst>
           </a:prstGeom>
           <a:solidFill>
@@ -9487,10 +9488,10 @@
         </p:nvSpPr>
         <p:spPr>
           <a:xfrm>
-            <a:off x="731520" y="1508760"/>
-            <a:ext cx="457200" cy="457200"/>
-          </a:xfrm>
-          <a:prstGeom prst="ellipse">
+            <a:off x="548640" y="1325880"/>
+            <a:ext cx="5408676" cy="109728"/>
+          </a:xfrm>
+          <a:prstGeom prst="rect">
             <a:avLst/>
           </a:prstGeom>
           <a:solidFill>
@@ -9507,56 +9508,17 @@
         </p:nvSpPr>
         <p:spPr>
           <a:xfrm>
-            <a:off x="731520" y="1508760"/>
-            <a:ext cx="457200" cy="457200"/>
-          </a:xfrm>
-          <a:prstGeom prst="rect">
-            <a:avLst/>
-          </a:prstGeom>
-          <a:noFill/>
-          <a:ln/>
-        </p:spPr>
-        <p:txBody>
-          <a:bodyPr wrap="square" rtlCol="0" anchor="ctr"/>
-          <a:lstStyle/>
-          <a:p>
-            <a:pPr algn="ctr" indent="0" marL="0">
-              <a:buNone/>
-            </a:pPr>
-            <a:r>
-              <a:rPr lang="en-US" sz="1400" b="1" dirty="0">
-                <a:solidFill>
-                  <a:srgbClr val="FFFFFF"/>
-                </a:solidFill>
-                <a:latin typeface="Arial" pitchFamily="34" charset="0"/>
-                <a:ea typeface="Arial" pitchFamily="34" charset="-122"/>
-                <a:cs typeface="Arial" pitchFamily="34" charset="-120"/>
-              </a:rPr>
-              <a:t>1</a:t>
-            </a:r>
-            <a:endParaRPr lang="en-US" sz="1400" dirty="0"/>
-          </a:p>
-        </p:txBody>
-      </p:sp>
-      <p:sp>
-        <p:nvSpPr>
-          <p:cNvPr id="12" name="Text 9"/>
-          <p:cNvSpPr/>
-          <p:nvPr/>
-        </p:nvSpPr>
-        <p:spPr>
-          <a:xfrm>
-            <a:off x="1325880" y="1435608"/>
-            <a:ext cx="4517136" cy="3758184"/>
-          </a:xfrm>
-          <a:prstGeom prst="rect">
-            <a:avLst/>
-          </a:prstGeom>
-          <a:noFill/>
-          <a:ln/>
-        </p:spPr>
-        <p:txBody>
-          <a:bodyPr wrap="square" rtlCol="0" anchor="ctr">
+            <a:off x="822960" y="1554480"/>
+            <a:ext cx="4860036" cy="685800"/>
+          </a:xfrm>
+          <a:prstGeom prst="rect">
+            <a:avLst/>
+          </a:prstGeom>
+          <a:noFill/>
+          <a:ln/>
+        </p:spPr>
+        <p:txBody>
+          <a:bodyPr wrap="square" rtlCol="0" anchor="t">
             <a:normAutofit/>
           </a:bodyPr>
           <a:lstStyle/>
@@ -9565,7 +9527,52 @@
               <a:buNone/>
             </a:pPr>
             <a:r>
-              <a:rPr lang="en-US" sz="1800" dirty="0">
+              <a:rPr lang="en-US" sz="1600" b="1" dirty="0">
+                <a:solidFill>
+                  <a:srgbClr val="1B3A6B"/>
+                </a:solidFill>
+                <a:latin typeface="Arial" pitchFamily="34" charset="0"/>
+                <a:ea typeface="Arial" pitchFamily="34" charset="-122"/>
+                <a:cs typeface="Arial" pitchFamily="34" charset="-120"/>
+              </a:rPr>
+              <a:t>O quadro de onboarding na plataforma</a:t>
+            </a:r>
+            <a:endParaRPr lang="en-US" sz="1600" dirty="0"/>
+          </a:p>
+        </p:txBody>
+      </p:sp>
+      <p:sp>
+        <p:nvSpPr>
+          <p:cNvPr id="12" name="Text 9"/>
+          <p:cNvSpPr/>
+          <p:nvPr/>
+        </p:nvSpPr>
+        <p:spPr>
+          <a:xfrm>
+            <a:off x="822960" y="2286000"/>
+            <a:ext cx="4860036" cy="2286000"/>
+          </a:xfrm>
+          <a:prstGeom prst="rect">
+            <a:avLst/>
+          </a:prstGeom>
+          <a:noFill/>
+          <a:ln/>
+        </p:spPr>
+        <p:txBody>
+          <a:bodyPr wrap="square" rtlCol="0" anchor="t">
+            <a:normAutofit/>
+          </a:bodyPr>
+          <a:lstStyle/>
+          <a:p>
+            <a:pPr marL="342900" indent="-342900">
+              <a:spcAft>
+                <a:spcPts val="600"/>
+              </a:spcAft>
+              <a:buSzPct val="100000"/>
+              <a:buChar char="●"/>
+            </a:pPr>
+            <a:r>
+              <a:rPr lang="en-US" sz="1700" dirty="0">
                 <a:solidFill>
                   <a:srgbClr val="1F2937"/>
                 </a:solidFill>
@@ -9573,9 +9580,72 @@
                 <a:ea typeface="Arial" pitchFamily="34" charset="-122"/>
                 <a:cs typeface="Arial" pitchFamily="34" charset="-120"/>
               </a:rPr>
-              <a:t>Pré-venda com data honesta</a:t>
-            </a:r>
-            <a:endParaRPr lang="en-US" sz="1800" dirty="0"/>
+              <a:t>Usinas Solar → Onboarding de Usinas</a:t>
+            </a:r>
+            <a:endParaRPr lang="en-US" sz="1700" dirty="0"/>
+          </a:p>
+          <a:p>
+            <a:pPr marL="342900" indent="-342900">
+              <a:spcAft>
+                <a:spcPts val="600"/>
+              </a:spcAft>
+              <a:buSzPct val="100000"/>
+              <a:buChar char="●"/>
+            </a:pPr>
+            <a:r>
+              <a:rPr lang="en-US" sz="1700" dirty="0">
+                <a:solidFill>
+                  <a:srgbClr val="1F2937"/>
+                </a:solidFill>
+                <a:latin typeface="Arial" pitchFamily="34" charset="0"/>
+                <a:ea typeface="Arial" pitchFamily="34" charset="-122"/>
+                <a:cs typeface="Arial" pitchFamily="34" charset="-120"/>
+              </a:rPr>
+              <a:t>cada usina é um cartão</a:t>
+            </a:r>
+            <a:endParaRPr lang="en-US" sz="1700" dirty="0"/>
+          </a:p>
+          <a:p>
+            <a:pPr marL="342900" indent="-342900">
+              <a:spcAft>
+                <a:spcPts val="600"/>
+              </a:spcAft>
+              <a:buSzPct val="100000"/>
+              <a:buChar char="●"/>
+            </a:pPr>
+            <a:r>
+              <a:rPr lang="en-US" sz="1700" dirty="0">
+                <a:solidFill>
+                  <a:srgbClr val="1F2937"/>
+                </a:solidFill>
+                <a:latin typeface="Arial" pitchFamily="34" charset="0"/>
+                <a:ea typeface="Arial" pitchFamily="34" charset="-122"/>
+                <a:cs typeface="Arial" pitchFamily="34" charset="-120"/>
+              </a:rPr>
+              <a:t>arraste para avançar</a:t>
+            </a:r>
+            <a:endParaRPr lang="en-US" sz="1700" dirty="0"/>
+          </a:p>
+          <a:p>
+            <a:pPr marL="342900" indent="-342900">
+              <a:spcAft>
+                <a:spcPts val="600"/>
+              </a:spcAft>
+              <a:buSzPct val="100000"/>
+              <a:buChar char="●"/>
+            </a:pPr>
+            <a:r>
+              <a:rPr lang="en-US" sz="1700" dirty="0">
+                <a:solidFill>
+                  <a:srgbClr val="1F2937"/>
+                </a:solidFill>
+                <a:latin typeface="Arial" pitchFamily="34" charset="0"/>
+                <a:ea typeface="Arial" pitchFamily="34" charset="-122"/>
+                <a:cs typeface="Arial" pitchFamily="34" charset="-120"/>
+              </a:rPr>
+              <a:t>parada há mais de 14 dias = destaque</a:t>
+            </a:r>
+            <a:endParaRPr lang="en-US" sz="1700" dirty="0"/>
           </a:p>
         </p:txBody>
       </p:sp>
@@ -9587,12 +9657,71 @@
         </p:nvSpPr>
         <p:spPr>
           <a:xfrm>
-            <a:off x="6208776" y="1325880"/>
-            <a:ext cx="5431536" cy="3977640"/>
+            <a:off x="822960" y="4663440"/>
+            <a:ext cx="4860036" cy="18288"/>
+          </a:xfrm>
+          <a:prstGeom prst="rect">
+            <a:avLst/>
+          </a:prstGeom>
+          <a:solidFill>
+            <a:srgbClr val="D8E0EC"/>
+          </a:solidFill>
+          <a:ln/>
+        </p:spPr>
+      </p:sp>
+      <p:sp>
+        <p:nvSpPr>
+          <p:cNvPr id="14" name="Text 11"/>
+          <p:cNvSpPr/>
+          <p:nvPr/>
+        </p:nvSpPr>
+        <p:spPr>
+          <a:xfrm>
+            <a:off x="822960" y="4754880"/>
+            <a:ext cx="4860036" cy="1371600"/>
+          </a:xfrm>
+          <a:prstGeom prst="rect">
+            <a:avLst/>
+          </a:prstGeom>
+          <a:noFill/>
+          <a:ln/>
+        </p:spPr>
+        <p:txBody>
+          <a:bodyPr wrap="square" rtlCol="0" anchor="t"/>
+          <a:lstStyle/>
+          <a:p>
+            <a:pPr indent="0" marL="0">
+              <a:buNone/>
+            </a:pPr>
+            <a:r>
+              <a:rPr lang="en-US" sz="1400" i="1" dirty="0">
+                <a:solidFill>
+                  <a:srgbClr val="64748B"/>
+                </a:solidFill>
+                <a:latin typeface="Arial" pitchFamily="34" charset="0"/>
+                <a:ea typeface="Arial" pitchFamily="34" charset="-122"/>
+                <a:cs typeface="Arial" pitchFamily="34" charset="-120"/>
+              </a:rPr>
+              <a:t>Na plataforma, cada usina é um cartão no quadro de onboarding. Usina nova entra sozinha na primeira etapa, e cartão parado há mais de duas semanas fica em destaque.</a:t>
+            </a:r>
+            <a:endParaRPr lang="en-US" sz="1400" dirty="0"/>
+          </a:p>
+        </p:txBody>
+      </p:sp>
+      <p:sp>
+        <p:nvSpPr>
+          <p:cNvPr id="15" name="Shape 12"/>
+          <p:cNvSpPr/>
+          <p:nvPr/>
+        </p:nvSpPr>
+        <p:spPr>
+          <a:xfrm>
+            <a:off x="6231636" y="1325880"/>
+            <a:ext cx="5408676" cy="4937760"/>
           </a:xfrm>
           <a:prstGeom prst="roundRect">
             <a:avLst>
-              <a:gd name="adj" fmla="val 1839"/>
+              <a:gd name="adj" fmla="val 1481"/>
             </a:avLst>
           </a:prstGeom>
           <a:solidFill>
@@ -9615,16 +9744,16 @@
       </p:sp>
       <p:sp>
         <p:nvSpPr>
-          <p:cNvPr id="14" name="Shape 11"/>
-          <p:cNvSpPr/>
-          <p:nvPr/>
-        </p:nvSpPr>
-        <p:spPr>
-          <a:xfrm>
-            <a:off x="6391656" y="1508760"/>
-            <a:ext cx="457200" cy="457200"/>
-          </a:xfrm>
-          <a:prstGeom prst="ellipse">
+          <p:cNvPr id="16" name="Shape 13"/>
+          <p:cNvSpPr/>
+          <p:nvPr/>
+        </p:nvSpPr>
+        <p:spPr>
+          <a:xfrm>
+            <a:off x="6231636" y="1325880"/>
+            <a:ext cx="5408676" cy="109728"/>
+          </a:xfrm>
+          <a:prstGeom prst="rect">
             <a:avLst/>
           </a:prstGeom>
           <a:solidFill>
@@ -9635,62 +9764,23 @@
       </p:sp>
       <p:sp>
         <p:nvSpPr>
-          <p:cNvPr id="15" name="Text 12"/>
-          <p:cNvSpPr/>
-          <p:nvPr/>
-        </p:nvSpPr>
-        <p:spPr>
-          <a:xfrm>
-            <a:off x="6391656" y="1508760"/>
-            <a:ext cx="457200" cy="457200"/>
-          </a:xfrm>
-          <a:prstGeom prst="rect">
-            <a:avLst/>
-          </a:prstGeom>
-          <a:noFill/>
-          <a:ln/>
-        </p:spPr>
-        <p:txBody>
-          <a:bodyPr wrap="square" rtlCol="0" anchor="ctr"/>
-          <a:lstStyle/>
-          <a:p>
-            <a:pPr algn="ctr" indent="0" marL="0">
-              <a:buNone/>
-            </a:pPr>
-            <a:r>
-              <a:rPr lang="en-US" sz="1400" b="1" dirty="0">
-                <a:solidFill>
-                  <a:srgbClr val="FFFFFF"/>
-                </a:solidFill>
-                <a:latin typeface="Arial" pitchFamily="34" charset="0"/>
-                <a:ea typeface="Arial" pitchFamily="34" charset="-122"/>
-                <a:cs typeface="Arial" pitchFamily="34" charset="-120"/>
-              </a:rPr>
-              <a:t>2</a:t>
-            </a:r>
-            <a:endParaRPr lang="en-US" sz="1400" dirty="0"/>
-          </a:p>
-        </p:txBody>
-      </p:sp>
-      <p:sp>
-        <p:nvSpPr>
-          <p:cNvPr id="16" name="Text 13"/>
-          <p:cNvSpPr/>
-          <p:nvPr/>
-        </p:nvSpPr>
-        <p:spPr>
-          <a:xfrm>
-            <a:off x="6986016" y="1435608"/>
-            <a:ext cx="4517136" cy="3758184"/>
-          </a:xfrm>
-          <a:prstGeom prst="rect">
-            <a:avLst/>
-          </a:prstGeom>
-          <a:noFill/>
-          <a:ln/>
-        </p:spPr>
-        <p:txBody>
-          <a:bodyPr wrap="square" rtlCol="0" anchor="ctr">
+          <p:cNvPr id="17" name="Text 14"/>
+          <p:cNvSpPr/>
+          <p:nvPr/>
+        </p:nvSpPr>
+        <p:spPr>
+          <a:xfrm>
+            <a:off x="6505956" y="1554480"/>
+            <a:ext cx="4860036" cy="685800"/>
+          </a:xfrm>
+          <a:prstGeom prst="rect">
+            <a:avLst/>
+          </a:prstGeom>
+          <a:noFill/>
+          <a:ln/>
+        </p:spPr>
+        <p:txBody>
+          <a:bodyPr wrap="square" rtlCol="0" anchor="t">
             <a:normAutofit/>
           </a:bodyPr>
           <a:lstStyle/>
@@ -9699,7 +9789,52 @@
               <a:buNone/>
             </a:pPr>
             <a:r>
-              <a:rPr lang="en-US" sz="1800" dirty="0">
+              <a:rPr lang="en-US" sz="1600" b="1" dirty="0">
+                <a:solidFill>
+                  <a:srgbClr val="1B3A6B"/>
+                </a:solidFill>
+                <a:latin typeface="Arial" pitchFamily="34" charset="0"/>
+                <a:ea typeface="Arial" pitchFamily="34" charset="-122"/>
+                <a:cs typeface="Arial" pitchFamily="34" charset="-120"/>
+              </a:rPr>
+              <a:t>Vender durante o onboarding?</a:t>
+            </a:r>
+            <a:endParaRPr lang="en-US" sz="1600" dirty="0"/>
+          </a:p>
+        </p:txBody>
+      </p:sp>
+      <p:sp>
+        <p:nvSpPr>
+          <p:cNvPr id="18" name="Text 15"/>
+          <p:cNvSpPr/>
+          <p:nvPr/>
+        </p:nvSpPr>
+        <p:spPr>
+          <a:xfrm>
+            <a:off x="6505956" y="2286000"/>
+            <a:ext cx="4860036" cy="2286000"/>
+          </a:xfrm>
+          <a:prstGeom prst="rect">
+            <a:avLst/>
+          </a:prstGeom>
+          <a:noFill/>
+          <a:ln/>
+        </p:spPr>
+        <p:txBody>
+          <a:bodyPr wrap="square" rtlCol="0" anchor="t">
+            <a:normAutofit/>
+          </a:bodyPr>
+          <a:lstStyle/>
+          <a:p>
+            <a:pPr marL="342900" indent="-342900">
+              <a:spcAft>
+                <a:spcPts val="600"/>
+              </a:spcAft>
+              <a:buSzPct val="100000"/>
+              <a:buChar char="●"/>
+            </a:pPr>
+            <a:r>
+              <a:rPr lang="en-US" sz="1700" dirty="0">
                 <a:solidFill>
                   <a:srgbClr val="1F2937"/>
                 </a:solidFill>
@@ -9707,87 +9842,81 @@
                 <a:ea typeface="Arial" pitchFamily="34" charset="-122"/>
                 <a:cs typeface="Arial" pitchFamily="34" charset="-120"/>
               </a:rPr>
+              <a:t>Pré-venda com data honesta</a:t>
+            </a:r>
+            <a:endParaRPr lang="en-US" sz="1700" dirty="0"/>
+          </a:p>
+          <a:p>
+            <a:pPr marL="342900" indent="-342900">
+              <a:spcAft>
+                <a:spcPts val="600"/>
+              </a:spcAft>
+              <a:buSzPct val="100000"/>
+              <a:buChar char="●"/>
+            </a:pPr>
+            <a:r>
+              <a:rPr lang="en-US" sz="1700" dirty="0">
+                <a:solidFill>
+                  <a:srgbClr val="1F2937"/>
+                </a:solidFill>
+                <a:latin typeface="Arial" pitchFamily="34" charset="0"/>
+                <a:ea typeface="Arial" pitchFamily="34" charset="-122"/>
+                <a:cs typeface="Arial" pitchFamily="34" charset="-120"/>
+              </a:rPr>
               <a:t>cliente só entra no rateio depois da etapa 7</a:t>
             </a:r>
-            <a:endParaRPr lang="en-US" sz="1800" dirty="0"/>
-          </a:p>
-        </p:txBody>
-      </p:sp>
-      <p:sp>
-        <p:nvSpPr>
-          <p:cNvPr id="17" name="Shape 14"/>
-          <p:cNvSpPr/>
-          <p:nvPr/>
-        </p:nvSpPr>
-        <p:spPr>
-          <a:xfrm>
-            <a:off x="548640" y="5413248"/>
-            <a:ext cx="11091672" cy="868680"/>
-          </a:xfrm>
-          <a:prstGeom prst="roundRect">
-            <a:avLst>
-              <a:gd name="adj" fmla="val 8421"/>
-            </a:avLst>
+            <a:endParaRPr lang="en-US" sz="1700" dirty="0"/>
+          </a:p>
+        </p:txBody>
+      </p:sp>
+      <p:sp>
+        <p:nvSpPr>
+          <p:cNvPr id="19" name="Shape 16"/>
+          <p:cNvSpPr/>
+          <p:nvPr/>
+        </p:nvSpPr>
+        <p:spPr>
+          <a:xfrm>
+            <a:off x="6505956" y="4663440"/>
+            <a:ext cx="4860036" cy="18288"/>
+          </a:xfrm>
+          <a:prstGeom prst="rect">
+            <a:avLst/>
           </a:prstGeom>
           <a:solidFill>
-            <a:srgbClr val="EEF3FA"/>
+            <a:srgbClr val="D8E0EC"/>
           </a:solidFill>
-          <a:ln w="6350">
-            <a:solidFill>
-              <a:srgbClr val="D8E0EC"/>
-            </a:solidFill>
-            <a:prstDash val="solid"/>
-          </a:ln>
-        </p:spPr>
-      </p:sp>
-      <p:sp>
-        <p:nvSpPr>
-          <p:cNvPr id="18" name="Shape 15"/>
-          <p:cNvSpPr/>
-          <p:nvPr/>
-        </p:nvSpPr>
-        <p:spPr>
-          <a:xfrm>
-            <a:off x="548640" y="5413248"/>
-            <a:ext cx="91440" cy="868680"/>
-          </a:xfrm>
-          <a:prstGeom prst="rect">
-            <a:avLst/>
-          </a:prstGeom>
-          <a:solidFill>
-            <a:srgbClr val="F7A23B"/>
-          </a:solidFill>
-          <a:ln/>
-        </p:spPr>
-      </p:sp>
-      <p:sp>
-        <p:nvSpPr>
-          <p:cNvPr id="19" name="Text 16"/>
-          <p:cNvSpPr/>
-          <p:nvPr/>
-        </p:nvSpPr>
-        <p:spPr>
-          <a:xfrm>
-            <a:off x="777240" y="5458968"/>
-            <a:ext cx="10744200" cy="777240"/>
-          </a:xfrm>
-          <a:prstGeom prst="rect">
-            <a:avLst/>
-          </a:prstGeom>
-          <a:noFill/>
-          <a:ln/>
-        </p:spPr>
-        <p:txBody>
-          <a:bodyPr wrap="square" rtlCol="0" anchor="ctr"/>
-          <a:lstStyle/>
-          <a:p>
-            <a:pPr indent="0" marL="0">
-              <a:buNone/>
-            </a:pPr>
-            <a:r>
-              <a:rPr lang="en-US" sz="1500" dirty="0">
-                <a:solidFill>
-                  <a:srgbClr val="1F2937"/>
+          <a:ln/>
+        </p:spPr>
+      </p:sp>
+      <p:sp>
+        <p:nvSpPr>
+          <p:cNvPr id="20" name="Text 17"/>
+          <p:cNvSpPr/>
+          <p:nvPr/>
+        </p:nvSpPr>
+        <p:spPr>
+          <a:xfrm>
+            <a:off x="6505956" y="4754880"/>
+            <a:ext cx="4860036" cy="1371600"/>
+          </a:xfrm>
+          <a:prstGeom prst="rect">
+            <a:avLst/>
+          </a:prstGeom>
+          <a:noFill/>
+          <a:ln/>
+        </p:spPr>
+        <p:txBody>
+          <a:bodyPr wrap="square" rtlCol="0" anchor="t"/>
+          <a:lstStyle/>
+          <a:p>
+            <a:pPr indent="0" marL="0">
+              <a:buNone/>
+            </a:pPr>
+            <a:r>
+              <a:rPr lang="en-US" sz="1400" i="1" dirty="0">
+                <a:solidFill>
+                  <a:srgbClr val="64748B"/>
                 </a:solidFill>
                 <a:latin typeface="Arial" pitchFamily="34" charset="0"/>
                 <a:ea typeface="Arial" pitchFamily="34" charset="-122"/>
@@ -9795,7 +9924,7 @@
               </a:rPr>
               <a:t>Você pode fazer pré-venda durante o onboarding, com data honesta. Mas o cliente só entra no rateio depois da etapa sete.</a:t>
             </a:r>
-            <a:endParaRPr lang="en-US" sz="1500" dirty="0"/>
+            <a:endParaRPr lang="en-US" sz="1400" dirty="0"/>
           </a:p>
         </p:txBody>
       </p:sp>
@@ -10059,7 +10188,7 @@
                 <a:ea typeface="Arial" pitchFamily="34" charset="-122"/>
                 <a:cs typeface="Arial" pitchFamily="34" charset="-120"/>
               </a:rPr>
-              <a:t>AULA 4 · ONBOARDING DA USINA EM SETE ETAPAS</a:t>
+              <a:t>AULA 4 · NA PLATAFORMA</a:t>
             </a:r>
             <a:endParaRPr lang="en-US" sz="1000" dirty="0"/>
           </a:p>
@@ -10100,7 +10229,7 @@
                 <a:ea typeface="Arial" pitchFamily="34" charset="-122"/>
                 <a:cs typeface="Arial" pitchFamily="34" charset="-120"/>
               </a:rPr>
-              <a:t>Passo a passo na plataforma</a:t>
+              <a:t>Onboarding de usinas</a:t>
             </a:r>
             <a:endParaRPr lang="en-US" sz="2600" dirty="0"/>
           </a:p>
@@ -10114,12 +10243,12 @@
         </p:nvSpPr>
         <p:spPr>
           <a:xfrm>
-            <a:off x="420624" y="1289304"/>
-            <a:ext cx="7114032" cy="4033647"/>
+            <a:off x="1380744" y="1225296"/>
+            <a:ext cx="9400032" cy="5319522"/>
           </a:xfrm>
           <a:prstGeom prst="roundRect">
             <a:avLst>
-              <a:gd name="adj" fmla="val 1360"/>
+              <a:gd name="adj" fmla="val 1031"/>
             </a:avLst>
           </a:prstGeom>
           <a:solidFill>
@@ -10156,128 +10285,14 @@
         </p:blipFill>
         <p:spPr>
           <a:xfrm>
-            <a:off x="457200" y="1325880"/>
-            <a:ext cx="7040880" cy="3960495"/>
+            <a:off x="1417320" y="1261872"/>
+            <a:ext cx="9326880" cy="5246370"/>
           </a:xfrm>
           <a:prstGeom prst="rect">
             <a:avLst/>
           </a:prstGeom>
         </p:spPr>
       </p:pic>
-      <p:sp>
-        <p:nvSpPr>
-          <p:cNvPr id="11" name="Text 7"/>
-          <p:cNvSpPr/>
-          <p:nvPr/>
-        </p:nvSpPr>
-        <p:spPr>
-          <a:xfrm>
-            <a:off x="457200" y="5332095"/>
-            <a:ext cx="7040880" cy="320040"/>
-          </a:xfrm>
-          <a:prstGeom prst="rect">
-            <a:avLst/>
-          </a:prstGeom>
-          <a:noFill/>
-          <a:ln/>
-        </p:spPr>
-        <p:txBody>
-          <a:bodyPr wrap="square" rtlCol="0" anchor="ctr"/>
-          <a:lstStyle/>
-          <a:p>
-            <a:pPr algn="ctr" indent="0" marL="0">
-              <a:buNone/>
-            </a:pPr>
-            <a:r>
-              <a:rPr lang="en-US" sz="1100" i="1" dirty="0">
-                <a:solidFill>
-                  <a:srgbClr val="64748B"/>
-                </a:solidFill>
-                <a:latin typeface="Arial" pitchFamily="34" charset="0"/>
-                <a:ea typeface="Arial" pitchFamily="34" charset="-122"/>
-                <a:cs typeface="Arial" pitchFamily="34" charset="-120"/>
-              </a:rPr>
-              <a:t>Onboarding de usinas</a:t>
-            </a:r>
-            <a:endParaRPr lang="en-US" sz="1100" dirty="0"/>
-          </a:p>
-        </p:txBody>
-      </p:sp>
-      <p:sp>
-        <p:nvSpPr>
-          <p:cNvPr id="12" name="Text 8"/>
-          <p:cNvSpPr/>
-          <p:nvPr/>
-        </p:nvSpPr>
-        <p:spPr>
-          <a:xfrm>
-            <a:off x="7818120" y="1325880"/>
-            <a:ext cx="3977640" cy="4937760"/>
-          </a:xfrm>
-          <a:prstGeom prst="rect">
-            <a:avLst/>
-          </a:prstGeom>
-          <a:noFill/>
-          <a:ln/>
-        </p:spPr>
-        <p:txBody>
-          <a:bodyPr wrap="square" rtlCol="0" anchor="t">
-            <a:normAutofit/>
-          </a:bodyPr>
-          <a:lstStyle/>
-          <a:p>
-            <a:pPr indent="0" marL="0">
-              <a:buNone/>
-            </a:pPr>
-            <a:r>
-              <a:rPr lang="en-US" sz="1500" b="1" dirty="0">
-                <a:solidFill>
-                  <a:srgbClr val="F7A23B"/>
-                </a:solidFill>
-                <a:latin typeface="Arial" pitchFamily="34" charset="0"/>
-                <a:ea typeface="Arial" pitchFamily="34" charset="-122"/>
-                <a:cs typeface="Arial" pitchFamily="34" charset="-120"/>
-              </a:rPr>
-              <a:t>1  </a:t>
-            </a:r>
-            <a:pPr indent="0" marL="0">
-              <a:buNone/>
-            </a:pPr>
-            <a:r>
-              <a:rPr lang="en-US" sz="1400" b="1" dirty="0">
-                <a:solidFill>
-                  <a:srgbClr val="1B3A6B"/>
-                </a:solidFill>
-                <a:latin typeface="Arial" pitchFamily="34" charset="0"/>
-                <a:ea typeface="Arial" pitchFamily="34" charset="-122"/>
-                <a:cs typeface="Arial" pitchFamily="34" charset="-120"/>
-              </a:rPr>
-              <a:t>O quadro de onboarding na plataforma</a:t>
-            </a:r>
-            <a:endParaRPr lang="en-US" sz="1500" dirty="0"/>
-          </a:p>
-          <a:p>
-            <a:pPr indent="0" marL="0">
-              <a:spcAft>
-                <a:spcPts val="800"/>
-              </a:spcAft>
-              <a:buNone/>
-            </a:pPr>
-            <a:r>
-              <a:rPr lang="en-US" sz="1100" dirty="0">
-                <a:solidFill>
-                  <a:srgbClr val="1F2937"/>
-                </a:solidFill>
-                <a:latin typeface="Arial" pitchFamily="34" charset="0"/>
-                <a:ea typeface="Arial" pitchFamily="34" charset="-122"/>
-                <a:cs typeface="Arial" pitchFamily="34" charset="-120"/>
-              </a:rPr>
-              <a:t>Usinas Solar → Onboarding de Usinas · cada usina é um cartão · arraste para avançar · parada há mais de 14 dias = destaque</a:t>
-            </a:r>
-            <a:endParaRPr lang="en-US" sz="1500" dirty="0"/>
-          </a:p>
-        </p:txBody>
-      </p:sp>
       <p:sp>
         <p:nvSpPr>
           <p:cNvPr id="25" name="Slide Number Placeholder 0"/>
@@ -11114,7 +11129,7 @@
             <a:r>
               <a:rPr lang="en-US" sz="11000" b="1" dirty="0">
                 <a:solidFill>
-                  <a:srgbClr val="11396F"/>
+                  <a:srgbClr val="F7A23B"/>
                 </a:solidFill>
                 <a:latin typeface="Arial" pitchFamily="34" charset="0"/>
                 <a:ea typeface="Arial" pitchFamily="34" charset="-122"/>
@@ -11237,7 +11252,7 @@
                 <a:ea typeface="Arial" pitchFamily="34" charset="-122"/>
                 <a:cs typeface="Arial" pitchFamily="34" charset="-120"/>
               </a:rPr>
-              <a:t>Aula</a:t>
+              <a:t>Aula teórica</a:t>
             </a:r>
             <a:endParaRPr lang="en-US" sz="1400" dirty="0"/>
           </a:p>
@@ -11451,7 +11466,7 @@
                 <a:ea typeface="Arial" pitchFamily="34" charset="-122"/>
                 <a:cs typeface="Arial" pitchFamily="34" charset="-120"/>
               </a:rPr>
-              <a:t>Passo a passo na plataforma</a:t>
+              <a:t>Registrando os produtores na plataforma</a:t>
             </a:r>
             <a:endParaRPr lang="en-US" sz="1500" dirty="0"/>
           </a:p>
@@ -11536,7 +11551,7 @@
             <a:r>
               <a:rPr lang="en-US" sz="11000" b="1" dirty="0">
                 <a:solidFill>
-                  <a:srgbClr val="11396F"/>
+                  <a:srgbClr val="F7A23B"/>
                 </a:solidFill>
                 <a:latin typeface="Arial" pitchFamily="34" charset="0"/>
                 <a:ea typeface="Arial" pitchFamily="34" charset="-122"/>
@@ -11724,7 +11739,7 @@
                 <a:ea typeface="Arial" pitchFamily="34" charset="-122"/>
                 <a:cs typeface="Arial" pitchFamily="34" charset="-120"/>
               </a:rPr>
-              <a:t>cadastrando o produtor e a proposta de produtor</a:t>
+              <a:t>Cadastrando o produtor e a proposta de produtor</a:t>
             </a:r>
             <a:endParaRPr lang="en-US" sz="3200" dirty="0"/>
           </a:p>
@@ -12892,7 +12907,7 @@
             <a:r>
               <a:rPr lang="en-US" sz="11000" b="1" dirty="0">
                 <a:solidFill>
-                  <a:srgbClr val="11396F"/>
+                  <a:srgbClr val="F7A23B"/>
                 </a:solidFill>
                 <a:latin typeface="Arial" pitchFamily="34" charset="0"/>
                 <a:ea typeface="Arial" pitchFamily="34" charset="-122"/>
@@ -13080,7 +13095,7 @@
                 <a:ea typeface="Arial" pitchFamily="34" charset="-122"/>
                 <a:cs typeface="Arial" pitchFamily="34" charset="-120"/>
               </a:rPr>
-              <a:t>cadastrando a usina e registrando a geração</a:t>
+              <a:t>Cadastrando a usina e registrando a geração</a:t>
             </a:r>
             <a:endParaRPr lang="en-US" sz="3200" dirty="0"/>
           </a:p>
@@ -19905,7 +19920,7 @@
               <a:buNone/>
             </a:pPr>
             <a:r>
-              <a:rPr lang="en-US" sz="1300" i="1" dirty="0">
+              <a:rPr lang="en-US" sz="1400" i="1" dirty="0">
                 <a:solidFill>
                   <a:srgbClr val="64748B"/>
                 </a:solidFill>
@@ -19915,7 +19930,7 @@
               </a:rPr>
               <a:t>Para encontrá-las, use a sua rede, contadores e bancos, associações rurais e os dados públicos da ANEEL. Uma visita à usina vale mais que dez e-mails.</a:t>
             </a:r>
-            <a:endParaRPr lang="en-US" sz="1300" dirty="0"/>
+            <a:endParaRPr lang="en-US" sz="1400" dirty="0"/>
           </a:p>
         </p:txBody>
       </p:sp>
@@ -20167,7 +20182,7 @@
               <a:buNone/>
             </a:pPr>
             <a:r>
-              <a:rPr lang="en-US" sz="1300" i="1" dirty="0">
+              <a:rPr lang="en-US" sz="1400" i="1" dirty="0">
                 <a:solidFill>
                   <a:srgbClr val="64748B"/>
                 </a:solidFill>
@@ -20177,7 +20192,7 @@
               </a:rPr>
               <a:t>O produtor quer quatro coisas: renda previsível, usina cheia rápido, zero trabalho e transparência. O portal do produtor é um ótimo argumento.</a:t>
             </a:r>
-            <a:endParaRPr lang="en-US" sz="1300" dirty="0"/>
+            <a:endParaRPr lang="en-US" sz="1400" dirty="0"/>
           </a:p>
         </p:txBody>
       </p:sp>
@@ -20990,7 +21005,7 @@
                 <a:ea typeface="Arial" pitchFamily="34" charset="-122"/>
                 <a:cs typeface="Arial" pitchFamily="34" charset="-120"/>
               </a:rPr>
-              <a:t>Passo a passo na plataforma</a:t>
+              <a:t>Registrando os produtores na plataforma</a:t>
             </a:r>
             <a:endParaRPr lang="en-US" sz="2600" dirty="0"/>
           </a:p>
@@ -21004,20 +21019,18 @@
         </p:nvSpPr>
         <p:spPr>
           <a:xfrm>
-            <a:off x="548640" y="1325880"/>
-            <a:ext cx="11091672" cy="4937760"/>
-          </a:xfrm>
-          <a:prstGeom prst="roundRect">
-            <a:avLst>
-              <a:gd name="adj" fmla="val 1481"/>
-            </a:avLst>
+            <a:off x="548640" y="3063240"/>
+            <a:ext cx="5596128" cy="1463040"/>
+          </a:xfrm>
+          <a:prstGeom prst="chevron">
+            <a:avLst/>
           </a:prstGeom>
           <a:solidFill>
-            <a:srgbClr val="FFFFFF"/>
+            <a:srgbClr val="1B3A6B"/>
           </a:solidFill>
-          <a:ln w="9525">
+          <a:ln w="25400">
             <a:solidFill>
-              <a:srgbClr val="D8E0EC"/>
+              <a:srgbClr val="FFFFFF"/>
             </a:solidFill>
             <a:prstDash val="solid"/>
           </a:ln>
@@ -21025,75 +21038,14 @@
       </p:sp>
       <p:sp>
         <p:nvSpPr>
-          <p:cNvPr id="10" name="Shape 7"/>
-          <p:cNvSpPr/>
-          <p:nvPr/>
-        </p:nvSpPr>
-        <p:spPr>
-          <a:xfrm>
-            <a:off x="731520" y="1508760"/>
-            <a:ext cx="822960" cy="384048"/>
-          </a:xfrm>
-          <a:prstGeom prst="roundRect">
-            <a:avLst>
-              <a:gd name="adj" fmla="val 47619"/>
-            </a:avLst>
-          </a:prstGeom>
-          <a:solidFill>
-            <a:srgbClr val="F7A23B"/>
-          </a:solidFill>
-          <a:ln/>
-        </p:spPr>
-      </p:sp>
-      <p:sp>
-        <p:nvSpPr>
-          <p:cNvPr id="11" name="Text 8"/>
-          <p:cNvSpPr/>
-          <p:nvPr/>
-        </p:nvSpPr>
-        <p:spPr>
-          <a:xfrm>
-            <a:off x="731520" y="1508760"/>
-            <a:ext cx="822960" cy="384048"/>
-          </a:xfrm>
-          <a:prstGeom prst="rect">
-            <a:avLst/>
-          </a:prstGeom>
-          <a:noFill/>
-          <a:ln/>
-        </p:spPr>
-        <p:txBody>
-          <a:bodyPr wrap="square" rtlCol="0" anchor="ctr"/>
-          <a:lstStyle/>
-          <a:p>
-            <a:pPr algn="ctr" indent="0" marL="0">
-              <a:buNone/>
-            </a:pPr>
-            <a:r>
-              <a:rPr lang="en-US" sz="1000" b="1" dirty="0">
-                <a:solidFill>
-                  <a:srgbClr val="FFFFFF"/>
-                </a:solidFill>
-                <a:latin typeface="Arial" pitchFamily="34" charset="0"/>
-                <a:ea typeface="Arial" pitchFamily="34" charset="-122"/>
-                <a:cs typeface="Arial" pitchFamily="34" charset="-120"/>
-              </a:rPr>
-              <a:t>PASSO 1</a:t>
-            </a:r>
-            <a:endParaRPr lang="en-US" sz="1000" dirty="0"/>
-          </a:p>
-        </p:txBody>
-      </p:sp>
-      <p:sp>
-        <p:nvSpPr>
-          <p:cNvPr id="12" name="Text 9"/>
-          <p:cNvSpPr/>
-          <p:nvPr/>
-        </p:nvSpPr>
-        <p:spPr>
-          <a:xfrm>
-            <a:off x="1645920" y="1463040"/>
-            <a:ext cx="9857232" cy="502920"/>
+          <p:cNvPr id="10" name="Text 7"/>
+          <p:cNvSpPr/>
+          <p:nvPr/>
+        </p:nvSpPr>
+        <p:spPr>
+          <a:xfrm>
+            <a:off x="868680" y="3063240"/>
+            <a:ext cx="5074920" cy="1463040"/>
           </a:xfrm>
           <a:prstGeom prst="rect">
             <a:avLst/>
@@ -21107,60 +21059,85 @@
           </a:bodyPr>
           <a:lstStyle/>
           <a:p>
-            <a:pPr indent="0" marL="0">
-              <a:buNone/>
-            </a:pPr>
-            <a:r>
-              <a:rPr lang="en-US" sz="1400" b="1" dirty="0">
-                <a:solidFill>
-                  <a:srgbClr val="1B3A6B"/>
-                </a:solidFill>
-                <a:latin typeface="Arial" pitchFamily="34" charset="0"/>
-                <a:ea typeface="Arial" pitchFamily="34" charset="-122"/>
-                <a:cs typeface="Arial" pitchFamily="34" charset="-120"/>
-              </a:rPr>
-              <a:t>Registrando os produtores na plataforma</a:t>
-            </a:r>
-            <a:endParaRPr lang="en-US" sz="1400" dirty="0"/>
-          </a:p>
-        </p:txBody>
-      </p:sp>
-      <p:sp>
-        <p:nvSpPr>
-          <p:cNvPr id="13" name="Text 10"/>
-          <p:cNvSpPr/>
-          <p:nvPr/>
-        </p:nvSpPr>
-        <p:spPr>
-          <a:xfrm>
-            <a:off x="777240" y="2057400"/>
-            <a:ext cx="10634472" cy="4069080"/>
-          </a:xfrm>
-          <a:prstGeom prst="rect">
-            <a:avLst/>
-          </a:prstGeom>
-          <a:noFill/>
-          <a:ln/>
-        </p:spPr>
-        <p:txBody>
-          <a:bodyPr wrap="square" rtlCol="0" anchor="t">
+            <a:pPr algn="ctr" indent="0" marL="0">
+              <a:buNone/>
+            </a:pPr>
+            <a:r>
+              <a:rPr lang="en-US" sz="1500" b="1" dirty="0">
+                <a:solidFill>
+                  <a:srgbClr val="FFFFFF"/>
+                </a:solidFill>
+                <a:latin typeface="Arial" pitchFamily="34" charset="0"/>
+                <a:ea typeface="Arial" pitchFamily="34" charset="-122"/>
+                <a:cs typeface="Arial" pitchFamily="34" charset="-120"/>
+              </a:rPr>
+              <a:t>Produtores Solar</a:t>
+            </a:r>
+            <a:endParaRPr lang="en-US" sz="1500" dirty="0"/>
+          </a:p>
+        </p:txBody>
+      </p:sp>
+      <p:sp>
+        <p:nvSpPr>
+          <p:cNvPr id="11" name="Shape 8"/>
+          <p:cNvSpPr/>
+          <p:nvPr/>
+        </p:nvSpPr>
+        <p:spPr>
+          <a:xfrm>
+            <a:off x="6035040" y="3063240"/>
+            <a:ext cx="5596128" cy="1463040"/>
+          </a:xfrm>
+          <a:prstGeom prst="chevron">
+            <a:avLst/>
+          </a:prstGeom>
+          <a:solidFill>
+            <a:srgbClr val="11396F"/>
+          </a:solidFill>
+          <a:ln w="25400">
+            <a:solidFill>
+              <a:srgbClr val="FFFFFF"/>
+            </a:solidFill>
+            <a:prstDash val="solid"/>
+          </a:ln>
+        </p:spPr>
+      </p:sp>
+      <p:sp>
+        <p:nvSpPr>
+          <p:cNvPr id="12" name="Text 9"/>
+          <p:cNvSpPr/>
+          <p:nvPr/>
+        </p:nvSpPr>
+        <p:spPr>
+          <a:xfrm>
+            <a:off x="6355080" y="3063240"/>
+            <a:ext cx="5074920" cy="1463040"/>
+          </a:xfrm>
+          <a:prstGeom prst="rect">
+            <a:avLst/>
+          </a:prstGeom>
+          <a:noFill/>
+          <a:ln/>
+        </p:spPr>
+        <p:txBody>
+          <a:bodyPr wrap="square" rtlCol="0" anchor="ctr">
             <a:normAutofit/>
           </a:bodyPr>
           <a:lstStyle/>
           <a:p>
-            <a:pPr indent="0" marL="0">
-              <a:buNone/>
-            </a:pPr>
-            <a:r>
-              <a:rPr lang="en-US" sz="1500" dirty="0">
-                <a:solidFill>
-                  <a:srgbClr val="1F2937"/>
-                </a:solidFill>
-                <a:latin typeface="Arial" pitchFamily="34" charset="0"/>
-                <a:ea typeface="Arial" pitchFamily="34" charset="-122"/>
-                <a:cs typeface="Arial" pitchFamily="34" charset="-120"/>
-              </a:rPr>
-              <a:t>Produtores Solar → Produtores: todo contato vira cadastro com status</a:t>
+            <a:pPr algn="ctr" indent="0" marL="0">
+              <a:buNone/>
+            </a:pPr>
+            <a:r>
+              <a:rPr lang="en-US" sz="1500" b="1" dirty="0">
+                <a:solidFill>
+                  <a:srgbClr val="FFFFFF"/>
+                </a:solidFill>
+                <a:latin typeface="Arial" pitchFamily="34" charset="0"/>
+                <a:ea typeface="Arial" pitchFamily="34" charset="-122"/>
+                <a:cs typeface="Arial" pitchFamily="34" charset="-120"/>
+              </a:rPr>
+              <a:t>Produtores: todo contato vira cadastro com status</a:t>
             </a:r>
             <a:endParaRPr lang="en-US" sz="1500" dirty="0"/>
           </a:p>
@@ -22002,7 +21979,7 @@
             <a:r>
               <a:rPr lang="en-US" sz="11000" b="1" dirty="0">
                 <a:solidFill>
-                  <a:srgbClr val="11396F"/>
+                  <a:srgbClr val="F7A23B"/>
                 </a:solidFill>
                 <a:latin typeface="Arial" pitchFamily="34" charset="0"/>
                 <a:ea typeface="Arial" pitchFamily="34" charset="-122"/>
@@ -22125,7 +22102,7 @@
                 <a:ea typeface="Arial" pitchFamily="34" charset="-122"/>
                 <a:cs typeface="Arial" pitchFamily="34" charset="-120"/>
               </a:rPr>
-              <a:t>Aula</a:t>
+              <a:t>Aula teórica</a:t>
             </a:r>
             <a:endParaRPr lang="en-US" sz="1400" dirty="0"/>
           </a:p>
@@ -22869,7 +22846,7 @@
               <a:buNone/>
             </a:pPr>
             <a:r>
-              <a:rPr lang="en-US" sz="1300" i="1" dirty="0">
+              <a:rPr lang="en-US" sz="1400" i="1" dirty="0">
                 <a:solidFill>
                   <a:srgbClr val="64748B"/>
                 </a:solidFill>
@@ -22879,7 +22856,7 @@
               </a:rPr>
               <a:t>Primeiro bloco: imóvel e titularidade. Confira prazos, titular e eventuais garantias dadas ao banco.</a:t>
             </a:r>
-            <a:endParaRPr lang="en-US" sz="1300" dirty="0"/>
+            <a:endParaRPr lang="en-US" sz="1400" dirty="0"/>
           </a:p>
         </p:txBody>
       </p:sp>
@@ -23147,7 +23124,7 @@
               <a:buNone/>
             </a:pPr>
             <a:r>
-              <a:rPr lang="en-US" sz="1300" i="1" dirty="0">
+              <a:rPr lang="en-US" sz="1400" i="1" dirty="0">
                 <a:solidFill>
                   <a:srgbClr val="64748B"/>
                 </a:solidFill>
@@ -23157,7 +23134,7 @@
               </a:rPr>
               <a:t>Segundo: conexão e enquadramento. A data do pedido de acesso diz se a usina é GD um ou dois. E confirme que ela está na distribuidora dos seus clientes.</a:t>
             </a:r>
-            <a:endParaRPr lang="en-US" sz="1300" dirty="0"/>
+            <a:endParaRPr lang="en-US" sz="1400" dirty="0"/>
           </a:p>
         </p:txBody>
       </p:sp>
@@ -23385,7 +23362,7 @@
               <a:buNone/>
             </a:pPr>
             <a:r>
-              <a:rPr lang="en-US" sz="1300" i="1" dirty="0">
+              <a:rPr lang="en-US" sz="1400" i="1" dirty="0">
                 <a:solidFill>
                   <a:srgbClr val="64748B"/>
                 </a:solidFill>
@@ -23395,7 +23372,7 @@
               </a:rPr>
               <a:t>Terceiro: desempenho. Compare doze meses de geração real com a projeção.</a:t>
             </a:r>
-            <a:endParaRPr lang="en-US" sz="1300" dirty="0"/>
+            <a:endParaRPr lang="en-US" sz="1400" dirty="0"/>
           </a:p>
         </p:txBody>
       </p:sp>
@@ -23950,7 +23927,7 @@
               <a:buNone/>
             </a:pPr>
             <a:r>
-              <a:rPr lang="en-US" sz="1300" i="1" dirty="0">
+              <a:rPr lang="en-US" sz="1400" i="1" dirty="0">
                 <a:solidFill>
                   <a:srgbClr val="64748B"/>
                 </a:solidFill>
@@ -23960,7 +23937,7 @@
               </a:rPr>
               <a:t>Quarto: equipamentos, manutenção e seguro. Furto de cabos é comum em usinas rurais.</a:t>
             </a:r>
-            <a:endParaRPr lang="en-US" sz="1300" dirty="0"/>
+            <a:endParaRPr lang="en-US" sz="1400" dirty="0"/>
           </a:p>
         </p:txBody>
       </p:sp>
@@ -24208,7 +24185,7 @@
               <a:buNone/>
             </a:pPr>
             <a:r>
-              <a:rPr lang="en-US" sz="1300" i="1" dirty="0">
+              <a:rPr lang="en-US" sz="1400" i="1" dirty="0">
                 <a:solidFill>
                   <a:srgbClr val="64748B"/>
                 </a:solidFill>
@@ -24218,7 +24195,7 @@
               </a:rPr>
               <a:t>Quinto: o lado comercial e o próprio produtor. No fim, registre a decisão: aprovar, aprovar com condições ou recusar.</a:t>
             </a:r>
-            <a:endParaRPr lang="en-US" sz="1300" dirty="0"/>
+            <a:endParaRPr lang="en-US" sz="1400" dirty="0"/>
           </a:p>
         </p:txBody>
       </p:sp>
